--- a/docs/sales/SwarmAI-Customer-Deck.pptx
+++ b/docs/sales/SwarmAI-Customer-Deck.pptx
@@ -18,9 +18,10 @@
     <p:sldId id="266" r:id="rId12"/>
     <p:sldId id="267" r:id="rId13"/>
     <p:sldId id="268" r:id="rId14"/>
+    <p:sldId id="269" r:id="rId15"/>
   </p:sldIdLst>
   <p:notesMasterIdLst>
-    <p:notesMasterId r:id="rId15"/>
+    <p:notesMasterId r:id="rId16"/>
   </p:notesMasterIdLst>
   <p:sldSz cx="9144000" cy="5143500"/>
   <p:notesSz cx="5143500" cy="9144000"/>
@@ -119,14 +120,14 @@
   <p:extLst>
     <p:ext uri="{521415D9-36F7-43E2-AB2F-B90AF26B5E84}">
       <p14:sectionLst xmlns:p14="http://schemas.microsoft.com/office/powerpoint/2010/main">
-        <p14:section name="Introduction" id="{6302f020-68e6-5e8c-1230-e8658ee208fe}">
+        <p14:section name="Introduction" id="{f1113137-36cb-f4d1-ca25-09b66d5ea477}">
           <p14:sldIdLst>
             <p14:sldId id="256"/>
             <p14:sldId id="257"/>
             <p14:sldId id="258"/>
           </p14:sldIdLst>
         </p14:section>
-        <p14:section name="Product" id="{5ad68e47-e6a2-a49c-f225-5ea6d162bfdf}">
+        <p14:section name="Product" id="{70f7412f-ebad-61be-78d7-a5f4c12bf9fe}">
           <p14:sldIdLst>
             <p14:sldId id="259"/>
             <p14:sldId id="260"/>
@@ -135,13 +136,14 @@
             <p14:sldId id="263"/>
             <p14:sldId id="264"/>
             <p14:sldId id="265"/>
+            <p14:sldId id="266"/>
           </p14:sldIdLst>
         </p14:section>
-        <p14:section name="Working together" id="{6c3d324f-145b-8abf-ee6f-2dbd26795451}">
+        <p14:section name="Working together" id="{7636c1e1-f2a8-96d5-0107-0e0b051491f2}">
           <p14:sldIdLst>
-            <p14:sldId id="266"/>
             <p14:sldId id="267"/>
             <p14:sldId id="268"/>
+            <p14:sldId id="269"/>
           </p14:sldIdLst>
         </p14:section>
       </p14:sectionLst>
@@ -636,7 +638,7 @@
           <a:p>
             <a:r>
               <a:rPr lang="en-US" dirty="0"/>
-              <a:t>A pack is a preset: agents, instructions, greeting and hand-over rules for an industry. We load your documents on top and tune it during the pilot. Roadmap packs are built on request with the first client in that industry.</a:t>
+              <a:t>Everything a client changes later — greeting, hand-over message, instructions, documents — is done in the admin console. Changes reach the bot within about 30 seconds.</a:t>
             </a:r>
             <a:endParaRPr lang="en-US" dirty="0"/>
           </a:p>
@@ -724,7 +726,7 @@
           <a:p>
             <a:r>
               <a:rPr lang="en-US" dirty="0"/>
-              <a:t>You provide: your FAQs, price list and policies; a WhatsApp Business number verified with Meta; and one or two staff for the Inbox. We agree the target numbers in week 1.</a:t>
+              <a:t>A pack is a preset: agents, instructions, greeting and hand-over rules for an industry. We load your documents on top and tune it during the pilot. Roadmap packs are built on request with the first client in that industry.</a:t>
             </a:r>
             <a:endParaRPr lang="en-US" dirty="0"/>
           </a:p>
@@ -812,7 +814,7 @@
           <a:p>
             <a:r>
               <a:rPr lang="en-US" dirty="0"/>
-              <a:t>Indicative prices — confirm before sending. A pilot can be offered as the setup fee plus the first month at Starter price.</a:t>
+              <a:t>You provide: your FAQs, price list and policies; a WhatsApp Business number verified with Meta; and one or two staff for the Inbox. We agree the target numbers in week 1.</a:t>
             </a:r>
             <a:endParaRPr lang="en-US" dirty="0"/>
           </a:p>
@@ -900,7 +902,7 @@
           <a:p>
             <a:r>
               <a:rPr lang="en-US" dirty="0"/>
-              <a:t>Replace the contact line before sending.</a:t>
+              <a:t>Indicative prices — confirm before sending. A pilot can be offered as the setup fee plus the first month at Starter price.</a:t>
             </a:r>
             <a:endParaRPr lang="en-US" dirty="0"/>
           </a:p>
@@ -924,6 +926,94 @@
             <a:fld id="{F7021451-1387-4CA6-816F-3879F97B5CBC}" type="slidenum">
               <a:rPr lang="en-US"/>
               <a:t>13</a:t>
+            </a:fld>
+            <a:endParaRPr lang="en-US"/>
+          </a:p>
+        </p:txBody>
+      </p:sp>
+    </p:spTree>
+    <p:extLst>
+      <p:ext uri="{BB962C8B-B14F-4D97-AF65-F5344CB8AC3E}">
+        <p14:creationId xmlns:p14="http://schemas.microsoft.com/office/powerpoint/2010/main" val="1024086991"/>
+      </p:ext>
+    </p:extLst>
+  </p:cSld>
+  <p:clrMapOvr>
+    <a:masterClrMapping/>
+  </p:clrMapOvr>
+</p:notes>
+</file>
+
+<file path=ppt/notesSlides/notesSlide14.xml><?xml version="1.0" encoding="utf-8"?>
+<p:notes xmlns:a="http://schemas.openxmlformats.org/drawingml/2006/main" xmlns:r="http://schemas.openxmlformats.org/officeDocument/2006/relationships" xmlns:p="http://schemas.openxmlformats.org/presentationml/2006/main">
+  <p:cSld>
+    <p:spTree>
+      <p:nvGrpSpPr>
+        <p:cNvPr id="1" name=""/>
+        <p:cNvGrpSpPr/>
+        <p:nvPr/>
+      </p:nvGrpSpPr>
+      <p:grpSpPr>
+        <a:xfrm>
+          <a:off x="0" y="0"/>
+          <a:ext cx="0" cy="0"/>
+          <a:chOff x="0" y="0"/>
+          <a:chExt cx="0" cy="0"/>
+        </a:xfrm>
+      </p:grpSpPr>
+      <p:sp>
+        <p:nvSpPr>
+          <p:cNvPr id="2" name="Slide Image Placeholder 1"/>
+          <p:cNvSpPr>
+            <a:spLocks noGrp="1" noRot="1" noChangeAspect="1"/>
+          </p:cNvSpPr>
+          <p:nvPr>
+            <p:ph type="sldImg"/>
+          </p:nvPr>
+        </p:nvSpPr>
+        <p:spPr/>
+      </p:sp>
+      <p:sp>
+        <p:nvSpPr>
+          <p:cNvPr id="3" name="Notes Placeholder 2"/>
+          <p:cNvSpPr>
+            <a:spLocks noGrp="1"/>
+          </p:cNvSpPr>
+          <p:nvPr>
+            <p:ph type="body" idx="1"/>
+          </p:nvPr>
+        </p:nvSpPr>
+        <p:spPr/>
+        <p:txBody>
+          <a:bodyPr/>
+          <a:lstStyle/>
+          <a:p>
+            <a:r>
+              <a:rPr lang="en-US" dirty="0"/>
+              <a:t>Replace the contact line before sending.</a:t>
+            </a:r>
+            <a:endParaRPr lang="en-US" dirty="0"/>
+          </a:p>
+        </p:txBody>
+      </p:sp>
+      <p:sp>
+        <p:nvSpPr>
+          <p:cNvPr id="4" name="Slide Number Placeholder 3"/>
+          <p:cNvSpPr>
+            <a:spLocks noGrp="1"/>
+          </p:cNvSpPr>
+          <p:nvPr>
+            <p:ph type="sldNum" sz="quarter" idx="10"/>
+          </p:nvPr>
+        </p:nvSpPr>
+        <p:spPr/>
+        <p:txBody>
+          <a:bodyPr/>
+          <a:lstStyle/>
+          <a:p>
+            <a:fld id="{F7021451-1387-4CA6-816F-3879F97B5CBC}" type="slidenum">
+              <a:rPr lang="en-US"/>
+              <a:t>14</a:t>
             </a:fld>
             <a:endParaRPr lang="en-US"/>
           </a:p>
@@ -1604,7 +1694,7 @@
           <a:p>
             <a:r>
               <a:rPr lang="en-US" dirty="0"/>
-              <a:t>Everything a client changes later — greeting, hand-over message, instructions, documents — is done in the admin console. Changes reach the bot within about 30 seconds.</a:t>
+              <a:t>How it is run: one cloud server with a single encrypted entrance; everything else (AI agents, workflow engine, database) is on a private network inside it. Containers restart automatically, health is checked continuously, the database is backed up every night and the team gets a Telegram message if a backup fails. Sign-up is invite-only on hosted servers. For clients who need it, the same setup runs in their own cloud with their own AI account.</a:t>
             </a:r>
             <a:endParaRPr lang="en-US" dirty="0"/>
           </a:p>
@@ -2492,93 +2582,15 @@
                   <a:schemeClr val="tx1"/>
                 </a:solidFill>
               </a:rPr>
-              <a:t>Ready-made industry packs</a:t>
+              <a:t>Set up without writing code</a:t>
             </a:r>
             <a:endParaRPr lang="en-US" sz="3200" dirty="0"/>
           </a:p>
         </p:txBody>
-      </p:sp>
-      <p:sp>
-        <p:nvSpPr>
-          <p:cNvPr id="3" name="packs-now"/>
-          <p:cNvSpPr txBox="1"/>
-          <p:nvPr/>
-        </p:nvSpPr>
-        <p:spPr>
-          <a:xfrm>
-            <a:off x="457200" y="1143000"/>
-            <a:ext cx="3657600" cy="274320"/>
-          </a:xfrm>
-          <a:prstGeom prst="rect">
-            <a:avLst/>
-          </a:prstGeom>
-          <a:noFill/>
-          <a:ln/>
-        </p:spPr>
-        <p:txBody>
-          <a:bodyPr wrap="square" lIns="0" tIns="0" rIns="0" bIns="0" rtlCol="0" anchor="t"/>
-          <a:lstStyle/>
-          <a:p>
-            <a:pPr indent="0" marL="0">
-              <a:buNone/>
-            </a:pPr>
-            <a:r>
-              <a:rPr lang="en-US" sz="1100" b="1" spc="200" kern="0" dirty="0">
-                <a:solidFill>
-                  <a:schemeClr val="accent2"/>
-                </a:solidFill>
-              </a:rPr>
-              <a:t>AVAILABLE NOW</a:t>
-            </a:r>
-            <a:endParaRPr lang="en-US" sz="1100" dirty="0"/>
-          </a:p>
-        </p:txBody>
-      </p:sp>
-      <p:sp>
-        <p:nvSpPr>
-          <p:cNvPr id="4" name="pack-0"/>
-          <p:cNvSpPr/>
-          <p:nvPr/>
-        </p:nvSpPr>
-        <p:spPr>
-          <a:xfrm>
-            <a:off x="457200" y="1463040"/>
-            <a:ext cx="4663440" cy="1426464"/>
-          </a:xfrm>
-          <a:prstGeom prst="roundRect">
-            <a:avLst>
-              <a:gd name="adj" fmla="val 7692"/>
-            </a:avLst>
-          </a:prstGeom>
-          <a:solidFill>
-            <a:schemeClr val="accent6"/>
-          </a:solidFill>
-          <a:ln/>
-        </p:spPr>
-      </p:sp>
-      <p:sp>
-        <p:nvSpPr>
-          <p:cNvPr id="5" name="circle-pack-0"/>
-          <p:cNvSpPr/>
-          <p:nvPr/>
-        </p:nvSpPr>
-        <p:spPr>
-          <a:xfrm>
-            <a:off x="658368" y="1664208"/>
-            <a:ext cx="548640" cy="548640"/>
-          </a:xfrm>
-          <a:prstGeom prst="ellipse">
-            <a:avLst/>
-          </a:prstGeom>
-          <a:solidFill>
-            <a:schemeClr val="accent2"/>
-          </a:solidFill>
-          <a:ln/>
-        </p:spPr>
       </p:sp>
       <p:pic>
         <p:nvPicPr>
-          <p:cNvPr id="6" name="icon-pack-0" descr="preencoded.png">    </p:cNvPr>
+          <p:cNvPr id="3" name="admin-shot" descr="Admin console agents page with on/off switches and per-agent settings">    </p:cNvPr>
           <p:cNvPicPr>
             <a:picLocks noChangeAspect="1"/>
           </p:cNvPicPr>
@@ -2592,131 +2604,24 @@
         </p:blipFill>
         <p:spPr>
           <a:xfrm>
-            <a:off x="795528" y="1801368"/>
-            <a:ext cx="274320" cy="274320"/>
-          </a:xfrm>
-          <a:prstGeom prst="rect">
-            <a:avLst/>
-          </a:prstGeom>
+            <a:off x="457200" y="1188720"/>
+            <a:ext cx="4754880" cy="3268980"/>
+          </a:xfrm>
+          <a:prstGeom prst="rect">
+            <a:avLst/>
+          </a:prstGeom>
+          <a:effectLst>
+            <a:outerShdw sx="100000" sy="100000" kx="0" ky="0" algn="bl" rotWithShape="0" blurRad="101600" dist="25400" dir="5400000">
+              <a:srgbClr val="000000">
+                <a:alpha val="18000"/>
+              </a:srgbClr>
+            </a:outerShdw>
+          </a:effectLst>
         </p:spPr>
       </p:pic>
-      <p:sp>
-        <p:nvSpPr>
-          <p:cNvPr id="7" name="pack-h-0"/>
-          <p:cNvSpPr txBox="1"/>
-          <p:nvPr/>
-        </p:nvSpPr>
-        <p:spPr>
-          <a:xfrm>
-            <a:off x="1371600" y="1627632"/>
-            <a:ext cx="3611880" cy="320040"/>
-          </a:xfrm>
-          <a:prstGeom prst="rect">
-            <a:avLst/>
-          </a:prstGeom>
-          <a:noFill/>
-          <a:ln/>
-        </p:spPr>
-        <p:txBody>
-          <a:bodyPr wrap="square" lIns="0" tIns="0" rIns="0" bIns="0" rtlCol="0" anchor="t"/>
-          <a:lstStyle/>
-          <a:p>
-            <a:pPr indent="0" marL="0">
-              <a:buNone/>
-            </a:pPr>
-            <a:r>
-              <a:rPr lang="en-US" sz="1600" b="1" dirty="0">
-                <a:solidFill>
-                  <a:schemeClr val="tx1"/>
-                </a:solidFill>
-              </a:rPr>
-              <a:t>WhatsApp Support Desk</a:t>
-            </a:r>
-            <a:endParaRPr lang="en-US" sz="1600" dirty="0"/>
-          </a:p>
-        </p:txBody>
-      </p:sp>
-      <p:sp>
-        <p:nvSpPr>
-          <p:cNvPr id="8" name="pack-b-0"/>
-          <p:cNvSpPr txBox="1"/>
-          <p:nvPr/>
-        </p:nvSpPr>
-        <p:spPr>
-          <a:xfrm>
-            <a:off x="1371600" y="1965960"/>
-            <a:ext cx="3611880" cy="868680"/>
-          </a:xfrm>
-          <a:prstGeom prst="rect">
-            <a:avLst/>
-          </a:prstGeom>
-          <a:noFill/>
-          <a:ln/>
-        </p:spPr>
-        <p:txBody>
-          <a:bodyPr wrap="square" lIns="0" tIns="0" rIns="0" bIns="0" rtlCol="0" anchor="t"/>
-          <a:lstStyle/>
-          <a:p>
-            <a:pPr indent="0" marL="0">
-              <a:buNone/>
-            </a:pPr>
-            <a:r>
-              <a:rPr lang="en-US" sz="1200" dirty="0">
-                <a:solidFill>
-                  <a:schemeClr val="tx1"/>
-                </a:solidFill>
-              </a:rPr>
-              <a:t>Product, order and policy questions answered from your documents. Complaints, refunds and cancellations go straight to your team with the order details collected.</a:t>
-            </a:r>
-            <a:endParaRPr lang="en-US" sz="1200" dirty="0"/>
-          </a:p>
-        </p:txBody>
-      </p:sp>
-      <p:sp>
-        <p:nvSpPr>
-          <p:cNvPr id="9" name="pack-1"/>
-          <p:cNvSpPr/>
-          <p:nvPr/>
-        </p:nvSpPr>
-        <p:spPr>
-          <a:xfrm>
-            <a:off x="457200" y="3035808"/>
-            <a:ext cx="4663440" cy="1426464"/>
-          </a:xfrm>
-          <a:prstGeom prst="roundRect">
-            <a:avLst>
-              <a:gd name="adj" fmla="val 7692"/>
-            </a:avLst>
-          </a:prstGeom>
-          <a:solidFill>
-            <a:schemeClr val="accent6"/>
-          </a:solidFill>
-          <a:ln/>
-        </p:spPr>
-      </p:sp>
-      <p:sp>
-        <p:nvSpPr>
-          <p:cNvPr id="10" name="circle-pack-1"/>
-          <p:cNvSpPr/>
-          <p:nvPr/>
-        </p:nvSpPr>
-        <p:spPr>
-          <a:xfrm>
-            <a:off x="658368" y="3236976"/>
-            <a:ext cx="548640" cy="548640"/>
-          </a:xfrm>
-          <a:prstGeom prst="ellipse">
-            <a:avLst/>
-          </a:prstGeom>
-          <a:solidFill>
-            <a:schemeClr val="accent2"/>
-          </a:solidFill>
-          <a:ln/>
-        </p:spPr>
-      </p:sp>
       <p:pic>
         <p:nvPicPr>
-          <p:cNvPr id="11" name="icon-pack-1" descr="preencoded.png">    </p:cNvPr>
+          <p:cNvPr id="4" name="admin-check-0" descr="preencoded.png">    </p:cNvPr>
           <p:cNvPicPr>
             <a:picLocks noChangeAspect="1"/>
           </p:cNvPicPr>
@@ -2730,8 +2635,8 @@
         </p:blipFill>
         <p:spPr>
           <a:xfrm>
-            <a:off x="795528" y="3374136"/>
-            <a:ext cx="274320" cy="274320"/>
+            <a:off x="5532120" y="1298448"/>
+            <a:ext cx="237744" cy="237744"/>
           </a:xfrm>
           <a:prstGeom prst="rect">
             <a:avLst/>
@@ -2740,137 +2645,43 @@
       </p:pic>
       <p:sp>
         <p:nvSpPr>
-          <p:cNvPr id="12" name="pack-h-1"/>
-          <p:cNvSpPr txBox="1"/>
-          <p:nvPr/>
-        </p:nvSpPr>
-        <p:spPr>
-          <a:xfrm>
-            <a:off x="1371600" y="3200400"/>
-            <a:ext cx="3611880" cy="320040"/>
-          </a:xfrm>
-          <a:prstGeom prst="rect">
-            <a:avLst/>
-          </a:prstGeom>
-          <a:noFill/>
-          <a:ln/>
-        </p:spPr>
-        <p:txBody>
-          <a:bodyPr wrap="square" lIns="0" tIns="0" rIns="0" bIns="0" rtlCol="0" anchor="t"/>
+          <p:cNvPr id="5" name="admin-item-0"/>
+          <p:cNvSpPr txBox="1"/>
+          <p:nvPr/>
+        </p:nvSpPr>
+        <p:spPr>
+          <a:xfrm>
+            <a:off x="5897880" y="1234440"/>
+            <a:ext cx="2788920" cy="411480"/>
+          </a:xfrm>
+          <a:prstGeom prst="rect">
+            <a:avLst/>
+          </a:prstGeom>
+          <a:noFill/>
+          <a:ln/>
+        </p:spPr>
+        <p:txBody>
+          <a:bodyPr wrap="square" lIns="0" tIns="0" rIns="0" bIns="0" rtlCol="0" anchor="ctr"/>
           <a:lstStyle/>
           <a:p>
             <a:pPr indent="0" marL="0">
               <a:buNone/>
             </a:pPr>
             <a:r>
-              <a:rPr lang="en-US" sz="1600" b="1" dirty="0">
+              <a:rPr lang="en-US" sz="1300" dirty="0">
                 <a:solidFill>
                   <a:schemeClr val="tx1"/>
                 </a:solidFill>
               </a:rPr>
-              <a:t>Clinic Front Desk</a:t>
-            </a:r>
-            <a:endParaRPr lang="en-US" sz="1600" dirty="0"/>
-          </a:p>
-        </p:txBody>
-      </p:sp>
-      <p:sp>
-        <p:nvSpPr>
-          <p:cNvPr id="13" name="pack-b-1"/>
-          <p:cNvSpPr txBox="1"/>
-          <p:nvPr/>
-        </p:nvSpPr>
-        <p:spPr>
-          <a:xfrm>
-            <a:off x="1371600" y="3538728"/>
-            <a:ext cx="3611880" cy="868680"/>
-          </a:xfrm>
-          <a:prstGeom prst="rect">
-            <a:avLst/>
-          </a:prstGeom>
-          <a:noFill/>
-          <a:ln/>
-        </p:spPr>
-        <p:txBody>
-          <a:bodyPr wrap="square" lIns="0" tIns="0" rIns="0" bIns="0" rtlCol="0" anchor="t"/>
-          <a:lstStyle/>
-          <a:p>
-            <a:pPr indent="0" marL="0">
-              <a:buNone/>
-            </a:pPr>
-            <a:r>
-              <a:rPr lang="en-US" sz="1200" dirty="0">
-                <a:solidFill>
-                  <a:schemeClr val="tx1"/>
-                </a:solidFill>
-              </a:rPr>
-              <a:t>Timings, fees, doctors and test preparation. Never gives medical advice. Appointment requests go to the front desk; emergencies get the 112 message.</a:t>
-            </a:r>
-            <a:endParaRPr lang="en-US" sz="1200" dirty="0"/>
-          </a:p>
-        </p:txBody>
-      </p:sp>
-      <p:sp>
-        <p:nvSpPr>
-          <p:cNvPr id="14" name="packs-next"/>
-          <p:cNvSpPr txBox="1"/>
-          <p:nvPr/>
-        </p:nvSpPr>
-        <p:spPr>
-          <a:xfrm>
-            <a:off x="5486400" y="1143000"/>
-            <a:ext cx="3200400" cy="274320"/>
-          </a:xfrm>
-          <a:prstGeom prst="rect">
-            <a:avLst/>
-          </a:prstGeom>
-          <a:noFill/>
-          <a:ln/>
-        </p:spPr>
-        <p:txBody>
-          <a:bodyPr wrap="square" lIns="0" tIns="0" rIns="0" bIns="0" rtlCol="0" anchor="t"/>
-          <a:lstStyle/>
-          <a:p>
-            <a:pPr indent="0" marL="0">
-              <a:buNone/>
-            </a:pPr>
-            <a:r>
-              <a:rPr lang="en-US" sz="1100" b="1" spc="200" kern="0" dirty="0">
-                <a:solidFill>
-                  <a:schemeClr val="accent4"/>
-                </a:solidFill>
-              </a:rPr>
-              <a:t>ON THE ROADMAP</a:t>
-            </a:r>
-            <a:endParaRPr lang="en-US" sz="1100" dirty="0"/>
-          </a:p>
-        </p:txBody>
-      </p:sp>
-      <p:sp>
-        <p:nvSpPr>
-          <p:cNvPr id="15" name="next-0"/>
-          <p:cNvSpPr/>
-          <p:nvPr/>
-        </p:nvSpPr>
-        <p:spPr>
-          <a:xfrm>
-            <a:off x="5486400" y="1463040"/>
-            <a:ext cx="3200400" cy="411480"/>
-          </a:xfrm>
-          <a:prstGeom prst="roundRect">
-            <a:avLst>
-              <a:gd name="adj" fmla="val 26667"/>
-            </a:avLst>
-          </a:prstGeom>
-          <a:solidFill>
-            <a:schemeClr val="bg2"/>
-          </a:solidFill>
-          <a:ln/>
-        </p:spPr>
+              <a:t>Switch agents on or off</a:t>
+            </a:r>
+            <a:endParaRPr lang="en-US" sz="1300" dirty="0"/>
+          </a:p>
+        </p:txBody>
       </p:sp>
       <p:pic>
         <p:nvPicPr>
-          <p:cNvPr id="16" name="next-icon-0" descr="preencoded.png">    </p:cNvPr>
+          <p:cNvPr id="6" name="admin-check-1" descr="preencoded.png">    </p:cNvPr>
           <p:cNvPicPr>
             <a:picLocks noChangeAspect="1"/>
           </p:cNvPicPr>
@@ -2884,8 +2695,8 @@
         </p:blipFill>
         <p:spPr>
           <a:xfrm>
-            <a:off x="5641848" y="1554480"/>
-            <a:ext cx="228600" cy="228600"/>
+            <a:off x="5532120" y="1773936"/>
+            <a:ext cx="237744" cy="237744"/>
           </a:xfrm>
           <a:prstGeom prst="rect">
             <a:avLst/>
@@ -2894,14 +2705,14 @@
       </p:pic>
       <p:sp>
         <p:nvSpPr>
-          <p:cNvPr id="17" name="next-t-0"/>
-          <p:cNvSpPr txBox="1"/>
-          <p:nvPr/>
-        </p:nvSpPr>
-        <p:spPr>
-          <a:xfrm>
-            <a:off x="6035040" y="1463040"/>
-            <a:ext cx="2560320" cy="411480"/>
+          <p:cNvPr id="7" name="admin-item-1"/>
+          <p:cNvSpPr txBox="1"/>
+          <p:nvPr/>
+        </p:nvSpPr>
+        <p:spPr>
+          <a:xfrm>
+            <a:off x="5897880" y="1709928"/>
+            <a:ext cx="2788920" cy="411480"/>
           </a:xfrm>
           <a:prstGeom prst="rect">
             <a:avLst/>
@@ -2922,37 +2733,15 @@
                   <a:schemeClr val="tx1"/>
                 </a:solidFill>
               </a:rPr>
-              <a:t>Sales &amp; leads</a:t>
+              <a:t>Add house rules: tone, language, what never to say</a:t>
             </a:r>
             <a:endParaRPr lang="en-US" sz="1300" dirty="0"/>
           </a:p>
         </p:txBody>
-      </p:sp>
-      <p:sp>
-        <p:nvSpPr>
-          <p:cNvPr id="18" name="next-1"/>
-          <p:cNvSpPr/>
-          <p:nvPr/>
-        </p:nvSpPr>
-        <p:spPr>
-          <a:xfrm>
-            <a:off x="5486400" y="1970532"/>
-            <a:ext cx="3200400" cy="411480"/>
-          </a:xfrm>
-          <a:prstGeom prst="roundRect">
-            <a:avLst>
-              <a:gd name="adj" fmla="val 26667"/>
-            </a:avLst>
-          </a:prstGeom>
-          <a:solidFill>
-            <a:schemeClr val="bg2"/>
-          </a:solidFill>
-          <a:ln/>
-        </p:spPr>
       </p:sp>
       <p:pic>
         <p:nvPicPr>
-          <p:cNvPr id="19" name="next-icon-1" descr="preencoded.png">    </p:cNvPr>
+          <p:cNvPr id="8" name="admin-check-2" descr="preencoded.png">    </p:cNvPr>
           <p:cNvPicPr>
             <a:picLocks noChangeAspect="1"/>
           </p:cNvPicPr>
@@ -2966,8 +2755,8 @@
         </p:blipFill>
         <p:spPr>
           <a:xfrm>
-            <a:off x="5641848" y="2061972"/>
-            <a:ext cx="228600" cy="228600"/>
+            <a:off x="5532120" y="2249424"/>
+            <a:ext cx="237744" cy="237744"/>
           </a:xfrm>
           <a:prstGeom prst="rect">
             <a:avLst/>
@@ -2976,14 +2765,14 @@
       </p:pic>
       <p:sp>
         <p:nvSpPr>
-          <p:cNvPr id="20" name="next-t-1"/>
-          <p:cNvSpPr txBox="1"/>
-          <p:nvPr/>
-        </p:nvSpPr>
-        <p:spPr>
-          <a:xfrm>
-            <a:off x="6035040" y="1970532"/>
-            <a:ext cx="2560320" cy="411480"/>
+          <p:cNvPr id="9" name="admin-item-2"/>
+          <p:cNvSpPr txBox="1"/>
+          <p:nvPr/>
+        </p:nvSpPr>
+        <p:spPr>
+          <a:xfrm>
+            <a:off x="5897880" y="2185416"/>
+            <a:ext cx="2788920" cy="411480"/>
           </a:xfrm>
           <a:prstGeom prst="rect">
             <a:avLst/>
@@ -3004,37 +2793,15 @@
                   <a:schemeClr val="tx1"/>
                 </a:solidFill>
               </a:rPr>
-              <a:t>Collections</a:t>
+              <a:t>Choose models and which tools need approval</a:t>
             </a:r>
             <a:endParaRPr lang="en-US" sz="1300" dirty="0"/>
           </a:p>
         </p:txBody>
-      </p:sp>
-      <p:sp>
-        <p:nvSpPr>
-          <p:cNvPr id="21" name="next-2"/>
-          <p:cNvSpPr/>
-          <p:nvPr/>
-        </p:nvSpPr>
-        <p:spPr>
-          <a:xfrm>
-            <a:off x="5486400" y="2478024"/>
-            <a:ext cx="3200400" cy="411480"/>
-          </a:xfrm>
-          <a:prstGeom prst="roundRect">
-            <a:avLst>
-              <a:gd name="adj" fmla="val 26667"/>
-            </a:avLst>
-          </a:prstGeom>
-          <a:solidFill>
-            <a:schemeClr val="bg2"/>
-          </a:solidFill>
-          <a:ln/>
-        </p:spPr>
       </p:sp>
       <p:pic>
         <p:nvPicPr>
-          <p:cNvPr id="22" name="next-icon-2" descr="preencoded.png">    </p:cNvPr>
+          <p:cNvPr id="10" name="admin-check-3" descr="preencoded.png">    </p:cNvPr>
           <p:cNvPicPr>
             <a:picLocks noChangeAspect="1"/>
           </p:cNvPicPr>
@@ -3048,8 +2815,8 @@
         </p:blipFill>
         <p:spPr>
           <a:xfrm>
-            <a:off x="5641848" y="2569464"/>
-            <a:ext cx="228600" cy="228600"/>
+            <a:off x="5532120" y="2724912"/>
+            <a:ext cx="237744" cy="237744"/>
           </a:xfrm>
           <a:prstGeom prst="rect">
             <a:avLst/>
@@ -3058,14 +2825,14 @@
       </p:pic>
       <p:sp>
         <p:nvSpPr>
-          <p:cNvPr id="23" name="next-t-2"/>
-          <p:cNvSpPr txBox="1"/>
-          <p:nvPr/>
-        </p:nvSpPr>
-        <p:spPr>
-          <a:xfrm>
-            <a:off x="6035040" y="2478024"/>
-            <a:ext cx="2560320" cy="411480"/>
+          <p:cNvPr id="11" name="admin-item-3"/>
+          <p:cNvSpPr txBox="1"/>
+          <p:nvPr/>
+        </p:nvSpPr>
+        <p:spPr>
+          <a:xfrm>
+            <a:off x="5897880" y="2660904"/>
+            <a:ext cx="2788920" cy="411480"/>
           </a:xfrm>
           <a:prstGeom prst="rect">
             <a:avLst/>
@@ -3086,37 +2853,15 @@
                   <a:schemeClr val="tx1"/>
                 </a:solidFill>
               </a:rPr>
-              <a:t>HR &amp; hiring</a:t>
+              <a:t>Create your own agents</a:t>
             </a:r>
             <a:endParaRPr lang="en-US" sz="1300" dirty="0"/>
           </a:p>
         </p:txBody>
-      </p:sp>
-      <p:sp>
-        <p:nvSpPr>
-          <p:cNvPr id="24" name="next-3"/>
-          <p:cNvSpPr/>
-          <p:nvPr/>
-        </p:nvSpPr>
-        <p:spPr>
-          <a:xfrm>
-            <a:off x="5486400" y="2985516"/>
-            <a:ext cx="3200400" cy="411480"/>
-          </a:xfrm>
-          <a:prstGeom prst="roundRect">
-            <a:avLst>
-              <a:gd name="adj" fmla="val 26667"/>
-            </a:avLst>
-          </a:prstGeom>
-          <a:solidFill>
-            <a:schemeClr val="bg2"/>
-          </a:solidFill>
-          <a:ln/>
-        </p:spPr>
       </p:sp>
       <p:pic>
         <p:nvPicPr>
-          <p:cNvPr id="25" name="next-icon-3" descr="preencoded.png">    </p:cNvPr>
+          <p:cNvPr id="12" name="admin-check-4" descr="preencoded.png">    </p:cNvPr>
           <p:cNvPicPr>
             <a:picLocks noChangeAspect="1"/>
           </p:cNvPicPr>
@@ -3130,8 +2875,8 @@
         </p:blipFill>
         <p:spPr>
           <a:xfrm>
-            <a:off x="5641848" y="3076956"/>
-            <a:ext cx="228600" cy="228600"/>
+            <a:off x="5532120" y="3200400"/>
+            <a:ext cx="237744" cy="237744"/>
           </a:xfrm>
           <a:prstGeom prst="rect">
             <a:avLst/>
@@ -3140,14 +2885,14 @@
       </p:pic>
       <p:sp>
         <p:nvSpPr>
-          <p:cNvPr id="26" name="next-t-3"/>
-          <p:cNvSpPr txBox="1"/>
-          <p:nvPr/>
-        </p:nvSpPr>
-        <p:spPr>
-          <a:xfrm>
-            <a:off x="6035040" y="2985516"/>
-            <a:ext cx="2560320" cy="411480"/>
+          <p:cNvPr id="13" name="admin-item-4"/>
+          <p:cNvSpPr txBox="1"/>
+          <p:nvPr/>
+        </p:nvSpPr>
+        <p:spPr>
+          <a:xfrm>
+            <a:off x="5897880" y="3136392"/>
+            <a:ext cx="2788920" cy="411480"/>
           </a:xfrm>
           <a:prstGeom prst="rect">
             <a:avLst/>
@@ -3168,37 +2913,15 @@
                   <a:schemeClr val="tx1"/>
                 </a:solidFill>
               </a:rPr>
-              <a:t>Real estate</a:t>
+              <a:t>Apply an industry pack in one click</a:t>
             </a:r>
             <a:endParaRPr lang="en-US" sz="1300" dirty="0"/>
           </a:p>
         </p:txBody>
-      </p:sp>
-      <p:sp>
-        <p:nvSpPr>
-          <p:cNvPr id="27" name="next-4"/>
-          <p:cNvSpPr/>
-          <p:nvPr/>
-        </p:nvSpPr>
-        <p:spPr>
-          <a:xfrm>
-            <a:off x="5486400" y="3493008"/>
-            <a:ext cx="3200400" cy="411480"/>
-          </a:xfrm>
-          <a:prstGeom prst="roundRect">
-            <a:avLst>
-              <a:gd name="adj" fmla="val 26667"/>
-            </a:avLst>
-          </a:prstGeom>
-          <a:solidFill>
-            <a:schemeClr val="bg2"/>
-          </a:solidFill>
-          <a:ln/>
-        </p:spPr>
       </p:sp>
       <p:pic>
         <p:nvPicPr>
-          <p:cNvPr id="28" name="next-icon-4" descr="preencoded.png">    </p:cNvPr>
+          <p:cNvPr id="14" name="admin-check-5" descr="preencoded.png">    </p:cNvPr>
           <p:cNvPicPr>
             <a:picLocks noChangeAspect="1"/>
           </p:cNvPicPr>
@@ -3212,8 +2935,8 @@
         </p:blipFill>
         <p:spPr>
           <a:xfrm>
-            <a:off x="5641848" y="3584448"/>
-            <a:ext cx="228600" cy="228600"/>
+            <a:off x="5532120" y="3675888"/>
+            <a:ext cx="237744" cy="237744"/>
           </a:xfrm>
           <a:prstGeom prst="rect">
             <a:avLst/>
@@ -3222,14 +2945,14 @@
       </p:pic>
       <p:sp>
         <p:nvSpPr>
-          <p:cNvPr id="29" name="next-t-4"/>
-          <p:cNvSpPr txBox="1"/>
-          <p:nvPr/>
-        </p:nvSpPr>
-        <p:spPr>
-          <a:xfrm>
-            <a:off x="6035040" y="3493008"/>
-            <a:ext cx="2560320" cy="411480"/>
+          <p:cNvPr id="15" name="admin-item-5"/>
+          <p:cNvSpPr txBox="1"/>
+          <p:nvPr/>
+        </p:nvSpPr>
+        <p:spPr>
+          <a:xfrm>
+            <a:off x="5897880" y="3611880"/>
+            <a:ext cx="2788920" cy="411480"/>
           </a:xfrm>
           <a:prstGeom prst="rect">
             <a:avLst/>
@@ -3250,37 +2973,15 @@
                   <a:schemeClr val="tx1"/>
                 </a:solidFill>
               </a:rPr>
-              <a:t>Education</a:t>
+              <a:t>Invite your team and set roles</a:t>
             </a:r>
             <a:endParaRPr lang="en-US" sz="1300" dirty="0"/>
           </a:p>
         </p:txBody>
-      </p:sp>
-      <p:sp>
-        <p:nvSpPr>
-          <p:cNvPr id="30" name="next-5"/>
-          <p:cNvSpPr/>
-          <p:nvPr/>
-        </p:nvSpPr>
-        <p:spPr>
-          <a:xfrm>
-            <a:off x="5486400" y="4000500"/>
-            <a:ext cx="3200400" cy="411480"/>
-          </a:xfrm>
-          <a:prstGeom prst="roundRect">
-            <a:avLst>
-              <a:gd name="adj" fmla="val 26667"/>
-            </a:avLst>
-          </a:prstGeom>
-          <a:solidFill>
-            <a:schemeClr val="bg2"/>
-          </a:solidFill>
-          <a:ln/>
-        </p:spPr>
       </p:sp>
       <p:pic>
         <p:nvPicPr>
-          <p:cNvPr id="31" name="next-icon-5" descr="preencoded.png">    </p:cNvPr>
+          <p:cNvPr id="16" name="admin-check-6" descr="preencoded.png">    </p:cNvPr>
           <p:cNvPicPr>
             <a:picLocks noChangeAspect="1"/>
           </p:cNvPicPr>
@@ -3294,8 +2995,8 @@
         </p:blipFill>
         <p:spPr>
           <a:xfrm>
-            <a:off x="5641848" y="4091940"/>
-            <a:ext cx="228600" cy="228600"/>
+            <a:off x="5532120" y="4151376"/>
+            <a:ext cx="237744" cy="237744"/>
           </a:xfrm>
           <a:prstGeom prst="rect">
             <a:avLst/>
@@ -3304,14 +3005,14 @@
       </p:pic>
       <p:sp>
         <p:nvSpPr>
-          <p:cNvPr id="32" name="next-t-5"/>
-          <p:cNvSpPr txBox="1"/>
-          <p:nvPr/>
-        </p:nvSpPr>
-        <p:spPr>
-          <a:xfrm>
-            <a:off x="6035040" y="4000500"/>
-            <a:ext cx="2560320" cy="411480"/>
+          <p:cNvPr id="17" name="admin-item-6"/>
+          <p:cNvSpPr txBox="1"/>
+          <p:nvPr/>
+        </p:nvSpPr>
+        <p:spPr>
+          <a:xfrm>
+            <a:off x="5897880" y="4087368"/>
+            <a:ext cx="2788920" cy="411480"/>
           </a:xfrm>
           <a:prstGeom prst="rect">
             <a:avLst/>
@@ -3332,7 +3033,7 @@
                   <a:schemeClr val="tx1"/>
                 </a:solidFill>
               </a:rPr>
-              <a:t>D2C commerce</a:t>
+              <a:t>See usage, approvals and the audit log</a:t>
             </a:r>
             <a:endParaRPr lang="en-US" sz="1300" dirty="0"/>
           </a:p>
@@ -3440,7 +3141,7 @@
                   <a:schemeClr val="tx1"/>
                 </a:solidFill>
               </a:rPr>
-              <a:t>Live in four weeks</a:t>
+              <a:t>Ready-made industry packs</a:t>
             </a:r>
             <a:endParaRPr lang="en-US" sz="3200" dirty="0"/>
           </a:p>
@@ -3448,37 +3149,72 @@
       </p:sp>
       <p:sp>
         <p:nvSpPr>
-          <p:cNvPr id="3" name="timeline"/>
+          <p:cNvPr id="3" name="packs-now"/>
+          <p:cNvSpPr txBox="1"/>
+          <p:nvPr/>
+        </p:nvSpPr>
+        <p:spPr>
+          <a:xfrm>
+            <a:off x="457200" y="1143000"/>
+            <a:ext cx="3657600" cy="274320"/>
+          </a:xfrm>
+          <a:prstGeom prst="rect">
+            <a:avLst/>
+          </a:prstGeom>
+          <a:noFill/>
+          <a:ln/>
+        </p:spPr>
+        <p:txBody>
+          <a:bodyPr wrap="square" lIns="0" tIns="0" rIns="0" bIns="0" rtlCol="0" anchor="t"/>
+          <a:lstStyle/>
+          <a:p>
+            <a:pPr indent="0" marL="0">
+              <a:buNone/>
+            </a:pPr>
+            <a:r>
+              <a:rPr lang="en-US" sz="1100" b="1" spc="200" kern="0" dirty="0">
+                <a:solidFill>
+                  <a:schemeClr val="accent2"/>
+                </a:solidFill>
+              </a:rPr>
+              <a:t>AVAILABLE NOW</a:t>
+            </a:r>
+            <a:endParaRPr lang="en-US" sz="1100" dirty="0"/>
+          </a:p>
+        </p:txBody>
+      </p:sp>
+      <p:sp>
+        <p:nvSpPr>
+          <p:cNvPr id="4" name="pack-0"/>
           <p:cNvSpPr/>
           <p:nvPr/>
         </p:nvSpPr>
         <p:spPr>
           <a:xfrm>
-            <a:off x="777240" y="1481328"/>
-            <a:ext cx="6309360" cy="0"/>
-          </a:xfrm>
-          <a:prstGeom prst="line">
-            <a:avLst/>
-          </a:prstGeom>
-          <a:noFill/>
-          <a:ln w="19050">
-            <a:solidFill>
-              <a:schemeClr val="accent4"/>
-            </a:solidFill>
-            <a:prstDash val="solid"/>
-          </a:ln>
-        </p:spPr>
-      </p:sp>
-      <p:sp>
-        <p:nvSpPr>
-          <p:cNvPr id="4" name="dot-0"/>
+            <a:off x="457200" y="1463040"/>
+            <a:ext cx="4663440" cy="1426464"/>
+          </a:xfrm>
+          <a:prstGeom prst="roundRect">
+            <a:avLst>
+              <a:gd name="adj" fmla="val 7692"/>
+            </a:avLst>
+          </a:prstGeom>
+          <a:solidFill>
+            <a:schemeClr val="accent6"/>
+          </a:solidFill>
+          <a:ln/>
+        </p:spPr>
+      </p:sp>
+      <p:sp>
+        <p:nvSpPr>
+          <p:cNvPr id="5" name="circle-pack-0"/>
           <p:cNvSpPr/>
           <p:nvPr/>
         </p:nvSpPr>
         <p:spPr>
           <a:xfrm>
-            <a:off x="640080" y="1344168"/>
-            <a:ext cx="274320" cy="274320"/>
+            <a:off x="658368" y="1664208"/>
+            <a:ext cx="548640" cy="548640"/>
           </a:xfrm>
           <a:prstGeom prst="ellipse">
             <a:avLst/>
@@ -3486,24 +3222,43 @@
           <a:solidFill>
             <a:schemeClr val="accent2"/>
           </a:solidFill>
-          <a:ln w="25400">
-            <a:solidFill>
-              <a:schemeClr val="bg1"/>
-            </a:solidFill>
-            <a:prstDash val="solid"/>
-          </a:ln>
-        </p:spPr>
-      </p:sp>
-      <p:sp>
-        <p:nvSpPr>
-          <p:cNvPr id="5" name="wk-0"/>
-          <p:cNvSpPr txBox="1"/>
-          <p:nvPr/>
-        </p:nvSpPr>
-        <p:spPr>
-          <a:xfrm>
-            <a:off x="457200" y="1737360"/>
-            <a:ext cx="1920240" cy="274320"/>
+          <a:ln/>
+        </p:spPr>
+      </p:sp>
+      <p:pic>
+        <p:nvPicPr>
+          <p:cNvPr id="6" name="icon-pack-0" descr="preencoded.png">    </p:cNvPr>
+          <p:cNvPicPr>
+            <a:picLocks noChangeAspect="1"/>
+          </p:cNvPicPr>
+          <p:nvPr/>
+        </p:nvPicPr>
+        <p:blipFill>
+          <a:blip r:embed="rId1"/>
+          <a:stretch>
+            <a:fillRect/>
+          </a:stretch>
+        </p:blipFill>
+        <p:spPr>
+          <a:xfrm>
+            <a:off x="795528" y="1801368"/>
+            <a:ext cx="274320" cy="274320"/>
+          </a:xfrm>
+          <a:prstGeom prst="rect">
+            <a:avLst/>
+          </a:prstGeom>
+        </p:spPr>
+      </p:pic>
+      <p:sp>
+        <p:nvSpPr>
+          <p:cNvPr id="7" name="pack-h-0"/>
+          <p:cNvSpPr txBox="1"/>
+          <p:nvPr/>
+        </p:nvSpPr>
+        <p:spPr>
+          <a:xfrm>
+            <a:off x="1371600" y="1627632"/>
+            <a:ext cx="3611880" cy="320040"/>
           </a:xfrm>
           <a:prstGeom prst="rect">
             <a:avLst/>
@@ -3519,12 +3274,48 @@
               <a:buNone/>
             </a:pPr>
             <a:r>
-              <a:rPr lang="en-US" sz="1200" b="1" dirty="0">
-                <a:solidFill>
-                  <a:schemeClr val="accent2"/>
-                </a:solidFill>
-              </a:rPr>
-              <a:t>Week 1</a:t>
+              <a:rPr lang="en-US" sz="1600" b="1" dirty="0">
+                <a:solidFill>
+                  <a:schemeClr val="tx1"/>
+                </a:solidFill>
+              </a:rPr>
+              <a:t>WhatsApp Support Desk</a:t>
+            </a:r>
+            <a:endParaRPr lang="en-US" sz="1600" dirty="0"/>
+          </a:p>
+        </p:txBody>
+      </p:sp>
+      <p:sp>
+        <p:nvSpPr>
+          <p:cNvPr id="8" name="pack-b-0"/>
+          <p:cNvSpPr txBox="1"/>
+          <p:nvPr/>
+        </p:nvSpPr>
+        <p:spPr>
+          <a:xfrm>
+            <a:off x="1371600" y="1965960"/>
+            <a:ext cx="3611880" cy="868680"/>
+          </a:xfrm>
+          <a:prstGeom prst="rect">
+            <a:avLst/>
+          </a:prstGeom>
+          <a:noFill/>
+          <a:ln/>
+        </p:spPr>
+        <p:txBody>
+          <a:bodyPr wrap="square" lIns="0" tIns="0" rIns="0" bIns="0" rtlCol="0" anchor="t"/>
+          <a:lstStyle/>
+          <a:p>
+            <a:pPr indent="0" marL="0">
+              <a:buNone/>
+            </a:pPr>
+            <a:r>
+              <a:rPr lang="en-US" sz="1200" dirty="0">
+                <a:solidFill>
+                  <a:schemeClr val="tx1"/>
+                </a:solidFill>
+              </a:rPr>
+              <a:t>Product, order and policy questions answered from your documents. Complaints, refunds and cancellations go straight to your team with the order details collected.</a:t>
             </a:r>
             <a:endParaRPr lang="en-US" sz="1200" dirty="0"/>
           </a:p>
@@ -3532,86 +3323,36 @@
       </p:sp>
       <p:sp>
         <p:nvSpPr>
-          <p:cNvPr id="6" name="wk-h-0"/>
-          <p:cNvSpPr txBox="1"/>
-          <p:nvPr/>
-        </p:nvSpPr>
-        <p:spPr>
-          <a:xfrm>
-            <a:off x="457200" y="2011680"/>
-            <a:ext cx="1920240" cy="320040"/>
-          </a:xfrm>
-          <a:prstGeom prst="rect">
-            <a:avLst/>
-          </a:prstGeom>
-          <a:noFill/>
-          <a:ln/>
-        </p:spPr>
-        <p:txBody>
-          <a:bodyPr wrap="square" lIns="0" tIns="0" rIns="0" bIns="0" rtlCol="0" anchor="t"/>
-          <a:lstStyle/>
-          <a:p>
-            <a:pPr indent="0" marL="0">
-              <a:buNone/>
-            </a:pPr>
-            <a:r>
-              <a:rPr lang="en-US" sz="1600" b="1" dirty="0">
-                <a:solidFill>
-                  <a:schemeClr val="tx1"/>
-                </a:solidFill>
-              </a:rPr>
-              <a:t>Discover &amp; load</a:t>
-            </a:r>
-            <a:endParaRPr lang="en-US" sz="1600" dirty="0"/>
-          </a:p>
-        </p:txBody>
-      </p:sp>
-      <p:sp>
-        <p:nvSpPr>
-          <p:cNvPr id="7" name="wk-b-0"/>
-          <p:cNvSpPr txBox="1"/>
-          <p:nvPr/>
-        </p:nvSpPr>
-        <p:spPr>
-          <a:xfrm>
-            <a:off x="457200" y="2377440"/>
-            <a:ext cx="1874520" cy="868680"/>
-          </a:xfrm>
-          <a:prstGeom prst="rect">
-            <a:avLst/>
-          </a:prstGeom>
-          <a:noFill/>
-          <a:ln/>
-        </p:spPr>
-        <p:txBody>
-          <a:bodyPr wrap="square" lIns="0" tIns="0" rIns="0" bIns="0" rtlCol="0" anchor="t"/>
-          <a:lstStyle/>
-          <a:p>
-            <a:pPr indent="0" marL="0">
-              <a:buNone/>
-            </a:pPr>
-            <a:r>
-              <a:rPr lang="en-US" sz="1200" dirty="0">
-                <a:solidFill>
-                  <a:schemeClr val="accent4"/>
-                </a:solidFill>
-              </a:rPr>
-              <a:t>Your top questions, hand-over rules and documents go into the knowledge base.</a:t>
-            </a:r>
-            <a:endParaRPr lang="en-US" sz="1200" dirty="0"/>
-          </a:p>
-        </p:txBody>
-      </p:sp>
-      <p:sp>
-        <p:nvSpPr>
-          <p:cNvPr id="8" name="dot-1"/>
+          <p:cNvPr id="9" name="pack-1"/>
           <p:cNvSpPr/>
           <p:nvPr/>
         </p:nvSpPr>
         <p:spPr>
           <a:xfrm>
-            <a:off x="2743200" y="1344168"/>
-            <a:ext cx="274320" cy="274320"/>
+            <a:off x="457200" y="3035808"/>
+            <a:ext cx="4663440" cy="1426464"/>
+          </a:xfrm>
+          <a:prstGeom prst="roundRect">
+            <a:avLst>
+              <a:gd name="adj" fmla="val 7692"/>
+            </a:avLst>
+          </a:prstGeom>
+          <a:solidFill>
+            <a:schemeClr val="accent6"/>
+          </a:solidFill>
+          <a:ln/>
+        </p:spPr>
+      </p:sp>
+      <p:sp>
+        <p:nvSpPr>
+          <p:cNvPr id="10" name="circle-pack-1"/>
+          <p:cNvSpPr/>
+          <p:nvPr/>
+        </p:nvSpPr>
+        <p:spPr>
+          <a:xfrm>
+            <a:off x="658368" y="3236976"/>
+            <a:ext cx="548640" cy="548640"/>
           </a:xfrm>
           <a:prstGeom prst="ellipse">
             <a:avLst/>
@@ -3619,24 +3360,43 @@
           <a:solidFill>
             <a:schemeClr val="accent2"/>
           </a:solidFill>
-          <a:ln w="25400">
-            <a:solidFill>
-              <a:schemeClr val="bg1"/>
-            </a:solidFill>
-            <a:prstDash val="solid"/>
-          </a:ln>
-        </p:spPr>
-      </p:sp>
-      <p:sp>
-        <p:nvSpPr>
-          <p:cNvPr id="9" name="wk-1"/>
-          <p:cNvSpPr txBox="1"/>
-          <p:nvPr/>
-        </p:nvSpPr>
-        <p:spPr>
-          <a:xfrm>
-            <a:off x="2560320" y="1737360"/>
-            <a:ext cx="1920240" cy="274320"/>
+          <a:ln/>
+        </p:spPr>
+      </p:sp>
+      <p:pic>
+        <p:nvPicPr>
+          <p:cNvPr id="11" name="icon-pack-1" descr="preencoded.png">    </p:cNvPr>
+          <p:cNvPicPr>
+            <a:picLocks noChangeAspect="1"/>
+          </p:cNvPicPr>
+          <p:nvPr/>
+        </p:nvPicPr>
+        <p:blipFill>
+          <a:blip r:embed="rId2"/>
+          <a:stretch>
+            <a:fillRect/>
+          </a:stretch>
+        </p:blipFill>
+        <p:spPr>
+          <a:xfrm>
+            <a:off x="795528" y="3374136"/>
+            <a:ext cx="274320" cy="274320"/>
+          </a:xfrm>
+          <a:prstGeom prst="rect">
+            <a:avLst/>
+          </a:prstGeom>
+        </p:spPr>
+      </p:pic>
+      <p:sp>
+        <p:nvSpPr>
+          <p:cNvPr id="12" name="pack-h-1"/>
+          <p:cNvSpPr txBox="1"/>
+          <p:nvPr/>
+        </p:nvSpPr>
+        <p:spPr>
+          <a:xfrm>
+            <a:off x="1371600" y="3200400"/>
+            <a:ext cx="3611880" cy="320040"/>
           </a:xfrm>
           <a:prstGeom prst="rect">
             <a:avLst/>
@@ -3652,12 +3412,48 @@
               <a:buNone/>
             </a:pPr>
             <a:r>
-              <a:rPr lang="en-US" sz="1200" b="1" dirty="0">
-                <a:solidFill>
-                  <a:schemeClr val="accent2"/>
-                </a:solidFill>
-              </a:rPr>
-              <a:t>Week 2</a:t>
+              <a:rPr lang="en-US" sz="1600" b="1" dirty="0">
+                <a:solidFill>
+                  <a:schemeClr val="tx1"/>
+                </a:solidFill>
+              </a:rPr>
+              <a:t>Clinic Front Desk</a:t>
+            </a:r>
+            <a:endParaRPr lang="en-US" sz="1600" dirty="0"/>
+          </a:p>
+        </p:txBody>
+      </p:sp>
+      <p:sp>
+        <p:nvSpPr>
+          <p:cNvPr id="13" name="pack-b-1"/>
+          <p:cNvSpPr txBox="1"/>
+          <p:nvPr/>
+        </p:nvSpPr>
+        <p:spPr>
+          <a:xfrm>
+            <a:off x="1371600" y="3538728"/>
+            <a:ext cx="3611880" cy="868680"/>
+          </a:xfrm>
+          <a:prstGeom prst="rect">
+            <a:avLst/>
+          </a:prstGeom>
+          <a:noFill/>
+          <a:ln/>
+        </p:spPr>
+        <p:txBody>
+          <a:bodyPr wrap="square" lIns="0" tIns="0" rIns="0" bIns="0" rtlCol="0" anchor="t"/>
+          <a:lstStyle/>
+          <a:p>
+            <a:pPr indent="0" marL="0">
+              <a:buNone/>
+            </a:pPr>
+            <a:r>
+              <a:rPr lang="en-US" sz="1200" dirty="0">
+                <a:solidFill>
+                  <a:schemeClr val="tx1"/>
+                </a:solidFill>
+              </a:rPr>
+              <a:t>Timings, fees, doctors and test preparation. Never gives medical advice. Appointment requests go to the front desk; emergencies get the 112 message.</a:t>
             </a:r>
             <a:endParaRPr lang="en-US" sz="1200" dirty="0"/>
           </a:p>
@@ -3665,14 +3461,14 @@
       </p:sp>
       <p:sp>
         <p:nvSpPr>
-          <p:cNvPr id="10" name="wk-h-1"/>
-          <p:cNvSpPr txBox="1"/>
-          <p:nvPr/>
-        </p:nvSpPr>
-        <p:spPr>
-          <a:xfrm>
-            <a:off x="2560320" y="2011680"/>
-            <a:ext cx="1920240" cy="320040"/>
+          <p:cNvPr id="14" name="packs-next"/>
+          <p:cNvSpPr txBox="1"/>
+          <p:nvPr/>
+        </p:nvSpPr>
+        <p:spPr>
+          <a:xfrm>
+            <a:off x="5486400" y="1143000"/>
+            <a:ext cx="3200400" cy="274320"/>
           </a:xfrm>
           <a:prstGeom prst="rect">
             <a:avLst/>
@@ -3688,387 +3484,73 @@
               <a:buNone/>
             </a:pPr>
             <a:r>
-              <a:rPr lang="en-US" sz="1600" b="1" dirty="0">
-                <a:solidFill>
-                  <a:schemeClr val="tx1"/>
-                </a:solidFill>
-              </a:rPr>
-              <a:t>Configure &amp; test</a:t>
-            </a:r>
-            <a:endParaRPr lang="en-US" sz="1600" dirty="0"/>
-          </a:p>
-        </p:txBody>
-      </p:sp>
-      <p:sp>
-        <p:nvSpPr>
-          <p:cNvPr id="11" name="wk-b-1"/>
-          <p:cNvSpPr txBox="1"/>
-          <p:nvPr/>
-        </p:nvSpPr>
-        <p:spPr>
-          <a:xfrm>
-            <a:off x="2560320" y="2377440"/>
-            <a:ext cx="1874520" cy="868680"/>
-          </a:xfrm>
-          <a:prstGeom prst="rect">
-            <a:avLst/>
-          </a:prstGeom>
-          <a:noFill/>
-          <a:ln/>
-        </p:spPr>
-        <p:txBody>
-          <a:bodyPr wrap="square" lIns="0" tIns="0" rIns="0" bIns="0" rtlCol="0" anchor="t"/>
-          <a:lstStyle/>
-          <a:p>
-            <a:pPr indent="0" marL="0">
-              <a:buNone/>
-            </a:pPr>
-            <a:r>
-              <a:rPr lang="en-US" sz="1200" dirty="0">
+              <a:rPr lang="en-US" sz="1100" b="1" spc="200" kern="0" dirty="0">
                 <a:solidFill>
                   <a:schemeClr val="accent4"/>
                 </a:solidFill>
               </a:rPr>
-              <a:t>Greeting, tone and pack set up. Your team tests as customers.</a:t>
-            </a:r>
-            <a:endParaRPr lang="en-US" sz="1200" dirty="0"/>
-          </a:p>
-        </p:txBody>
-      </p:sp>
-      <p:sp>
-        <p:nvSpPr>
-          <p:cNvPr id="12" name="dot-2"/>
+              <a:t>ON THE ROADMAP</a:t>
+            </a:r>
+            <a:endParaRPr lang="en-US" sz="1100" dirty="0"/>
+          </a:p>
+        </p:txBody>
+      </p:sp>
+      <p:sp>
+        <p:nvSpPr>
+          <p:cNvPr id="15" name="next-0"/>
           <p:cNvSpPr/>
           <p:nvPr/>
         </p:nvSpPr>
         <p:spPr>
           <a:xfrm>
-            <a:off x="4846320" y="1344168"/>
-            <a:ext cx="274320" cy="274320"/>
-          </a:xfrm>
-          <a:prstGeom prst="ellipse">
-            <a:avLst/>
-          </a:prstGeom>
-          <a:solidFill>
-            <a:schemeClr val="accent2"/>
-          </a:solidFill>
-          <a:ln w="25400">
-            <a:solidFill>
-              <a:schemeClr val="bg1"/>
-            </a:solidFill>
-            <a:prstDash val="solid"/>
-          </a:ln>
-        </p:spPr>
-      </p:sp>
-      <p:sp>
-        <p:nvSpPr>
-          <p:cNvPr id="13" name="wk-2"/>
-          <p:cNvSpPr txBox="1"/>
-          <p:nvPr/>
-        </p:nvSpPr>
-        <p:spPr>
-          <a:xfrm>
-            <a:off x="4663440" y="1737360"/>
-            <a:ext cx="1920240" cy="274320"/>
-          </a:xfrm>
-          <a:prstGeom prst="rect">
-            <a:avLst/>
-          </a:prstGeom>
-          <a:noFill/>
-          <a:ln/>
-        </p:spPr>
-        <p:txBody>
-          <a:bodyPr wrap="square" lIns="0" tIns="0" rIns="0" bIns="0" rtlCol="0" anchor="t"/>
-          <a:lstStyle/>
-          <a:p>
-            <a:pPr indent="0" marL="0">
-              <a:buNone/>
-            </a:pPr>
-            <a:r>
-              <a:rPr lang="en-US" sz="1200" b="1" dirty="0">
-                <a:solidFill>
-                  <a:schemeClr val="accent2"/>
-                </a:solidFill>
-              </a:rPr>
-              <a:t>Week 3</a:t>
-            </a:r>
-            <a:endParaRPr lang="en-US" sz="1200" dirty="0"/>
-          </a:p>
-        </p:txBody>
-      </p:sp>
-      <p:sp>
-        <p:nvSpPr>
-          <p:cNvPr id="14" name="wk-h-2"/>
-          <p:cNvSpPr txBox="1"/>
-          <p:nvPr/>
-        </p:nvSpPr>
-        <p:spPr>
-          <a:xfrm>
-            <a:off x="4663440" y="2011680"/>
-            <a:ext cx="1920240" cy="320040"/>
-          </a:xfrm>
-          <a:prstGeom prst="rect">
-            <a:avLst/>
-          </a:prstGeom>
-          <a:noFill/>
-          <a:ln/>
-        </p:spPr>
-        <p:txBody>
-          <a:bodyPr wrap="square" lIns="0" tIns="0" rIns="0" bIns="0" rtlCol="0" anchor="t"/>
-          <a:lstStyle/>
-          <a:p>
-            <a:pPr indent="0" marL="0">
-              <a:buNone/>
-            </a:pPr>
-            <a:r>
-              <a:rPr lang="en-US" sz="1600" b="1" dirty="0">
-                <a:solidFill>
-                  <a:schemeClr val="tx1"/>
-                </a:solidFill>
-              </a:rPr>
-              <a:t>Soft launch</a:t>
-            </a:r>
-            <a:endParaRPr lang="en-US" sz="1600" dirty="0"/>
-          </a:p>
-        </p:txBody>
-      </p:sp>
-      <p:sp>
-        <p:nvSpPr>
-          <p:cNvPr id="15" name="wk-b-2"/>
-          <p:cNvSpPr txBox="1"/>
-          <p:nvPr/>
-        </p:nvSpPr>
-        <p:spPr>
-          <a:xfrm>
-            <a:off x="4663440" y="2377440"/>
-            <a:ext cx="1874520" cy="868680"/>
-          </a:xfrm>
-          <a:prstGeom prst="rect">
-            <a:avLst/>
-          </a:prstGeom>
-          <a:noFill/>
-          <a:ln/>
-        </p:spPr>
-        <p:txBody>
-          <a:bodyPr wrap="square" lIns="0" tIns="0" rIns="0" bIns="0" rtlCol="0" anchor="t"/>
-          <a:lstStyle/>
-          <a:p>
-            <a:pPr indent="0" marL="0">
-              <a:buNone/>
-            </a:pPr>
-            <a:r>
-              <a:rPr lang="en-US" sz="1200" dirty="0">
-                <a:solidFill>
-                  <a:schemeClr val="accent4"/>
-                </a:solidFill>
-              </a:rPr>
-              <a:t>Live on your WhatsApp number. Your team handles hand-overs from the Inbox.</a:t>
-            </a:r>
-            <a:endParaRPr lang="en-US" sz="1200" dirty="0"/>
-          </a:p>
-        </p:txBody>
-      </p:sp>
-      <p:sp>
-        <p:nvSpPr>
-          <p:cNvPr id="16" name="dot-3"/>
-          <p:cNvSpPr/>
-          <p:nvPr/>
-        </p:nvSpPr>
-        <p:spPr>
-          <a:xfrm>
-            <a:off x="6949440" y="1344168"/>
-            <a:ext cx="274320" cy="274320"/>
-          </a:xfrm>
-          <a:prstGeom prst="ellipse">
-            <a:avLst/>
-          </a:prstGeom>
-          <a:solidFill>
-            <a:schemeClr val="accent1"/>
-          </a:solidFill>
-          <a:ln w="25400">
-            <a:solidFill>
-              <a:schemeClr val="bg1"/>
-            </a:solidFill>
-            <a:prstDash val="solid"/>
-          </a:ln>
-        </p:spPr>
-      </p:sp>
-      <p:sp>
-        <p:nvSpPr>
-          <p:cNvPr id="17" name="wk-3"/>
-          <p:cNvSpPr txBox="1"/>
-          <p:nvPr/>
-        </p:nvSpPr>
-        <p:spPr>
-          <a:xfrm>
-            <a:off x="6766560" y="1737360"/>
-            <a:ext cx="1920240" cy="274320"/>
-          </a:xfrm>
-          <a:prstGeom prst="rect">
-            <a:avLst/>
-          </a:prstGeom>
-          <a:noFill/>
-          <a:ln/>
-        </p:spPr>
-        <p:txBody>
-          <a:bodyPr wrap="square" lIns="0" tIns="0" rIns="0" bIns="0" rtlCol="0" anchor="t"/>
-          <a:lstStyle/>
-          <a:p>
-            <a:pPr indent="0" marL="0">
-              <a:buNone/>
-            </a:pPr>
-            <a:r>
-              <a:rPr lang="en-US" sz="1200" b="1" dirty="0">
-                <a:solidFill>
-                  <a:schemeClr val="accent1"/>
-                </a:solidFill>
-              </a:rPr>
-              <a:t>Week 4</a:t>
-            </a:r>
-            <a:endParaRPr lang="en-US" sz="1200" dirty="0"/>
-          </a:p>
-        </p:txBody>
-      </p:sp>
-      <p:sp>
-        <p:nvSpPr>
-          <p:cNvPr id="18" name="wk-h-3"/>
-          <p:cNvSpPr txBox="1"/>
-          <p:nvPr/>
-        </p:nvSpPr>
-        <p:spPr>
-          <a:xfrm>
-            <a:off x="6766560" y="2011680"/>
-            <a:ext cx="1920240" cy="320040"/>
-          </a:xfrm>
-          <a:prstGeom prst="rect">
-            <a:avLst/>
-          </a:prstGeom>
-          <a:noFill/>
-          <a:ln/>
-        </p:spPr>
-        <p:txBody>
-          <a:bodyPr wrap="square" lIns="0" tIns="0" rIns="0" bIns="0" rtlCol="0" anchor="t"/>
-          <a:lstStyle/>
-          <a:p>
-            <a:pPr indent="0" marL="0">
-              <a:buNone/>
-            </a:pPr>
-            <a:r>
-              <a:rPr lang="en-US" sz="1600" b="1" dirty="0">
-                <a:solidFill>
-                  <a:schemeClr val="tx1"/>
-                </a:solidFill>
-              </a:rPr>
-              <a:t>Review &amp; go live</a:t>
-            </a:r>
-            <a:endParaRPr lang="en-US" sz="1600" dirty="0"/>
-          </a:p>
-        </p:txBody>
-      </p:sp>
-      <p:sp>
-        <p:nvSpPr>
-          <p:cNvPr id="19" name="wk-b-3"/>
-          <p:cNvSpPr txBox="1"/>
-          <p:nvPr/>
-        </p:nvSpPr>
-        <p:spPr>
-          <a:xfrm>
-            <a:off x="6766560" y="2377440"/>
-            <a:ext cx="1874520" cy="868680"/>
-          </a:xfrm>
-          <a:prstGeom prst="rect">
-            <a:avLst/>
-          </a:prstGeom>
-          <a:noFill/>
-          <a:ln/>
-        </p:spPr>
-        <p:txBody>
-          <a:bodyPr wrap="square" lIns="0" tIns="0" rIns="0" bIns="0" rtlCol="0" anchor="t"/>
-          <a:lstStyle/>
-          <a:p>
-            <a:pPr indent="0" marL="0">
-              <a:buNone/>
-            </a:pPr>
-            <a:r>
-              <a:rPr lang="en-US" sz="1200" dirty="0">
-                <a:solidFill>
-                  <a:schemeClr val="accent4"/>
-                </a:solidFill>
-              </a:rPr>
-              <a:t>We review the numbers together, fill knowledge gaps and switch fully on.</a:t>
-            </a:r>
-            <a:endParaRPr lang="en-US" sz="1200" dirty="0"/>
-          </a:p>
-        </p:txBody>
-      </p:sp>
-      <p:sp>
-        <p:nvSpPr>
-          <p:cNvPr id="20" name="kpi-label"/>
-          <p:cNvSpPr txBox="1"/>
-          <p:nvPr/>
-        </p:nvSpPr>
-        <p:spPr>
-          <a:xfrm>
-            <a:off x="457200" y="3429000"/>
-            <a:ext cx="3657600" cy="274320"/>
-          </a:xfrm>
-          <a:prstGeom prst="rect">
-            <a:avLst/>
-          </a:prstGeom>
-          <a:noFill/>
-          <a:ln/>
-        </p:spPr>
-        <p:txBody>
-          <a:bodyPr wrap="square" lIns="0" tIns="0" rIns="0" bIns="0" rtlCol="0" anchor="t"/>
-          <a:lstStyle/>
-          <a:p>
-            <a:pPr indent="0" marL="0">
-              <a:buNone/>
-            </a:pPr>
-            <a:r>
-              <a:rPr lang="en-US" sz="1100" b="1" spc="200" kern="0" dirty="0">
-                <a:solidFill>
-                  <a:schemeClr val="accent4"/>
-                </a:solidFill>
-              </a:rPr>
-              <a:t>WHAT WE MEASURE</a:t>
-            </a:r>
-            <a:endParaRPr lang="en-US" sz="1100" dirty="0"/>
-          </a:p>
-        </p:txBody>
-      </p:sp>
-      <p:sp>
-        <p:nvSpPr>
-          <p:cNvPr id="21" name="kpi-0"/>
-          <p:cNvSpPr/>
-          <p:nvPr/>
-        </p:nvSpPr>
-        <p:spPr>
-          <a:xfrm>
-            <a:off x="457200" y="3749040"/>
-            <a:ext cx="1965960" cy="685800"/>
+            <a:off x="5486400" y="1463040"/>
+            <a:ext cx="3200400" cy="411480"/>
           </a:xfrm>
           <a:prstGeom prst="roundRect">
             <a:avLst>
-              <a:gd name="adj" fmla="val 16000"/>
+              <a:gd name="adj" fmla="val 26667"/>
             </a:avLst>
           </a:prstGeom>
           <a:solidFill>
-            <a:schemeClr val="accent5"/>
+            <a:schemeClr val="bg2"/>
           </a:solidFill>
           <a:ln/>
         </p:spPr>
       </p:sp>
-      <p:sp>
-        <p:nvSpPr>
-          <p:cNvPr id="22" name="kpi-t-0"/>
-          <p:cNvSpPr txBox="1"/>
-          <p:nvPr/>
-        </p:nvSpPr>
-        <p:spPr>
-          <a:xfrm>
-            <a:off x="594360" y="3749040"/>
-            <a:ext cx="1691640" cy="685800"/>
+      <p:pic>
+        <p:nvPicPr>
+          <p:cNvPr id="16" name="next-icon-0" descr="preencoded.png">    </p:cNvPr>
+          <p:cNvPicPr>
+            <a:picLocks noChangeAspect="1"/>
+          </p:cNvPicPr>
+          <p:nvPr/>
+        </p:nvPicPr>
+        <p:blipFill>
+          <a:blip r:embed="rId3"/>
+          <a:stretch>
+            <a:fillRect/>
+          </a:stretch>
+        </p:blipFill>
+        <p:spPr>
+          <a:xfrm>
+            <a:off x="5641848" y="1554480"/>
+            <a:ext cx="228600" cy="228600"/>
+          </a:xfrm>
+          <a:prstGeom prst="rect">
+            <a:avLst/>
+          </a:prstGeom>
+        </p:spPr>
+      </p:pic>
+      <p:sp>
+        <p:nvSpPr>
+          <p:cNvPr id="17" name="next-t-0"/>
+          <p:cNvSpPr txBox="1"/>
+          <p:nvPr/>
+        </p:nvSpPr>
+        <p:spPr>
+          <a:xfrm>
+            <a:off x="6035040" y="1463040"/>
+            <a:ext cx="2560320" cy="411480"/>
           </a:xfrm>
           <a:prstGeom prst="rect">
             <a:avLst/>
@@ -4084,12 +3566,12 @@
               <a:buNone/>
             </a:pPr>
             <a:r>
-              <a:rPr lang="en-US" sz="1300" b="1" dirty="0">
+              <a:rPr lang="en-US" sz="1300" dirty="0">
                 <a:solidFill>
                   <a:schemeClr val="tx1"/>
                 </a:solidFill>
               </a:rPr>
-              <a:t>Questions answered by the bot</a:t>
+              <a:t>Sales &amp; leads</a:t>
             </a:r>
             <a:endParaRPr lang="en-US" sz="1300" dirty="0"/>
           </a:p>
@@ -4097,36 +3579,60 @@
       </p:sp>
       <p:sp>
         <p:nvSpPr>
-          <p:cNvPr id="23" name="kpi-1"/>
+          <p:cNvPr id="18" name="next-1"/>
           <p:cNvSpPr/>
           <p:nvPr/>
         </p:nvSpPr>
         <p:spPr>
           <a:xfrm>
-            <a:off x="2560320" y="3749040"/>
-            <a:ext cx="1965960" cy="685800"/>
+            <a:off x="5486400" y="1970532"/>
+            <a:ext cx="3200400" cy="411480"/>
           </a:xfrm>
           <a:prstGeom prst="roundRect">
             <a:avLst>
-              <a:gd name="adj" fmla="val 16000"/>
+              <a:gd name="adj" fmla="val 26667"/>
             </a:avLst>
           </a:prstGeom>
           <a:solidFill>
-            <a:schemeClr val="accent5"/>
+            <a:schemeClr val="bg2"/>
           </a:solidFill>
           <a:ln/>
         </p:spPr>
       </p:sp>
-      <p:sp>
-        <p:nvSpPr>
-          <p:cNvPr id="24" name="kpi-t-1"/>
-          <p:cNvSpPr txBox="1"/>
-          <p:nvPr/>
-        </p:nvSpPr>
-        <p:spPr>
-          <a:xfrm>
-            <a:off x="2697480" y="3749040"/>
-            <a:ext cx="1691640" cy="685800"/>
+      <p:pic>
+        <p:nvPicPr>
+          <p:cNvPr id="19" name="next-icon-1" descr="preencoded.png">    </p:cNvPr>
+          <p:cNvPicPr>
+            <a:picLocks noChangeAspect="1"/>
+          </p:cNvPicPr>
+          <p:nvPr/>
+        </p:nvPicPr>
+        <p:blipFill>
+          <a:blip r:embed="rId4"/>
+          <a:stretch>
+            <a:fillRect/>
+          </a:stretch>
+        </p:blipFill>
+        <p:spPr>
+          <a:xfrm>
+            <a:off x="5641848" y="2061972"/>
+            <a:ext cx="228600" cy="228600"/>
+          </a:xfrm>
+          <a:prstGeom prst="rect">
+            <a:avLst/>
+          </a:prstGeom>
+        </p:spPr>
+      </p:pic>
+      <p:sp>
+        <p:nvSpPr>
+          <p:cNvPr id="20" name="next-t-1"/>
+          <p:cNvSpPr txBox="1"/>
+          <p:nvPr/>
+        </p:nvSpPr>
+        <p:spPr>
+          <a:xfrm>
+            <a:off x="6035040" y="1970532"/>
+            <a:ext cx="2560320" cy="411480"/>
           </a:xfrm>
           <a:prstGeom prst="rect">
             <a:avLst/>
@@ -4142,12 +3648,12 @@
               <a:buNone/>
             </a:pPr>
             <a:r>
-              <a:rPr lang="en-US" sz="1300" b="1" dirty="0">
+              <a:rPr lang="en-US" sz="1300" dirty="0">
                 <a:solidFill>
                   <a:schemeClr val="tx1"/>
                 </a:solidFill>
               </a:rPr>
-              <a:t>First-reply time</a:t>
+              <a:t>Collections</a:t>
             </a:r>
             <a:endParaRPr lang="en-US" sz="1300" dirty="0"/>
           </a:p>
@@ -4155,36 +3661,60 @@
       </p:sp>
       <p:sp>
         <p:nvSpPr>
-          <p:cNvPr id="25" name="kpi-2"/>
+          <p:cNvPr id="21" name="next-2"/>
           <p:cNvSpPr/>
           <p:nvPr/>
         </p:nvSpPr>
         <p:spPr>
           <a:xfrm>
-            <a:off x="4663440" y="3749040"/>
-            <a:ext cx="1965960" cy="685800"/>
+            <a:off x="5486400" y="2478024"/>
+            <a:ext cx="3200400" cy="411480"/>
           </a:xfrm>
           <a:prstGeom prst="roundRect">
             <a:avLst>
-              <a:gd name="adj" fmla="val 16000"/>
+              <a:gd name="adj" fmla="val 26667"/>
             </a:avLst>
           </a:prstGeom>
           <a:solidFill>
-            <a:schemeClr val="accent5"/>
+            <a:schemeClr val="bg2"/>
           </a:solidFill>
           <a:ln/>
         </p:spPr>
       </p:sp>
-      <p:sp>
-        <p:nvSpPr>
-          <p:cNvPr id="26" name="kpi-t-2"/>
-          <p:cNvSpPr txBox="1"/>
-          <p:nvPr/>
-        </p:nvSpPr>
-        <p:spPr>
-          <a:xfrm>
-            <a:off x="4800600" y="3749040"/>
-            <a:ext cx="1691640" cy="685800"/>
+      <p:pic>
+        <p:nvPicPr>
+          <p:cNvPr id="22" name="next-icon-2" descr="preencoded.png">    </p:cNvPr>
+          <p:cNvPicPr>
+            <a:picLocks noChangeAspect="1"/>
+          </p:cNvPicPr>
+          <p:nvPr/>
+        </p:nvPicPr>
+        <p:blipFill>
+          <a:blip r:embed="rId5"/>
+          <a:stretch>
+            <a:fillRect/>
+          </a:stretch>
+        </p:blipFill>
+        <p:spPr>
+          <a:xfrm>
+            <a:off x="5641848" y="2569464"/>
+            <a:ext cx="228600" cy="228600"/>
+          </a:xfrm>
+          <a:prstGeom prst="rect">
+            <a:avLst/>
+          </a:prstGeom>
+        </p:spPr>
+      </p:pic>
+      <p:sp>
+        <p:nvSpPr>
+          <p:cNvPr id="23" name="next-t-2"/>
+          <p:cNvSpPr txBox="1"/>
+          <p:nvPr/>
+        </p:nvSpPr>
+        <p:spPr>
+          <a:xfrm>
+            <a:off x="6035040" y="2478024"/>
+            <a:ext cx="2560320" cy="411480"/>
           </a:xfrm>
           <a:prstGeom prst="rect">
             <a:avLst/>
@@ -4200,12 +3730,12 @@
               <a:buNone/>
             </a:pPr>
             <a:r>
-              <a:rPr lang="en-US" sz="1300" b="1" dirty="0">
+              <a:rPr lang="en-US" sz="1300" dirty="0">
                 <a:solidFill>
                   <a:schemeClr val="tx1"/>
                 </a:solidFill>
               </a:rPr>
-              <a:t>Chats handed to your team</a:t>
+              <a:t>HR &amp; hiring</a:t>
             </a:r>
             <a:endParaRPr lang="en-US" sz="1300" dirty="0"/>
           </a:p>
@@ -4213,36 +3743,60 @@
       </p:sp>
       <p:sp>
         <p:nvSpPr>
-          <p:cNvPr id="27" name="kpi-3"/>
+          <p:cNvPr id="24" name="next-3"/>
           <p:cNvSpPr/>
           <p:nvPr/>
         </p:nvSpPr>
         <p:spPr>
           <a:xfrm>
-            <a:off x="6766560" y="3749040"/>
-            <a:ext cx="1965960" cy="685800"/>
+            <a:off x="5486400" y="2985516"/>
+            <a:ext cx="3200400" cy="411480"/>
           </a:xfrm>
           <a:prstGeom prst="roundRect">
             <a:avLst>
-              <a:gd name="adj" fmla="val 16000"/>
+              <a:gd name="adj" fmla="val 26667"/>
             </a:avLst>
           </a:prstGeom>
           <a:solidFill>
-            <a:schemeClr val="accent5"/>
+            <a:schemeClr val="bg2"/>
           </a:solidFill>
           <a:ln/>
         </p:spPr>
       </p:sp>
-      <p:sp>
-        <p:nvSpPr>
-          <p:cNvPr id="28" name="kpi-t-3"/>
-          <p:cNvSpPr txBox="1"/>
-          <p:nvPr/>
-        </p:nvSpPr>
-        <p:spPr>
-          <a:xfrm>
-            <a:off x="6903720" y="3749040"/>
-            <a:ext cx="1691640" cy="685800"/>
+      <p:pic>
+        <p:nvPicPr>
+          <p:cNvPr id="25" name="next-icon-3" descr="preencoded.png">    </p:cNvPr>
+          <p:cNvPicPr>
+            <a:picLocks noChangeAspect="1"/>
+          </p:cNvPicPr>
+          <p:nvPr/>
+        </p:nvPicPr>
+        <p:blipFill>
+          <a:blip r:embed="rId6"/>
+          <a:stretch>
+            <a:fillRect/>
+          </a:stretch>
+        </p:blipFill>
+        <p:spPr>
+          <a:xfrm>
+            <a:off x="5641848" y="3076956"/>
+            <a:ext cx="228600" cy="228600"/>
+          </a:xfrm>
+          <a:prstGeom prst="rect">
+            <a:avLst/>
+          </a:prstGeom>
+        </p:spPr>
+      </p:pic>
+      <p:sp>
+        <p:nvSpPr>
+          <p:cNvPr id="26" name="next-t-3"/>
+          <p:cNvSpPr txBox="1"/>
+          <p:nvPr/>
+        </p:nvSpPr>
+        <p:spPr>
+          <a:xfrm>
+            <a:off x="6035040" y="2985516"/>
+            <a:ext cx="2560320" cy="411480"/>
           </a:xfrm>
           <a:prstGeom prst="rect">
             <a:avLst/>
@@ -4258,12 +3812,176 @@
               <a:buNone/>
             </a:pPr>
             <a:r>
-              <a:rPr lang="en-US" sz="1300" b="1" dirty="0">
+              <a:rPr lang="en-US" sz="1300" dirty="0">
                 <a:solidFill>
                   <a:schemeClr val="tx1"/>
                 </a:solidFill>
               </a:rPr>
-              <a:t>Customer satisfaction</a:t>
+              <a:t>Real estate</a:t>
+            </a:r>
+            <a:endParaRPr lang="en-US" sz="1300" dirty="0"/>
+          </a:p>
+        </p:txBody>
+      </p:sp>
+      <p:sp>
+        <p:nvSpPr>
+          <p:cNvPr id="27" name="next-4"/>
+          <p:cNvSpPr/>
+          <p:nvPr/>
+        </p:nvSpPr>
+        <p:spPr>
+          <a:xfrm>
+            <a:off x="5486400" y="3493008"/>
+            <a:ext cx="3200400" cy="411480"/>
+          </a:xfrm>
+          <a:prstGeom prst="roundRect">
+            <a:avLst>
+              <a:gd name="adj" fmla="val 26667"/>
+            </a:avLst>
+          </a:prstGeom>
+          <a:solidFill>
+            <a:schemeClr val="bg2"/>
+          </a:solidFill>
+          <a:ln/>
+        </p:spPr>
+      </p:sp>
+      <p:pic>
+        <p:nvPicPr>
+          <p:cNvPr id="28" name="next-icon-4" descr="preencoded.png">    </p:cNvPr>
+          <p:cNvPicPr>
+            <a:picLocks noChangeAspect="1"/>
+          </p:cNvPicPr>
+          <p:nvPr/>
+        </p:nvPicPr>
+        <p:blipFill>
+          <a:blip r:embed="rId7"/>
+          <a:stretch>
+            <a:fillRect/>
+          </a:stretch>
+        </p:blipFill>
+        <p:spPr>
+          <a:xfrm>
+            <a:off x="5641848" y="3584448"/>
+            <a:ext cx="228600" cy="228600"/>
+          </a:xfrm>
+          <a:prstGeom prst="rect">
+            <a:avLst/>
+          </a:prstGeom>
+        </p:spPr>
+      </p:pic>
+      <p:sp>
+        <p:nvSpPr>
+          <p:cNvPr id="29" name="next-t-4"/>
+          <p:cNvSpPr txBox="1"/>
+          <p:nvPr/>
+        </p:nvSpPr>
+        <p:spPr>
+          <a:xfrm>
+            <a:off x="6035040" y="3493008"/>
+            <a:ext cx="2560320" cy="411480"/>
+          </a:xfrm>
+          <a:prstGeom prst="rect">
+            <a:avLst/>
+          </a:prstGeom>
+          <a:noFill/>
+          <a:ln/>
+        </p:spPr>
+        <p:txBody>
+          <a:bodyPr wrap="square" lIns="0" tIns="0" rIns="0" bIns="0" rtlCol="0" anchor="ctr"/>
+          <a:lstStyle/>
+          <a:p>
+            <a:pPr indent="0" marL="0">
+              <a:buNone/>
+            </a:pPr>
+            <a:r>
+              <a:rPr lang="en-US" sz="1300" dirty="0">
+                <a:solidFill>
+                  <a:schemeClr val="tx1"/>
+                </a:solidFill>
+              </a:rPr>
+              <a:t>Education</a:t>
+            </a:r>
+            <a:endParaRPr lang="en-US" sz="1300" dirty="0"/>
+          </a:p>
+        </p:txBody>
+      </p:sp>
+      <p:sp>
+        <p:nvSpPr>
+          <p:cNvPr id="30" name="next-5"/>
+          <p:cNvSpPr/>
+          <p:nvPr/>
+        </p:nvSpPr>
+        <p:spPr>
+          <a:xfrm>
+            <a:off x="5486400" y="4000500"/>
+            <a:ext cx="3200400" cy="411480"/>
+          </a:xfrm>
+          <a:prstGeom prst="roundRect">
+            <a:avLst>
+              <a:gd name="adj" fmla="val 26667"/>
+            </a:avLst>
+          </a:prstGeom>
+          <a:solidFill>
+            <a:schemeClr val="bg2"/>
+          </a:solidFill>
+          <a:ln/>
+        </p:spPr>
+      </p:sp>
+      <p:pic>
+        <p:nvPicPr>
+          <p:cNvPr id="31" name="next-icon-5" descr="preencoded.png">    </p:cNvPr>
+          <p:cNvPicPr>
+            <a:picLocks noChangeAspect="1"/>
+          </p:cNvPicPr>
+          <p:nvPr/>
+        </p:nvPicPr>
+        <p:blipFill>
+          <a:blip r:embed="rId8"/>
+          <a:stretch>
+            <a:fillRect/>
+          </a:stretch>
+        </p:blipFill>
+        <p:spPr>
+          <a:xfrm>
+            <a:off x="5641848" y="4091940"/>
+            <a:ext cx="228600" cy="228600"/>
+          </a:xfrm>
+          <a:prstGeom prst="rect">
+            <a:avLst/>
+          </a:prstGeom>
+        </p:spPr>
+      </p:pic>
+      <p:sp>
+        <p:nvSpPr>
+          <p:cNvPr id="32" name="next-t-5"/>
+          <p:cNvSpPr txBox="1"/>
+          <p:nvPr/>
+        </p:nvSpPr>
+        <p:spPr>
+          <a:xfrm>
+            <a:off x="6035040" y="4000500"/>
+            <a:ext cx="2560320" cy="411480"/>
+          </a:xfrm>
+          <a:prstGeom prst="rect">
+            <a:avLst/>
+          </a:prstGeom>
+          <a:noFill/>
+          <a:ln/>
+        </p:spPr>
+        <p:txBody>
+          <a:bodyPr wrap="square" lIns="0" tIns="0" rIns="0" bIns="0" rtlCol="0" anchor="ctr"/>
+          <a:lstStyle/>
+          <a:p>
+            <a:pPr indent="0" marL="0">
+              <a:buNone/>
+            </a:pPr>
+            <a:r>
+              <a:rPr lang="en-US" sz="1300" dirty="0">
+                <a:solidFill>
+                  <a:schemeClr val="tx1"/>
+                </a:solidFill>
+              </a:rPr>
+              <a:t>D2C commerce</a:t>
             </a:r>
             <a:endParaRPr lang="en-US" sz="1300" dirty="0"/>
           </a:p>
@@ -4371,7 +4089,7 @@
                   <a:schemeClr val="tx1"/>
                 </a:solidFill>
               </a:rPr>
-              <a:t>Simple, predictable pricing</a:t>
+              <a:t>Live in four weeks</a:t>
             </a:r>
             <a:endParaRPr lang="en-US" sz="3200" dirty="0"/>
           </a:p>
@@ -4379,513 +4097,801 @@
       </p:sp>
       <p:sp>
         <p:nvSpPr>
-          <p:cNvPr id="3" name="plan-0"/>
+          <p:cNvPr id="3" name="timeline"/>
           <p:cNvSpPr/>
           <p:nvPr/>
         </p:nvSpPr>
         <p:spPr>
           <a:xfrm>
-            <a:off x="457200" y="1143000"/>
-            <a:ext cx="2615184" cy="3108960"/>
+            <a:off x="777240" y="1481328"/>
+            <a:ext cx="6309360" cy="0"/>
+          </a:xfrm>
+          <a:prstGeom prst="line">
+            <a:avLst/>
+          </a:prstGeom>
+          <a:noFill/>
+          <a:ln w="19050">
+            <a:solidFill>
+              <a:schemeClr val="accent4"/>
+            </a:solidFill>
+            <a:prstDash val="solid"/>
+          </a:ln>
+        </p:spPr>
+      </p:sp>
+      <p:sp>
+        <p:nvSpPr>
+          <p:cNvPr id="4" name="dot-0"/>
+          <p:cNvSpPr/>
+          <p:nvPr/>
+        </p:nvSpPr>
+        <p:spPr>
+          <a:xfrm>
+            <a:off x="640080" y="1344168"/>
+            <a:ext cx="274320" cy="274320"/>
+          </a:xfrm>
+          <a:prstGeom prst="ellipse">
+            <a:avLst/>
+          </a:prstGeom>
+          <a:solidFill>
+            <a:schemeClr val="accent2"/>
+          </a:solidFill>
+          <a:ln w="25400">
+            <a:solidFill>
+              <a:schemeClr val="bg1"/>
+            </a:solidFill>
+            <a:prstDash val="solid"/>
+          </a:ln>
+        </p:spPr>
+      </p:sp>
+      <p:sp>
+        <p:nvSpPr>
+          <p:cNvPr id="5" name="wk-0"/>
+          <p:cNvSpPr txBox="1"/>
+          <p:nvPr/>
+        </p:nvSpPr>
+        <p:spPr>
+          <a:xfrm>
+            <a:off x="457200" y="1737360"/>
+            <a:ext cx="1920240" cy="274320"/>
+          </a:xfrm>
+          <a:prstGeom prst="rect">
+            <a:avLst/>
+          </a:prstGeom>
+          <a:noFill/>
+          <a:ln/>
+        </p:spPr>
+        <p:txBody>
+          <a:bodyPr wrap="square" lIns="0" tIns="0" rIns="0" bIns="0" rtlCol="0" anchor="t"/>
+          <a:lstStyle/>
+          <a:p>
+            <a:pPr indent="0" marL="0">
+              <a:buNone/>
+            </a:pPr>
+            <a:r>
+              <a:rPr lang="en-US" sz="1200" b="1" dirty="0">
+                <a:solidFill>
+                  <a:schemeClr val="accent2"/>
+                </a:solidFill>
+              </a:rPr>
+              <a:t>Week 1</a:t>
+            </a:r>
+            <a:endParaRPr lang="en-US" sz="1200" dirty="0"/>
+          </a:p>
+        </p:txBody>
+      </p:sp>
+      <p:sp>
+        <p:nvSpPr>
+          <p:cNvPr id="6" name="wk-h-0"/>
+          <p:cNvSpPr txBox="1"/>
+          <p:nvPr/>
+        </p:nvSpPr>
+        <p:spPr>
+          <a:xfrm>
+            <a:off x="457200" y="2011680"/>
+            <a:ext cx="1920240" cy="320040"/>
+          </a:xfrm>
+          <a:prstGeom prst="rect">
+            <a:avLst/>
+          </a:prstGeom>
+          <a:noFill/>
+          <a:ln/>
+        </p:spPr>
+        <p:txBody>
+          <a:bodyPr wrap="square" lIns="0" tIns="0" rIns="0" bIns="0" rtlCol="0" anchor="t"/>
+          <a:lstStyle/>
+          <a:p>
+            <a:pPr indent="0" marL="0">
+              <a:buNone/>
+            </a:pPr>
+            <a:r>
+              <a:rPr lang="en-US" sz="1600" b="1" dirty="0">
+                <a:solidFill>
+                  <a:schemeClr val="tx1"/>
+                </a:solidFill>
+              </a:rPr>
+              <a:t>Discover &amp; load</a:t>
+            </a:r>
+            <a:endParaRPr lang="en-US" sz="1600" dirty="0"/>
+          </a:p>
+        </p:txBody>
+      </p:sp>
+      <p:sp>
+        <p:nvSpPr>
+          <p:cNvPr id="7" name="wk-b-0"/>
+          <p:cNvSpPr txBox="1"/>
+          <p:nvPr/>
+        </p:nvSpPr>
+        <p:spPr>
+          <a:xfrm>
+            <a:off x="457200" y="2377440"/>
+            <a:ext cx="1874520" cy="868680"/>
+          </a:xfrm>
+          <a:prstGeom prst="rect">
+            <a:avLst/>
+          </a:prstGeom>
+          <a:noFill/>
+          <a:ln/>
+        </p:spPr>
+        <p:txBody>
+          <a:bodyPr wrap="square" lIns="0" tIns="0" rIns="0" bIns="0" rtlCol="0" anchor="t"/>
+          <a:lstStyle/>
+          <a:p>
+            <a:pPr indent="0" marL="0">
+              <a:buNone/>
+            </a:pPr>
+            <a:r>
+              <a:rPr lang="en-US" sz="1200" dirty="0">
+                <a:solidFill>
+                  <a:schemeClr val="accent4"/>
+                </a:solidFill>
+              </a:rPr>
+              <a:t>Your top questions, hand-over rules and documents go into the knowledge base.</a:t>
+            </a:r>
+            <a:endParaRPr lang="en-US" sz="1200" dirty="0"/>
+          </a:p>
+        </p:txBody>
+      </p:sp>
+      <p:sp>
+        <p:nvSpPr>
+          <p:cNvPr id="8" name="dot-1"/>
+          <p:cNvSpPr/>
+          <p:nvPr/>
+        </p:nvSpPr>
+        <p:spPr>
+          <a:xfrm>
+            <a:off x="2743200" y="1344168"/>
+            <a:ext cx="274320" cy="274320"/>
+          </a:xfrm>
+          <a:prstGeom prst="ellipse">
+            <a:avLst/>
+          </a:prstGeom>
+          <a:solidFill>
+            <a:schemeClr val="accent2"/>
+          </a:solidFill>
+          <a:ln w="25400">
+            <a:solidFill>
+              <a:schemeClr val="bg1"/>
+            </a:solidFill>
+            <a:prstDash val="solid"/>
+          </a:ln>
+        </p:spPr>
+      </p:sp>
+      <p:sp>
+        <p:nvSpPr>
+          <p:cNvPr id="9" name="wk-1"/>
+          <p:cNvSpPr txBox="1"/>
+          <p:nvPr/>
+        </p:nvSpPr>
+        <p:spPr>
+          <a:xfrm>
+            <a:off x="2560320" y="1737360"/>
+            <a:ext cx="1920240" cy="274320"/>
+          </a:xfrm>
+          <a:prstGeom prst="rect">
+            <a:avLst/>
+          </a:prstGeom>
+          <a:noFill/>
+          <a:ln/>
+        </p:spPr>
+        <p:txBody>
+          <a:bodyPr wrap="square" lIns="0" tIns="0" rIns="0" bIns="0" rtlCol="0" anchor="t"/>
+          <a:lstStyle/>
+          <a:p>
+            <a:pPr indent="0" marL="0">
+              <a:buNone/>
+            </a:pPr>
+            <a:r>
+              <a:rPr lang="en-US" sz="1200" b="1" dirty="0">
+                <a:solidFill>
+                  <a:schemeClr val="accent2"/>
+                </a:solidFill>
+              </a:rPr>
+              <a:t>Week 2</a:t>
+            </a:r>
+            <a:endParaRPr lang="en-US" sz="1200" dirty="0"/>
+          </a:p>
+        </p:txBody>
+      </p:sp>
+      <p:sp>
+        <p:nvSpPr>
+          <p:cNvPr id="10" name="wk-h-1"/>
+          <p:cNvSpPr txBox="1"/>
+          <p:nvPr/>
+        </p:nvSpPr>
+        <p:spPr>
+          <a:xfrm>
+            <a:off x="2560320" y="2011680"/>
+            <a:ext cx="1920240" cy="320040"/>
+          </a:xfrm>
+          <a:prstGeom prst="rect">
+            <a:avLst/>
+          </a:prstGeom>
+          <a:noFill/>
+          <a:ln/>
+        </p:spPr>
+        <p:txBody>
+          <a:bodyPr wrap="square" lIns="0" tIns="0" rIns="0" bIns="0" rtlCol="0" anchor="t"/>
+          <a:lstStyle/>
+          <a:p>
+            <a:pPr indent="0" marL="0">
+              <a:buNone/>
+            </a:pPr>
+            <a:r>
+              <a:rPr lang="en-US" sz="1600" b="1" dirty="0">
+                <a:solidFill>
+                  <a:schemeClr val="tx1"/>
+                </a:solidFill>
+              </a:rPr>
+              <a:t>Configure &amp; test</a:t>
+            </a:r>
+            <a:endParaRPr lang="en-US" sz="1600" dirty="0"/>
+          </a:p>
+        </p:txBody>
+      </p:sp>
+      <p:sp>
+        <p:nvSpPr>
+          <p:cNvPr id="11" name="wk-b-1"/>
+          <p:cNvSpPr txBox="1"/>
+          <p:nvPr/>
+        </p:nvSpPr>
+        <p:spPr>
+          <a:xfrm>
+            <a:off x="2560320" y="2377440"/>
+            <a:ext cx="1874520" cy="868680"/>
+          </a:xfrm>
+          <a:prstGeom prst="rect">
+            <a:avLst/>
+          </a:prstGeom>
+          <a:noFill/>
+          <a:ln/>
+        </p:spPr>
+        <p:txBody>
+          <a:bodyPr wrap="square" lIns="0" tIns="0" rIns="0" bIns="0" rtlCol="0" anchor="t"/>
+          <a:lstStyle/>
+          <a:p>
+            <a:pPr indent="0" marL="0">
+              <a:buNone/>
+            </a:pPr>
+            <a:r>
+              <a:rPr lang="en-US" sz="1200" dirty="0">
+                <a:solidFill>
+                  <a:schemeClr val="accent4"/>
+                </a:solidFill>
+              </a:rPr>
+              <a:t>Greeting, tone and pack set up. Your team tests as customers.</a:t>
+            </a:r>
+            <a:endParaRPr lang="en-US" sz="1200" dirty="0"/>
+          </a:p>
+        </p:txBody>
+      </p:sp>
+      <p:sp>
+        <p:nvSpPr>
+          <p:cNvPr id="12" name="dot-2"/>
+          <p:cNvSpPr/>
+          <p:nvPr/>
+        </p:nvSpPr>
+        <p:spPr>
+          <a:xfrm>
+            <a:off x="4846320" y="1344168"/>
+            <a:ext cx="274320" cy="274320"/>
+          </a:xfrm>
+          <a:prstGeom prst="ellipse">
+            <a:avLst/>
+          </a:prstGeom>
+          <a:solidFill>
+            <a:schemeClr val="accent2"/>
+          </a:solidFill>
+          <a:ln w="25400">
+            <a:solidFill>
+              <a:schemeClr val="bg1"/>
+            </a:solidFill>
+            <a:prstDash val="solid"/>
+          </a:ln>
+        </p:spPr>
+      </p:sp>
+      <p:sp>
+        <p:nvSpPr>
+          <p:cNvPr id="13" name="wk-2"/>
+          <p:cNvSpPr txBox="1"/>
+          <p:nvPr/>
+        </p:nvSpPr>
+        <p:spPr>
+          <a:xfrm>
+            <a:off x="4663440" y="1737360"/>
+            <a:ext cx="1920240" cy="274320"/>
+          </a:xfrm>
+          <a:prstGeom prst="rect">
+            <a:avLst/>
+          </a:prstGeom>
+          <a:noFill/>
+          <a:ln/>
+        </p:spPr>
+        <p:txBody>
+          <a:bodyPr wrap="square" lIns="0" tIns="0" rIns="0" bIns="0" rtlCol="0" anchor="t"/>
+          <a:lstStyle/>
+          <a:p>
+            <a:pPr indent="0" marL="0">
+              <a:buNone/>
+            </a:pPr>
+            <a:r>
+              <a:rPr lang="en-US" sz="1200" b="1" dirty="0">
+                <a:solidFill>
+                  <a:schemeClr val="accent2"/>
+                </a:solidFill>
+              </a:rPr>
+              <a:t>Week 3</a:t>
+            </a:r>
+            <a:endParaRPr lang="en-US" sz="1200" dirty="0"/>
+          </a:p>
+        </p:txBody>
+      </p:sp>
+      <p:sp>
+        <p:nvSpPr>
+          <p:cNvPr id="14" name="wk-h-2"/>
+          <p:cNvSpPr txBox="1"/>
+          <p:nvPr/>
+        </p:nvSpPr>
+        <p:spPr>
+          <a:xfrm>
+            <a:off x="4663440" y="2011680"/>
+            <a:ext cx="1920240" cy="320040"/>
+          </a:xfrm>
+          <a:prstGeom prst="rect">
+            <a:avLst/>
+          </a:prstGeom>
+          <a:noFill/>
+          <a:ln/>
+        </p:spPr>
+        <p:txBody>
+          <a:bodyPr wrap="square" lIns="0" tIns="0" rIns="0" bIns="0" rtlCol="0" anchor="t"/>
+          <a:lstStyle/>
+          <a:p>
+            <a:pPr indent="0" marL="0">
+              <a:buNone/>
+            </a:pPr>
+            <a:r>
+              <a:rPr lang="en-US" sz="1600" b="1" dirty="0">
+                <a:solidFill>
+                  <a:schemeClr val="tx1"/>
+                </a:solidFill>
+              </a:rPr>
+              <a:t>Soft launch</a:t>
+            </a:r>
+            <a:endParaRPr lang="en-US" sz="1600" dirty="0"/>
+          </a:p>
+        </p:txBody>
+      </p:sp>
+      <p:sp>
+        <p:nvSpPr>
+          <p:cNvPr id="15" name="wk-b-2"/>
+          <p:cNvSpPr txBox="1"/>
+          <p:nvPr/>
+        </p:nvSpPr>
+        <p:spPr>
+          <a:xfrm>
+            <a:off x="4663440" y="2377440"/>
+            <a:ext cx="1874520" cy="868680"/>
+          </a:xfrm>
+          <a:prstGeom prst="rect">
+            <a:avLst/>
+          </a:prstGeom>
+          <a:noFill/>
+          <a:ln/>
+        </p:spPr>
+        <p:txBody>
+          <a:bodyPr wrap="square" lIns="0" tIns="0" rIns="0" bIns="0" rtlCol="0" anchor="t"/>
+          <a:lstStyle/>
+          <a:p>
+            <a:pPr indent="0" marL="0">
+              <a:buNone/>
+            </a:pPr>
+            <a:r>
+              <a:rPr lang="en-US" sz="1200" dirty="0">
+                <a:solidFill>
+                  <a:schemeClr val="accent4"/>
+                </a:solidFill>
+              </a:rPr>
+              <a:t>Live on your WhatsApp number. Your team handles hand-overs from the Inbox.</a:t>
+            </a:r>
+            <a:endParaRPr lang="en-US" sz="1200" dirty="0"/>
+          </a:p>
+        </p:txBody>
+      </p:sp>
+      <p:sp>
+        <p:nvSpPr>
+          <p:cNvPr id="16" name="dot-3"/>
+          <p:cNvSpPr/>
+          <p:nvPr/>
+        </p:nvSpPr>
+        <p:spPr>
+          <a:xfrm>
+            <a:off x="6949440" y="1344168"/>
+            <a:ext cx="274320" cy="274320"/>
+          </a:xfrm>
+          <a:prstGeom prst="ellipse">
+            <a:avLst/>
+          </a:prstGeom>
+          <a:solidFill>
+            <a:schemeClr val="accent1"/>
+          </a:solidFill>
+          <a:ln w="25400">
+            <a:solidFill>
+              <a:schemeClr val="bg1"/>
+            </a:solidFill>
+            <a:prstDash val="solid"/>
+          </a:ln>
+        </p:spPr>
+      </p:sp>
+      <p:sp>
+        <p:nvSpPr>
+          <p:cNvPr id="17" name="wk-3"/>
+          <p:cNvSpPr txBox="1"/>
+          <p:nvPr/>
+        </p:nvSpPr>
+        <p:spPr>
+          <a:xfrm>
+            <a:off x="6766560" y="1737360"/>
+            <a:ext cx="1920240" cy="274320"/>
+          </a:xfrm>
+          <a:prstGeom prst="rect">
+            <a:avLst/>
+          </a:prstGeom>
+          <a:noFill/>
+          <a:ln/>
+        </p:spPr>
+        <p:txBody>
+          <a:bodyPr wrap="square" lIns="0" tIns="0" rIns="0" bIns="0" rtlCol="0" anchor="t"/>
+          <a:lstStyle/>
+          <a:p>
+            <a:pPr indent="0" marL="0">
+              <a:buNone/>
+            </a:pPr>
+            <a:r>
+              <a:rPr lang="en-US" sz="1200" b="1" dirty="0">
+                <a:solidFill>
+                  <a:schemeClr val="accent1"/>
+                </a:solidFill>
+              </a:rPr>
+              <a:t>Week 4</a:t>
+            </a:r>
+            <a:endParaRPr lang="en-US" sz="1200" dirty="0"/>
+          </a:p>
+        </p:txBody>
+      </p:sp>
+      <p:sp>
+        <p:nvSpPr>
+          <p:cNvPr id="18" name="wk-h-3"/>
+          <p:cNvSpPr txBox="1"/>
+          <p:nvPr/>
+        </p:nvSpPr>
+        <p:spPr>
+          <a:xfrm>
+            <a:off x="6766560" y="2011680"/>
+            <a:ext cx="1920240" cy="320040"/>
+          </a:xfrm>
+          <a:prstGeom prst="rect">
+            <a:avLst/>
+          </a:prstGeom>
+          <a:noFill/>
+          <a:ln/>
+        </p:spPr>
+        <p:txBody>
+          <a:bodyPr wrap="square" lIns="0" tIns="0" rIns="0" bIns="0" rtlCol="0" anchor="t"/>
+          <a:lstStyle/>
+          <a:p>
+            <a:pPr indent="0" marL="0">
+              <a:buNone/>
+            </a:pPr>
+            <a:r>
+              <a:rPr lang="en-US" sz="1600" b="1" dirty="0">
+                <a:solidFill>
+                  <a:schemeClr val="tx1"/>
+                </a:solidFill>
+              </a:rPr>
+              <a:t>Review &amp; go live</a:t>
+            </a:r>
+            <a:endParaRPr lang="en-US" sz="1600" dirty="0"/>
+          </a:p>
+        </p:txBody>
+      </p:sp>
+      <p:sp>
+        <p:nvSpPr>
+          <p:cNvPr id="19" name="wk-b-3"/>
+          <p:cNvSpPr txBox="1"/>
+          <p:nvPr/>
+        </p:nvSpPr>
+        <p:spPr>
+          <a:xfrm>
+            <a:off x="6766560" y="2377440"/>
+            <a:ext cx="1874520" cy="868680"/>
+          </a:xfrm>
+          <a:prstGeom prst="rect">
+            <a:avLst/>
+          </a:prstGeom>
+          <a:noFill/>
+          <a:ln/>
+        </p:spPr>
+        <p:txBody>
+          <a:bodyPr wrap="square" lIns="0" tIns="0" rIns="0" bIns="0" rtlCol="0" anchor="t"/>
+          <a:lstStyle/>
+          <a:p>
+            <a:pPr indent="0" marL="0">
+              <a:buNone/>
+            </a:pPr>
+            <a:r>
+              <a:rPr lang="en-US" sz="1200" dirty="0">
+                <a:solidFill>
+                  <a:schemeClr val="accent4"/>
+                </a:solidFill>
+              </a:rPr>
+              <a:t>We review the numbers together, fill knowledge gaps and switch fully on.</a:t>
+            </a:r>
+            <a:endParaRPr lang="en-US" sz="1200" dirty="0"/>
+          </a:p>
+        </p:txBody>
+      </p:sp>
+      <p:sp>
+        <p:nvSpPr>
+          <p:cNvPr id="20" name="kpi-label"/>
+          <p:cNvSpPr txBox="1"/>
+          <p:nvPr/>
+        </p:nvSpPr>
+        <p:spPr>
+          <a:xfrm>
+            <a:off x="457200" y="3429000"/>
+            <a:ext cx="3657600" cy="274320"/>
+          </a:xfrm>
+          <a:prstGeom prst="rect">
+            <a:avLst/>
+          </a:prstGeom>
+          <a:noFill/>
+          <a:ln/>
+        </p:spPr>
+        <p:txBody>
+          <a:bodyPr wrap="square" lIns="0" tIns="0" rIns="0" bIns="0" rtlCol="0" anchor="t"/>
+          <a:lstStyle/>
+          <a:p>
+            <a:pPr indent="0" marL="0">
+              <a:buNone/>
+            </a:pPr>
+            <a:r>
+              <a:rPr lang="en-US" sz="1100" b="1" spc="200" kern="0" dirty="0">
+                <a:solidFill>
+                  <a:schemeClr val="accent4"/>
+                </a:solidFill>
+              </a:rPr>
+              <a:t>WHAT WE MEASURE</a:t>
+            </a:r>
+            <a:endParaRPr lang="en-US" sz="1100" dirty="0"/>
+          </a:p>
+        </p:txBody>
+      </p:sp>
+      <p:sp>
+        <p:nvSpPr>
+          <p:cNvPr id="21" name="kpi-0"/>
+          <p:cNvSpPr/>
+          <p:nvPr/>
+        </p:nvSpPr>
+        <p:spPr>
+          <a:xfrm>
+            <a:off x="457200" y="3749040"/>
+            <a:ext cx="1965960" cy="685800"/>
           </a:xfrm>
           <a:prstGeom prst="roundRect">
             <a:avLst>
-              <a:gd name="adj" fmla="val 4196"/>
+              <a:gd name="adj" fmla="val 16000"/>
             </a:avLst>
           </a:prstGeom>
           <a:solidFill>
-            <a:schemeClr val="bg2"/>
+            <a:schemeClr val="accent5"/>
           </a:solidFill>
           <a:ln/>
         </p:spPr>
       </p:sp>
       <p:sp>
         <p:nvSpPr>
-          <p:cNvPr id="4" name="plan-name-0"/>
-          <p:cNvSpPr txBox="1"/>
-          <p:nvPr/>
-        </p:nvSpPr>
-        <p:spPr>
-          <a:xfrm>
-            <a:off x="685800" y="1298448"/>
-            <a:ext cx="2194560" cy="320040"/>
-          </a:xfrm>
-          <a:prstGeom prst="rect">
-            <a:avLst/>
-          </a:prstGeom>
-          <a:noFill/>
-          <a:ln/>
-        </p:spPr>
-        <p:txBody>
-          <a:bodyPr wrap="square" lIns="0" tIns="0" rIns="0" bIns="0" rtlCol="0" anchor="t"/>
+          <p:cNvPr id="22" name="kpi-t-0"/>
+          <p:cNvSpPr txBox="1"/>
+          <p:nvPr/>
+        </p:nvSpPr>
+        <p:spPr>
+          <a:xfrm>
+            <a:off x="594360" y="3749040"/>
+            <a:ext cx="1691640" cy="685800"/>
+          </a:xfrm>
+          <a:prstGeom prst="rect">
+            <a:avLst/>
+          </a:prstGeom>
+          <a:noFill/>
+          <a:ln/>
+        </p:spPr>
+        <p:txBody>
+          <a:bodyPr wrap="square" lIns="0" tIns="0" rIns="0" bIns="0" rtlCol="0" anchor="ctr"/>
           <a:lstStyle/>
           <a:p>
             <a:pPr indent="0" marL="0">
               <a:buNone/>
             </a:pPr>
             <a:r>
-              <a:rPr lang="en-US" sz="1600" b="1" dirty="0">
+              <a:rPr lang="en-US" sz="1300" b="1" dirty="0">
                 <a:solidFill>
                   <a:schemeClr val="tx1"/>
                 </a:solidFill>
               </a:rPr>
-              <a:t>Starter</a:t>
-            </a:r>
-            <a:endParaRPr lang="en-US" sz="1600" dirty="0"/>
-          </a:p>
-        </p:txBody>
-      </p:sp>
-      <p:sp>
-        <p:nvSpPr>
-          <p:cNvPr id="5" name="plan-price-0"/>
-          <p:cNvSpPr txBox="1"/>
-          <p:nvPr/>
-        </p:nvSpPr>
-        <p:spPr>
-          <a:xfrm>
-            <a:off x="685800" y="1645920"/>
-            <a:ext cx="2194560" cy="548640"/>
-          </a:xfrm>
-          <a:prstGeom prst="rect">
-            <a:avLst/>
-          </a:prstGeom>
-          <a:noFill/>
-          <a:ln/>
-        </p:spPr>
-        <p:txBody>
-          <a:bodyPr wrap="square" lIns="0" tIns="0" rIns="0" bIns="0" rtlCol="0" anchor="ctr"/>
-          <a:lstStyle/>
-          <a:p>
-            <a:pPr indent="0" marL="0">
-              <a:buNone/>
-            </a:pPr>
-            <a:r>
-              <a:rPr lang="en-US" sz="3000" b="1" dirty="0">
-                <a:solidFill>
-                  <a:schemeClr val="tx1"/>
-                </a:solidFill>
-              </a:rPr>
-              <a:t>₹4,999</a:t>
-            </a:r>
-            <a:pPr indent="0" marL="0">
-              <a:buNone/>
-            </a:pPr>
-            <a:r>
-              <a:rPr lang="en-US" sz="1200" dirty="0">
-                <a:solidFill>
-                  <a:schemeClr val="accent4"/>
-                </a:solidFill>
-              </a:rPr>
-              <a:t> /month</a:t>
-            </a:r>
-            <a:endParaRPr lang="en-US" sz="1400" dirty="0"/>
-          </a:p>
-        </p:txBody>
-      </p:sp>
-      <p:sp>
-        <p:nvSpPr>
-          <p:cNvPr id="6" name="plan-feats-0"/>
-          <p:cNvSpPr txBox="1"/>
-          <p:nvPr/>
-        </p:nvSpPr>
-        <p:spPr>
-          <a:xfrm>
-            <a:off x="685800" y="2331720"/>
-            <a:ext cx="2240280" cy="1828800"/>
-          </a:xfrm>
-          <a:prstGeom prst="rect">
-            <a:avLst/>
-          </a:prstGeom>
-          <a:noFill/>
-          <a:ln/>
-        </p:spPr>
-        <p:txBody>
-          <a:bodyPr wrap="square" lIns="0" tIns="0" rIns="0" bIns="0" rtlCol="0" anchor="t"/>
-          <a:lstStyle/>
-          <a:p>
-            <a:pPr marL="152400" indent="-152400">
-              <a:spcAft>
-                <a:spcPts val="400"/>
-              </a:spcAft>
-              <a:buSzPct val="100000"/>
-              <a:buChar char="•"/>
-            </a:pPr>
-            <a:r>
-              <a:rPr lang="en-US" sz="1200" dirty="0">
-                <a:solidFill>
-                  <a:schemeClr val="tx1"/>
-                </a:solidFill>
-              </a:rPr>
-              <a:t>1 channel (WhatsApp or Telegram)</a:t>
-            </a:r>
-            <a:endParaRPr lang="en-US" sz="1200" dirty="0"/>
-          </a:p>
-          <a:p>
-            <a:pPr marL="152400" indent="-152400">
-              <a:spcAft>
-                <a:spcPts val="400"/>
-              </a:spcAft>
-              <a:buSzPct val="100000"/>
-              <a:buChar char="•"/>
-            </a:pPr>
-            <a:r>
-              <a:rPr lang="en-US" sz="1200" dirty="0">
-                <a:solidFill>
-                  <a:schemeClr val="tx1"/>
-                </a:solidFill>
-              </a:rPr>
-              <a:t>3 team seats</a:t>
-            </a:r>
-            <a:endParaRPr lang="en-US" sz="1200" dirty="0"/>
-          </a:p>
-          <a:p>
-            <a:pPr marL="152400" indent="-152400">
-              <a:spcAft>
-                <a:spcPts val="400"/>
-              </a:spcAft>
-              <a:buSzPct val="100000"/>
-              <a:buChar char="•"/>
-            </a:pPr>
-            <a:r>
-              <a:rPr lang="en-US" sz="1200" dirty="0">
-                <a:solidFill>
-                  <a:schemeClr val="tx1"/>
-                </a:solidFill>
-              </a:rPr>
-              <a:t>500 customer chats / month</a:t>
-            </a:r>
-            <a:endParaRPr lang="en-US" sz="1200" dirty="0"/>
-          </a:p>
-          <a:p>
-            <a:pPr marL="152400" indent="-152400">
-              <a:spcAft>
-                <a:spcPts val="400"/>
-              </a:spcAft>
-              <a:buSzPct val="100000"/>
-              <a:buChar char="•"/>
-            </a:pPr>
-            <a:r>
-              <a:rPr lang="en-US" sz="1200" dirty="0">
-                <a:solidFill>
-                  <a:schemeClr val="tx1"/>
-                </a:solidFill>
-              </a:rPr>
-              <a:t>50 documents</a:t>
-            </a:r>
-            <a:endParaRPr lang="en-US" sz="1200" dirty="0"/>
-          </a:p>
-          <a:p>
-            <a:pPr marL="152400" indent="-152400">
-              <a:spcAft>
-                <a:spcPts val="400"/>
-              </a:spcAft>
-              <a:buSzPct val="100000"/>
-              <a:buChar char="•"/>
-            </a:pPr>
-            <a:r>
-              <a:rPr lang="en-US" sz="1200" dirty="0">
-                <a:solidFill>
-                  <a:schemeClr val="tx1"/>
-                </a:solidFill>
-              </a:rPr>
-              <a:t>Email support</a:t>
-            </a:r>
-            <a:endParaRPr lang="en-US" sz="1200" dirty="0"/>
-          </a:p>
-        </p:txBody>
-      </p:sp>
-      <p:sp>
-        <p:nvSpPr>
-          <p:cNvPr id="7" name="plan-1"/>
+              <a:t>Questions answered by the bot</a:t>
+            </a:r>
+            <a:endParaRPr lang="en-US" sz="1300" dirty="0"/>
+          </a:p>
+        </p:txBody>
+      </p:sp>
+      <p:sp>
+        <p:nvSpPr>
+          <p:cNvPr id="23" name="kpi-1"/>
           <p:cNvSpPr/>
           <p:nvPr/>
         </p:nvSpPr>
         <p:spPr>
           <a:xfrm>
-            <a:off x="3273552" y="1143000"/>
-            <a:ext cx="2615184" cy="3108960"/>
+            <a:off x="2560320" y="3749040"/>
+            <a:ext cx="1965960" cy="685800"/>
           </a:xfrm>
           <a:prstGeom prst="roundRect">
             <a:avLst>
-              <a:gd name="adj" fmla="val 4196"/>
+              <a:gd name="adj" fmla="val 16000"/>
             </a:avLst>
           </a:prstGeom>
           <a:solidFill>
-            <a:schemeClr val="tx2"/>
+            <a:schemeClr val="accent5"/>
           </a:solidFill>
           <a:ln/>
-          <a:effectLst>
-            <a:outerShdw sx="100000" sy="100000" kx="0" ky="0" algn="bl" rotWithShape="0" blurRad="101600" dist="25400" dir="5400000">
-              <a:srgbClr val="000000">
-                <a:alpha val="18000"/>
-              </a:srgbClr>
-            </a:outerShdw>
-          </a:effectLst>
-        </p:spPr>
-      </p:sp>
-      <p:sp>
-        <p:nvSpPr>
-          <p:cNvPr id="8" name="plan-name-1"/>
-          <p:cNvSpPr txBox="1"/>
-          <p:nvPr/>
-        </p:nvSpPr>
-        <p:spPr>
-          <a:xfrm>
-            <a:off x="3502152" y="1298448"/>
-            <a:ext cx="2194560" cy="320040"/>
-          </a:xfrm>
-          <a:prstGeom prst="rect">
-            <a:avLst/>
-          </a:prstGeom>
-          <a:noFill/>
-          <a:ln/>
-        </p:spPr>
-        <p:txBody>
-          <a:bodyPr wrap="square" lIns="0" tIns="0" rIns="0" bIns="0" rtlCol="0" anchor="t"/>
+        </p:spPr>
+      </p:sp>
+      <p:sp>
+        <p:nvSpPr>
+          <p:cNvPr id="24" name="kpi-t-1"/>
+          <p:cNvSpPr txBox="1"/>
+          <p:nvPr/>
+        </p:nvSpPr>
+        <p:spPr>
+          <a:xfrm>
+            <a:off x="2697480" y="3749040"/>
+            <a:ext cx="1691640" cy="685800"/>
+          </a:xfrm>
+          <a:prstGeom prst="rect">
+            <a:avLst/>
+          </a:prstGeom>
+          <a:noFill/>
+          <a:ln/>
+        </p:spPr>
+        <p:txBody>
+          <a:bodyPr wrap="square" lIns="0" tIns="0" rIns="0" bIns="0" rtlCol="0" anchor="ctr"/>
           <a:lstStyle/>
           <a:p>
             <a:pPr indent="0" marL="0">
               <a:buNone/>
             </a:pPr>
             <a:r>
-              <a:rPr lang="en-US" sz="1600" b="1" dirty="0">
-                <a:solidFill>
-                  <a:schemeClr val="accent5"/>
-                </a:solidFill>
-              </a:rPr>
-              <a:t>Growth</a:t>
-            </a:r>
-            <a:endParaRPr lang="en-US" sz="1600" dirty="0"/>
-          </a:p>
-        </p:txBody>
-      </p:sp>
-      <p:sp>
-        <p:nvSpPr>
-          <p:cNvPr id="9" name="plan-price-1"/>
-          <p:cNvSpPr txBox="1"/>
-          <p:nvPr/>
-        </p:nvSpPr>
-        <p:spPr>
-          <a:xfrm>
-            <a:off x="3502152" y="1645920"/>
-            <a:ext cx="2194560" cy="548640"/>
-          </a:xfrm>
-          <a:prstGeom prst="rect">
-            <a:avLst/>
-          </a:prstGeom>
-          <a:noFill/>
-          <a:ln/>
-        </p:spPr>
-        <p:txBody>
-          <a:bodyPr wrap="square" lIns="0" tIns="0" rIns="0" bIns="0" rtlCol="0" anchor="ctr"/>
-          <a:lstStyle/>
-          <a:p>
-            <a:pPr indent="0" marL="0">
-              <a:buNone/>
-            </a:pPr>
-            <a:r>
-              <a:rPr lang="en-US" sz="3000" b="1" dirty="0">
-                <a:solidFill>
-                  <a:schemeClr val="bg1"/>
-                </a:solidFill>
-              </a:rPr>
-              <a:t>₹12,999</a:t>
-            </a:r>
-            <a:pPr indent="0" marL="0">
-              <a:buNone/>
-            </a:pPr>
-            <a:r>
-              <a:rPr lang="en-US" sz="1200" dirty="0">
-                <a:solidFill>
-                  <a:srgbClr val="E7E5E4"/>
-                </a:solidFill>
-              </a:rPr>
-              <a:t> /month</a:t>
-            </a:r>
-            <a:endParaRPr lang="en-US" sz="1400" dirty="0"/>
-          </a:p>
-        </p:txBody>
-      </p:sp>
-      <p:sp>
-        <p:nvSpPr>
-          <p:cNvPr id="10" name="plan-feats-1"/>
-          <p:cNvSpPr txBox="1"/>
-          <p:nvPr/>
-        </p:nvSpPr>
-        <p:spPr>
-          <a:xfrm>
-            <a:off x="3502152" y="2331720"/>
-            <a:ext cx="2240280" cy="1828800"/>
-          </a:xfrm>
-          <a:prstGeom prst="rect">
-            <a:avLst/>
-          </a:prstGeom>
-          <a:noFill/>
-          <a:ln/>
-        </p:spPr>
-        <p:txBody>
-          <a:bodyPr wrap="square" lIns="0" tIns="0" rIns="0" bIns="0" rtlCol="0" anchor="t"/>
-          <a:lstStyle/>
-          <a:p>
-            <a:pPr marL="152400" indent="-152400">
-              <a:spcAft>
-                <a:spcPts val="400"/>
-              </a:spcAft>
-              <a:buSzPct val="100000"/>
-              <a:buChar char="•"/>
-            </a:pPr>
-            <a:r>
-              <a:rPr lang="en-US" sz="1200" dirty="0">
-                <a:solidFill>
-                  <a:schemeClr val="bg1"/>
-                </a:solidFill>
-              </a:rPr>
-              <a:t>WhatsApp + Telegram + web</a:t>
-            </a:r>
-            <a:endParaRPr lang="en-US" sz="1200" dirty="0"/>
-          </a:p>
-          <a:p>
-            <a:pPr marL="152400" indent="-152400">
-              <a:spcAft>
-                <a:spcPts val="400"/>
-              </a:spcAft>
-              <a:buSzPct val="100000"/>
-              <a:buChar char="•"/>
-            </a:pPr>
-            <a:r>
-              <a:rPr lang="en-US" sz="1200" dirty="0">
-                <a:solidFill>
-                  <a:schemeClr val="bg1"/>
-                </a:solidFill>
-              </a:rPr>
-              <a:t>10 team seats</a:t>
-            </a:r>
-            <a:endParaRPr lang="en-US" sz="1200" dirty="0"/>
-          </a:p>
-          <a:p>
-            <a:pPr marL="152400" indent="-152400">
-              <a:spcAft>
-                <a:spcPts val="400"/>
-              </a:spcAft>
-              <a:buSzPct val="100000"/>
-              <a:buChar char="•"/>
-            </a:pPr>
-            <a:r>
-              <a:rPr lang="en-US" sz="1200" dirty="0">
-                <a:solidFill>
-                  <a:schemeClr val="bg1"/>
-                </a:solidFill>
-              </a:rPr>
-              <a:t>3,000 customer chats / month</a:t>
-            </a:r>
-            <a:endParaRPr lang="en-US" sz="1200" dirty="0"/>
-          </a:p>
-          <a:p>
-            <a:pPr marL="152400" indent="-152400">
-              <a:spcAft>
-                <a:spcPts val="400"/>
-              </a:spcAft>
-              <a:buSzPct val="100000"/>
-              <a:buChar char="•"/>
-            </a:pPr>
-            <a:r>
-              <a:rPr lang="en-US" sz="1200" dirty="0">
-                <a:solidFill>
-                  <a:schemeClr val="bg1"/>
-                </a:solidFill>
-              </a:rPr>
-              <a:t>Industry pack + custom agents</a:t>
-            </a:r>
-            <a:endParaRPr lang="en-US" sz="1200" dirty="0"/>
-          </a:p>
-          <a:p>
-            <a:pPr marL="152400" indent="-152400">
-              <a:spcAft>
-                <a:spcPts val="400"/>
-              </a:spcAft>
-              <a:buSzPct val="100000"/>
-              <a:buChar char="•"/>
-            </a:pPr>
-            <a:r>
-              <a:rPr lang="en-US" sz="1200" dirty="0">
-                <a:solidFill>
-                  <a:schemeClr val="bg1"/>
-                </a:solidFill>
-              </a:rPr>
-              <a:t>Team assistant for staff</a:t>
-            </a:r>
-            <a:endParaRPr lang="en-US" sz="1200" dirty="0"/>
-          </a:p>
-        </p:txBody>
-      </p:sp>
-      <p:sp>
-        <p:nvSpPr>
-          <p:cNvPr id="11" name="plan-2"/>
+              <a:rPr lang="en-US" sz="1300" b="1" dirty="0">
+                <a:solidFill>
+                  <a:schemeClr val="tx1"/>
+                </a:solidFill>
+              </a:rPr>
+              <a:t>First-reply time</a:t>
+            </a:r>
+            <a:endParaRPr lang="en-US" sz="1300" dirty="0"/>
+          </a:p>
+        </p:txBody>
+      </p:sp>
+      <p:sp>
+        <p:nvSpPr>
+          <p:cNvPr id="25" name="kpi-2"/>
           <p:cNvSpPr/>
           <p:nvPr/>
         </p:nvSpPr>
         <p:spPr>
           <a:xfrm>
-            <a:off x="6089904" y="1143000"/>
-            <a:ext cx="2615184" cy="3108960"/>
+            <a:off x="4663440" y="3749040"/>
+            <a:ext cx="1965960" cy="685800"/>
           </a:xfrm>
           <a:prstGeom prst="roundRect">
             <a:avLst>
-              <a:gd name="adj" fmla="val 4196"/>
+              <a:gd name="adj" fmla="val 16000"/>
             </a:avLst>
           </a:prstGeom>
           <a:solidFill>
-            <a:schemeClr val="bg2"/>
+            <a:schemeClr val="accent5"/>
           </a:solidFill>
           <a:ln/>
         </p:spPr>
       </p:sp>
       <p:sp>
         <p:nvSpPr>
-          <p:cNvPr id="12" name="plan-name-2"/>
-          <p:cNvSpPr txBox="1"/>
-          <p:nvPr/>
-        </p:nvSpPr>
-        <p:spPr>
-          <a:xfrm>
-            <a:off x="6318504" y="1298448"/>
-            <a:ext cx="2194560" cy="320040"/>
-          </a:xfrm>
-          <a:prstGeom prst="rect">
-            <a:avLst/>
-          </a:prstGeom>
-          <a:noFill/>
-          <a:ln/>
-        </p:spPr>
-        <p:txBody>
-          <a:bodyPr wrap="square" lIns="0" tIns="0" rIns="0" bIns="0" rtlCol="0" anchor="t"/>
+          <p:cNvPr id="26" name="kpi-t-2"/>
+          <p:cNvSpPr txBox="1"/>
+          <p:nvPr/>
+        </p:nvSpPr>
+        <p:spPr>
+          <a:xfrm>
+            <a:off x="4800600" y="3749040"/>
+            <a:ext cx="1691640" cy="685800"/>
+          </a:xfrm>
+          <a:prstGeom prst="rect">
+            <a:avLst/>
+          </a:prstGeom>
+          <a:noFill/>
+          <a:ln/>
+        </p:spPr>
+        <p:txBody>
+          <a:bodyPr wrap="square" lIns="0" tIns="0" rIns="0" bIns="0" rtlCol="0" anchor="ctr"/>
           <a:lstStyle/>
           <a:p>
             <a:pPr indent="0" marL="0">
               <a:buNone/>
             </a:pPr>
             <a:r>
-              <a:rPr lang="en-US" sz="1600" b="1" dirty="0">
+              <a:rPr lang="en-US" sz="1300" b="1" dirty="0">
                 <a:solidFill>
                   <a:schemeClr val="tx1"/>
                 </a:solidFill>
               </a:rPr>
-              <a:t>Enterprise</a:t>
-            </a:r>
-            <a:endParaRPr lang="en-US" sz="1600" dirty="0"/>
-          </a:p>
-        </p:txBody>
-      </p:sp>
-      <p:sp>
-        <p:nvSpPr>
-          <p:cNvPr id="13" name="plan-price-2"/>
-          <p:cNvSpPr txBox="1"/>
-          <p:nvPr/>
-        </p:nvSpPr>
-        <p:spPr>
-          <a:xfrm>
-            <a:off x="6318504" y="1645920"/>
-            <a:ext cx="2194560" cy="548640"/>
+              <a:t>Chats handed to your team</a:t>
+            </a:r>
+            <a:endParaRPr lang="en-US" sz="1300" dirty="0"/>
+          </a:p>
+        </p:txBody>
+      </p:sp>
+      <p:sp>
+        <p:nvSpPr>
+          <p:cNvPr id="27" name="kpi-3"/>
+          <p:cNvSpPr/>
+          <p:nvPr/>
+        </p:nvSpPr>
+        <p:spPr>
+          <a:xfrm>
+            <a:off x="6766560" y="3749040"/>
+            <a:ext cx="1965960" cy="685800"/>
+          </a:xfrm>
+          <a:prstGeom prst="roundRect">
+            <a:avLst>
+              <a:gd name="adj" fmla="val 16000"/>
+            </a:avLst>
+          </a:prstGeom>
+          <a:solidFill>
+            <a:schemeClr val="accent5"/>
+          </a:solidFill>
+          <a:ln/>
+        </p:spPr>
+      </p:sp>
+      <p:sp>
+        <p:nvSpPr>
+          <p:cNvPr id="28" name="kpi-t-3"/>
+          <p:cNvSpPr txBox="1"/>
+          <p:nvPr/>
+        </p:nvSpPr>
+        <p:spPr>
+          <a:xfrm>
+            <a:off x="6903720" y="3749040"/>
+            <a:ext cx="1691640" cy="685800"/>
           </a:xfrm>
           <a:prstGeom prst="rect">
             <a:avLst/>
@@ -4901,165 +4907,14 @@
               <a:buNone/>
             </a:pPr>
             <a:r>
-              <a:rPr lang="en-US" sz="3000" b="1" dirty="0">
+              <a:rPr lang="en-US" sz="1300" b="1" dirty="0">
                 <a:solidFill>
                   <a:schemeClr val="tx1"/>
                 </a:solidFill>
               </a:rPr>
-              <a:t>Custom</a:t>
-            </a:r>
-            <a:pPr indent="0" marL="0">
-              <a:buNone/>
-            </a:pPr>
-            <a:endParaRPr lang="en-US" sz="1400" dirty="0"/>
-          </a:p>
-        </p:txBody>
-      </p:sp>
-      <p:sp>
-        <p:nvSpPr>
-          <p:cNvPr id="14" name="plan-feats-2"/>
-          <p:cNvSpPr txBox="1"/>
-          <p:nvPr/>
-        </p:nvSpPr>
-        <p:spPr>
-          <a:xfrm>
-            <a:off x="6318504" y="2331720"/>
-            <a:ext cx="2240280" cy="1828800"/>
-          </a:xfrm>
-          <a:prstGeom prst="rect">
-            <a:avLst/>
-          </a:prstGeom>
-          <a:noFill/>
-          <a:ln/>
-        </p:spPr>
-        <p:txBody>
-          <a:bodyPr wrap="square" lIns="0" tIns="0" rIns="0" bIns="0" rtlCol="0" anchor="t"/>
-          <a:lstStyle/>
-          <a:p>
-            <a:pPr marL="152400" indent="-152400">
-              <a:spcAft>
-                <a:spcPts val="400"/>
-              </a:spcAft>
-              <a:buSzPct val="100000"/>
-              <a:buChar char="•"/>
-            </a:pPr>
-            <a:r>
-              <a:rPr lang="en-US" sz="1200" dirty="0">
-                <a:solidFill>
-                  <a:schemeClr val="tx1"/>
-                </a:solidFill>
-              </a:rPr>
-              <a:t>Unlimited seats and chats</a:t>
-            </a:r>
-            <a:endParaRPr lang="en-US" sz="1200" dirty="0"/>
-          </a:p>
-          <a:p>
-            <a:pPr marL="152400" indent="-152400">
-              <a:spcAft>
-                <a:spcPts val="400"/>
-              </a:spcAft>
-              <a:buSzPct val="100000"/>
-              <a:buChar char="•"/>
-            </a:pPr>
-            <a:r>
-              <a:rPr lang="en-US" sz="1200" dirty="0">
-                <a:solidFill>
-                  <a:schemeClr val="tx1"/>
-                </a:solidFill>
-              </a:rPr>
-              <a:t>Your own cloud or server</a:t>
-            </a:r>
-            <a:endParaRPr lang="en-US" sz="1200" dirty="0"/>
-          </a:p>
-          <a:p>
-            <a:pPr marL="152400" indent="-152400">
-              <a:spcAft>
-                <a:spcPts val="400"/>
-              </a:spcAft>
-              <a:buSzPct val="100000"/>
-              <a:buChar char="•"/>
-            </a:pPr>
-            <a:r>
-              <a:rPr lang="en-US" sz="1200" dirty="0">
-                <a:solidFill>
-                  <a:schemeClr val="tx1"/>
-                </a:solidFill>
-              </a:rPr>
-              <a:t>Your own AI account and keys</a:t>
-            </a:r>
-            <a:endParaRPr lang="en-US" sz="1200" dirty="0"/>
-          </a:p>
-          <a:p>
-            <a:pPr marL="152400" indent="-152400">
-              <a:spcAft>
-                <a:spcPts val="400"/>
-              </a:spcAft>
-              <a:buSzPct val="100000"/>
-              <a:buChar char="•"/>
-            </a:pPr>
-            <a:r>
-              <a:rPr lang="en-US" sz="1200" dirty="0">
-                <a:solidFill>
-                  <a:schemeClr val="tx1"/>
-                </a:solidFill>
-              </a:rPr>
-              <a:t>Custom integrations</a:t>
-            </a:r>
-            <a:endParaRPr lang="en-US" sz="1200" dirty="0"/>
-          </a:p>
-          <a:p>
-            <a:pPr marL="152400" indent="-152400">
-              <a:spcAft>
-                <a:spcPts val="400"/>
-              </a:spcAft>
-              <a:buSzPct val="100000"/>
-              <a:buChar char="•"/>
-            </a:pPr>
-            <a:r>
-              <a:rPr lang="en-US" sz="1200" dirty="0">
-                <a:solidFill>
-                  <a:schemeClr val="tx1"/>
-                </a:solidFill>
-              </a:rPr>
-              <a:t>Priority support</a:t>
-            </a:r>
-            <a:endParaRPr lang="en-US" sz="1200" dirty="0"/>
-          </a:p>
-        </p:txBody>
-      </p:sp>
-      <p:sp>
-        <p:nvSpPr>
-          <p:cNvPr id="15" name="pricing-note"/>
-          <p:cNvSpPr txBox="1"/>
-          <p:nvPr/>
-        </p:nvSpPr>
-        <p:spPr>
-          <a:xfrm>
-            <a:off x="457200" y="4343400"/>
-            <a:ext cx="8229600" cy="411480"/>
-          </a:xfrm>
-          <a:prstGeom prst="rect">
-            <a:avLst/>
-          </a:prstGeom>
-          <a:noFill/>
-          <a:ln/>
-        </p:spPr>
-        <p:txBody>
-          <a:bodyPr wrap="square" lIns="0" tIns="0" rIns="0" bIns="0" rtlCol="0" anchor="t"/>
-          <a:lstStyle/>
-          <a:p>
-            <a:pPr indent="0" marL="0">
-              <a:buNone/>
-            </a:pPr>
-            <a:r>
-              <a:rPr lang="en-US" sz="1000" dirty="0">
-                <a:solidFill>
-                  <a:schemeClr val="accent4"/>
-                </a:solidFill>
-              </a:rPr>
-              <a:t>One-time setup from ₹25,000 per pack (knowledge base, configuration, testing, training). WhatsApp conversation charges from Meta are billed at cost. Prices exclude GST and are indicative — the final quote follows the discovery call.</a:t>
-            </a:r>
-            <a:endParaRPr lang="en-US" sz="1000" dirty="0"/>
+              <a:t>Customer satisfaction</a:t>
+            </a:r>
+            <a:endParaRPr lang="en-US" sz="1300" dirty="0"/>
           </a:p>
         </p:txBody>
       </p:sp>
@@ -5143,6 +4998,800 @@
         </p:nvSpPr>
         <p:spPr>
           <a:xfrm>
+            <a:off x="457200" y="274320"/>
+            <a:ext cx="8229600" cy="685800"/>
+          </a:xfrm>
+          <a:prstGeom prst="rect">
+            <a:avLst/>
+          </a:prstGeom>
+          <a:noFill/>
+          <a:ln/>
+        </p:spPr>
+        <p:txBody>
+          <a:bodyPr wrap="square" lIns="0" tIns="0" rIns="0" bIns="0" rtlCol="0" anchor="ctr"/>
+          <a:lstStyle/>
+          <a:p>
+            <a:pPr algn="l" indent="0" marL="0">
+              <a:buNone/>
+            </a:pPr>
+            <a:r>
+              <a:rPr lang="en-US" sz="3200" b="1" dirty="0">
+                <a:solidFill>
+                  <a:schemeClr val="tx1"/>
+                </a:solidFill>
+              </a:rPr>
+              <a:t>Simple, predictable pricing</a:t>
+            </a:r>
+            <a:endParaRPr lang="en-US" sz="3200" dirty="0"/>
+          </a:p>
+        </p:txBody>
+      </p:sp>
+      <p:sp>
+        <p:nvSpPr>
+          <p:cNvPr id="3" name="plan-0"/>
+          <p:cNvSpPr/>
+          <p:nvPr/>
+        </p:nvSpPr>
+        <p:spPr>
+          <a:xfrm>
+            <a:off x="457200" y="1143000"/>
+            <a:ext cx="2615184" cy="3108960"/>
+          </a:xfrm>
+          <a:prstGeom prst="roundRect">
+            <a:avLst>
+              <a:gd name="adj" fmla="val 4196"/>
+            </a:avLst>
+          </a:prstGeom>
+          <a:solidFill>
+            <a:schemeClr val="bg2"/>
+          </a:solidFill>
+          <a:ln/>
+        </p:spPr>
+      </p:sp>
+      <p:sp>
+        <p:nvSpPr>
+          <p:cNvPr id="4" name="plan-name-0"/>
+          <p:cNvSpPr txBox="1"/>
+          <p:nvPr/>
+        </p:nvSpPr>
+        <p:spPr>
+          <a:xfrm>
+            <a:off x="685800" y="1298448"/>
+            <a:ext cx="2194560" cy="320040"/>
+          </a:xfrm>
+          <a:prstGeom prst="rect">
+            <a:avLst/>
+          </a:prstGeom>
+          <a:noFill/>
+          <a:ln/>
+        </p:spPr>
+        <p:txBody>
+          <a:bodyPr wrap="square" lIns="0" tIns="0" rIns="0" bIns="0" rtlCol="0" anchor="t"/>
+          <a:lstStyle/>
+          <a:p>
+            <a:pPr indent="0" marL="0">
+              <a:buNone/>
+            </a:pPr>
+            <a:r>
+              <a:rPr lang="en-US" sz="1600" b="1" dirty="0">
+                <a:solidFill>
+                  <a:schemeClr val="tx1"/>
+                </a:solidFill>
+              </a:rPr>
+              <a:t>Starter</a:t>
+            </a:r>
+            <a:endParaRPr lang="en-US" sz="1600" dirty="0"/>
+          </a:p>
+        </p:txBody>
+      </p:sp>
+      <p:sp>
+        <p:nvSpPr>
+          <p:cNvPr id="5" name="plan-price-0"/>
+          <p:cNvSpPr txBox="1"/>
+          <p:nvPr/>
+        </p:nvSpPr>
+        <p:spPr>
+          <a:xfrm>
+            <a:off x="685800" y="1645920"/>
+            <a:ext cx="2194560" cy="548640"/>
+          </a:xfrm>
+          <a:prstGeom prst="rect">
+            <a:avLst/>
+          </a:prstGeom>
+          <a:noFill/>
+          <a:ln/>
+        </p:spPr>
+        <p:txBody>
+          <a:bodyPr wrap="square" lIns="0" tIns="0" rIns="0" bIns="0" rtlCol="0" anchor="ctr"/>
+          <a:lstStyle/>
+          <a:p>
+            <a:pPr indent="0" marL="0">
+              <a:buNone/>
+            </a:pPr>
+            <a:r>
+              <a:rPr lang="en-US" sz="3000" b="1" dirty="0">
+                <a:solidFill>
+                  <a:schemeClr val="tx1"/>
+                </a:solidFill>
+              </a:rPr>
+              <a:t>₹4,999</a:t>
+            </a:r>
+            <a:pPr indent="0" marL="0">
+              <a:buNone/>
+            </a:pPr>
+            <a:r>
+              <a:rPr lang="en-US" sz="1200" dirty="0">
+                <a:solidFill>
+                  <a:schemeClr val="accent4"/>
+                </a:solidFill>
+              </a:rPr>
+              <a:t> /month</a:t>
+            </a:r>
+            <a:endParaRPr lang="en-US" sz="1400" dirty="0"/>
+          </a:p>
+        </p:txBody>
+      </p:sp>
+      <p:sp>
+        <p:nvSpPr>
+          <p:cNvPr id="6" name="plan-feats-0"/>
+          <p:cNvSpPr txBox="1"/>
+          <p:nvPr/>
+        </p:nvSpPr>
+        <p:spPr>
+          <a:xfrm>
+            <a:off x="685800" y="2331720"/>
+            <a:ext cx="2240280" cy="1828800"/>
+          </a:xfrm>
+          <a:prstGeom prst="rect">
+            <a:avLst/>
+          </a:prstGeom>
+          <a:noFill/>
+          <a:ln/>
+        </p:spPr>
+        <p:txBody>
+          <a:bodyPr wrap="square" lIns="0" tIns="0" rIns="0" bIns="0" rtlCol="0" anchor="t"/>
+          <a:lstStyle/>
+          <a:p>
+            <a:pPr marL="152400" indent="-152400">
+              <a:spcAft>
+                <a:spcPts val="400"/>
+              </a:spcAft>
+              <a:buSzPct val="100000"/>
+              <a:buChar char="•"/>
+            </a:pPr>
+            <a:r>
+              <a:rPr lang="en-US" sz="1200" dirty="0">
+                <a:solidFill>
+                  <a:schemeClr val="tx1"/>
+                </a:solidFill>
+              </a:rPr>
+              <a:t>1 channel (WhatsApp or Telegram)</a:t>
+            </a:r>
+            <a:endParaRPr lang="en-US" sz="1200" dirty="0"/>
+          </a:p>
+          <a:p>
+            <a:pPr marL="152400" indent="-152400">
+              <a:spcAft>
+                <a:spcPts val="400"/>
+              </a:spcAft>
+              <a:buSzPct val="100000"/>
+              <a:buChar char="•"/>
+            </a:pPr>
+            <a:r>
+              <a:rPr lang="en-US" sz="1200" dirty="0">
+                <a:solidFill>
+                  <a:schemeClr val="tx1"/>
+                </a:solidFill>
+              </a:rPr>
+              <a:t>3 team seats</a:t>
+            </a:r>
+            <a:endParaRPr lang="en-US" sz="1200" dirty="0"/>
+          </a:p>
+          <a:p>
+            <a:pPr marL="152400" indent="-152400">
+              <a:spcAft>
+                <a:spcPts val="400"/>
+              </a:spcAft>
+              <a:buSzPct val="100000"/>
+              <a:buChar char="•"/>
+            </a:pPr>
+            <a:r>
+              <a:rPr lang="en-US" sz="1200" dirty="0">
+                <a:solidFill>
+                  <a:schemeClr val="tx1"/>
+                </a:solidFill>
+              </a:rPr>
+              <a:t>500 customer chats / month</a:t>
+            </a:r>
+            <a:endParaRPr lang="en-US" sz="1200" dirty="0"/>
+          </a:p>
+          <a:p>
+            <a:pPr marL="152400" indent="-152400">
+              <a:spcAft>
+                <a:spcPts val="400"/>
+              </a:spcAft>
+              <a:buSzPct val="100000"/>
+              <a:buChar char="•"/>
+            </a:pPr>
+            <a:r>
+              <a:rPr lang="en-US" sz="1200" dirty="0">
+                <a:solidFill>
+                  <a:schemeClr val="tx1"/>
+                </a:solidFill>
+              </a:rPr>
+              <a:t>50 documents</a:t>
+            </a:r>
+            <a:endParaRPr lang="en-US" sz="1200" dirty="0"/>
+          </a:p>
+          <a:p>
+            <a:pPr marL="152400" indent="-152400">
+              <a:spcAft>
+                <a:spcPts val="400"/>
+              </a:spcAft>
+              <a:buSzPct val="100000"/>
+              <a:buChar char="•"/>
+            </a:pPr>
+            <a:r>
+              <a:rPr lang="en-US" sz="1200" dirty="0">
+                <a:solidFill>
+                  <a:schemeClr val="tx1"/>
+                </a:solidFill>
+              </a:rPr>
+              <a:t>Email support</a:t>
+            </a:r>
+            <a:endParaRPr lang="en-US" sz="1200" dirty="0"/>
+          </a:p>
+        </p:txBody>
+      </p:sp>
+      <p:sp>
+        <p:nvSpPr>
+          <p:cNvPr id="7" name="plan-1"/>
+          <p:cNvSpPr/>
+          <p:nvPr/>
+        </p:nvSpPr>
+        <p:spPr>
+          <a:xfrm>
+            <a:off x="3273552" y="1143000"/>
+            <a:ext cx="2615184" cy="3108960"/>
+          </a:xfrm>
+          <a:prstGeom prst="roundRect">
+            <a:avLst>
+              <a:gd name="adj" fmla="val 4196"/>
+            </a:avLst>
+          </a:prstGeom>
+          <a:solidFill>
+            <a:schemeClr val="tx2"/>
+          </a:solidFill>
+          <a:ln/>
+          <a:effectLst>
+            <a:outerShdw sx="100000" sy="100000" kx="0" ky="0" algn="bl" rotWithShape="0" blurRad="101600" dist="25400" dir="5400000">
+              <a:srgbClr val="000000">
+                <a:alpha val="18000"/>
+              </a:srgbClr>
+            </a:outerShdw>
+          </a:effectLst>
+        </p:spPr>
+      </p:sp>
+      <p:sp>
+        <p:nvSpPr>
+          <p:cNvPr id="8" name="plan-name-1"/>
+          <p:cNvSpPr txBox="1"/>
+          <p:nvPr/>
+        </p:nvSpPr>
+        <p:spPr>
+          <a:xfrm>
+            <a:off x="3502152" y="1298448"/>
+            <a:ext cx="2194560" cy="320040"/>
+          </a:xfrm>
+          <a:prstGeom prst="rect">
+            <a:avLst/>
+          </a:prstGeom>
+          <a:noFill/>
+          <a:ln/>
+        </p:spPr>
+        <p:txBody>
+          <a:bodyPr wrap="square" lIns="0" tIns="0" rIns="0" bIns="0" rtlCol="0" anchor="t"/>
+          <a:lstStyle/>
+          <a:p>
+            <a:pPr indent="0" marL="0">
+              <a:buNone/>
+            </a:pPr>
+            <a:r>
+              <a:rPr lang="en-US" sz="1600" b="1" dirty="0">
+                <a:solidFill>
+                  <a:schemeClr val="accent5"/>
+                </a:solidFill>
+              </a:rPr>
+              <a:t>Growth</a:t>
+            </a:r>
+            <a:endParaRPr lang="en-US" sz="1600" dirty="0"/>
+          </a:p>
+        </p:txBody>
+      </p:sp>
+      <p:sp>
+        <p:nvSpPr>
+          <p:cNvPr id="9" name="plan-price-1"/>
+          <p:cNvSpPr txBox="1"/>
+          <p:nvPr/>
+        </p:nvSpPr>
+        <p:spPr>
+          <a:xfrm>
+            <a:off x="3502152" y="1645920"/>
+            <a:ext cx="2194560" cy="548640"/>
+          </a:xfrm>
+          <a:prstGeom prst="rect">
+            <a:avLst/>
+          </a:prstGeom>
+          <a:noFill/>
+          <a:ln/>
+        </p:spPr>
+        <p:txBody>
+          <a:bodyPr wrap="square" lIns="0" tIns="0" rIns="0" bIns="0" rtlCol="0" anchor="ctr"/>
+          <a:lstStyle/>
+          <a:p>
+            <a:pPr indent="0" marL="0">
+              <a:buNone/>
+            </a:pPr>
+            <a:r>
+              <a:rPr lang="en-US" sz="3000" b="1" dirty="0">
+                <a:solidFill>
+                  <a:schemeClr val="bg1"/>
+                </a:solidFill>
+              </a:rPr>
+              <a:t>₹12,999</a:t>
+            </a:r>
+            <a:pPr indent="0" marL="0">
+              <a:buNone/>
+            </a:pPr>
+            <a:r>
+              <a:rPr lang="en-US" sz="1200" dirty="0">
+                <a:solidFill>
+                  <a:srgbClr val="E7E5E4"/>
+                </a:solidFill>
+              </a:rPr>
+              <a:t> /month</a:t>
+            </a:r>
+            <a:endParaRPr lang="en-US" sz="1400" dirty="0"/>
+          </a:p>
+        </p:txBody>
+      </p:sp>
+      <p:sp>
+        <p:nvSpPr>
+          <p:cNvPr id="10" name="plan-feats-1"/>
+          <p:cNvSpPr txBox="1"/>
+          <p:nvPr/>
+        </p:nvSpPr>
+        <p:spPr>
+          <a:xfrm>
+            <a:off x="3502152" y="2331720"/>
+            <a:ext cx="2240280" cy="1828800"/>
+          </a:xfrm>
+          <a:prstGeom prst="rect">
+            <a:avLst/>
+          </a:prstGeom>
+          <a:noFill/>
+          <a:ln/>
+        </p:spPr>
+        <p:txBody>
+          <a:bodyPr wrap="square" lIns="0" tIns="0" rIns="0" bIns="0" rtlCol="0" anchor="t"/>
+          <a:lstStyle/>
+          <a:p>
+            <a:pPr marL="152400" indent="-152400">
+              <a:spcAft>
+                <a:spcPts val="400"/>
+              </a:spcAft>
+              <a:buSzPct val="100000"/>
+              <a:buChar char="•"/>
+            </a:pPr>
+            <a:r>
+              <a:rPr lang="en-US" sz="1200" dirty="0">
+                <a:solidFill>
+                  <a:schemeClr val="bg1"/>
+                </a:solidFill>
+              </a:rPr>
+              <a:t>WhatsApp + Telegram + web</a:t>
+            </a:r>
+            <a:endParaRPr lang="en-US" sz="1200" dirty="0"/>
+          </a:p>
+          <a:p>
+            <a:pPr marL="152400" indent="-152400">
+              <a:spcAft>
+                <a:spcPts val="400"/>
+              </a:spcAft>
+              <a:buSzPct val="100000"/>
+              <a:buChar char="•"/>
+            </a:pPr>
+            <a:r>
+              <a:rPr lang="en-US" sz="1200" dirty="0">
+                <a:solidFill>
+                  <a:schemeClr val="bg1"/>
+                </a:solidFill>
+              </a:rPr>
+              <a:t>10 team seats</a:t>
+            </a:r>
+            <a:endParaRPr lang="en-US" sz="1200" dirty="0"/>
+          </a:p>
+          <a:p>
+            <a:pPr marL="152400" indent="-152400">
+              <a:spcAft>
+                <a:spcPts val="400"/>
+              </a:spcAft>
+              <a:buSzPct val="100000"/>
+              <a:buChar char="•"/>
+            </a:pPr>
+            <a:r>
+              <a:rPr lang="en-US" sz="1200" dirty="0">
+                <a:solidFill>
+                  <a:schemeClr val="bg1"/>
+                </a:solidFill>
+              </a:rPr>
+              <a:t>3,000 customer chats / month</a:t>
+            </a:r>
+            <a:endParaRPr lang="en-US" sz="1200" dirty="0"/>
+          </a:p>
+          <a:p>
+            <a:pPr marL="152400" indent="-152400">
+              <a:spcAft>
+                <a:spcPts val="400"/>
+              </a:spcAft>
+              <a:buSzPct val="100000"/>
+              <a:buChar char="•"/>
+            </a:pPr>
+            <a:r>
+              <a:rPr lang="en-US" sz="1200" dirty="0">
+                <a:solidFill>
+                  <a:schemeClr val="bg1"/>
+                </a:solidFill>
+              </a:rPr>
+              <a:t>Industry pack + custom agents</a:t>
+            </a:r>
+            <a:endParaRPr lang="en-US" sz="1200" dirty="0"/>
+          </a:p>
+          <a:p>
+            <a:pPr marL="152400" indent="-152400">
+              <a:spcAft>
+                <a:spcPts val="400"/>
+              </a:spcAft>
+              <a:buSzPct val="100000"/>
+              <a:buChar char="•"/>
+            </a:pPr>
+            <a:r>
+              <a:rPr lang="en-US" sz="1200" dirty="0">
+                <a:solidFill>
+                  <a:schemeClr val="bg1"/>
+                </a:solidFill>
+              </a:rPr>
+              <a:t>Team assistant for staff</a:t>
+            </a:r>
+            <a:endParaRPr lang="en-US" sz="1200" dirty="0"/>
+          </a:p>
+        </p:txBody>
+      </p:sp>
+      <p:sp>
+        <p:nvSpPr>
+          <p:cNvPr id="11" name="plan-2"/>
+          <p:cNvSpPr/>
+          <p:nvPr/>
+        </p:nvSpPr>
+        <p:spPr>
+          <a:xfrm>
+            <a:off x="6089904" y="1143000"/>
+            <a:ext cx="2615184" cy="3108960"/>
+          </a:xfrm>
+          <a:prstGeom prst="roundRect">
+            <a:avLst>
+              <a:gd name="adj" fmla="val 4196"/>
+            </a:avLst>
+          </a:prstGeom>
+          <a:solidFill>
+            <a:schemeClr val="bg2"/>
+          </a:solidFill>
+          <a:ln/>
+        </p:spPr>
+      </p:sp>
+      <p:sp>
+        <p:nvSpPr>
+          <p:cNvPr id="12" name="plan-name-2"/>
+          <p:cNvSpPr txBox="1"/>
+          <p:nvPr/>
+        </p:nvSpPr>
+        <p:spPr>
+          <a:xfrm>
+            <a:off x="6318504" y="1298448"/>
+            <a:ext cx="2194560" cy="320040"/>
+          </a:xfrm>
+          <a:prstGeom prst="rect">
+            <a:avLst/>
+          </a:prstGeom>
+          <a:noFill/>
+          <a:ln/>
+        </p:spPr>
+        <p:txBody>
+          <a:bodyPr wrap="square" lIns="0" tIns="0" rIns="0" bIns="0" rtlCol="0" anchor="t"/>
+          <a:lstStyle/>
+          <a:p>
+            <a:pPr indent="0" marL="0">
+              <a:buNone/>
+            </a:pPr>
+            <a:r>
+              <a:rPr lang="en-US" sz="1600" b="1" dirty="0">
+                <a:solidFill>
+                  <a:schemeClr val="tx1"/>
+                </a:solidFill>
+              </a:rPr>
+              <a:t>Enterprise</a:t>
+            </a:r>
+            <a:endParaRPr lang="en-US" sz="1600" dirty="0"/>
+          </a:p>
+        </p:txBody>
+      </p:sp>
+      <p:sp>
+        <p:nvSpPr>
+          <p:cNvPr id="13" name="plan-price-2"/>
+          <p:cNvSpPr txBox="1"/>
+          <p:nvPr/>
+        </p:nvSpPr>
+        <p:spPr>
+          <a:xfrm>
+            <a:off x="6318504" y="1645920"/>
+            <a:ext cx="2194560" cy="548640"/>
+          </a:xfrm>
+          <a:prstGeom prst="rect">
+            <a:avLst/>
+          </a:prstGeom>
+          <a:noFill/>
+          <a:ln/>
+        </p:spPr>
+        <p:txBody>
+          <a:bodyPr wrap="square" lIns="0" tIns="0" rIns="0" bIns="0" rtlCol="0" anchor="ctr"/>
+          <a:lstStyle/>
+          <a:p>
+            <a:pPr indent="0" marL="0">
+              <a:buNone/>
+            </a:pPr>
+            <a:r>
+              <a:rPr lang="en-US" sz="3000" b="1" dirty="0">
+                <a:solidFill>
+                  <a:schemeClr val="tx1"/>
+                </a:solidFill>
+              </a:rPr>
+              <a:t>Custom</a:t>
+            </a:r>
+            <a:pPr indent="0" marL="0">
+              <a:buNone/>
+            </a:pPr>
+            <a:endParaRPr lang="en-US" sz="1400" dirty="0"/>
+          </a:p>
+        </p:txBody>
+      </p:sp>
+      <p:sp>
+        <p:nvSpPr>
+          <p:cNvPr id="14" name="plan-feats-2"/>
+          <p:cNvSpPr txBox="1"/>
+          <p:nvPr/>
+        </p:nvSpPr>
+        <p:spPr>
+          <a:xfrm>
+            <a:off x="6318504" y="2331720"/>
+            <a:ext cx="2240280" cy="1828800"/>
+          </a:xfrm>
+          <a:prstGeom prst="rect">
+            <a:avLst/>
+          </a:prstGeom>
+          <a:noFill/>
+          <a:ln/>
+        </p:spPr>
+        <p:txBody>
+          <a:bodyPr wrap="square" lIns="0" tIns="0" rIns="0" bIns="0" rtlCol="0" anchor="t"/>
+          <a:lstStyle/>
+          <a:p>
+            <a:pPr marL="152400" indent="-152400">
+              <a:spcAft>
+                <a:spcPts val="400"/>
+              </a:spcAft>
+              <a:buSzPct val="100000"/>
+              <a:buChar char="•"/>
+            </a:pPr>
+            <a:r>
+              <a:rPr lang="en-US" sz="1200" dirty="0">
+                <a:solidFill>
+                  <a:schemeClr val="tx1"/>
+                </a:solidFill>
+              </a:rPr>
+              <a:t>Unlimited seats and chats</a:t>
+            </a:r>
+            <a:endParaRPr lang="en-US" sz="1200" dirty="0"/>
+          </a:p>
+          <a:p>
+            <a:pPr marL="152400" indent="-152400">
+              <a:spcAft>
+                <a:spcPts val="400"/>
+              </a:spcAft>
+              <a:buSzPct val="100000"/>
+              <a:buChar char="•"/>
+            </a:pPr>
+            <a:r>
+              <a:rPr lang="en-US" sz="1200" dirty="0">
+                <a:solidFill>
+                  <a:schemeClr val="tx1"/>
+                </a:solidFill>
+              </a:rPr>
+              <a:t>Your own cloud or server</a:t>
+            </a:r>
+            <a:endParaRPr lang="en-US" sz="1200" dirty="0"/>
+          </a:p>
+          <a:p>
+            <a:pPr marL="152400" indent="-152400">
+              <a:spcAft>
+                <a:spcPts val="400"/>
+              </a:spcAft>
+              <a:buSzPct val="100000"/>
+              <a:buChar char="•"/>
+            </a:pPr>
+            <a:r>
+              <a:rPr lang="en-US" sz="1200" dirty="0">
+                <a:solidFill>
+                  <a:schemeClr val="tx1"/>
+                </a:solidFill>
+              </a:rPr>
+              <a:t>Your own AI account and keys</a:t>
+            </a:r>
+            <a:endParaRPr lang="en-US" sz="1200" dirty="0"/>
+          </a:p>
+          <a:p>
+            <a:pPr marL="152400" indent="-152400">
+              <a:spcAft>
+                <a:spcPts val="400"/>
+              </a:spcAft>
+              <a:buSzPct val="100000"/>
+              <a:buChar char="•"/>
+            </a:pPr>
+            <a:r>
+              <a:rPr lang="en-US" sz="1200" dirty="0">
+                <a:solidFill>
+                  <a:schemeClr val="tx1"/>
+                </a:solidFill>
+              </a:rPr>
+              <a:t>Custom integrations</a:t>
+            </a:r>
+            <a:endParaRPr lang="en-US" sz="1200" dirty="0"/>
+          </a:p>
+          <a:p>
+            <a:pPr marL="152400" indent="-152400">
+              <a:spcAft>
+                <a:spcPts val="400"/>
+              </a:spcAft>
+              <a:buSzPct val="100000"/>
+              <a:buChar char="•"/>
+            </a:pPr>
+            <a:r>
+              <a:rPr lang="en-US" sz="1200" dirty="0">
+                <a:solidFill>
+                  <a:schemeClr val="tx1"/>
+                </a:solidFill>
+              </a:rPr>
+              <a:t>Priority support</a:t>
+            </a:r>
+            <a:endParaRPr lang="en-US" sz="1200" dirty="0"/>
+          </a:p>
+        </p:txBody>
+      </p:sp>
+      <p:sp>
+        <p:nvSpPr>
+          <p:cNvPr id="15" name="pricing-note"/>
+          <p:cNvSpPr txBox="1"/>
+          <p:nvPr/>
+        </p:nvSpPr>
+        <p:spPr>
+          <a:xfrm>
+            <a:off x="457200" y="4343400"/>
+            <a:ext cx="8229600" cy="411480"/>
+          </a:xfrm>
+          <a:prstGeom prst="rect">
+            <a:avLst/>
+          </a:prstGeom>
+          <a:noFill/>
+          <a:ln/>
+        </p:spPr>
+        <p:txBody>
+          <a:bodyPr wrap="square" lIns="0" tIns="0" rIns="0" bIns="0" rtlCol="0" anchor="t"/>
+          <a:lstStyle/>
+          <a:p>
+            <a:pPr indent="0" marL="0">
+              <a:buNone/>
+            </a:pPr>
+            <a:r>
+              <a:rPr lang="en-US" sz="1000" dirty="0">
+                <a:solidFill>
+                  <a:schemeClr val="accent4"/>
+                </a:solidFill>
+              </a:rPr>
+              <a:t>All plans are hosted 24×7 with HTTPS and nightly backups. One-time setup from ₹25,000 per pack. WhatsApp charges from Meta are billed at cost. Prices exclude GST and are indicative — the final quote follows the discovery call.</a:t>
+            </a:r>
+            <a:endParaRPr lang="en-US" sz="1000" dirty="0"/>
+          </a:p>
+        </p:txBody>
+      </p:sp>
+      <p:sp>
+        <p:nvSpPr>
+          <p:cNvPr id="25" name="Slide Number Placeholder 0"/>
+          <p:cNvSpPr>
+            <a:spLocks noGrp="1"/>
+          </p:cNvSpPr>
+          <p:nvPr>
+            <p:ph type="sldNum" sz="quarter" idx="4294967295"/>
+          </p:nvPr>
+        </p:nvSpPr>
+        <p:spPr>
+          <a:xfrm>
+            <a:off x="8229600" y="4754880"/>
+            <a:ext cx="457200" cy="274320"/>
+          </a:xfrm>
+          <a:prstGeom prst="rect">
+            <a:avLst/>
+          </a:prstGeom>
+          <a:extLst>
+            <a:ext uri="{C572A759-6A51-4108-AA02-DFA0A04FC94B}">
+              <ma14:wrappingTextBoxFlag xmlns:ma14="http://schemas.microsoft.com/office/mac/drawingml/2011/main" val="0"/>
+            </a:ext>
+          </a:extLst>
+        </p:spPr>
+        <p:txBody>
+          <a:bodyPr/>
+          <a:lstStyle>
+            <a:lvl1pPr>
+              <a:defRPr sz="1000">
+                <a:solidFill>
+                  <a:schemeClr val="accent4"/>
+                </a:solidFill>
+              </a:defRPr>
+            </a:lvl1pPr>
+          </a:lstStyle>
+          <a:p>
+            <a:pPr algn="r"/>
+            <a:fld id="{F7021451-1387-4CA6-816F-3879F97B5CBC}" type="slidenum">
+              <a:rPr b="0" lang="en-US"/>
+              <a:t>13</a:t>
+            </a:fld>
+            <a:endParaRPr lang="en-US"/>
+          </a:p>
+        </p:txBody>
+      </p:sp>
+    </p:spTree>
+  </p:cSld>
+  <p:clrMapOvr>
+    <a:masterClrMapping/>
+  </p:clrMapOvr>
+</p:sld>
+</file>
+
+<file path=ppt/slides/slide14.xml><?xml version="1.0" encoding="utf-8"?>
+<p:sld xmlns:a="http://schemas.openxmlformats.org/drawingml/2006/main" xmlns:r="http://schemas.openxmlformats.org/officeDocument/2006/relationships" xmlns:p="http://schemas.openxmlformats.org/presentationml/2006/main">
+  <p:cSld name="Slide 14">
+    <p:spTree>
+      <p:nvGrpSpPr>
+        <p:cNvPr id="1" name=""/>
+        <p:cNvGrpSpPr/>
+        <p:nvPr/>
+      </p:nvGrpSpPr>
+      <p:grpSpPr>
+        <a:xfrm>
+          <a:off x="0" y="0"/>
+          <a:ext cx="0" cy="0"/>
+          <a:chOff x="0" y="0"/>
+          <a:chExt cx="0" cy="0"/>
+        </a:xfrm>
+      </p:grpSpPr>
+      <p:sp>
+        <p:nvSpPr>
+          <p:cNvPr id="2" name="Text 0"/>
+          <p:cNvSpPr/>
+          <p:nvPr>
+            <p:ph idx="100" type="title" hasCustomPrompt="1"/>
+          </p:nvPr>
+        </p:nvSpPr>
+        <p:spPr>
+          <a:xfrm>
             <a:off x="548640" y="1417320"/>
             <a:ext cx="8046720" cy="1371600"/>
           </a:xfrm>
@@ -11378,15 +12027,57 @@
                   <a:schemeClr val="tx1"/>
                 </a:solidFill>
               </a:rPr>
-              <a:t>Set up without writing code</a:t>
+              <a:t>Always on, safely hosted</a:t>
             </a:r>
             <a:endParaRPr lang="en-US" sz="3200" dirty="0"/>
           </a:p>
         </p:txBody>
+      </p:sp>
+      <p:sp>
+        <p:nvSpPr>
+          <p:cNvPr id="3" name="host-0"/>
+          <p:cNvSpPr/>
+          <p:nvPr/>
+        </p:nvSpPr>
+        <p:spPr>
+          <a:xfrm>
+            <a:off x="457200" y="1188720"/>
+            <a:ext cx="1828800" cy="1965960"/>
+          </a:xfrm>
+          <a:prstGeom prst="roundRect">
+            <a:avLst>
+              <a:gd name="adj" fmla="val 6000"/>
+            </a:avLst>
+          </a:prstGeom>
+          <a:solidFill>
+            <a:schemeClr val="bg2"/>
+          </a:solidFill>
+          <a:ln/>
+        </p:spPr>
+      </p:sp>
+      <p:sp>
+        <p:nvSpPr>
+          <p:cNvPr id="4" name="circle-host-0"/>
+          <p:cNvSpPr/>
+          <p:nvPr/>
+        </p:nvSpPr>
+        <p:spPr>
+          <a:xfrm>
+            <a:off x="1097280" y="1325880"/>
+            <a:ext cx="548640" cy="548640"/>
+          </a:xfrm>
+          <a:prstGeom prst="ellipse">
+            <a:avLst/>
+          </a:prstGeom>
+          <a:solidFill>
+            <a:schemeClr val="accent4"/>
+          </a:solidFill>
+          <a:ln/>
+        </p:spPr>
       </p:sp>
       <p:pic>
         <p:nvPicPr>
-          <p:cNvPr id="3" name="admin-shot" descr="Admin console agents page with on/off switches and per-agent settings">    </p:cNvPr>
+          <p:cNvPr id="5" name="icon-host-0" descr="preencoded.png">    </p:cNvPr>
           <p:cNvPicPr>
             <a:picLocks noChangeAspect="1"/>
           </p:cNvPicPr>
@@ -11400,24 +12091,155 @@
         </p:blipFill>
         <p:spPr>
           <a:xfrm>
-            <a:off x="457200" y="1188720"/>
-            <a:ext cx="4754880" cy="3268980"/>
-          </a:xfrm>
-          <a:prstGeom prst="rect">
-            <a:avLst/>
-          </a:prstGeom>
-          <a:effectLst>
-            <a:outerShdw sx="100000" sy="100000" kx="0" ky="0" algn="bl" rotWithShape="0" blurRad="101600" dist="25400" dir="5400000">
-              <a:srgbClr val="000000">
-                <a:alpha val="18000"/>
-              </a:srgbClr>
-            </a:outerShdw>
-          </a:effectLst>
+            <a:off x="1234440" y="1463040"/>
+            <a:ext cx="274320" cy="274320"/>
+          </a:xfrm>
+          <a:prstGeom prst="rect">
+            <a:avLst/>
+          </a:prstGeom>
         </p:spPr>
       </p:pic>
+      <p:sp>
+        <p:nvSpPr>
+          <p:cNvPr id="6" name="host-h-0"/>
+          <p:cNvSpPr txBox="1"/>
+          <p:nvPr/>
+        </p:nvSpPr>
+        <p:spPr>
+          <a:xfrm>
+            <a:off x="566928" y="1965960"/>
+            <a:ext cx="1609344" cy="320040"/>
+          </a:xfrm>
+          <a:prstGeom prst="rect">
+            <a:avLst/>
+          </a:prstGeom>
+          <a:noFill/>
+          <a:ln/>
+        </p:spPr>
+        <p:txBody>
+          <a:bodyPr wrap="square" lIns="0" tIns="0" rIns="0" bIns="0" rtlCol="0" anchor="t"/>
+          <a:lstStyle/>
+          <a:p>
+            <a:pPr algn="ctr" indent="0" marL="0">
+              <a:buNone/>
+            </a:pPr>
+            <a:r>
+              <a:rPr lang="en-US" sz="1400" b="1" dirty="0">
+                <a:solidFill>
+                  <a:schemeClr val="tx1"/>
+                </a:solidFill>
+              </a:rPr>
+              <a:t>Customers &amp; team</a:t>
+            </a:r>
+            <a:endParaRPr lang="en-US" sz="1400" dirty="0"/>
+          </a:p>
+        </p:txBody>
+      </p:sp>
+      <p:sp>
+        <p:nvSpPr>
+          <p:cNvPr id="7" name="host-b-0"/>
+          <p:cNvSpPr txBox="1"/>
+          <p:nvPr/>
+        </p:nvSpPr>
+        <p:spPr>
+          <a:xfrm>
+            <a:off x="594360" y="2304288"/>
+            <a:ext cx="1554480" cy="804672"/>
+          </a:xfrm>
+          <a:prstGeom prst="rect">
+            <a:avLst/>
+          </a:prstGeom>
+          <a:noFill/>
+          <a:ln/>
+        </p:spPr>
+        <p:txBody>
+          <a:bodyPr wrap="square" lIns="0" tIns="0" rIns="0" bIns="0" rtlCol="0" anchor="t"/>
+          <a:lstStyle/>
+          <a:p>
+            <a:pPr algn="ctr" indent="0" marL="0">
+              <a:buNone/>
+            </a:pPr>
+            <a:r>
+              <a:rPr lang="en-US" sz="1100" dirty="0">
+                <a:solidFill>
+                  <a:schemeClr val="accent4"/>
+                </a:solidFill>
+              </a:rPr>
+              <a:t>WhatsApp, Telegram and the web app — from any phone or browser.</a:t>
+            </a:r>
+            <a:endParaRPr lang="en-US" sz="1100" dirty="0"/>
+          </a:p>
+        </p:txBody>
+      </p:sp>
+      <p:sp>
+        <p:nvSpPr>
+          <p:cNvPr id="8" name="host-arrow-0"/>
+          <p:cNvSpPr/>
+          <p:nvPr/>
+        </p:nvSpPr>
+        <p:spPr>
+          <a:xfrm>
+            <a:off x="2313432" y="2167128"/>
+            <a:ext cx="237744" cy="0"/>
+          </a:xfrm>
+          <a:prstGeom prst="line">
+            <a:avLst/>
+          </a:prstGeom>
+          <a:noFill/>
+          <a:ln w="19050">
+            <a:solidFill>
+              <a:schemeClr val="accent4"/>
+            </a:solidFill>
+            <a:prstDash val="solid"/>
+            <a:tailEnd type="triangle"/>
+          </a:ln>
+        </p:spPr>
+      </p:sp>
+      <p:sp>
+        <p:nvSpPr>
+          <p:cNvPr id="9" name="host-1"/>
+          <p:cNvSpPr/>
+          <p:nvPr/>
+        </p:nvSpPr>
+        <p:spPr>
+          <a:xfrm>
+            <a:off x="2578608" y="1188720"/>
+            <a:ext cx="1828800" cy="1965960"/>
+          </a:xfrm>
+          <a:prstGeom prst="roundRect">
+            <a:avLst>
+              <a:gd name="adj" fmla="val 6000"/>
+            </a:avLst>
+          </a:prstGeom>
+          <a:solidFill>
+            <a:schemeClr val="bg2"/>
+          </a:solidFill>
+          <a:ln/>
+        </p:spPr>
+      </p:sp>
+      <p:sp>
+        <p:nvSpPr>
+          <p:cNvPr id="10" name="circle-host-1"/>
+          <p:cNvSpPr/>
+          <p:nvPr/>
+        </p:nvSpPr>
+        <p:spPr>
+          <a:xfrm>
+            <a:off x="3218688" y="1325880"/>
+            <a:ext cx="548640" cy="548640"/>
+          </a:xfrm>
+          <a:prstGeom prst="ellipse">
+            <a:avLst/>
+          </a:prstGeom>
+          <a:solidFill>
+            <a:schemeClr val="accent1"/>
+          </a:solidFill>
+          <a:ln/>
+        </p:spPr>
+      </p:sp>
       <p:pic>
         <p:nvPicPr>
-          <p:cNvPr id="4" name="admin-check-0" descr="preencoded.png">    </p:cNvPr>
+          <p:cNvPr id="11" name="icon-host-1" descr="preencoded.png">    </p:cNvPr>
           <p:cNvPicPr>
             <a:picLocks noChangeAspect="1"/>
           </p:cNvPicPr>
@@ -11431,8 +12253,8 @@
         </p:blipFill>
         <p:spPr>
           <a:xfrm>
-            <a:off x="5532120" y="1298448"/>
-            <a:ext cx="237744" cy="237744"/>
+            <a:off x="3355848" y="1463040"/>
+            <a:ext cx="274320" cy="274320"/>
           </a:xfrm>
           <a:prstGeom prst="rect">
             <a:avLst/>
@@ -11441,43 +12263,145 @@
       </p:pic>
       <p:sp>
         <p:nvSpPr>
-          <p:cNvPr id="5" name="admin-item-0"/>
-          <p:cNvSpPr txBox="1"/>
-          <p:nvPr/>
-        </p:nvSpPr>
-        <p:spPr>
-          <a:xfrm>
-            <a:off x="5897880" y="1234440"/>
-            <a:ext cx="2788920" cy="411480"/>
-          </a:xfrm>
-          <a:prstGeom prst="rect">
-            <a:avLst/>
-          </a:prstGeom>
-          <a:noFill/>
-          <a:ln/>
-        </p:spPr>
-        <p:txBody>
-          <a:bodyPr wrap="square" lIns="0" tIns="0" rIns="0" bIns="0" rtlCol="0" anchor="ctr"/>
-          <a:lstStyle/>
-          <a:p>
-            <a:pPr indent="0" marL="0">
-              <a:buNone/>
-            </a:pPr>
-            <a:r>
-              <a:rPr lang="en-US" sz="1300" dirty="0">
+          <p:cNvPr id="12" name="host-h-1"/>
+          <p:cNvSpPr txBox="1"/>
+          <p:nvPr/>
+        </p:nvSpPr>
+        <p:spPr>
+          <a:xfrm>
+            <a:off x="2688336" y="1965960"/>
+            <a:ext cx="1609344" cy="320040"/>
+          </a:xfrm>
+          <a:prstGeom prst="rect">
+            <a:avLst/>
+          </a:prstGeom>
+          <a:noFill/>
+          <a:ln/>
+        </p:spPr>
+        <p:txBody>
+          <a:bodyPr wrap="square" lIns="0" tIns="0" rIns="0" bIns="0" rtlCol="0" anchor="t"/>
+          <a:lstStyle/>
+          <a:p>
+            <a:pPr algn="ctr" indent="0" marL="0">
+              <a:buNone/>
+            </a:pPr>
+            <a:r>
+              <a:rPr lang="en-US" sz="1400" b="1" dirty="0">
                 <a:solidFill>
                   <a:schemeClr val="tx1"/>
                 </a:solidFill>
               </a:rPr>
-              <a:t>Switch agents on or off</a:t>
-            </a:r>
-            <a:endParaRPr lang="en-US" sz="1300" dirty="0"/>
-          </a:p>
-        </p:txBody>
+              <a:t>One secure entrance</a:t>
+            </a:r>
+            <a:endParaRPr lang="en-US" sz="1400" dirty="0"/>
+          </a:p>
+        </p:txBody>
+      </p:sp>
+      <p:sp>
+        <p:nvSpPr>
+          <p:cNvPr id="13" name="host-b-1"/>
+          <p:cNvSpPr txBox="1"/>
+          <p:nvPr/>
+        </p:nvSpPr>
+        <p:spPr>
+          <a:xfrm>
+            <a:off x="2715768" y="2304288"/>
+            <a:ext cx="1554480" cy="804672"/>
+          </a:xfrm>
+          <a:prstGeom prst="rect">
+            <a:avLst/>
+          </a:prstGeom>
+          <a:noFill/>
+          <a:ln/>
+        </p:spPr>
+        <p:txBody>
+          <a:bodyPr wrap="square" lIns="0" tIns="0" rIns="0" bIns="0" rtlCol="0" anchor="t"/>
+          <a:lstStyle/>
+          <a:p>
+            <a:pPr algn="ctr" indent="0" marL="0">
+              <a:buNone/>
+            </a:pPr>
+            <a:r>
+              <a:rPr lang="en-US" sz="1100" dirty="0">
+                <a:solidFill>
+                  <a:schemeClr val="accent4"/>
+                </a:solidFill>
+              </a:rPr>
+              <a:t>Encrypted HTTPS only. Nothing else on the server is reachable from the internet.</a:t>
+            </a:r>
+            <a:endParaRPr lang="en-US" sz="1100" dirty="0"/>
+          </a:p>
+        </p:txBody>
+      </p:sp>
+      <p:sp>
+        <p:nvSpPr>
+          <p:cNvPr id="14" name="host-arrow-1"/>
+          <p:cNvSpPr/>
+          <p:nvPr/>
+        </p:nvSpPr>
+        <p:spPr>
+          <a:xfrm>
+            <a:off x="4434840" y="2167128"/>
+            <a:ext cx="237744" cy="0"/>
+          </a:xfrm>
+          <a:prstGeom prst="line">
+            <a:avLst/>
+          </a:prstGeom>
+          <a:noFill/>
+          <a:ln w="19050">
+            <a:solidFill>
+              <a:schemeClr val="accent4"/>
+            </a:solidFill>
+            <a:prstDash val="solid"/>
+            <a:tailEnd type="triangle"/>
+          </a:ln>
+        </p:spPr>
+      </p:sp>
+      <p:sp>
+        <p:nvSpPr>
+          <p:cNvPr id="15" name="host-2"/>
+          <p:cNvSpPr/>
+          <p:nvPr/>
+        </p:nvSpPr>
+        <p:spPr>
+          <a:xfrm>
+            <a:off x="4700016" y="1188720"/>
+            <a:ext cx="1828800" cy="1965960"/>
+          </a:xfrm>
+          <a:prstGeom prst="roundRect">
+            <a:avLst>
+              <a:gd name="adj" fmla="val 6000"/>
+            </a:avLst>
+          </a:prstGeom>
+          <a:solidFill>
+            <a:schemeClr val="bg2"/>
+          </a:solidFill>
+          <a:ln/>
+        </p:spPr>
+      </p:sp>
+      <p:sp>
+        <p:nvSpPr>
+          <p:cNvPr id="16" name="circle-host-2"/>
+          <p:cNvSpPr/>
+          <p:nvPr/>
+        </p:nvSpPr>
+        <p:spPr>
+          <a:xfrm>
+            <a:off x="5340096" y="1325880"/>
+            <a:ext cx="548640" cy="548640"/>
+          </a:xfrm>
+          <a:prstGeom prst="ellipse">
+            <a:avLst/>
+          </a:prstGeom>
+          <a:solidFill>
+            <a:schemeClr val="accent2"/>
+          </a:solidFill>
+          <a:ln/>
+        </p:spPr>
       </p:sp>
       <p:pic>
         <p:nvPicPr>
-          <p:cNvPr id="6" name="admin-check-1" descr="preencoded.png">    </p:cNvPr>
+          <p:cNvPr id="17" name="icon-host-2" descr="preencoded.png">    </p:cNvPr>
           <p:cNvPicPr>
             <a:picLocks noChangeAspect="1"/>
           </p:cNvPicPr>
@@ -11491,8 +12415,8 @@
         </p:blipFill>
         <p:spPr>
           <a:xfrm>
-            <a:off x="5532120" y="1773936"/>
-            <a:ext cx="237744" cy="237744"/>
+            <a:off x="5477256" y="1463040"/>
+            <a:ext cx="274320" cy="274320"/>
           </a:xfrm>
           <a:prstGeom prst="rect">
             <a:avLst/>
@@ -11501,43 +12425,145 @@
       </p:pic>
       <p:sp>
         <p:nvSpPr>
-          <p:cNvPr id="7" name="admin-item-1"/>
-          <p:cNvSpPr txBox="1"/>
-          <p:nvPr/>
-        </p:nvSpPr>
-        <p:spPr>
-          <a:xfrm>
-            <a:off x="5897880" y="1709928"/>
-            <a:ext cx="2788920" cy="411480"/>
-          </a:xfrm>
-          <a:prstGeom prst="rect">
-            <a:avLst/>
-          </a:prstGeom>
-          <a:noFill/>
-          <a:ln/>
-        </p:spPr>
-        <p:txBody>
-          <a:bodyPr wrap="square" lIns="0" tIns="0" rIns="0" bIns="0" rtlCol="0" anchor="ctr"/>
-          <a:lstStyle/>
-          <a:p>
-            <a:pPr indent="0" marL="0">
-              <a:buNone/>
-            </a:pPr>
-            <a:r>
-              <a:rPr lang="en-US" sz="1300" dirty="0">
+          <p:cNvPr id="18" name="host-h-2"/>
+          <p:cNvSpPr txBox="1"/>
+          <p:nvPr/>
+        </p:nvSpPr>
+        <p:spPr>
+          <a:xfrm>
+            <a:off x="4809744" y="1965960"/>
+            <a:ext cx="1609344" cy="320040"/>
+          </a:xfrm>
+          <a:prstGeom prst="rect">
+            <a:avLst/>
+          </a:prstGeom>
+          <a:noFill/>
+          <a:ln/>
+        </p:spPr>
+        <p:txBody>
+          <a:bodyPr wrap="square" lIns="0" tIns="0" rIns="0" bIns="0" rtlCol="0" anchor="t"/>
+          <a:lstStyle/>
+          <a:p>
+            <a:pPr algn="ctr" indent="0" marL="0">
+              <a:buNone/>
+            </a:pPr>
+            <a:r>
+              <a:rPr lang="en-US" sz="1400" b="1" dirty="0">
                 <a:solidFill>
                   <a:schemeClr val="tx1"/>
                 </a:solidFill>
               </a:rPr>
-              <a:t>Add house rules: tone, language, what never to say</a:t>
-            </a:r>
-            <a:endParaRPr lang="en-US" sz="1300" dirty="0"/>
-          </a:p>
-        </p:txBody>
+              <a:t>SwarmAI</a:t>
+            </a:r>
+            <a:endParaRPr lang="en-US" sz="1400" dirty="0"/>
+          </a:p>
+        </p:txBody>
+      </p:sp>
+      <p:sp>
+        <p:nvSpPr>
+          <p:cNvPr id="19" name="host-b-2"/>
+          <p:cNvSpPr txBox="1"/>
+          <p:nvPr/>
+        </p:nvSpPr>
+        <p:spPr>
+          <a:xfrm>
+            <a:off x="4837176" y="2304288"/>
+            <a:ext cx="1554480" cy="804672"/>
+          </a:xfrm>
+          <a:prstGeom prst="rect">
+            <a:avLst/>
+          </a:prstGeom>
+          <a:noFill/>
+          <a:ln/>
+        </p:spPr>
+        <p:txBody>
+          <a:bodyPr wrap="square" lIns="0" tIns="0" rIns="0" bIns="0" rtlCol="0" anchor="t"/>
+          <a:lstStyle/>
+          <a:p>
+            <a:pPr algn="ctr" indent="0" marL="0">
+              <a:buNone/>
+            </a:pPr>
+            <a:r>
+              <a:rPr lang="en-US" sz="1100" dirty="0">
+                <a:solidFill>
+                  <a:schemeClr val="accent4"/>
+                </a:solidFill>
+              </a:rPr>
+              <a:t>AI agents, workflows and your data on a private network inside the server.</a:t>
+            </a:r>
+            <a:endParaRPr lang="en-US" sz="1100" dirty="0"/>
+          </a:p>
+        </p:txBody>
+      </p:sp>
+      <p:sp>
+        <p:nvSpPr>
+          <p:cNvPr id="20" name="host-arrow-2"/>
+          <p:cNvSpPr/>
+          <p:nvPr/>
+        </p:nvSpPr>
+        <p:spPr>
+          <a:xfrm>
+            <a:off x="6556248" y="2167128"/>
+            <a:ext cx="237744" cy="0"/>
+          </a:xfrm>
+          <a:prstGeom prst="line">
+            <a:avLst/>
+          </a:prstGeom>
+          <a:noFill/>
+          <a:ln w="19050">
+            <a:solidFill>
+              <a:schemeClr val="accent4"/>
+            </a:solidFill>
+            <a:prstDash val="solid"/>
+            <a:tailEnd type="triangle"/>
+          </a:ln>
+        </p:spPr>
+      </p:sp>
+      <p:sp>
+        <p:nvSpPr>
+          <p:cNvPr id="21" name="host-3"/>
+          <p:cNvSpPr/>
+          <p:nvPr/>
+        </p:nvSpPr>
+        <p:spPr>
+          <a:xfrm>
+            <a:off x="6821424" y="1188720"/>
+            <a:ext cx="1828800" cy="1965960"/>
+          </a:xfrm>
+          <a:prstGeom prst="roundRect">
+            <a:avLst>
+              <a:gd name="adj" fmla="val 6000"/>
+            </a:avLst>
+          </a:prstGeom>
+          <a:solidFill>
+            <a:schemeClr val="bg2"/>
+          </a:solidFill>
+          <a:ln/>
+        </p:spPr>
+      </p:sp>
+      <p:sp>
+        <p:nvSpPr>
+          <p:cNvPr id="22" name="circle-host-3"/>
+          <p:cNvSpPr/>
+          <p:nvPr/>
+        </p:nvSpPr>
+        <p:spPr>
+          <a:xfrm>
+            <a:off x="7461504" y="1325880"/>
+            <a:ext cx="548640" cy="548640"/>
+          </a:xfrm>
+          <a:prstGeom prst="ellipse">
+            <a:avLst/>
+          </a:prstGeom>
+          <a:solidFill>
+            <a:schemeClr val="accent2"/>
+          </a:solidFill>
+          <a:ln/>
+        </p:spPr>
       </p:sp>
       <p:pic>
         <p:nvPicPr>
-          <p:cNvPr id="8" name="admin-check-2" descr="preencoded.png">    </p:cNvPr>
+          <p:cNvPr id="23" name="icon-host-3" descr="preencoded.png">    </p:cNvPr>
           <p:cNvPicPr>
             <a:picLocks noChangeAspect="1"/>
           </p:cNvPicPr>
@@ -11551,8 +12577,8 @@
         </p:blipFill>
         <p:spPr>
           <a:xfrm>
-            <a:off x="5532120" y="2249424"/>
-            <a:ext cx="237744" cy="237744"/>
+            <a:off x="7598664" y="1463040"/>
+            <a:ext cx="274320" cy="274320"/>
           </a:xfrm>
           <a:prstGeom prst="rect">
             <a:avLst/>
@@ -11561,43 +12587,121 @@
       </p:pic>
       <p:sp>
         <p:nvSpPr>
-          <p:cNvPr id="9" name="admin-item-2"/>
-          <p:cNvSpPr txBox="1"/>
-          <p:nvPr/>
-        </p:nvSpPr>
-        <p:spPr>
-          <a:xfrm>
-            <a:off x="5897880" y="2185416"/>
-            <a:ext cx="2788920" cy="411480"/>
-          </a:xfrm>
-          <a:prstGeom prst="rect">
-            <a:avLst/>
-          </a:prstGeom>
-          <a:noFill/>
-          <a:ln/>
-        </p:spPr>
-        <p:txBody>
-          <a:bodyPr wrap="square" lIns="0" tIns="0" rIns="0" bIns="0" rtlCol="0" anchor="ctr"/>
-          <a:lstStyle/>
-          <a:p>
-            <a:pPr indent="0" marL="0">
-              <a:buNone/>
-            </a:pPr>
-            <a:r>
-              <a:rPr lang="en-US" sz="1300" dirty="0">
+          <p:cNvPr id="24" name="host-h-3"/>
+          <p:cNvSpPr txBox="1"/>
+          <p:nvPr/>
+        </p:nvSpPr>
+        <p:spPr>
+          <a:xfrm>
+            <a:off x="6931152" y="1965960"/>
+            <a:ext cx="1609344" cy="320040"/>
+          </a:xfrm>
+          <a:prstGeom prst="rect">
+            <a:avLst/>
+          </a:prstGeom>
+          <a:noFill/>
+          <a:ln/>
+        </p:spPr>
+        <p:txBody>
+          <a:bodyPr wrap="square" lIns="0" tIns="0" rIns="0" bIns="0" rtlCol="0" anchor="t"/>
+          <a:lstStyle/>
+          <a:p>
+            <a:pPr algn="ctr" indent="0" marL="0">
+              <a:buNone/>
+            </a:pPr>
+            <a:r>
+              <a:rPr lang="en-US" sz="1400" b="1" dirty="0">
                 <a:solidFill>
                   <a:schemeClr val="tx1"/>
                 </a:solidFill>
               </a:rPr>
-              <a:t>Choose models and which tools need approval</a:t>
-            </a:r>
-            <a:endParaRPr lang="en-US" sz="1300" dirty="0"/>
-          </a:p>
-        </p:txBody>
+              <a:t>Backups &amp; alerts</a:t>
+            </a:r>
+            <a:endParaRPr lang="en-US" sz="1400" dirty="0"/>
+          </a:p>
+        </p:txBody>
+      </p:sp>
+      <p:sp>
+        <p:nvSpPr>
+          <p:cNvPr id="25" name="host-b-3"/>
+          <p:cNvSpPr txBox="1"/>
+          <p:nvPr/>
+        </p:nvSpPr>
+        <p:spPr>
+          <a:xfrm>
+            <a:off x="6958584" y="2304288"/>
+            <a:ext cx="1554480" cy="804672"/>
+          </a:xfrm>
+          <a:prstGeom prst="rect">
+            <a:avLst/>
+          </a:prstGeom>
+          <a:noFill/>
+          <a:ln/>
+        </p:spPr>
+        <p:txBody>
+          <a:bodyPr wrap="square" lIns="0" tIns="0" rIns="0" bIns="0" rtlCol="0" anchor="t"/>
+          <a:lstStyle/>
+          <a:p>
+            <a:pPr algn="ctr" indent="0" marL="0">
+              <a:buNone/>
+            </a:pPr>
+            <a:r>
+              <a:rPr lang="en-US" sz="1100" dirty="0">
+                <a:solidFill>
+                  <a:schemeClr val="accent4"/>
+                </a:solidFill>
+              </a:rPr>
+              <a:t>Every night, kept 14 days. Your team is told on Telegram if anything fails.</a:t>
+            </a:r>
+            <a:endParaRPr lang="en-US" sz="1100" dirty="0"/>
+          </a:p>
+        </p:txBody>
+      </p:sp>
+      <p:sp>
+        <p:nvSpPr>
+          <p:cNvPr id="26" name="hostpt-0"/>
+          <p:cNvSpPr/>
+          <p:nvPr/>
+        </p:nvSpPr>
+        <p:spPr>
+          <a:xfrm>
+            <a:off x="457200" y="3383280"/>
+            <a:ext cx="2615184" cy="1143000"/>
+          </a:xfrm>
+          <a:prstGeom prst="roundRect">
+            <a:avLst>
+              <a:gd name="adj" fmla="val 9600"/>
+            </a:avLst>
+          </a:prstGeom>
+          <a:solidFill>
+            <a:schemeClr val="accent5"/>
+          </a:solidFill>
+          <a:ln/>
+        </p:spPr>
+      </p:sp>
+      <p:sp>
+        <p:nvSpPr>
+          <p:cNvPr id="27" name="circle-hostpt-0"/>
+          <p:cNvSpPr/>
+          <p:nvPr/>
+        </p:nvSpPr>
+        <p:spPr>
+          <a:xfrm>
+            <a:off x="640080" y="3566160"/>
+            <a:ext cx="420624" cy="420624"/>
+          </a:xfrm>
+          <a:prstGeom prst="ellipse">
+            <a:avLst/>
+          </a:prstGeom>
+          <a:solidFill>
+            <a:schemeClr val="accent1"/>
+          </a:solidFill>
+          <a:ln/>
+        </p:spPr>
       </p:sp>
       <p:pic>
         <p:nvPicPr>
-          <p:cNvPr id="10" name="admin-check-3" descr="preencoded.png">    </p:cNvPr>
+          <p:cNvPr id="28" name="icon-hostpt-0" descr="preencoded.png">    </p:cNvPr>
           <p:cNvPicPr>
             <a:picLocks noChangeAspect="1"/>
           </p:cNvPicPr>
@@ -11611,8 +12715,8 @@
         </p:blipFill>
         <p:spPr>
           <a:xfrm>
-            <a:off x="5532120" y="2724912"/>
-            <a:ext cx="237744" cy="237744"/>
+            <a:off x="745236" y="3671316"/>
+            <a:ext cx="210312" cy="210312"/>
           </a:xfrm>
           <a:prstGeom prst="rect">
             <a:avLst/>
@@ -11621,43 +12725,121 @@
       </p:pic>
       <p:sp>
         <p:nvSpPr>
-          <p:cNvPr id="11" name="admin-item-3"/>
-          <p:cNvSpPr txBox="1"/>
-          <p:nvPr/>
-        </p:nvSpPr>
-        <p:spPr>
-          <a:xfrm>
-            <a:off x="5897880" y="2660904"/>
-            <a:ext cx="2788920" cy="411480"/>
-          </a:xfrm>
-          <a:prstGeom prst="rect">
-            <a:avLst/>
-          </a:prstGeom>
-          <a:noFill/>
-          <a:ln/>
-        </p:spPr>
-        <p:txBody>
-          <a:bodyPr wrap="square" lIns="0" tIns="0" rIns="0" bIns="0" rtlCol="0" anchor="ctr"/>
+          <p:cNvPr id="29" name="hostpt-h-0"/>
+          <p:cNvSpPr txBox="1"/>
+          <p:nvPr/>
+        </p:nvSpPr>
+        <p:spPr>
+          <a:xfrm>
+            <a:off x="1170432" y="3520440"/>
+            <a:ext cx="1783080" cy="292608"/>
+          </a:xfrm>
+          <a:prstGeom prst="rect">
+            <a:avLst/>
+          </a:prstGeom>
+          <a:noFill/>
+          <a:ln/>
+        </p:spPr>
+        <p:txBody>
+          <a:bodyPr wrap="square" lIns="0" tIns="0" rIns="0" bIns="0" rtlCol="0" anchor="t"/>
           <a:lstStyle/>
           <a:p>
             <a:pPr indent="0" marL="0">
               <a:buNone/>
             </a:pPr>
             <a:r>
-              <a:rPr lang="en-US" sz="1300" dirty="0">
+              <a:rPr lang="en-US" sz="1400" b="1" dirty="0">
                 <a:solidFill>
                   <a:schemeClr val="tx1"/>
                 </a:solidFill>
               </a:rPr>
-              <a:t>Create your own agents</a:t>
-            </a:r>
-            <a:endParaRPr lang="en-US" sz="1300" dirty="0"/>
-          </a:p>
-        </p:txBody>
+              <a:t>Runs 24×7</a:t>
+            </a:r>
+            <a:endParaRPr lang="en-US" sz="1400" dirty="0"/>
+          </a:p>
+        </p:txBody>
+      </p:sp>
+      <p:sp>
+        <p:nvSpPr>
+          <p:cNvPr id="30" name="hostpt-b-0"/>
+          <p:cNvSpPr txBox="1"/>
+          <p:nvPr/>
+        </p:nvSpPr>
+        <p:spPr>
+          <a:xfrm>
+            <a:off x="1170432" y="3813048"/>
+            <a:ext cx="1810512" cy="658368"/>
+          </a:xfrm>
+          <a:prstGeom prst="rect">
+            <a:avLst/>
+          </a:prstGeom>
+          <a:noFill/>
+          <a:ln/>
+        </p:spPr>
+        <p:txBody>
+          <a:bodyPr wrap="square" lIns="0" tIns="0" rIns="0" bIns="0" rtlCol="0" anchor="t"/>
+          <a:lstStyle/>
+          <a:p>
+            <a:pPr indent="0" marL="0">
+              <a:buNone/>
+            </a:pPr>
+            <a:r>
+              <a:rPr lang="en-US" sz="1100" dirty="0">
+                <a:solidFill>
+                  <a:schemeClr val="tx1"/>
+                </a:solidFill>
+              </a:rPr>
+              <a:t>In the cloud — restarts itself after a crash or reboot. Your laptop can be off.</a:t>
+            </a:r>
+            <a:endParaRPr lang="en-US" sz="1100" dirty="0"/>
+          </a:p>
+        </p:txBody>
+      </p:sp>
+      <p:sp>
+        <p:nvSpPr>
+          <p:cNvPr id="31" name="hostpt-1"/>
+          <p:cNvSpPr/>
+          <p:nvPr/>
+        </p:nvSpPr>
+        <p:spPr>
+          <a:xfrm>
+            <a:off x="3273552" y="3383280"/>
+            <a:ext cx="2615184" cy="1143000"/>
+          </a:xfrm>
+          <a:prstGeom prst="roundRect">
+            <a:avLst>
+              <a:gd name="adj" fmla="val 9600"/>
+            </a:avLst>
+          </a:prstGeom>
+          <a:solidFill>
+            <a:schemeClr val="accent5"/>
+          </a:solidFill>
+          <a:ln/>
+        </p:spPr>
+      </p:sp>
+      <p:sp>
+        <p:nvSpPr>
+          <p:cNvPr id="32" name="circle-hostpt-1"/>
+          <p:cNvSpPr/>
+          <p:nvPr/>
+        </p:nvSpPr>
+        <p:spPr>
+          <a:xfrm>
+            <a:off x="3456432" y="3566160"/>
+            <a:ext cx="420624" cy="420624"/>
+          </a:xfrm>
+          <a:prstGeom prst="ellipse">
+            <a:avLst/>
+          </a:prstGeom>
+          <a:solidFill>
+            <a:schemeClr val="accent1"/>
+          </a:solidFill>
+          <a:ln/>
+        </p:spPr>
       </p:sp>
       <p:pic>
         <p:nvPicPr>
-          <p:cNvPr id="12" name="admin-check-4" descr="preencoded.png">    </p:cNvPr>
+          <p:cNvPr id="33" name="icon-hostpt-1" descr="preencoded.png">    </p:cNvPr>
           <p:cNvPicPr>
             <a:picLocks noChangeAspect="1"/>
           </p:cNvPicPr>
@@ -11671,8 +12853,8 @@
         </p:blipFill>
         <p:spPr>
           <a:xfrm>
-            <a:off x="5532120" y="3200400"/>
-            <a:ext cx="237744" cy="237744"/>
+            <a:off x="3561588" y="3671316"/>
+            <a:ext cx="210312" cy="210312"/>
           </a:xfrm>
           <a:prstGeom prst="rect">
             <a:avLst/>
@@ -11681,43 +12863,121 @@
       </p:pic>
       <p:sp>
         <p:nvSpPr>
-          <p:cNvPr id="13" name="admin-item-4"/>
-          <p:cNvSpPr txBox="1"/>
-          <p:nvPr/>
-        </p:nvSpPr>
-        <p:spPr>
-          <a:xfrm>
-            <a:off x="5897880" y="3136392"/>
-            <a:ext cx="2788920" cy="411480"/>
-          </a:xfrm>
-          <a:prstGeom prst="rect">
-            <a:avLst/>
-          </a:prstGeom>
-          <a:noFill/>
-          <a:ln/>
-        </p:spPr>
-        <p:txBody>
-          <a:bodyPr wrap="square" lIns="0" tIns="0" rIns="0" bIns="0" rtlCol="0" anchor="ctr"/>
+          <p:cNvPr id="34" name="hostpt-h-1"/>
+          <p:cNvSpPr txBox="1"/>
+          <p:nvPr/>
+        </p:nvSpPr>
+        <p:spPr>
+          <a:xfrm>
+            <a:off x="3986784" y="3520440"/>
+            <a:ext cx="1783080" cy="292608"/>
+          </a:xfrm>
+          <a:prstGeom prst="rect">
+            <a:avLst/>
+          </a:prstGeom>
+          <a:noFill/>
+          <a:ln/>
+        </p:spPr>
+        <p:txBody>
+          <a:bodyPr wrap="square" lIns="0" tIns="0" rIns="0" bIns="0" rtlCol="0" anchor="t"/>
           <a:lstStyle/>
           <a:p>
             <a:pPr indent="0" marL="0">
               <a:buNone/>
             </a:pPr>
             <a:r>
-              <a:rPr lang="en-US" sz="1300" dirty="0">
+              <a:rPr lang="en-US" sz="1400" b="1" dirty="0">
                 <a:solidFill>
                   <a:schemeClr val="tx1"/>
                 </a:solidFill>
               </a:rPr>
-              <a:t>Apply an industry pack in one click</a:t>
-            </a:r>
-            <a:endParaRPr lang="en-US" sz="1300" dirty="0"/>
-          </a:p>
-        </p:txBody>
+              <a:t>Invite-only access</a:t>
+            </a:r>
+            <a:endParaRPr lang="en-US" sz="1400" dirty="0"/>
+          </a:p>
+        </p:txBody>
+      </p:sp>
+      <p:sp>
+        <p:nvSpPr>
+          <p:cNvPr id="35" name="hostpt-b-1"/>
+          <p:cNvSpPr txBox="1"/>
+          <p:nvPr/>
+        </p:nvSpPr>
+        <p:spPr>
+          <a:xfrm>
+            <a:off x="3986784" y="3813048"/>
+            <a:ext cx="1810512" cy="658368"/>
+          </a:xfrm>
+          <a:prstGeom prst="rect">
+            <a:avLst/>
+          </a:prstGeom>
+          <a:noFill/>
+          <a:ln/>
+        </p:spPr>
+        <p:txBody>
+          <a:bodyPr wrap="square" lIns="0" tIns="0" rIns="0" bIns="0" rtlCol="0" anchor="t"/>
+          <a:lstStyle/>
+          <a:p>
+            <a:pPr indent="0" marL="0">
+              <a:buNone/>
+            </a:pPr>
+            <a:r>
+              <a:rPr lang="en-US" sz="1100" dirty="0">
+                <a:solidFill>
+                  <a:schemeClr val="tx1"/>
+                </a:solidFill>
+              </a:rPr>
+              <a:t>Only people you invite can create an account on your SwarmAI.</a:t>
+            </a:r>
+            <a:endParaRPr lang="en-US" sz="1100" dirty="0"/>
+          </a:p>
+        </p:txBody>
+      </p:sp>
+      <p:sp>
+        <p:nvSpPr>
+          <p:cNvPr id="36" name="hostpt-2"/>
+          <p:cNvSpPr/>
+          <p:nvPr/>
+        </p:nvSpPr>
+        <p:spPr>
+          <a:xfrm>
+            <a:off x="6089904" y="3383280"/>
+            <a:ext cx="2615184" cy="1143000"/>
+          </a:xfrm>
+          <a:prstGeom prst="roundRect">
+            <a:avLst>
+              <a:gd name="adj" fmla="val 9600"/>
+            </a:avLst>
+          </a:prstGeom>
+          <a:solidFill>
+            <a:schemeClr val="accent5"/>
+          </a:solidFill>
+          <a:ln/>
+        </p:spPr>
+      </p:sp>
+      <p:sp>
+        <p:nvSpPr>
+          <p:cNvPr id="37" name="circle-hostpt-2"/>
+          <p:cNvSpPr/>
+          <p:nvPr/>
+        </p:nvSpPr>
+        <p:spPr>
+          <a:xfrm>
+            <a:off x="6272784" y="3566160"/>
+            <a:ext cx="420624" cy="420624"/>
+          </a:xfrm>
+          <a:prstGeom prst="ellipse">
+            <a:avLst/>
+          </a:prstGeom>
+          <a:solidFill>
+            <a:schemeClr val="accent1"/>
+          </a:solidFill>
+          <a:ln/>
+        </p:spPr>
       </p:sp>
       <p:pic>
         <p:nvPicPr>
-          <p:cNvPr id="14" name="admin-check-5" descr="preencoded.png">    </p:cNvPr>
+          <p:cNvPr id="38" name="icon-hostpt-2" descr="preencoded.png">    </p:cNvPr>
           <p:cNvPicPr>
             <a:picLocks noChangeAspect="1"/>
           </p:cNvPicPr>
@@ -11731,8 +12991,8 @@
         </p:blipFill>
         <p:spPr>
           <a:xfrm>
-            <a:off x="5532120" y="3675888"/>
-            <a:ext cx="237744" cy="237744"/>
+            <a:off x="6377940" y="3671316"/>
+            <a:ext cx="210312" cy="210312"/>
           </a:xfrm>
           <a:prstGeom prst="rect">
             <a:avLst/>
@@ -11741,97 +13001,73 @@
       </p:pic>
       <p:sp>
         <p:nvSpPr>
-          <p:cNvPr id="15" name="admin-item-5"/>
-          <p:cNvSpPr txBox="1"/>
-          <p:nvPr/>
-        </p:nvSpPr>
-        <p:spPr>
-          <a:xfrm>
-            <a:off x="5897880" y="3611880"/>
-            <a:ext cx="2788920" cy="411480"/>
-          </a:xfrm>
-          <a:prstGeom prst="rect">
-            <a:avLst/>
-          </a:prstGeom>
-          <a:noFill/>
-          <a:ln/>
-        </p:spPr>
-        <p:txBody>
-          <a:bodyPr wrap="square" lIns="0" tIns="0" rIns="0" bIns="0" rtlCol="0" anchor="ctr"/>
+          <p:cNvPr id="39" name="hostpt-h-2"/>
+          <p:cNvSpPr txBox="1"/>
+          <p:nvPr/>
+        </p:nvSpPr>
+        <p:spPr>
+          <a:xfrm>
+            <a:off x="6803136" y="3520440"/>
+            <a:ext cx="1783080" cy="292608"/>
+          </a:xfrm>
+          <a:prstGeom prst="rect">
+            <a:avLst/>
+          </a:prstGeom>
+          <a:noFill/>
+          <a:ln/>
+        </p:spPr>
+        <p:txBody>
+          <a:bodyPr wrap="square" lIns="0" tIns="0" rIns="0" bIns="0" rtlCol="0" anchor="t"/>
           <a:lstStyle/>
           <a:p>
             <a:pPr indent="0" marL="0">
               <a:buNone/>
             </a:pPr>
             <a:r>
-              <a:rPr lang="en-US" sz="1300" dirty="0">
+              <a:rPr lang="en-US" sz="1400" b="1" dirty="0">
                 <a:solidFill>
                   <a:schemeClr val="tx1"/>
                 </a:solidFill>
               </a:rPr>
-              <a:t>Invite your team and set roles</a:t>
-            </a:r>
-            <a:endParaRPr lang="en-US" sz="1300" dirty="0"/>
-          </a:p>
-        </p:txBody>
-      </p:sp>
-      <p:pic>
-        <p:nvPicPr>
-          <p:cNvPr id="16" name="admin-check-6" descr="preencoded.png">    </p:cNvPr>
-          <p:cNvPicPr>
-            <a:picLocks noChangeAspect="1"/>
-          </p:cNvPicPr>
-          <p:nvPr/>
-        </p:nvPicPr>
-        <p:blipFill>
-          <a:blip r:embed="rId8"/>
-          <a:stretch>
-            <a:fillRect/>
-          </a:stretch>
-        </p:blipFill>
-        <p:spPr>
-          <a:xfrm>
-            <a:off x="5532120" y="4151376"/>
-            <a:ext cx="237744" cy="237744"/>
-          </a:xfrm>
-          <a:prstGeom prst="rect">
-            <a:avLst/>
-          </a:prstGeom>
-        </p:spPr>
-      </p:pic>
-      <p:sp>
-        <p:nvSpPr>
-          <p:cNvPr id="17" name="admin-item-6"/>
-          <p:cNvSpPr txBox="1"/>
-          <p:nvPr/>
-        </p:nvSpPr>
-        <p:spPr>
-          <a:xfrm>
-            <a:off x="5897880" y="4087368"/>
-            <a:ext cx="2788920" cy="411480"/>
-          </a:xfrm>
-          <a:prstGeom prst="rect">
-            <a:avLst/>
-          </a:prstGeom>
-          <a:noFill/>
-          <a:ln/>
-        </p:spPr>
-        <p:txBody>
-          <a:bodyPr wrap="square" lIns="0" tIns="0" rIns="0" bIns="0" rtlCol="0" anchor="ctr"/>
+              <a:t>Or in your own cloud</a:t>
+            </a:r>
+            <a:endParaRPr lang="en-US" sz="1400" dirty="0"/>
+          </a:p>
+        </p:txBody>
+      </p:sp>
+      <p:sp>
+        <p:nvSpPr>
+          <p:cNvPr id="40" name="hostpt-b-2"/>
+          <p:cNvSpPr txBox="1"/>
+          <p:nvPr/>
+        </p:nvSpPr>
+        <p:spPr>
+          <a:xfrm>
+            <a:off x="6803136" y="3813048"/>
+            <a:ext cx="1810512" cy="658368"/>
+          </a:xfrm>
+          <a:prstGeom prst="rect">
+            <a:avLst/>
+          </a:prstGeom>
+          <a:noFill/>
+          <a:ln/>
+        </p:spPr>
+        <p:txBody>
+          <a:bodyPr wrap="square" lIns="0" tIns="0" rIns="0" bIns="0" rtlCol="0" anchor="t"/>
           <a:lstStyle/>
           <a:p>
             <a:pPr indent="0" marL="0">
               <a:buNone/>
             </a:pPr>
             <a:r>
-              <a:rPr lang="en-US" sz="1300" dirty="0">
+              <a:rPr lang="en-US" sz="1100" dirty="0">
                 <a:solidFill>
                   <a:schemeClr val="tx1"/>
                 </a:solidFill>
               </a:rPr>
-              <a:t>See usage, approvals and the audit log</a:t>
-            </a:r>
-            <a:endParaRPr lang="en-US" sz="1300" dirty="0"/>
+              <a:t>The same setup runs on your server with your own AI account.</a:t>
+            </a:r>
+            <a:endParaRPr lang="en-US" sz="1100" dirty="0"/>
           </a:p>
         </p:txBody>
       </p:sp>

--- a/docs/sales/SwarmAI-Customer-Deck.pptx
+++ b/docs/sales/SwarmAI-Customer-Deck.pptx
@@ -19,9 +19,10 @@
     <p:sldId id="267" r:id="rId13"/>
     <p:sldId id="268" r:id="rId14"/>
     <p:sldId id="269" r:id="rId15"/>
+    <p:sldId id="270" r:id="rId16"/>
   </p:sldIdLst>
   <p:notesMasterIdLst>
-    <p:notesMasterId r:id="rId16"/>
+    <p:notesMasterId r:id="rId17"/>
   </p:notesMasterIdLst>
   <p:sldSz cx="9144000" cy="5143500"/>
   <p:notesSz cx="5143500" cy="9144000"/>
@@ -120,14 +121,14 @@
   <p:extLst>
     <p:ext uri="{521415D9-36F7-43E2-AB2F-B90AF26B5E84}">
       <p14:sectionLst xmlns:p14="http://schemas.microsoft.com/office/powerpoint/2010/main">
-        <p14:section name="Introduction" id="{f1113137-36cb-f4d1-ca25-09b66d5ea477}">
+        <p14:section name="Introduction" id="{d581d6bb-f4f1-9bed-b705-144a534b5011}">
           <p14:sldIdLst>
             <p14:sldId id="256"/>
             <p14:sldId id="257"/>
             <p14:sldId id="258"/>
           </p14:sldIdLst>
         </p14:section>
-        <p14:section name="Product" id="{70f7412f-ebad-61be-78d7-a5f4c12bf9fe}">
+        <p14:section name="Product" id="{d52756a6-4855-6e9b-953c-6ad8c19d7ab4}">
           <p14:sldIdLst>
             <p14:sldId id="259"/>
             <p14:sldId id="260"/>
@@ -137,13 +138,14 @@
             <p14:sldId id="264"/>
             <p14:sldId id="265"/>
             <p14:sldId id="266"/>
+            <p14:sldId id="267"/>
           </p14:sldIdLst>
         </p14:section>
-        <p14:section name="Working together" id="{7636c1e1-f2a8-96d5-0107-0e0b051491f2}">
+        <p14:section name="Working together" id="{7f676ff0-5fc8-f323-80a7-738b9272b8ab}">
           <p14:sldIdLst>
-            <p14:sldId id="267"/>
             <p14:sldId id="268"/>
             <p14:sldId id="269"/>
+            <p14:sldId id="270"/>
           </p14:sldIdLst>
         </p14:section>
       </p14:sectionLst>
@@ -638,7 +640,7 @@
           <a:p>
             <a:r>
               <a:rPr lang="en-US" dirty="0"/>
-              <a:t>Everything a client changes later — greeting, hand-over message, instructions, documents — is done in the admin console. Changes reach the bot within about 30 seconds.</a:t>
+              <a:t>How it is run: one cloud server with a single encrypted entrance; everything else (AI agents, workflow engine, database) is on a private network inside it. Containers restart automatically, health is checked continuously, the database is backed up every night and the team gets a Telegram message if a backup fails. Sign-up is invite-only on hosted servers. For clients who need it, the same setup runs in their own cloud with their own AI account.</a:t>
             </a:r>
             <a:endParaRPr lang="en-US" dirty="0"/>
           </a:p>
@@ -726,7 +728,7 @@
           <a:p>
             <a:r>
               <a:rPr lang="en-US" dirty="0"/>
-              <a:t>A pack is a preset: agents, instructions, greeting and hand-over rules for an industry. We load your documents on top and tune it during the pilot. Roadmap packs are built on request with the first client in that industry.</a:t>
+              <a:t>Everything a client changes later — greeting, hand-over message, instructions, documents — is done in the admin console. Changes reach the bot within about 30 seconds.</a:t>
             </a:r>
             <a:endParaRPr lang="en-US" dirty="0"/>
           </a:p>
@@ -814,7 +816,7 @@
           <a:p>
             <a:r>
               <a:rPr lang="en-US" dirty="0"/>
-              <a:t>You provide: your FAQs, price list and policies; a WhatsApp Business number verified with Meta; and one or two staff for the Inbox. We agree the target numbers in week 1.</a:t>
+              <a:t>A pack is a preset: agents, instructions, greeting and hand-over rules for an industry. We load your documents on top and tune it during the pilot. Roadmap packs are built on request with the first client in that industry.</a:t>
             </a:r>
             <a:endParaRPr lang="en-US" dirty="0"/>
           </a:p>
@@ -902,7 +904,7 @@
           <a:p>
             <a:r>
               <a:rPr lang="en-US" dirty="0"/>
-              <a:t>Indicative prices — confirm before sending. A pilot can be offered as the setup fee plus the first month at Starter price.</a:t>
+              <a:t>You provide: your FAQs, price list and policies; a WhatsApp Business number verified with Meta; and one or two staff for the Inbox. We agree the target numbers in week 1.</a:t>
             </a:r>
             <a:endParaRPr lang="en-US" dirty="0"/>
           </a:p>
@@ -990,7 +992,7 @@
           <a:p>
             <a:r>
               <a:rPr lang="en-US" dirty="0"/>
-              <a:t>Replace the contact line before sending.</a:t>
+              <a:t>Indicative prices — confirm before sending. A pilot can be offered as the setup fee plus the first month at Starter price.</a:t>
             </a:r>
             <a:endParaRPr lang="en-US" dirty="0"/>
           </a:p>
@@ -1014,6 +1016,94 @@
             <a:fld id="{F7021451-1387-4CA6-816F-3879F97B5CBC}" type="slidenum">
               <a:rPr lang="en-US"/>
               <a:t>14</a:t>
+            </a:fld>
+            <a:endParaRPr lang="en-US"/>
+          </a:p>
+        </p:txBody>
+      </p:sp>
+    </p:spTree>
+    <p:extLst>
+      <p:ext uri="{BB962C8B-B14F-4D97-AF65-F5344CB8AC3E}">
+        <p14:creationId xmlns:p14="http://schemas.microsoft.com/office/powerpoint/2010/main" val="1024086991"/>
+      </p:ext>
+    </p:extLst>
+  </p:cSld>
+  <p:clrMapOvr>
+    <a:masterClrMapping/>
+  </p:clrMapOvr>
+</p:notes>
+</file>
+
+<file path=ppt/notesSlides/notesSlide15.xml><?xml version="1.0" encoding="utf-8"?>
+<p:notes xmlns:a="http://schemas.openxmlformats.org/drawingml/2006/main" xmlns:r="http://schemas.openxmlformats.org/officeDocument/2006/relationships" xmlns:p="http://schemas.openxmlformats.org/presentationml/2006/main">
+  <p:cSld>
+    <p:spTree>
+      <p:nvGrpSpPr>
+        <p:cNvPr id="1" name=""/>
+        <p:cNvGrpSpPr/>
+        <p:nvPr/>
+      </p:nvGrpSpPr>
+      <p:grpSpPr>
+        <a:xfrm>
+          <a:off x="0" y="0"/>
+          <a:ext cx="0" cy="0"/>
+          <a:chOff x="0" y="0"/>
+          <a:chExt cx="0" cy="0"/>
+        </a:xfrm>
+      </p:grpSpPr>
+      <p:sp>
+        <p:nvSpPr>
+          <p:cNvPr id="2" name="Slide Image Placeholder 1"/>
+          <p:cNvSpPr>
+            <a:spLocks noGrp="1" noRot="1" noChangeAspect="1"/>
+          </p:cNvSpPr>
+          <p:nvPr>
+            <p:ph type="sldImg"/>
+          </p:nvPr>
+        </p:nvSpPr>
+        <p:spPr/>
+      </p:sp>
+      <p:sp>
+        <p:nvSpPr>
+          <p:cNvPr id="3" name="Notes Placeholder 2"/>
+          <p:cNvSpPr>
+            <a:spLocks noGrp="1"/>
+          </p:cNvSpPr>
+          <p:nvPr>
+            <p:ph type="body" idx="1"/>
+          </p:nvPr>
+        </p:nvSpPr>
+        <p:spPr/>
+        <p:txBody>
+          <a:bodyPr/>
+          <a:lstStyle/>
+          <a:p>
+            <a:r>
+              <a:rPr lang="en-US" dirty="0"/>
+              <a:t>Replace the contact line before sending.</a:t>
+            </a:r>
+            <a:endParaRPr lang="en-US" dirty="0"/>
+          </a:p>
+        </p:txBody>
+      </p:sp>
+      <p:sp>
+        <p:nvSpPr>
+          <p:cNvPr id="4" name="Slide Number Placeholder 3"/>
+          <p:cNvSpPr>
+            <a:spLocks noGrp="1"/>
+          </p:cNvSpPr>
+          <p:nvPr>
+            <p:ph type="sldNum" sz="quarter" idx="10"/>
+          </p:nvPr>
+        </p:nvSpPr>
+        <p:spPr/>
+        <p:txBody>
+          <a:bodyPr/>
+          <a:lstStyle/>
+          <a:p>
+            <a:fld id="{F7021451-1387-4CA6-816F-3879F97B5CBC}" type="slidenum">
+              <a:rPr lang="en-US"/>
+              <a:t>15</a:t>
             </a:fld>
             <a:endParaRPr lang="en-US"/>
           </a:p>
@@ -1606,7 +1696,7 @@
           <a:p>
             <a:r>
               <a:rPr lang="en-US" dirty="0"/>
-              <a:t>The biggest objection is “what if the AI does something wrong?”. Answer: anything with a side effect is a proposal a human approves, customers physically cannot reach internal tools, and every action is logged.</a:t>
+              <a:t>Studio (StoryForge) is for anyone who makes short videos — marketing teams, coaches, clinics, creators. Type a topic: it searches the latest news and web sources, summarises them with linked facts and suggests angles, then writes a script timed to the chosen length for Shorts or Reels, in the chosen language and tone. Everything is downloadable. The same research and scripting are available to AI assistants like Claude Desktop through MCP. Search uses free sources; the writing uses OpenAI.</a:t>
             </a:r>
             <a:endParaRPr lang="en-US" dirty="0"/>
           </a:p>
@@ -1694,7 +1784,7 @@
           <a:p>
             <a:r>
               <a:rPr lang="en-US" dirty="0"/>
-              <a:t>How it is run: one cloud server with a single encrypted entrance; everything else (AI agents, workflow engine, database) is on a private network inside it. Containers restart automatically, health is checked continuously, the database is backed up every night and the team gets a Telegram message if a backup fails. Sign-up is invite-only on hosted servers. For clients who need it, the same setup runs in their own cloud with their own AI account.</a:t>
+              <a:t>The biggest objection is “what if the AI does something wrong?”. Answer: anything with a side effect is a proposal a human approves, customers physically cannot reach internal tools, and every action is logged.</a:t>
             </a:r>
             <a:endParaRPr lang="en-US" dirty="0"/>
           </a:p>
@@ -2582,15 +2672,57 @@
                   <a:schemeClr val="tx1"/>
                 </a:solidFill>
               </a:rPr>
-              <a:t>Set up without writing code</a:t>
+              <a:t>Always on, safely hosted</a:t>
             </a:r>
             <a:endParaRPr lang="en-US" sz="3200" dirty="0"/>
           </a:p>
         </p:txBody>
+      </p:sp>
+      <p:sp>
+        <p:nvSpPr>
+          <p:cNvPr id="3" name="host-0"/>
+          <p:cNvSpPr/>
+          <p:nvPr/>
+        </p:nvSpPr>
+        <p:spPr>
+          <a:xfrm>
+            <a:off x="457200" y="1188720"/>
+            <a:ext cx="1828800" cy="1965960"/>
+          </a:xfrm>
+          <a:prstGeom prst="roundRect">
+            <a:avLst>
+              <a:gd name="adj" fmla="val 6000"/>
+            </a:avLst>
+          </a:prstGeom>
+          <a:solidFill>
+            <a:schemeClr val="bg2"/>
+          </a:solidFill>
+          <a:ln/>
+        </p:spPr>
+      </p:sp>
+      <p:sp>
+        <p:nvSpPr>
+          <p:cNvPr id="4" name="circle-host-0"/>
+          <p:cNvSpPr/>
+          <p:nvPr/>
+        </p:nvSpPr>
+        <p:spPr>
+          <a:xfrm>
+            <a:off x="1097280" y="1325880"/>
+            <a:ext cx="548640" cy="548640"/>
+          </a:xfrm>
+          <a:prstGeom prst="ellipse">
+            <a:avLst/>
+          </a:prstGeom>
+          <a:solidFill>
+            <a:schemeClr val="accent4"/>
+          </a:solidFill>
+          <a:ln/>
+        </p:spPr>
       </p:sp>
       <p:pic>
         <p:nvPicPr>
-          <p:cNvPr id="3" name="admin-shot" descr="Admin console agents page with on/off switches and per-agent settings">    </p:cNvPr>
+          <p:cNvPr id="5" name="icon-host-0" descr="preencoded.png">    </p:cNvPr>
           <p:cNvPicPr>
             <a:picLocks noChangeAspect="1"/>
           </p:cNvPicPr>
@@ -2604,24 +2736,155 @@
         </p:blipFill>
         <p:spPr>
           <a:xfrm>
-            <a:off x="457200" y="1188720"/>
-            <a:ext cx="4754880" cy="3268980"/>
-          </a:xfrm>
-          <a:prstGeom prst="rect">
-            <a:avLst/>
-          </a:prstGeom>
-          <a:effectLst>
-            <a:outerShdw sx="100000" sy="100000" kx="0" ky="0" algn="bl" rotWithShape="0" blurRad="101600" dist="25400" dir="5400000">
-              <a:srgbClr val="000000">
-                <a:alpha val="18000"/>
-              </a:srgbClr>
-            </a:outerShdw>
-          </a:effectLst>
+            <a:off x="1234440" y="1463040"/>
+            <a:ext cx="274320" cy="274320"/>
+          </a:xfrm>
+          <a:prstGeom prst="rect">
+            <a:avLst/>
+          </a:prstGeom>
         </p:spPr>
       </p:pic>
+      <p:sp>
+        <p:nvSpPr>
+          <p:cNvPr id="6" name="host-h-0"/>
+          <p:cNvSpPr txBox="1"/>
+          <p:nvPr/>
+        </p:nvSpPr>
+        <p:spPr>
+          <a:xfrm>
+            <a:off x="566928" y="1965960"/>
+            <a:ext cx="1609344" cy="320040"/>
+          </a:xfrm>
+          <a:prstGeom prst="rect">
+            <a:avLst/>
+          </a:prstGeom>
+          <a:noFill/>
+          <a:ln/>
+        </p:spPr>
+        <p:txBody>
+          <a:bodyPr wrap="square" lIns="0" tIns="0" rIns="0" bIns="0" rtlCol="0" anchor="t"/>
+          <a:lstStyle/>
+          <a:p>
+            <a:pPr algn="ctr" indent="0" marL="0">
+              <a:buNone/>
+            </a:pPr>
+            <a:r>
+              <a:rPr lang="en-US" sz="1400" b="1" dirty="0">
+                <a:solidFill>
+                  <a:schemeClr val="tx1"/>
+                </a:solidFill>
+              </a:rPr>
+              <a:t>Customers &amp; team</a:t>
+            </a:r>
+            <a:endParaRPr lang="en-US" sz="1400" dirty="0"/>
+          </a:p>
+        </p:txBody>
+      </p:sp>
+      <p:sp>
+        <p:nvSpPr>
+          <p:cNvPr id="7" name="host-b-0"/>
+          <p:cNvSpPr txBox="1"/>
+          <p:nvPr/>
+        </p:nvSpPr>
+        <p:spPr>
+          <a:xfrm>
+            <a:off x="594360" y="2304288"/>
+            <a:ext cx="1554480" cy="804672"/>
+          </a:xfrm>
+          <a:prstGeom prst="rect">
+            <a:avLst/>
+          </a:prstGeom>
+          <a:noFill/>
+          <a:ln/>
+        </p:spPr>
+        <p:txBody>
+          <a:bodyPr wrap="square" lIns="0" tIns="0" rIns="0" bIns="0" rtlCol="0" anchor="t"/>
+          <a:lstStyle/>
+          <a:p>
+            <a:pPr algn="ctr" indent="0" marL="0">
+              <a:buNone/>
+            </a:pPr>
+            <a:r>
+              <a:rPr lang="en-US" sz="1100" dirty="0">
+                <a:solidFill>
+                  <a:schemeClr val="accent4"/>
+                </a:solidFill>
+              </a:rPr>
+              <a:t>WhatsApp, Telegram and the web app — from any phone or browser.</a:t>
+            </a:r>
+            <a:endParaRPr lang="en-US" sz="1100" dirty="0"/>
+          </a:p>
+        </p:txBody>
+      </p:sp>
+      <p:sp>
+        <p:nvSpPr>
+          <p:cNvPr id="8" name="host-arrow-0"/>
+          <p:cNvSpPr/>
+          <p:nvPr/>
+        </p:nvSpPr>
+        <p:spPr>
+          <a:xfrm>
+            <a:off x="2313432" y="2167128"/>
+            <a:ext cx="237744" cy="0"/>
+          </a:xfrm>
+          <a:prstGeom prst="line">
+            <a:avLst/>
+          </a:prstGeom>
+          <a:noFill/>
+          <a:ln w="19050">
+            <a:solidFill>
+              <a:schemeClr val="accent4"/>
+            </a:solidFill>
+            <a:prstDash val="solid"/>
+            <a:tailEnd type="triangle"/>
+          </a:ln>
+        </p:spPr>
+      </p:sp>
+      <p:sp>
+        <p:nvSpPr>
+          <p:cNvPr id="9" name="host-1"/>
+          <p:cNvSpPr/>
+          <p:nvPr/>
+        </p:nvSpPr>
+        <p:spPr>
+          <a:xfrm>
+            <a:off x="2578608" y="1188720"/>
+            <a:ext cx="1828800" cy="1965960"/>
+          </a:xfrm>
+          <a:prstGeom prst="roundRect">
+            <a:avLst>
+              <a:gd name="adj" fmla="val 6000"/>
+            </a:avLst>
+          </a:prstGeom>
+          <a:solidFill>
+            <a:schemeClr val="bg2"/>
+          </a:solidFill>
+          <a:ln/>
+        </p:spPr>
+      </p:sp>
+      <p:sp>
+        <p:nvSpPr>
+          <p:cNvPr id="10" name="circle-host-1"/>
+          <p:cNvSpPr/>
+          <p:nvPr/>
+        </p:nvSpPr>
+        <p:spPr>
+          <a:xfrm>
+            <a:off x="3218688" y="1325880"/>
+            <a:ext cx="548640" cy="548640"/>
+          </a:xfrm>
+          <a:prstGeom prst="ellipse">
+            <a:avLst/>
+          </a:prstGeom>
+          <a:solidFill>
+            <a:schemeClr val="accent1"/>
+          </a:solidFill>
+          <a:ln/>
+        </p:spPr>
+      </p:sp>
       <p:pic>
         <p:nvPicPr>
-          <p:cNvPr id="4" name="admin-check-0" descr="preencoded.png">    </p:cNvPr>
+          <p:cNvPr id="11" name="icon-host-1" descr="preencoded.png">    </p:cNvPr>
           <p:cNvPicPr>
             <a:picLocks noChangeAspect="1"/>
           </p:cNvPicPr>
@@ -2635,8 +2898,8 @@
         </p:blipFill>
         <p:spPr>
           <a:xfrm>
-            <a:off x="5532120" y="1298448"/>
-            <a:ext cx="237744" cy="237744"/>
+            <a:off x="3355848" y="1463040"/>
+            <a:ext cx="274320" cy="274320"/>
           </a:xfrm>
           <a:prstGeom prst="rect">
             <a:avLst/>
@@ -2645,43 +2908,145 @@
       </p:pic>
       <p:sp>
         <p:nvSpPr>
-          <p:cNvPr id="5" name="admin-item-0"/>
-          <p:cNvSpPr txBox="1"/>
-          <p:nvPr/>
-        </p:nvSpPr>
-        <p:spPr>
-          <a:xfrm>
-            <a:off x="5897880" y="1234440"/>
-            <a:ext cx="2788920" cy="411480"/>
-          </a:xfrm>
-          <a:prstGeom prst="rect">
-            <a:avLst/>
-          </a:prstGeom>
-          <a:noFill/>
-          <a:ln/>
-        </p:spPr>
-        <p:txBody>
-          <a:bodyPr wrap="square" lIns="0" tIns="0" rIns="0" bIns="0" rtlCol="0" anchor="ctr"/>
-          <a:lstStyle/>
-          <a:p>
-            <a:pPr indent="0" marL="0">
-              <a:buNone/>
-            </a:pPr>
-            <a:r>
-              <a:rPr lang="en-US" sz="1300" dirty="0">
+          <p:cNvPr id="12" name="host-h-1"/>
+          <p:cNvSpPr txBox="1"/>
+          <p:nvPr/>
+        </p:nvSpPr>
+        <p:spPr>
+          <a:xfrm>
+            <a:off x="2688336" y="1965960"/>
+            <a:ext cx="1609344" cy="320040"/>
+          </a:xfrm>
+          <a:prstGeom prst="rect">
+            <a:avLst/>
+          </a:prstGeom>
+          <a:noFill/>
+          <a:ln/>
+        </p:spPr>
+        <p:txBody>
+          <a:bodyPr wrap="square" lIns="0" tIns="0" rIns="0" bIns="0" rtlCol="0" anchor="t"/>
+          <a:lstStyle/>
+          <a:p>
+            <a:pPr algn="ctr" indent="0" marL="0">
+              <a:buNone/>
+            </a:pPr>
+            <a:r>
+              <a:rPr lang="en-US" sz="1400" b="1" dirty="0">
                 <a:solidFill>
                   <a:schemeClr val="tx1"/>
                 </a:solidFill>
               </a:rPr>
-              <a:t>Switch agents on or off</a:t>
-            </a:r>
-            <a:endParaRPr lang="en-US" sz="1300" dirty="0"/>
-          </a:p>
-        </p:txBody>
+              <a:t>One secure entrance</a:t>
+            </a:r>
+            <a:endParaRPr lang="en-US" sz="1400" dirty="0"/>
+          </a:p>
+        </p:txBody>
+      </p:sp>
+      <p:sp>
+        <p:nvSpPr>
+          <p:cNvPr id="13" name="host-b-1"/>
+          <p:cNvSpPr txBox="1"/>
+          <p:nvPr/>
+        </p:nvSpPr>
+        <p:spPr>
+          <a:xfrm>
+            <a:off x="2715768" y="2304288"/>
+            <a:ext cx="1554480" cy="804672"/>
+          </a:xfrm>
+          <a:prstGeom prst="rect">
+            <a:avLst/>
+          </a:prstGeom>
+          <a:noFill/>
+          <a:ln/>
+        </p:spPr>
+        <p:txBody>
+          <a:bodyPr wrap="square" lIns="0" tIns="0" rIns="0" bIns="0" rtlCol="0" anchor="t"/>
+          <a:lstStyle/>
+          <a:p>
+            <a:pPr algn="ctr" indent="0" marL="0">
+              <a:buNone/>
+            </a:pPr>
+            <a:r>
+              <a:rPr lang="en-US" sz="1100" dirty="0">
+                <a:solidFill>
+                  <a:schemeClr val="accent4"/>
+                </a:solidFill>
+              </a:rPr>
+              <a:t>Encrypted HTTPS only. Nothing else on the server is reachable from the internet.</a:t>
+            </a:r>
+            <a:endParaRPr lang="en-US" sz="1100" dirty="0"/>
+          </a:p>
+        </p:txBody>
+      </p:sp>
+      <p:sp>
+        <p:nvSpPr>
+          <p:cNvPr id="14" name="host-arrow-1"/>
+          <p:cNvSpPr/>
+          <p:nvPr/>
+        </p:nvSpPr>
+        <p:spPr>
+          <a:xfrm>
+            <a:off x="4434840" y="2167128"/>
+            <a:ext cx="237744" cy="0"/>
+          </a:xfrm>
+          <a:prstGeom prst="line">
+            <a:avLst/>
+          </a:prstGeom>
+          <a:noFill/>
+          <a:ln w="19050">
+            <a:solidFill>
+              <a:schemeClr val="accent4"/>
+            </a:solidFill>
+            <a:prstDash val="solid"/>
+            <a:tailEnd type="triangle"/>
+          </a:ln>
+        </p:spPr>
+      </p:sp>
+      <p:sp>
+        <p:nvSpPr>
+          <p:cNvPr id="15" name="host-2"/>
+          <p:cNvSpPr/>
+          <p:nvPr/>
+        </p:nvSpPr>
+        <p:spPr>
+          <a:xfrm>
+            <a:off x="4700016" y="1188720"/>
+            <a:ext cx="1828800" cy="1965960"/>
+          </a:xfrm>
+          <a:prstGeom prst="roundRect">
+            <a:avLst>
+              <a:gd name="adj" fmla="val 6000"/>
+            </a:avLst>
+          </a:prstGeom>
+          <a:solidFill>
+            <a:schemeClr val="bg2"/>
+          </a:solidFill>
+          <a:ln/>
+        </p:spPr>
+      </p:sp>
+      <p:sp>
+        <p:nvSpPr>
+          <p:cNvPr id="16" name="circle-host-2"/>
+          <p:cNvSpPr/>
+          <p:nvPr/>
+        </p:nvSpPr>
+        <p:spPr>
+          <a:xfrm>
+            <a:off x="5340096" y="1325880"/>
+            <a:ext cx="548640" cy="548640"/>
+          </a:xfrm>
+          <a:prstGeom prst="ellipse">
+            <a:avLst/>
+          </a:prstGeom>
+          <a:solidFill>
+            <a:schemeClr val="accent2"/>
+          </a:solidFill>
+          <a:ln/>
+        </p:spPr>
       </p:sp>
       <p:pic>
         <p:nvPicPr>
-          <p:cNvPr id="6" name="admin-check-1" descr="preencoded.png">    </p:cNvPr>
+          <p:cNvPr id="17" name="icon-host-2" descr="preencoded.png">    </p:cNvPr>
           <p:cNvPicPr>
             <a:picLocks noChangeAspect="1"/>
           </p:cNvPicPr>
@@ -2695,8 +3060,8 @@
         </p:blipFill>
         <p:spPr>
           <a:xfrm>
-            <a:off x="5532120" y="1773936"/>
-            <a:ext cx="237744" cy="237744"/>
+            <a:off x="5477256" y="1463040"/>
+            <a:ext cx="274320" cy="274320"/>
           </a:xfrm>
           <a:prstGeom prst="rect">
             <a:avLst/>
@@ -2705,43 +3070,145 @@
       </p:pic>
       <p:sp>
         <p:nvSpPr>
-          <p:cNvPr id="7" name="admin-item-1"/>
-          <p:cNvSpPr txBox="1"/>
-          <p:nvPr/>
-        </p:nvSpPr>
-        <p:spPr>
-          <a:xfrm>
-            <a:off x="5897880" y="1709928"/>
-            <a:ext cx="2788920" cy="411480"/>
-          </a:xfrm>
-          <a:prstGeom prst="rect">
-            <a:avLst/>
-          </a:prstGeom>
-          <a:noFill/>
-          <a:ln/>
-        </p:spPr>
-        <p:txBody>
-          <a:bodyPr wrap="square" lIns="0" tIns="0" rIns="0" bIns="0" rtlCol="0" anchor="ctr"/>
-          <a:lstStyle/>
-          <a:p>
-            <a:pPr indent="0" marL="0">
-              <a:buNone/>
-            </a:pPr>
-            <a:r>
-              <a:rPr lang="en-US" sz="1300" dirty="0">
+          <p:cNvPr id="18" name="host-h-2"/>
+          <p:cNvSpPr txBox="1"/>
+          <p:nvPr/>
+        </p:nvSpPr>
+        <p:spPr>
+          <a:xfrm>
+            <a:off x="4809744" y="1965960"/>
+            <a:ext cx="1609344" cy="320040"/>
+          </a:xfrm>
+          <a:prstGeom prst="rect">
+            <a:avLst/>
+          </a:prstGeom>
+          <a:noFill/>
+          <a:ln/>
+        </p:spPr>
+        <p:txBody>
+          <a:bodyPr wrap="square" lIns="0" tIns="0" rIns="0" bIns="0" rtlCol="0" anchor="t"/>
+          <a:lstStyle/>
+          <a:p>
+            <a:pPr algn="ctr" indent="0" marL="0">
+              <a:buNone/>
+            </a:pPr>
+            <a:r>
+              <a:rPr lang="en-US" sz="1400" b="1" dirty="0">
                 <a:solidFill>
                   <a:schemeClr val="tx1"/>
                 </a:solidFill>
               </a:rPr>
-              <a:t>Add house rules: tone, language, what never to say</a:t>
-            </a:r>
-            <a:endParaRPr lang="en-US" sz="1300" dirty="0"/>
-          </a:p>
-        </p:txBody>
+              <a:t>SwarmAI</a:t>
+            </a:r>
+            <a:endParaRPr lang="en-US" sz="1400" dirty="0"/>
+          </a:p>
+        </p:txBody>
+      </p:sp>
+      <p:sp>
+        <p:nvSpPr>
+          <p:cNvPr id="19" name="host-b-2"/>
+          <p:cNvSpPr txBox="1"/>
+          <p:nvPr/>
+        </p:nvSpPr>
+        <p:spPr>
+          <a:xfrm>
+            <a:off x="4837176" y="2304288"/>
+            <a:ext cx="1554480" cy="804672"/>
+          </a:xfrm>
+          <a:prstGeom prst="rect">
+            <a:avLst/>
+          </a:prstGeom>
+          <a:noFill/>
+          <a:ln/>
+        </p:spPr>
+        <p:txBody>
+          <a:bodyPr wrap="square" lIns="0" tIns="0" rIns="0" bIns="0" rtlCol="0" anchor="t"/>
+          <a:lstStyle/>
+          <a:p>
+            <a:pPr algn="ctr" indent="0" marL="0">
+              <a:buNone/>
+            </a:pPr>
+            <a:r>
+              <a:rPr lang="en-US" sz="1100" dirty="0">
+                <a:solidFill>
+                  <a:schemeClr val="accent4"/>
+                </a:solidFill>
+              </a:rPr>
+              <a:t>AI agents, workflows and your data on a private network inside the server.</a:t>
+            </a:r>
+            <a:endParaRPr lang="en-US" sz="1100" dirty="0"/>
+          </a:p>
+        </p:txBody>
+      </p:sp>
+      <p:sp>
+        <p:nvSpPr>
+          <p:cNvPr id="20" name="host-arrow-2"/>
+          <p:cNvSpPr/>
+          <p:nvPr/>
+        </p:nvSpPr>
+        <p:spPr>
+          <a:xfrm>
+            <a:off x="6556248" y="2167128"/>
+            <a:ext cx="237744" cy="0"/>
+          </a:xfrm>
+          <a:prstGeom prst="line">
+            <a:avLst/>
+          </a:prstGeom>
+          <a:noFill/>
+          <a:ln w="19050">
+            <a:solidFill>
+              <a:schemeClr val="accent4"/>
+            </a:solidFill>
+            <a:prstDash val="solid"/>
+            <a:tailEnd type="triangle"/>
+          </a:ln>
+        </p:spPr>
+      </p:sp>
+      <p:sp>
+        <p:nvSpPr>
+          <p:cNvPr id="21" name="host-3"/>
+          <p:cNvSpPr/>
+          <p:nvPr/>
+        </p:nvSpPr>
+        <p:spPr>
+          <a:xfrm>
+            <a:off x="6821424" y="1188720"/>
+            <a:ext cx="1828800" cy="1965960"/>
+          </a:xfrm>
+          <a:prstGeom prst="roundRect">
+            <a:avLst>
+              <a:gd name="adj" fmla="val 6000"/>
+            </a:avLst>
+          </a:prstGeom>
+          <a:solidFill>
+            <a:schemeClr val="bg2"/>
+          </a:solidFill>
+          <a:ln/>
+        </p:spPr>
+      </p:sp>
+      <p:sp>
+        <p:nvSpPr>
+          <p:cNvPr id="22" name="circle-host-3"/>
+          <p:cNvSpPr/>
+          <p:nvPr/>
+        </p:nvSpPr>
+        <p:spPr>
+          <a:xfrm>
+            <a:off x="7461504" y="1325880"/>
+            <a:ext cx="548640" cy="548640"/>
+          </a:xfrm>
+          <a:prstGeom prst="ellipse">
+            <a:avLst/>
+          </a:prstGeom>
+          <a:solidFill>
+            <a:schemeClr val="accent2"/>
+          </a:solidFill>
+          <a:ln/>
+        </p:spPr>
       </p:sp>
       <p:pic>
         <p:nvPicPr>
-          <p:cNvPr id="8" name="admin-check-2" descr="preencoded.png">    </p:cNvPr>
+          <p:cNvPr id="23" name="icon-host-3" descr="preencoded.png">    </p:cNvPr>
           <p:cNvPicPr>
             <a:picLocks noChangeAspect="1"/>
           </p:cNvPicPr>
@@ -2755,8 +3222,8 @@
         </p:blipFill>
         <p:spPr>
           <a:xfrm>
-            <a:off x="5532120" y="2249424"/>
-            <a:ext cx="237744" cy="237744"/>
+            <a:off x="7598664" y="1463040"/>
+            <a:ext cx="274320" cy="274320"/>
           </a:xfrm>
           <a:prstGeom prst="rect">
             <a:avLst/>
@@ -2765,43 +3232,121 @@
       </p:pic>
       <p:sp>
         <p:nvSpPr>
-          <p:cNvPr id="9" name="admin-item-2"/>
-          <p:cNvSpPr txBox="1"/>
-          <p:nvPr/>
-        </p:nvSpPr>
-        <p:spPr>
-          <a:xfrm>
-            <a:off x="5897880" y="2185416"/>
-            <a:ext cx="2788920" cy="411480"/>
-          </a:xfrm>
-          <a:prstGeom prst="rect">
-            <a:avLst/>
-          </a:prstGeom>
-          <a:noFill/>
-          <a:ln/>
-        </p:spPr>
-        <p:txBody>
-          <a:bodyPr wrap="square" lIns="0" tIns="0" rIns="0" bIns="0" rtlCol="0" anchor="ctr"/>
-          <a:lstStyle/>
-          <a:p>
-            <a:pPr indent="0" marL="0">
-              <a:buNone/>
-            </a:pPr>
-            <a:r>
-              <a:rPr lang="en-US" sz="1300" dirty="0">
+          <p:cNvPr id="24" name="host-h-3"/>
+          <p:cNvSpPr txBox="1"/>
+          <p:nvPr/>
+        </p:nvSpPr>
+        <p:spPr>
+          <a:xfrm>
+            <a:off x="6931152" y="1965960"/>
+            <a:ext cx="1609344" cy="320040"/>
+          </a:xfrm>
+          <a:prstGeom prst="rect">
+            <a:avLst/>
+          </a:prstGeom>
+          <a:noFill/>
+          <a:ln/>
+        </p:spPr>
+        <p:txBody>
+          <a:bodyPr wrap="square" lIns="0" tIns="0" rIns="0" bIns="0" rtlCol="0" anchor="t"/>
+          <a:lstStyle/>
+          <a:p>
+            <a:pPr algn="ctr" indent="0" marL="0">
+              <a:buNone/>
+            </a:pPr>
+            <a:r>
+              <a:rPr lang="en-US" sz="1400" b="1" dirty="0">
                 <a:solidFill>
                   <a:schemeClr val="tx1"/>
                 </a:solidFill>
               </a:rPr>
-              <a:t>Choose models and which tools need approval</a:t>
-            </a:r>
-            <a:endParaRPr lang="en-US" sz="1300" dirty="0"/>
-          </a:p>
-        </p:txBody>
+              <a:t>Backups &amp; alerts</a:t>
+            </a:r>
+            <a:endParaRPr lang="en-US" sz="1400" dirty="0"/>
+          </a:p>
+        </p:txBody>
+      </p:sp>
+      <p:sp>
+        <p:nvSpPr>
+          <p:cNvPr id="25" name="host-b-3"/>
+          <p:cNvSpPr txBox="1"/>
+          <p:nvPr/>
+        </p:nvSpPr>
+        <p:spPr>
+          <a:xfrm>
+            <a:off x="6958584" y="2304288"/>
+            <a:ext cx="1554480" cy="804672"/>
+          </a:xfrm>
+          <a:prstGeom prst="rect">
+            <a:avLst/>
+          </a:prstGeom>
+          <a:noFill/>
+          <a:ln/>
+        </p:spPr>
+        <p:txBody>
+          <a:bodyPr wrap="square" lIns="0" tIns="0" rIns="0" bIns="0" rtlCol="0" anchor="t"/>
+          <a:lstStyle/>
+          <a:p>
+            <a:pPr algn="ctr" indent="0" marL="0">
+              <a:buNone/>
+            </a:pPr>
+            <a:r>
+              <a:rPr lang="en-US" sz="1100" dirty="0">
+                <a:solidFill>
+                  <a:schemeClr val="accent4"/>
+                </a:solidFill>
+              </a:rPr>
+              <a:t>Every night, kept 14 days. Your team is told on Telegram if anything fails.</a:t>
+            </a:r>
+            <a:endParaRPr lang="en-US" sz="1100" dirty="0"/>
+          </a:p>
+        </p:txBody>
+      </p:sp>
+      <p:sp>
+        <p:nvSpPr>
+          <p:cNvPr id="26" name="hostpt-0"/>
+          <p:cNvSpPr/>
+          <p:nvPr/>
+        </p:nvSpPr>
+        <p:spPr>
+          <a:xfrm>
+            <a:off x="457200" y="3383280"/>
+            <a:ext cx="2615184" cy="1143000"/>
+          </a:xfrm>
+          <a:prstGeom prst="roundRect">
+            <a:avLst>
+              <a:gd name="adj" fmla="val 9600"/>
+            </a:avLst>
+          </a:prstGeom>
+          <a:solidFill>
+            <a:schemeClr val="accent5"/>
+          </a:solidFill>
+          <a:ln/>
+        </p:spPr>
+      </p:sp>
+      <p:sp>
+        <p:nvSpPr>
+          <p:cNvPr id="27" name="circle-hostpt-0"/>
+          <p:cNvSpPr/>
+          <p:nvPr/>
+        </p:nvSpPr>
+        <p:spPr>
+          <a:xfrm>
+            <a:off x="640080" y="3566160"/>
+            <a:ext cx="420624" cy="420624"/>
+          </a:xfrm>
+          <a:prstGeom prst="ellipse">
+            <a:avLst/>
+          </a:prstGeom>
+          <a:solidFill>
+            <a:schemeClr val="accent1"/>
+          </a:solidFill>
+          <a:ln/>
+        </p:spPr>
       </p:sp>
       <p:pic>
         <p:nvPicPr>
-          <p:cNvPr id="10" name="admin-check-3" descr="preencoded.png">    </p:cNvPr>
+          <p:cNvPr id="28" name="icon-hostpt-0" descr="preencoded.png">    </p:cNvPr>
           <p:cNvPicPr>
             <a:picLocks noChangeAspect="1"/>
           </p:cNvPicPr>
@@ -2815,8 +3360,8 @@
         </p:blipFill>
         <p:spPr>
           <a:xfrm>
-            <a:off x="5532120" y="2724912"/>
-            <a:ext cx="237744" cy="237744"/>
+            <a:off x="745236" y="3671316"/>
+            <a:ext cx="210312" cy="210312"/>
           </a:xfrm>
           <a:prstGeom prst="rect">
             <a:avLst/>
@@ -2825,43 +3370,121 @@
       </p:pic>
       <p:sp>
         <p:nvSpPr>
-          <p:cNvPr id="11" name="admin-item-3"/>
-          <p:cNvSpPr txBox="1"/>
-          <p:nvPr/>
-        </p:nvSpPr>
-        <p:spPr>
-          <a:xfrm>
-            <a:off x="5897880" y="2660904"/>
-            <a:ext cx="2788920" cy="411480"/>
-          </a:xfrm>
-          <a:prstGeom prst="rect">
-            <a:avLst/>
-          </a:prstGeom>
-          <a:noFill/>
-          <a:ln/>
-        </p:spPr>
-        <p:txBody>
-          <a:bodyPr wrap="square" lIns="0" tIns="0" rIns="0" bIns="0" rtlCol="0" anchor="ctr"/>
+          <p:cNvPr id="29" name="hostpt-h-0"/>
+          <p:cNvSpPr txBox="1"/>
+          <p:nvPr/>
+        </p:nvSpPr>
+        <p:spPr>
+          <a:xfrm>
+            <a:off x="1170432" y="3520440"/>
+            <a:ext cx="1783080" cy="292608"/>
+          </a:xfrm>
+          <a:prstGeom prst="rect">
+            <a:avLst/>
+          </a:prstGeom>
+          <a:noFill/>
+          <a:ln/>
+        </p:spPr>
+        <p:txBody>
+          <a:bodyPr wrap="square" lIns="0" tIns="0" rIns="0" bIns="0" rtlCol="0" anchor="t"/>
           <a:lstStyle/>
           <a:p>
             <a:pPr indent="0" marL="0">
               <a:buNone/>
             </a:pPr>
             <a:r>
-              <a:rPr lang="en-US" sz="1300" dirty="0">
+              <a:rPr lang="en-US" sz="1400" b="1" dirty="0">
                 <a:solidFill>
                   <a:schemeClr val="tx1"/>
                 </a:solidFill>
               </a:rPr>
-              <a:t>Create your own agents</a:t>
-            </a:r>
-            <a:endParaRPr lang="en-US" sz="1300" dirty="0"/>
-          </a:p>
-        </p:txBody>
+              <a:t>Runs 24×7</a:t>
+            </a:r>
+            <a:endParaRPr lang="en-US" sz="1400" dirty="0"/>
+          </a:p>
+        </p:txBody>
+      </p:sp>
+      <p:sp>
+        <p:nvSpPr>
+          <p:cNvPr id="30" name="hostpt-b-0"/>
+          <p:cNvSpPr txBox="1"/>
+          <p:nvPr/>
+        </p:nvSpPr>
+        <p:spPr>
+          <a:xfrm>
+            <a:off x="1170432" y="3813048"/>
+            <a:ext cx="1810512" cy="658368"/>
+          </a:xfrm>
+          <a:prstGeom prst="rect">
+            <a:avLst/>
+          </a:prstGeom>
+          <a:noFill/>
+          <a:ln/>
+        </p:spPr>
+        <p:txBody>
+          <a:bodyPr wrap="square" lIns="0" tIns="0" rIns="0" bIns="0" rtlCol="0" anchor="t"/>
+          <a:lstStyle/>
+          <a:p>
+            <a:pPr indent="0" marL="0">
+              <a:buNone/>
+            </a:pPr>
+            <a:r>
+              <a:rPr lang="en-US" sz="1100" dirty="0">
+                <a:solidFill>
+                  <a:schemeClr val="tx1"/>
+                </a:solidFill>
+              </a:rPr>
+              <a:t>In the cloud — restarts itself after a crash or reboot. Your laptop can be off.</a:t>
+            </a:r>
+            <a:endParaRPr lang="en-US" sz="1100" dirty="0"/>
+          </a:p>
+        </p:txBody>
+      </p:sp>
+      <p:sp>
+        <p:nvSpPr>
+          <p:cNvPr id="31" name="hostpt-1"/>
+          <p:cNvSpPr/>
+          <p:nvPr/>
+        </p:nvSpPr>
+        <p:spPr>
+          <a:xfrm>
+            <a:off x="3273552" y="3383280"/>
+            <a:ext cx="2615184" cy="1143000"/>
+          </a:xfrm>
+          <a:prstGeom prst="roundRect">
+            <a:avLst>
+              <a:gd name="adj" fmla="val 9600"/>
+            </a:avLst>
+          </a:prstGeom>
+          <a:solidFill>
+            <a:schemeClr val="accent5"/>
+          </a:solidFill>
+          <a:ln/>
+        </p:spPr>
+      </p:sp>
+      <p:sp>
+        <p:nvSpPr>
+          <p:cNvPr id="32" name="circle-hostpt-1"/>
+          <p:cNvSpPr/>
+          <p:nvPr/>
+        </p:nvSpPr>
+        <p:spPr>
+          <a:xfrm>
+            <a:off x="3456432" y="3566160"/>
+            <a:ext cx="420624" cy="420624"/>
+          </a:xfrm>
+          <a:prstGeom prst="ellipse">
+            <a:avLst/>
+          </a:prstGeom>
+          <a:solidFill>
+            <a:schemeClr val="accent1"/>
+          </a:solidFill>
+          <a:ln/>
+        </p:spPr>
       </p:sp>
       <p:pic>
         <p:nvPicPr>
-          <p:cNvPr id="12" name="admin-check-4" descr="preencoded.png">    </p:cNvPr>
+          <p:cNvPr id="33" name="icon-hostpt-1" descr="preencoded.png">    </p:cNvPr>
           <p:cNvPicPr>
             <a:picLocks noChangeAspect="1"/>
           </p:cNvPicPr>
@@ -2875,8 +3498,8 @@
         </p:blipFill>
         <p:spPr>
           <a:xfrm>
-            <a:off x="5532120" y="3200400"/>
-            <a:ext cx="237744" cy="237744"/>
+            <a:off x="3561588" y="3671316"/>
+            <a:ext cx="210312" cy="210312"/>
           </a:xfrm>
           <a:prstGeom prst="rect">
             <a:avLst/>
@@ -2885,43 +3508,121 @@
       </p:pic>
       <p:sp>
         <p:nvSpPr>
-          <p:cNvPr id="13" name="admin-item-4"/>
-          <p:cNvSpPr txBox="1"/>
-          <p:nvPr/>
-        </p:nvSpPr>
-        <p:spPr>
-          <a:xfrm>
-            <a:off x="5897880" y="3136392"/>
-            <a:ext cx="2788920" cy="411480"/>
-          </a:xfrm>
-          <a:prstGeom prst="rect">
-            <a:avLst/>
-          </a:prstGeom>
-          <a:noFill/>
-          <a:ln/>
-        </p:spPr>
-        <p:txBody>
-          <a:bodyPr wrap="square" lIns="0" tIns="0" rIns="0" bIns="0" rtlCol="0" anchor="ctr"/>
+          <p:cNvPr id="34" name="hostpt-h-1"/>
+          <p:cNvSpPr txBox="1"/>
+          <p:nvPr/>
+        </p:nvSpPr>
+        <p:spPr>
+          <a:xfrm>
+            <a:off x="3986784" y="3520440"/>
+            <a:ext cx="1783080" cy="292608"/>
+          </a:xfrm>
+          <a:prstGeom prst="rect">
+            <a:avLst/>
+          </a:prstGeom>
+          <a:noFill/>
+          <a:ln/>
+        </p:spPr>
+        <p:txBody>
+          <a:bodyPr wrap="square" lIns="0" tIns="0" rIns="0" bIns="0" rtlCol="0" anchor="t"/>
           <a:lstStyle/>
           <a:p>
             <a:pPr indent="0" marL="0">
               <a:buNone/>
             </a:pPr>
             <a:r>
-              <a:rPr lang="en-US" sz="1300" dirty="0">
+              <a:rPr lang="en-US" sz="1400" b="1" dirty="0">
                 <a:solidFill>
                   <a:schemeClr val="tx1"/>
                 </a:solidFill>
               </a:rPr>
-              <a:t>Apply an industry pack in one click</a:t>
-            </a:r>
-            <a:endParaRPr lang="en-US" sz="1300" dirty="0"/>
-          </a:p>
-        </p:txBody>
+              <a:t>Invite-only access</a:t>
+            </a:r>
+            <a:endParaRPr lang="en-US" sz="1400" dirty="0"/>
+          </a:p>
+        </p:txBody>
+      </p:sp>
+      <p:sp>
+        <p:nvSpPr>
+          <p:cNvPr id="35" name="hostpt-b-1"/>
+          <p:cNvSpPr txBox="1"/>
+          <p:nvPr/>
+        </p:nvSpPr>
+        <p:spPr>
+          <a:xfrm>
+            <a:off x="3986784" y="3813048"/>
+            <a:ext cx="1810512" cy="658368"/>
+          </a:xfrm>
+          <a:prstGeom prst="rect">
+            <a:avLst/>
+          </a:prstGeom>
+          <a:noFill/>
+          <a:ln/>
+        </p:spPr>
+        <p:txBody>
+          <a:bodyPr wrap="square" lIns="0" tIns="0" rIns="0" bIns="0" rtlCol="0" anchor="t"/>
+          <a:lstStyle/>
+          <a:p>
+            <a:pPr indent="0" marL="0">
+              <a:buNone/>
+            </a:pPr>
+            <a:r>
+              <a:rPr lang="en-US" sz="1100" dirty="0">
+                <a:solidFill>
+                  <a:schemeClr val="tx1"/>
+                </a:solidFill>
+              </a:rPr>
+              <a:t>Only people you invite can create an account on your SwarmAI.</a:t>
+            </a:r>
+            <a:endParaRPr lang="en-US" sz="1100" dirty="0"/>
+          </a:p>
+        </p:txBody>
+      </p:sp>
+      <p:sp>
+        <p:nvSpPr>
+          <p:cNvPr id="36" name="hostpt-2"/>
+          <p:cNvSpPr/>
+          <p:nvPr/>
+        </p:nvSpPr>
+        <p:spPr>
+          <a:xfrm>
+            <a:off x="6089904" y="3383280"/>
+            <a:ext cx="2615184" cy="1143000"/>
+          </a:xfrm>
+          <a:prstGeom prst="roundRect">
+            <a:avLst>
+              <a:gd name="adj" fmla="val 9600"/>
+            </a:avLst>
+          </a:prstGeom>
+          <a:solidFill>
+            <a:schemeClr val="accent5"/>
+          </a:solidFill>
+          <a:ln/>
+        </p:spPr>
+      </p:sp>
+      <p:sp>
+        <p:nvSpPr>
+          <p:cNvPr id="37" name="circle-hostpt-2"/>
+          <p:cNvSpPr/>
+          <p:nvPr/>
+        </p:nvSpPr>
+        <p:spPr>
+          <a:xfrm>
+            <a:off x="6272784" y="3566160"/>
+            <a:ext cx="420624" cy="420624"/>
+          </a:xfrm>
+          <a:prstGeom prst="ellipse">
+            <a:avLst/>
+          </a:prstGeom>
+          <a:solidFill>
+            <a:schemeClr val="accent1"/>
+          </a:solidFill>
+          <a:ln/>
+        </p:spPr>
       </p:sp>
       <p:pic>
         <p:nvPicPr>
-          <p:cNvPr id="14" name="admin-check-5" descr="preencoded.png">    </p:cNvPr>
+          <p:cNvPr id="38" name="icon-hostpt-2" descr="preencoded.png">    </p:cNvPr>
           <p:cNvPicPr>
             <a:picLocks noChangeAspect="1"/>
           </p:cNvPicPr>
@@ -2935,8 +3636,8 @@
         </p:blipFill>
         <p:spPr>
           <a:xfrm>
-            <a:off x="5532120" y="3675888"/>
-            <a:ext cx="237744" cy="237744"/>
+            <a:off x="6377940" y="3671316"/>
+            <a:ext cx="210312" cy="210312"/>
           </a:xfrm>
           <a:prstGeom prst="rect">
             <a:avLst/>
@@ -2945,97 +3646,73 @@
       </p:pic>
       <p:sp>
         <p:nvSpPr>
-          <p:cNvPr id="15" name="admin-item-5"/>
-          <p:cNvSpPr txBox="1"/>
-          <p:nvPr/>
-        </p:nvSpPr>
-        <p:spPr>
-          <a:xfrm>
-            <a:off x="5897880" y="3611880"/>
-            <a:ext cx="2788920" cy="411480"/>
-          </a:xfrm>
-          <a:prstGeom prst="rect">
-            <a:avLst/>
-          </a:prstGeom>
-          <a:noFill/>
-          <a:ln/>
-        </p:spPr>
-        <p:txBody>
-          <a:bodyPr wrap="square" lIns="0" tIns="0" rIns="0" bIns="0" rtlCol="0" anchor="ctr"/>
+          <p:cNvPr id="39" name="hostpt-h-2"/>
+          <p:cNvSpPr txBox="1"/>
+          <p:nvPr/>
+        </p:nvSpPr>
+        <p:spPr>
+          <a:xfrm>
+            <a:off x="6803136" y="3520440"/>
+            <a:ext cx="1783080" cy="292608"/>
+          </a:xfrm>
+          <a:prstGeom prst="rect">
+            <a:avLst/>
+          </a:prstGeom>
+          <a:noFill/>
+          <a:ln/>
+        </p:spPr>
+        <p:txBody>
+          <a:bodyPr wrap="square" lIns="0" tIns="0" rIns="0" bIns="0" rtlCol="0" anchor="t"/>
           <a:lstStyle/>
           <a:p>
             <a:pPr indent="0" marL="0">
               <a:buNone/>
             </a:pPr>
             <a:r>
-              <a:rPr lang="en-US" sz="1300" dirty="0">
+              <a:rPr lang="en-US" sz="1400" b="1" dirty="0">
                 <a:solidFill>
                   <a:schemeClr val="tx1"/>
                 </a:solidFill>
               </a:rPr>
-              <a:t>Invite your team and set roles</a:t>
-            </a:r>
-            <a:endParaRPr lang="en-US" sz="1300" dirty="0"/>
-          </a:p>
-        </p:txBody>
-      </p:sp>
-      <p:pic>
-        <p:nvPicPr>
-          <p:cNvPr id="16" name="admin-check-6" descr="preencoded.png">    </p:cNvPr>
-          <p:cNvPicPr>
-            <a:picLocks noChangeAspect="1"/>
-          </p:cNvPicPr>
-          <p:nvPr/>
-        </p:nvPicPr>
-        <p:blipFill>
-          <a:blip r:embed="rId8"/>
-          <a:stretch>
-            <a:fillRect/>
-          </a:stretch>
-        </p:blipFill>
-        <p:spPr>
-          <a:xfrm>
-            <a:off x="5532120" y="4151376"/>
-            <a:ext cx="237744" cy="237744"/>
-          </a:xfrm>
-          <a:prstGeom prst="rect">
-            <a:avLst/>
-          </a:prstGeom>
-        </p:spPr>
-      </p:pic>
-      <p:sp>
-        <p:nvSpPr>
-          <p:cNvPr id="17" name="admin-item-6"/>
-          <p:cNvSpPr txBox="1"/>
-          <p:nvPr/>
-        </p:nvSpPr>
-        <p:spPr>
-          <a:xfrm>
-            <a:off x="5897880" y="4087368"/>
-            <a:ext cx="2788920" cy="411480"/>
-          </a:xfrm>
-          <a:prstGeom prst="rect">
-            <a:avLst/>
-          </a:prstGeom>
-          <a:noFill/>
-          <a:ln/>
-        </p:spPr>
-        <p:txBody>
-          <a:bodyPr wrap="square" lIns="0" tIns="0" rIns="0" bIns="0" rtlCol="0" anchor="ctr"/>
+              <a:t>Or in your own cloud</a:t>
+            </a:r>
+            <a:endParaRPr lang="en-US" sz="1400" dirty="0"/>
+          </a:p>
+        </p:txBody>
+      </p:sp>
+      <p:sp>
+        <p:nvSpPr>
+          <p:cNvPr id="40" name="hostpt-b-2"/>
+          <p:cNvSpPr txBox="1"/>
+          <p:nvPr/>
+        </p:nvSpPr>
+        <p:spPr>
+          <a:xfrm>
+            <a:off x="6803136" y="3813048"/>
+            <a:ext cx="1810512" cy="658368"/>
+          </a:xfrm>
+          <a:prstGeom prst="rect">
+            <a:avLst/>
+          </a:prstGeom>
+          <a:noFill/>
+          <a:ln/>
+        </p:spPr>
+        <p:txBody>
+          <a:bodyPr wrap="square" lIns="0" tIns="0" rIns="0" bIns="0" rtlCol="0" anchor="t"/>
           <a:lstStyle/>
           <a:p>
             <a:pPr indent="0" marL="0">
               <a:buNone/>
             </a:pPr>
             <a:r>
-              <a:rPr lang="en-US" sz="1300" dirty="0">
+              <a:rPr lang="en-US" sz="1100" dirty="0">
                 <a:solidFill>
                   <a:schemeClr val="tx1"/>
                 </a:solidFill>
               </a:rPr>
-              <a:t>See usage, approvals and the audit log</a:t>
-            </a:r>
-            <a:endParaRPr lang="en-US" sz="1300" dirty="0"/>
+              <a:t>The same setup runs on your server with your own AI account.</a:t>
+            </a:r>
+            <a:endParaRPr lang="en-US" sz="1100" dirty="0"/>
           </a:p>
         </p:txBody>
       </p:sp>
@@ -3141,93 +3818,15 @@
                   <a:schemeClr val="tx1"/>
                 </a:solidFill>
               </a:rPr>
-              <a:t>Ready-made industry packs</a:t>
+              <a:t>Set up without writing code</a:t>
             </a:r>
             <a:endParaRPr lang="en-US" sz="3200" dirty="0"/>
           </a:p>
         </p:txBody>
-      </p:sp>
-      <p:sp>
-        <p:nvSpPr>
-          <p:cNvPr id="3" name="packs-now"/>
-          <p:cNvSpPr txBox="1"/>
-          <p:nvPr/>
-        </p:nvSpPr>
-        <p:spPr>
-          <a:xfrm>
-            <a:off x="457200" y="1143000"/>
-            <a:ext cx="3657600" cy="274320"/>
-          </a:xfrm>
-          <a:prstGeom prst="rect">
-            <a:avLst/>
-          </a:prstGeom>
-          <a:noFill/>
-          <a:ln/>
-        </p:spPr>
-        <p:txBody>
-          <a:bodyPr wrap="square" lIns="0" tIns="0" rIns="0" bIns="0" rtlCol="0" anchor="t"/>
-          <a:lstStyle/>
-          <a:p>
-            <a:pPr indent="0" marL="0">
-              <a:buNone/>
-            </a:pPr>
-            <a:r>
-              <a:rPr lang="en-US" sz="1100" b="1" spc="200" kern="0" dirty="0">
-                <a:solidFill>
-                  <a:schemeClr val="accent2"/>
-                </a:solidFill>
-              </a:rPr>
-              <a:t>AVAILABLE NOW</a:t>
-            </a:r>
-            <a:endParaRPr lang="en-US" sz="1100" dirty="0"/>
-          </a:p>
-        </p:txBody>
-      </p:sp>
-      <p:sp>
-        <p:nvSpPr>
-          <p:cNvPr id="4" name="pack-0"/>
-          <p:cNvSpPr/>
-          <p:nvPr/>
-        </p:nvSpPr>
-        <p:spPr>
-          <a:xfrm>
-            <a:off x="457200" y="1463040"/>
-            <a:ext cx="4663440" cy="1426464"/>
-          </a:xfrm>
-          <a:prstGeom prst="roundRect">
-            <a:avLst>
-              <a:gd name="adj" fmla="val 7692"/>
-            </a:avLst>
-          </a:prstGeom>
-          <a:solidFill>
-            <a:schemeClr val="accent6"/>
-          </a:solidFill>
-          <a:ln/>
-        </p:spPr>
-      </p:sp>
-      <p:sp>
-        <p:nvSpPr>
-          <p:cNvPr id="5" name="circle-pack-0"/>
-          <p:cNvSpPr/>
-          <p:nvPr/>
-        </p:nvSpPr>
-        <p:spPr>
-          <a:xfrm>
-            <a:off x="658368" y="1664208"/>
-            <a:ext cx="548640" cy="548640"/>
-          </a:xfrm>
-          <a:prstGeom prst="ellipse">
-            <a:avLst/>
-          </a:prstGeom>
-          <a:solidFill>
-            <a:schemeClr val="accent2"/>
-          </a:solidFill>
-          <a:ln/>
-        </p:spPr>
       </p:sp>
       <p:pic>
         <p:nvPicPr>
-          <p:cNvPr id="6" name="icon-pack-0" descr="preencoded.png">    </p:cNvPr>
+          <p:cNvPr id="3" name="admin-shot" descr="Admin console agents page with on/off switches and per-agent settings">    </p:cNvPr>
           <p:cNvPicPr>
             <a:picLocks noChangeAspect="1"/>
           </p:cNvPicPr>
@@ -3241,131 +3840,24 @@
         </p:blipFill>
         <p:spPr>
           <a:xfrm>
-            <a:off x="795528" y="1801368"/>
-            <a:ext cx="274320" cy="274320"/>
-          </a:xfrm>
-          <a:prstGeom prst="rect">
-            <a:avLst/>
-          </a:prstGeom>
+            <a:off x="457200" y="1188720"/>
+            <a:ext cx="4754880" cy="3268980"/>
+          </a:xfrm>
+          <a:prstGeom prst="rect">
+            <a:avLst/>
+          </a:prstGeom>
+          <a:effectLst>
+            <a:outerShdw sx="100000" sy="100000" kx="0" ky="0" algn="bl" rotWithShape="0" blurRad="101600" dist="25400" dir="5400000">
+              <a:srgbClr val="000000">
+                <a:alpha val="18000"/>
+              </a:srgbClr>
+            </a:outerShdw>
+          </a:effectLst>
         </p:spPr>
       </p:pic>
-      <p:sp>
-        <p:nvSpPr>
-          <p:cNvPr id="7" name="pack-h-0"/>
-          <p:cNvSpPr txBox="1"/>
-          <p:nvPr/>
-        </p:nvSpPr>
-        <p:spPr>
-          <a:xfrm>
-            <a:off x="1371600" y="1627632"/>
-            <a:ext cx="3611880" cy="320040"/>
-          </a:xfrm>
-          <a:prstGeom prst="rect">
-            <a:avLst/>
-          </a:prstGeom>
-          <a:noFill/>
-          <a:ln/>
-        </p:spPr>
-        <p:txBody>
-          <a:bodyPr wrap="square" lIns="0" tIns="0" rIns="0" bIns="0" rtlCol="0" anchor="t"/>
-          <a:lstStyle/>
-          <a:p>
-            <a:pPr indent="0" marL="0">
-              <a:buNone/>
-            </a:pPr>
-            <a:r>
-              <a:rPr lang="en-US" sz="1600" b="1" dirty="0">
-                <a:solidFill>
-                  <a:schemeClr val="tx1"/>
-                </a:solidFill>
-              </a:rPr>
-              <a:t>WhatsApp Support Desk</a:t>
-            </a:r>
-            <a:endParaRPr lang="en-US" sz="1600" dirty="0"/>
-          </a:p>
-        </p:txBody>
-      </p:sp>
-      <p:sp>
-        <p:nvSpPr>
-          <p:cNvPr id="8" name="pack-b-0"/>
-          <p:cNvSpPr txBox="1"/>
-          <p:nvPr/>
-        </p:nvSpPr>
-        <p:spPr>
-          <a:xfrm>
-            <a:off x="1371600" y="1965960"/>
-            <a:ext cx="3611880" cy="868680"/>
-          </a:xfrm>
-          <a:prstGeom prst="rect">
-            <a:avLst/>
-          </a:prstGeom>
-          <a:noFill/>
-          <a:ln/>
-        </p:spPr>
-        <p:txBody>
-          <a:bodyPr wrap="square" lIns="0" tIns="0" rIns="0" bIns="0" rtlCol="0" anchor="t"/>
-          <a:lstStyle/>
-          <a:p>
-            <a:pPr indent="0" marL="0">
-              <a:buNone/>
-            </a:pPr>
-            <a:r>
-              <a:rPr lang="en-US" sz="1200" dirty="0">
-                <a:solidFill>
-                  <a:schemeClr val="tx1"/>
-                </a:solidFill>
-              </a:rPr>
-              <a:t>Product, order and policy questions answered from your documents. Complaints, refunds and cancellations go straight to your team with the order details collected.</a:t>
-            </a:r>
-            <a:endParaRPr lang="en-US" sz="1200" dirty="0"/>
-          </a:p>
-        </p:txBody>
-      </p:sp>
-      <p:sp>
-        <p:nvSpPr>
-          <p:cNvPr id="9" name="pack-1"/>
-          <p:cNvSpPr/>
-          <p:nvPr/>
-        </p:nvSpPr>
-        <p:spPr>
-          <a:xfrm>
-            <a:off x="457200" y="3035808"/>
-            <a:ext cx="4663440" cy="1426464"/>
-          </a:xfrm>
-          <a:prstGeom prst="roundRect">
-            <a:avLst>
-              <a:gd name="adj" fmla="val 7692"/>
-            </a:avLst>
-          </a:prstGeom>
-          <a:solidFill>
-            <a:schemeClr val="accent6"/>
-          </a:solidFill>
-          <a:ln/>
-        </p:spPr>
-      </p:sp>
-      <p:sp>
-        <p:nvSpPr>
-          <p:cNvPr id="10" name="circle-pack-1"/>
-          <p:cNvSpPr/>
-          <p:nvPr/>
-        </p:nvSpPr>
-        <p:spPr>
-          <a:xfrm>
-            <a:off x="658368" y="3236976"/>
-            <a:ext cx="548640" cy="548640"/>
-          </a:xfrm>
-          <a:prstGeom prst="ellipse">
-            <a:avLst/>
-          </a:prstGeom>
-          <a:solidFill>
-            <a:schemeClr val="accent2"/>
-          </a:solidFill>
-          <a:ln/>
-        </p:spPr>
-      </p:sp>
       <p:pic>
         <p:nvPicPr>
-          <p:cNvPr id="11" name="icon-pack-1" descr="preencoded.png">    </p:cNvPr>
+          <p:cNvPr id="4" name="admin-check-0" descr="preencoded.png">    </p:cNvPr>
           <p:cNvPicPr>
             <a:picLocks noChangeAspect="1"/>
           </p:cNvPicPr>
@@ -3379,8 +3871,8 @@
         </p:blipFill>
         <p:spPr>
           <a:xfrm>
-            <a:off x="795528" y="3374136"/>
-            <a:ext cx="274320" cy="274320"/>
+            <a:off x="5532120" y="1298448"/>
+            <a:ext cx="237744" cy="237744"/>
           </a:xfrm>
           <a:prstGeom prst="rect">
             <a:avLst/>
@@ -3389,137 +3881,43 @@
       </p:pic>
       <p:sp>
         <p:nvSpPr>
-          <p:cNvPr id="12" name="pack-h-1"/>
-          <p:cNvSpPr txBox="1"/>
-          <p:nvPr/>
-        </p:nvSpPr>
-        <p:spPr>
-          <a:xfrm>
-            <a:off x="1371600" y="3200400"/>
-            <a:ext cx="3611880" cy="320040"/>
-          </a:xfrm>
-          <a:prstGeom prst="rect">
-            <a:avLst/>
-          </a:prstGeom>
-          <a:noFill/>
-          <a:ln/>
-        </p:spPr>
-        <p:txBody>
-          <a:bodyPr wrap="square" lIns="0" tIns="0" rIns="0" bIns="0" rtlCol="0" anchor="t"/>
+          <p:cNvPr id="5" name="admin-item-0"/>
+          <p:cNvSpPr txBox="1"/>
+          <p:nvPr/>
+        </p:nvSpPr>
+        <p:spPr>
+          <a:xfrm>
+            <a:off x="5897880" y="1234440"/>
+            <a:ext cx="2788920" cy="411480"/>
+          </a:xfrm>
+          <a:prstGeom prst="rect">
+            <a:avLst/>
+          </a:prstGeom>
+          <a:noFill/>
+          <a:ln/>
+        </p:spPr>
+        <p:txBody>
+          <a:bodyPr wrap="square" lIns="0" tIns="0" rIns="0" bIns="0" rtlCol="0" anchor="ctr"/>
           <a:lstStyle/>
           <a:p>
             <a:pPr indent="0" marL="0">
               <a:buNone/>
             </a:pPr>
             <a:r>
-              <a:rPr lang="en-US" sz="1600" b="1" dirty="0">
+              <a:rPr lang="en-US" sz="1300" dirty="0">
                 <a:solidFill>
                   <a:schemeClr val="tx1"/>
                 </a:solidFill>
               </a:rPr>
-              <a:t>Clinic Front Desk</a:t>
-            </a:r>
-            <a:endParaRPr lang="en-US" sz="1600" dirty="0"/>
-          </a:p>
-        </p:txBody>
-      </p:sp>
-      <p:sp>
-        <p:nvSpPr>
-          <p:cNvPr id="13" name="pack-b-1"/>
-          <p:cNvSpPr txBox="1"/>
-          <p:nvPr/>
-        </p:nvSpPr>
-        <p:spPr>
-          <a:xfrm>
-            <a:off x="1371600" y="3538728"/>
-            <a:ext cx="3611880" cy="868680"/>
-          </a:xfrm>
-          <a:prstGeom prst="rect">
-            <a:avLst/>
-          </a:prstGeom>
-          <a:noFill/>
-          <a:ln/>
-        </p:spPr>
-        <p:txBody>
-          <a:bodyPr wrap="square" lIns="0" tIns="0" rIns="0" bIns="0" rtlCol="0" anchor="t"/>
-          <a:lstStyle/>
-          <a:p>
-            <a:pPr indent="0" marL="0">
-              <a:buNone/>
-            </a:pPr>
-            <a:r>
-              <a:rPr lang="en-US" sz="1200" dirty="0">
-                <a:solidFill>
-                  <a:schemeClr val="tx1"/>
-                </a:solidFill>
-              </a:rPr>
-              <a:t>Timings, fees, doctors and test preparation. Never gives medical advice. Appointment requests go to the front desk; emergencies get the 112 message.</a:t>
-            </a:r>
-            <a:endParaRPr lang="en-US" sz="1200" dirty="0"/>
-          </a:p>
-        </p:txBody>
-      </p:sp>
-      <p:sp>
-        <p:nvSpPr>
-          <p:cNvPr id="14" name="packs-next"/>
-          <p:cNvSpPr txBox="1"/>
-          <p:nvPr/>
-        </p:nvSpPr>
-        <p:spPr>
-          <a:xfrm>
-            <a:off x="5486400" y="1143000"/>
-            <a:ext cx="3200400" cy="274320"/>
-          </a:xfrm>
-          <a:prstGeom prst="rect">
-            <a:avLst/>
-          </a:prstGeom>
-          <a:noFill/>
-          <a:ln/>
-        </p:spPr>
-        <p:txBody>
-          <a:bodyPr wrap="square" lIns="0" tIns="0" rIns="0" bIns="0" rtlCol="0" anchor="t"/>
-          <a:lstStyle/>
-          <a:p>
-            <a:pPr indent="0" marL="0">
-              <a:buNone/>
-            </a:pPr>
-            <a:r>
-              <a:rPr lang="en-US" sz="1100" b="1" spc="200" kern="0" dirty="0">
-                <a:solidFill>
-                  <a:schemeClr val="accent4"/>
-                </a:solidFill>
-              </a:rPr>
-              <a:t>ON THE ROADMAP</a:t>
-            </a:r>
-            <a:endParaRPr lang="en-US" sz="1100" dirty="0"/>
-          </a:p>
-        </p:txBody>
-      </p:sp>
-      <p:sp>
-        <p:nvSpPr>
-          <p:cNvPr id="15" name="next-0"/>
-          <p:cNvSpPr/>
-          <p:nvPr/>
-        </p:nvSpPr>
-        <p:spPr>
-          <a:xfrm>
-            <a:off x="5486400" y="1463040"/>
-            <a:ext cx="3200400" cy="411480"/>
-          </a:xfrm>
-          <a:prstGeom prst="roundRect">
-            <a:avLst>
-              <a:gd name="adj" fmla="val 26667"/>
-            </a:avLst>
-          </a:prstGeom>
-          <a:solidFill>
-            <a:schemeClr val="bg2"/>
-          </a:solidFill>
-          <a:ln/>
-        </p:spPr>
+              <a:t>Switch agents on or off</a:t>
+            </a:r>
+            <a:endParaRPr lang="en-US" sz="1300" dirty="0"/>
+          </a:p>
+        </p:txBody>
       </p:sp>
       <p:pic>
         <p:nvPicPr>
-          <p:cNvPr id="16" name="next-icon-0" descr="preencoded.png">    </p:cNvPr>
+          <p:cNvPr id="6" name="admin-check-1" descr="preencoded.png">    </p:cNvPr>
           <p:cNvPicPr>
             <a:picLocks noChangeAspect="1"/>
           </p:cNvPicPr>
@@ -3533,8 +3931,8 @@
         </p:blipFill>
         <p:spPr>
           <a:xfrm>
-            <a:off x="5641848" y="1554480"/>
-            <a:ext cx="228600" cy="228600"/>
+            <a:off x="5532120" y="1773936"/>
+            <a:ext cx="237744" cy="237744"/>
           </a:xfrm>
           <a:prstGeom prst="rect">
             <a:avLst/>
@@ -3543,14 +3941,14 @@
       </p:pic>
       <p:sp>
         <p:nvSpPr>
-          <p:cNvPr id="17" name="next-t-0"/>
-          <p:cNvSpPr txBox="1"/>
-          <p:nvPr/>
-        </p:nvSpPr>
-        <p:spPr>
-          <a:xfrm>
-            <a:off x="6035040" y="1463040"/>
-            <a:ext cx="2560320" cy="411480"/>
+          <p:cNvPr id="7" name="admin-item-1"/>
+          <p:cNvSpPr txBox="1"/>
+          <p:nvPr/>
+        </p:nvSpPr>
+        <p:spPr>
+          <a:xfrm>
+            <a:off x="5897880" y="1709928"/>
+            <a:ext cx="2788920" cy="411480"/>
           </a:xfrm>
           <a:prstGeom prst="rect">
             <a:avLst/>
@@ -3571,37 +3969,15 @@
                   <a:schemeClr val="tx1"/>
                 </a:solidFill>
               </a:rPr>
-              <a:t>Sales &amp; leads</a:t>
+              <a:t>Add house rules: tone, language, what never to say</a:t>
             </a:r>
             <a:endParaRPr lang="en-US" sz="1300" dirty="0"/>
           </a:p>
         </p:txBody>
-      </p:sp>
-      <p:sp>
-        <p:nvSpPr>
-          <p:cNvPr id="18" name="next-1"/>
-          <p:cNvSpPr/>
-          <p:nvPr/>
-        </p:nvSpPr>
-        <p:spPr>
-          <a:xfrm>
-            <a:off x="5486400" y="1970532"/>
-            <a:ext cx="3200400" cy="411480"/>
-          </a:xfrm>
-          <a:prstGeom prst="roundRect">
-            <a:avLst>
-              <a:gd name="adj" fmla="val 26667"/>
-            </a:avLst>
-          </a:prstGeom>
-          <a:solidFill>
-            <a:schemeClr val="bg2"/>
-          </a:solidFill>
-          <a:ln/>
-        </p:spPr>
       </p:sp>
       <p:pic>
         <p:nvPicPr>
-          <p:cNvPr id="19" name="next-icon-1" descr="preencoded.png">    </p:cNvPr>
+          <p:cNvPr id="8" name="admin-check-2" descr="preencoded.png">    </p:cNvPr>
           <p:cNvPicPr>
             <a:picLocks noChangeAspect="1"/>
           </p:cNvPicPr>
@@ -3615,8 +3991,8 @@
         </p:blipFill>
         <p:spPr>
           <a:xfrm>
-            <a:off x="5641848" y="2061972"/>
-            <a:ext cx="228600" cy="228600"/>
+            <a:off x="5532120" y="2249424"/>
+            <a:ext cx="237744" cy="237744"/>
           </a:xfrm>
           <a:prstGeom prst="rect">
             <a:avLst/>
@@ -3625,14 +4001,14 @@
       </p:pic>
       <p:sp>
         <p:nvSpPr>
-          <p:cNvPr id="20" name="next-t-1"/>
-          <p:cNvSpPr txBox="1"/>
-          <p:nvPr/>
-        </p:nvSpPr>
-        <p:spPr>
-          <a:xfrm>
-            <a:off x="6035040" y="1970532"/>
-            <a:ext cx="2560320" cy="411480"/>
+          <p:cNvPr id="9" name="admin-item-2"/>
+          <p:cNvSpPr txBox="1"/>
+          <p:nvPr/>
+        </p:nvSpPr>
+        <p:spPr>
+          <a:xfrm>
+            <a:off x="5897880" y="2185416"/>
+            <a:ext cx="2788920" cy="411480"/>
           </a:xfrm>
           <a:prstGeom prst="rect">
             <a:avLst/>
@@ -3653,37 +4029,15 @@
                   <a:schemeClr val="tx1"/>
                 </a:solidFill>
               </a:rPr>
-              <a:t>Collections</a:t>
+              <a:t>Choose models and which tools need approval</a:t>
             </a:r>
             <a:endParaRPr lang="en-US" sz="1300" dirty="0"/>
           </a:p>
         </p:txBody>
-      </p:sp>
-      <p:sp>
-        <p:nvSpPr>
-          <p:cNvPr id="21" name="next-2"/>
-          <p:cNvSpPr/>
-          <p:nvPr/>
-        </p:nvSpPr>
-        <p:spPr>
-          <a:xfrm>
-            <a:off x="5486400" y="2478024"/>
-            <a:ext cx="3200400" cy="411480"/>
-          </a:xfrm>
-          <a:prstGeom prst="roundRect">
-            <a:avLst>
-              <a:gd name="adj" fmla="val 26667"/>
-            </a:avLst>
-          </a:prstGeom>
-          <a:solidFill>
-            <a:schemeClr val="bg2"/>
-          </a:solidFill>
-          <a:ln/>
-        </p:spPr>
       </p:sp>
       <p:pic>
         <p:nvPicPr>
-          <p:cNvPr id="22" name="next-icon-2" descr="preencoded.png">    </p:cNvPr>
+          <p:cNvPr id="10" name="admin-check-3" descr="preencoded.png">    </p:cNvPr>
           <p:cNvPicPr>
             <a:picLocks noChangeAspect="1"/>
           </p:cNvPicPr>
@@ -3697,8 +4051,8 @@
         </p:blipFill>
         <p:spPr>
           <a:xfrm>
-            <a:off x="5641848" y="2569464"/>
-            <a:ext cx="228600" cy="228600"/>
+            <a:off x="5532120" y="2724912"/>
+            <a:ext cx="237744" cy="237744"/>
           </a:xfrm>
           <a:prstGeom prst="rect">
             <a:avLst/>
@@ -3707,14 +4061,14 @@
       </p:pic>
       <p:sp>
         <p:nvSpPr>
-          <p:cNvPr id="23" name="next-t-2"/>
-          <p:cNvSpPr txBox="1"/>
-          <p:nvPr/>
-        </p:nvSpPr>
-        <p:spPr>
-          <a:xfrm>
-            <a:off x="6035040" y="2478024"/>
-            <a:ext cx="2560320" cy="411480"/>
+          <p:cNvPr id="11" name="admin-item-3"/>
+          <p:cNvSpPr txBox="1"/>
+          <p:nvPr/>
+        </p:nvSpPr>
+        <p:spPr>
+          <a:xfrm>
+            <a:off x="5897880" y="2660904"/>
+            <a:ext cx="2788920" cy="411480"/>
           </a:xfrm>
           <a:prstGeom prst="rect">
             <a:avLst/>
@@ -3735,37 +4089,15 @@
                   <a:schemeClr val="tx1"/>
                 </a:solidFill>
               </a:rPr>
-              <a:t>HR &amp; hiring</a:t>
+              <a:t>Create your own agents</a:t>
             </a:r>
             <a:endParaRPr lang="en-US" sz="1300" dirty="0"/>
           </a:p>
         </p:txBody>
-      </p:sp>
-      <p:sp>
-        <p:nvSpPr>
-          <p:cNvPr id="24" name="next-3"/>
-          <p:cNvSpPr/>
-          <p:nvPr/>
-        </p:nvSpPr>
-        <p:spPr>
-          <a:xfrm>
-            <a:off x="5486400" y="2985516"/>
-            <a:ext cx="3200400" cy="411480"/>
-          </a:xfrm>
-          <a:prstGeom prst="roundRect">
-            <a:avLst>
-              <a:gd name="adj" fmla="val 26667"/>
-            </a:avLst>
-          </a:prstGeom>
-          <a:solidFill>
-            <a:schemeClr val="bg2"/>
-          </a:solidFill>
-          <a:ln/>
-        </p:spPr>
       </p:sp>
       <p:pic>
         <p:nvPicPr>
-          <p:cNvPr id="25" name="next-icon-3" descr="preencoded.png">    </p:cNvPr>
+          <p:cNvPr id="12" name="admin-check-4" descr="preencoded.png">    </p:cNvPr>
           <p:cNvPicPr>
             <a:picLocks noChangeAspect="1"/>
           </p:cNvPicPr>
@@ -3779,8 +4111,8 @@
         </p:blipFill>
         <p:spPr>
           <a:xfrm>
-            <a:off x="5641848" y="3076956"/>
-            <a:ext cx="228600" cy="228600"/>
+            <a:off x="5532120" y="3200400"/>
+            <a:ext cx="237744" cy="237744"/>
           </a:xfrm>
           <a:prstGeom prst="rect">
             <a:avLst/>
@@ -3789,14 +4121,14 @@
       </p:pic>
       <p:sp>
         <p:nvSpPr>
-          <p:cNvPr id="26" name="next-t-3"/>
-          <p:cNvSpPr txBox="1"/>
-          <p:nvPr/>
-        </p:nvSpPr>
-        <p:spPr>
-          <a:xfrm>
-            <a:off x="6035040" y="2985516"/>
-            <a:ext cx="2560320" cy="411480"/>
+          <p:cNvPr id="13" name="admin-item-4"/>
+          <p:cNvSpPr txBox="1"/>
+          <p:nvPr/>
+        </p:nvSpPr>
+        <p:spPr>
+          <a:xfrm>
+            <a:off x="5897880" y="3136392"/>
+            <a:ext cx="2788920" cy="411480"/>
           </a:xfrm>
           <a:prstGeom prst="rect">
             <a:avLst/>
@@ -3817,37 +4149,15 @@
                   <a:schemeClr val="tx1"/>
                 </a:solidFill>
               </a:rPr>
-              <a:t>Real estate</a:t>
+              <a:t>Apply an industry pack in one click</a:t>
             </a:r>
             <a:endParaRPr lang="en-US" sz="1300" dirty="0"/>
           </a:p>
         </p:txBody>
-      </p:sp>
-      <p:sp>
-        <p:nvSpPr>
-          <p:cNvPr id="27" name="next-4"/>
-          <p:cNvSpPr/>
-          <p:nvPr/>
-        </p:nvSpPr>
-        <p:spPr>
-          <a:xfrm>
-            <a:off x="5486400" y="3493008"/>
-            <a:ext cx="3200400" cy="411480"/>
-          </a:xfrm>
-          <a:prstGeom prst="roundRect">
-            <a:avLst>
-              <a:gd name="adj" fmla="val 26667"/>
-            </a:avLst>
-          </a:prstGeom>
-          <a:solidFill>
-            <a:schemeClr val="bg2"/>
-          </a:solidFill>
-          <a:ln/>
-        </p:spPr>
       </p:sp>
       <p:pic>
         <p:nvPicPr>
-          <p:cNvPr id="28" name="next-icon-4" descr="preencoded.png">    </p:cNvPr>
+          <p:cNvPr id="14" name="admin-check-5" descr="preencoded.png">    </p:cNvPr>
           <p:cNvPicPr>
             <a:picLocks noChangeAspect="1"/>
           </p:cNvPicPr>
@@ -3861,8 +4171,8 @@
         </p:blipFill>
         <p:spPr>
           <a:xfrm>
-            <a:off x="5641848" y="3584448"/>
-            <a:ext cx="228600" cy="228600"/>
+            <a:off x="5532120" y="3675888"/>
+            <a:ext cx="237744" cy="237744"/>
           </a:xfrm>
           <a:prstGeom prst="rect">
             <a:avLst/>
@@ -3871,14 +4181,14 @@
       </p:pic>
       <p:sp>
         <p:nvSpPr>
-          <p:cNvPr id="29" name="next-t-4"/>
-          <p:cNvSpPr txBox="1"/>
-          <p:nvPr/>
-        </p:nvSpPr>
-        <p:spPr>
-          <a:xfrm>
-            <a:off x="6035040" y="3493008"/>
-            <a:ext cx="2560320" cy="411480"/>
+          <p:cNvPr id="15" name="admin-item-5"/>
+          <p:cNvSpPr txBox="1"/>
+          <p:nvPr/>
+        </p:nvSpPr>
+        <p:spPr>
+          <a:xfrm>
+            <a:off x="5897880" y="3611880"/>
+            <a:ext cx="2788920" cy="411480"/>
           </a:xfrm>
           <a:prstGeom prst="rect">
             <a:avLst/>
@@ -3899,37 +4209,15 @@
                   <a:schemeClr val="tx1"/>
                 </a:solidFill>
               </a:rPr>
-              <a:t>Education</a:t>
+              <a:t>Invite your team and set roles</a:t>
             </a:r>
             <a:endParaRPr lang="en-US" sz="1300" dirty="0"/>
           </a:p>
         </p:txBody>
-      </p:sp>
-      <p:sp>
-        <p:nvSpPr>
-          <p:cNvPr id="30" name="next-5"/>
-          <p:cNvSpPr/>
-          <p:nvPr/>
-        </p:nvSpPr>
-        <p:spPr>
-          <a:xfrm>
-            <a:off x="5486400" y="4000500"/>
-            <a:ext cx="3200400" cy="411480"/>
-          </a:xfrm>
-          <a:prstGeom prst="roundRect">
-            <a:avLst>
-              <a:gd name="adj" fmla="val 26667"/>
-            </a:avLst>
-          </a:prstGeom>
-          <a:solidFill>
-            <a:schemeClr val="bg2"/>
-          </a:solidFill>
-          <a:ln/>
-        </p:spPr>
       </p:sp>
       <p:pic>
         <p:nvPicPr>
-          <p:cNvPr id="31" name="next-icon-5" descr="preencoded.png">    </p:cNvPr>
+          <p:cNvPr id="16" name="admin-check-6" descr="preencoded.png">    </p:cNvPr>
           <p:cNvPicPr>
             <a:picLocks noChangeAspect="1"/>
           </p:cNvPicPr>
@@ -3943,8 +4231,8 @@
         </p:blipFill>
         <p:spPr>
           <a:xfrm>
-            <a:off x="5641848" y="4091940"/>
-            <a:ext cx="228600" cy="228600"/>
+            <a:off x="5532120" y="4151376"/>
+            <a:ext cx="237744" cy="237744"/>
           </a:xfrm>
           <a:prstGeom prst="rect">
             <a:avLst/>
@@ -3953,14 +4241,14 @@
       </p:pic>
       <p:sp>
         <p:nvSpPr>
-          <p:cNvPr id="32" name="next-t-5"/>
-          <p:cNvSpPr txBox="1"/>
-          <p:nvPr/>
-        </p:nvSpPr>
-        <p:spPr>
-          <a:xfrm>
-            <a:off x="6035040" y="4000500"/>
-            <a:ext cx="2560320" cy="411480"/>
+          <p:cNvPr id="17" name="admin-item-6"/>
+          <p:cNvSpPr txBox="1"/>
+          <p:nvPr/>
+        </p:nvSpPr>
+        <p:spPr>
+          <a:xfrm>
+            <a:off x="5897880" y="4087368"/>
+            <a:ext cx="2788920" cy="411480"/>
           </a:xfrm>
           <a:prstGeom prst="rect">
             <a:avLst/>
@@ -3981,7 +4269,7 @@
                   <a:schemeClr val="tx1"/>
                 </a:solidFill>
               </a:rPr>
-              <a:t>D2C commerce</a:t>
+              <a:t>See usage, approvals and the audit log</a:t>
             </a:r>
             <a:endParaRPr lang="en-US" sz="1300" dirty="0"/>
           </a:p>
@@ -4089,7 +4377,7 @@
                   <a:schemeClr val="tx1"/>
                 </a:solidFill>
               </a:rPr>
-              <a:t>Live in four weeks</a:t>
+              <a:t>Ready-made industry packs</a:t>
             </a:r>
             <a:endParaRPr lang="en-US" sz="3200" dirty="0"/>
           </a:p>
@@ -4097,37 +4385,72 @@
       </p:sp>
       <p:sp>
         <p:nvSpPr>
-          <p:cNvPr id="3" name="timeline"/>
+          <p:cNvPr id="3" name="packs-now"/>
+          <p:cNvSpPr txBox="1"/>
+          <p:nvPr/>
+        </p:nvSpPr>
+        <p:spPr>
+          <a:xfrm>
+            <a:off x="457200" y="1143000"/>
+            <a:ext cx="3657600" cy="274320"/>
+          </a:xfrm>
+          <a:prstGeom prst="rect">
+            <a:avLst/>
+          </a:prstGeom>
+          <a:noFill/>
+          <a:ln/>
+        </p:spPr>
+        <p:txBody>
+          <a:bodyPr wrap="square" lIns="0" tIns="0" rIns="0" bIns="0" rtlCol="0" anchor="t"/>
+          <a:lstStyle/>
+          <a:p>
+            <a:pPr indent="0" marL="0">
+              <a:buNone/>
+            </a:pPr>
+            <a:r>
+              <a:rPr lang="en-US" sz="1100" b="1" spc="200" kern="0" dirty="0">
+                <a:solidFill>
+                  <a:schemeClr val="accent2"/>
+                </a:solidFill>
+              </a:rPr>
+              <a:t>AVAILABLE NOW</a:t>
+            </a:r>
+            <a:endParaRPr lang="en-US" sz="1100" dirty="0"/>
+          </a:p>
+        </p:txBody>
+      </p:sp>
+      <p:sp>
+        <p:nvSpPr>
+          <p:cNvPr id="4" name="pack-0"/>
           <p:cNvSpPr/>
           <p:nvPr/>
         </p:nvSpPr>
         <p:spPr>
           <a:xfrm>
-            <a:off x="777240" y="1481328"/>
-            <a:ext cx="6309360" cy="0"/>
-          </a:xfrm>
-          <a:prstGeom prst="line">
-            <a:avLst/>
-          </a:prstGeom>
-          <a:noFill/>
-          <a:ln w="19050">
-            <a:solidFill>
-              <a:schemeClr val="accent4"/>
-            </a:solidFill>
-            <a:prstDash val="solid"/>
-          </a:ln>
-        </p:spPr>
-      </p:sp>
-      <p:sp>
-        <p:nvSpPr>
-          <p:cNvPr id="4" name="dot-0"/>
+            <a:off x="457200" y="1463040"/>
+            <a:ext cx="4663440" cy="1426464"/>
+          </a:xfrm>
+          <a:prstGeom prst="roundRect">
+            <a:avLst>
+              <a:gd name="adj" fmla="val 7692"/>
+            </a:avLst>
+          </a:prstGeom>
+          <a:solidFill>
+            <a:schemeClr val="accent6"/>
+          </a:solidFill>
+          <a:ln/>
+        </p:spPr>
+      </p:sp>
+      <p:sp>
+        <p:nvSpPr>
+          <p:cNvPr id="5" name="circle-pack-0"/>
           <p:cNvSpPr/>
           <p:nvPr/>
         </p:nvSpPr>
         <p:spPr>
           <a:xfrm>
-            <a:off x="640080" y="1344168"/>
-            <a:ext cx="274320" cy="274320"/>
+            <a:off x="658368" y="1664208"/>
+            <a:ext cx="548640" cy="548640"/>
           </a:xfrm>
           <a:prstGeom prst="ellipse">
             <a:avLst/>
@@ -4135,24 +4458,43 @@
           <a:solidFill>
             <a:schemeClr val="accent2"/>
           </a:solidFill>
-          <a:ln w="25400">
-            <a:solidFill>
-              <a:schemeClr val="bg1"/>
-            </a:solidFill>
-            <a:prstDash val="solid"/>
-          </a:ln>
-        </p:spPr>
-      </p:sp>
-      <p:sp>
-        <p:nvSpPr>
-          <p:cNvPr id="5" name="wk-0"/>
-          <p:cNvSpPr txBox="1"/>
-          <p:nvPr/>
-        </p:nvSpPr>
-        <p:spPr>
-          <a:xfrm>
-            <a:off x="457200" y="1737360"/>
-            <a:ext cx="1920240" cy="274320"/>
+          <a:ln/>
+        </p:spPr>
+      </p:sp>
+      <p:pic>
+        <p:nvPicPr>
+          <p:cNvPr id="6" name="icon-pack-0" descr="preencoded.png">    </p:cNvPr>
+          <p:cNvPicPr>
+            <a:picLocks noChangeAspect="1"/>
+          </p:cNvPicPr>
+          <p:nvPr/>
+        </p:nvPicPr>
+        <p:blipFill>
+          <a:blip r:embed="rId1"/>
+          <a:stretch>
+            <a:fillRect/>
+          </a:stretch>
+        </p:blipFill>
+        <p:spPr>
+          <a:xfrm>
+            <a:off x="795528" y="1801368"/>
+            <a:ext cx="274320" cy="274320"/>
+          </a:xfrm>
+          <a:prstGeom prst="rect">
+            <a:avLst/>
+          </a:prstGeom>
+        </p:spPr>
+      </p:pic>
+      <p:sp>
+        <p:nvSpPr>
+          <p:cNvPr id="7" name="pack-h-0"/>
+          <p:cNvSpPr txBox="1"/>
+          <p:nvPr/>
+        </p:nvSpPr>
+        <p:spPr>
+          <a:xfrm>
+            <a:off x="1371600" y="1627632"/>
+            <a:ext cx="3611880" cy="320040"/>
           </a:xfrm>
           <a:prstGeom prst="rect">
             <a:avLst/>
@@ -4168,12 +4510,48 @@
               <a:buNone/>
             </a:pPr>
             <a:r>
-              <a:rPr lang="en-US" sz="1200" b="1" dirty="0">
-                <a:solidFill>
-                  <a:schemeClr val="accent2"/>
-                </a:solidFill>
-              </a:rPr>
-              <a:t>Week 1</a:t>
+              <a:rPr lang="en-US" sz="1600" b="1" dirty="0">
+                <a:solidFill>
+                  <a:schemeClr val="tx1"/>
+                </a:solidFill>
+              </a:rPr>
+              <a:t>WhatsApp Support Desk</a:t>
+            </a:r>
+            <a:endParaRPr lang="en-US" sz="1600" dirty="0"/>
+          </a:p>
+        </p:txBody>
+      </p:sp>
+      <p:sp>
+        <p:nvSpPr>
+          <p:cNvPr id="8" name="pack-b-0"/>
+          <p:cNvSpPr txBox="1"/>
+          <p:nvPr/>
+        </p:nvSpPr>
+        <p:spPr>
+          <a:xfrm>
+            <a:off x="1371600" y="1965960"/>
+            <a:ext cx="3611880" cy="868680"/>
+          </a:xfrm>
+          <a:prstGeom prst="rect">
+            <a:avLst/>
+          </a:prstGeom>
+          <a:noFill/>
+          <a:ln/>
+        </p:spPr>
+        <p:txBody>
+          <a:bodyPr wrap="square" lIns="0" tIns="0" rIns="0" bIns="0" rtlCol="0" anchor="t"/>
+          <a:lstStyle/>
+          <a:p>
+            <a:pPr indent="0" marL="0">
+              <a:buNone/>
+            </a:pPr>
+            <a:r>
+              <a:rPr lang="en-US" sz="1200" dirty="0">
+                <a:solidFill>
+                  <a:schemeClr val="tx1"/>
+                </a:solidFill>
+              </a:rPr>
+              <a:t>Product, order and policy questions answered from your documents. Complaints, refunds and cancellations go straight to your team with the order details collected.</a:t>
             </a:r>
             <a:endParaRPr lang="en-US" sz="1200" dirty="0"/>
           </a:p>
@@ -4181,86 +4559,36 @@
       </p:sp>
       <p:sp>
         <p:nvSpPr>
-          <p:cNvPr id="6" name="wk-h-0"/>
-          <p:cNvSpPr txBox="1"/>
-          <p:nvPr/>
-        </p:nvSpPr>
-        <p:spPr>
-          <a:xfrm>
-            <a:off x="457200" y="2011680"/>
-            <a:ext cx="1920240" cy="320040"/>
-          </a:xfrm>
-          <a:prstGeom prst="rect">
-            <a:avLst/>
-          </a:prstGeom>
-          <a:noFill/>
-          <a:ln/>
-        </p:spPr>
-        <p:txBody>
-          <a:bodyPr wrap="square" lIns="0" tIns="0" rIns="0" bIns="0" rtlCol="0" anchor="t"/>
-          <a:lstStyle/>
-          <a:p>
-            <a:pPr indent="0" marL="0">
-              <a:buNone/>
-            </a:pPr>
-            <a:r>
-              <a:rPr lang="en-US" sz="1600" b="1" dirty="0">
-                <a:solidFill>
-                  <a:schemeClr val="tx1"/>
-                </a:solidFill>
-              </a:rPr>
-              <a:t>Discover &amp; load</a:t>
-            </a:r>
-            <a:endParaRPr lang="en-US" sz="1600" dirty="0"/>
-          </a:p>
-        </p:txBody>
-      </p:sp>
-      <p:sp>
-        <p:nvSpPr>
-          <p:cNvPr id="7" name="wk-b-0"/>
-          <p:cNvSpPr txBox="1"/>
-          <p:nvPr/>
-        </p:nvSpPr>
-        <p:spPr>
-          <a:xfrm>
-            <a:off x="457200" y="2377440"/>
-            <a:ext cx="1874520" cy="868680"/>
-          </a:xfrm>
-          <a:prstGeom prst="rect">
-            <a:avLst/>
-          </a:prstGeom>
-          <a:noFill/>
-          <a:ln/>
-        </p:spPr>
-        <p:txBody>
-          <a:bodyPr wrap="square" lIns="0" tIns="0" rIns="0" bIns="0" rtlCol="0" anchor="t"/>
-          <a:lstStyle/>
-          <a:p>
-            <a:pPr indent="0" marL="0">
-              <a:buNone/>
-            </a:pPr>
-            <a:r>
-              <a:rPr lang="en-US" sz="1200" dirty="0">
-                <a:solidFill>
-                  <a:schemeClr val="accent4"/>
-                </a:solidFill>
-              </a:rPr>
-              <a:t>Your top questions, hand-over rules and documents go into the knowledge base.</a:t>
-            </a:r>
-            <a:endParaRPr lang="en-US" sz="1200" dirty="0"/>
-          </a:p>
-        </p:txBody>
-      </p:sp>
-      <p:sp>
-        <p:nvSpPr>
-          <p:cNvPr id="8" name="dot-1"/>
+          <p:cNvPr id="9" name="pack-1"/>
           <p:cNvSpPr/>
           <p:nvPr/>
         </p:nvSpPr>
         <p:spPr>
           <a:xfrm>
-            <a:off x="2743200" y="1344168"/>
-            <a:ext cx="274320" cy="274320"/>
+            <a:off x="457200" y="3035808"/>
+            <a:ext cx="4663440" cy="1426464"/>
+          </a:xfrm>
+          <a:prstGeom prst="roundRect">
+            <a:avLst>
+              <a:gd name="adj" fmla="val 7692"/>
+            </a:avLst>
+          </a:prstGeom>
+          <a:solidFill>
+            <a:schemeClr val="accent6"/>
+          </a:solidFill>
+          <a:ln/>
+        </p:spPr>
+      </p:sp>
+      <p:sp>
+        <p:nvSpPr>
+          <p:cNvPr id="10" name="circle-pack-1"/>
+          <p:cNvSpPr/>
+          <p:nvPr/>
+        </p:nvSpPr>
+        <p:spPr>
+          <a:xfrm>
+            <a:off x="658368" y="3236976"/>
+            <a:ext cx="548640" cy="548640"/>
           </a:xfrm>
           <a:prstGeom prst="ellipse">
             <a:avLst/>
@@ -4268,24 +4596,43 @@
           <a:solidFill>
             <a:schemeClr val="accent2"/>
           </a:solidFill>
-          <a:ln w="25400">
-            <a:solidFill>
-              <a:schemeClr val="bg1"/>
-            </a:solidFill>
-            <a:prstDash val="solid"/>
-          </a:ln>
-        </p:spPr>
-      </p:sp>
-      <p:sp>
-        <p:nvSpPr>
-          <p:cNvPr id="9" name="wk-1"/>
-          <p:cNvSpPr txBox="1"/>
-          <p:nvPr/>
-        </p:nvSpPr>
-        <p:spPr>
-          <a:xfrm>
-            <a:off x="2560320" y="1737360"/>
-            <a:ext cx="1920240" cy="274320"/>
+          <a:ln/>
+        </p:spPr>
+      </p:sp>
+      <p:pic>
+        <p:nvPicPr>
+          <p:cNvPr id="11" name="icon-pack-1" descr="preencoded.png">    </p:cNvPr>
+          <p:cNvPicPr>
+            <a:picLocks noChangeAspect="1"/>
+          </p:cNvPicPr>
+          <p:nvPr/>
+        </p:nvPicPr>
+        <p:blipFill>
+          <a:blip r:embed="rId2"/>
+          <a:stretch>
+            <a:fillRect/>
+          </a:stretch>
+        </p:blipFill>
+        <p:spPr>
+          <a:xfrm>
+            <a:off x="795528" y="3374136"/>
+            <a:ext cx="274320" cy="274320"/>
+          </a:xfrm>
+          <a:prstGeom prst="rect">
+            <a:avLst/>
+          </a:prstGeom>
+        </p:spPr>
+      </p:pic>
+      <p:sp>
+        <p:nvSpPr>
+          <p:cNvPr id="12" name="pack-h-1"/>
+          <p:cNvSpPr txBox="1"/>
+          <p:nvPr/>
+        </p:nvSpPr>
+        <p:spPr>
+          <a:xfrm>
+            <a:off x="1371600" y="3200400"/>
+            <a:ext cx="3611880" cy="320040"/>
           </a:xfrm>
           <a:prstGeom prst="rect">
             <a:avLst/>
@@ -4301,12 +4648,48 @@
               <a:buNone/>
             </a:pPr>
             <a:r>
-              <a:rPr lang="en-US" sz="1200" b="1" dirty="0">
-                <a:solidFill>
-                  <a:schemeClr val="accent2"/>
-                </a:solidFill>
-              </a:rPr>
-              <a:t>Week 2</a:t>
+              <a:rPr lang="en-US" sz="1600" b="1" dirty="0">
+                <a:solidFill>
+                  <a:schemeClr val="tx1"/>
+                </a:solidFill>
+              </a:rPr>
+              <a:t>Clinic Front Desk</a:t>
+            </a:r>
+            <a:endParaRPr lang="en-US" sz="1600" dirty="0"/>
+          </a:p>
+        </p:txBody>
+      </p:sp>
+      <p:sp>
+        <p:nvSpPr>
+          <p:cNvPr id="13" name="pack-b-1"/>
+          <p:cNvSpPr txBox="1"/>
+          <p:nvPr/>
+        </p:nvSpPr>
+        <p:spPr>
+          <a:xfrm>
+            <a:off x="1371600" y="3538728"/>
+            <a:ext cx="3611880" cy="868680"/>
+          </a:xfrm>
+          <a:prstGeom prst="rect">
+            <a:avLst/>
+          </a:prstGeom>
+          <a:noFill/>
+          <a:ln/>
+        </p:spPr>
+        <p:txBody>
+          <a:bodyPr wrap="square" lIns="0" tIns="0" rIns="0" bIns="0" rtlCol="0" anchor="t"/>
+          <a:lstStyle/>
+          <a:p>
+            <a:pPr indent="0" marL="0">
+              <a:buNone/>
+            </a:pPr>
+            <a:r>
+              <a:rPr lang="en-US" sz="1200" dirty="0">
+                <a:solidFill>
+                  <a:schemeClr val="tx1"/>
+                </a:solidFill>
+              </a:rPr>
+              <a:t>Timings, fees, doctors and test preparation. Never gives medical advice. Appointment requests go to the front desk; emergencies get the 112 message.</a:t>
             </a:r>
             <a:endParaRPr lang="en-US" sz="1200" dirty="0"/>
           </a:p>
@@ -4314,14 +4697,14 @@
       </p:sp>
       <p:sp>
         <p:nvSpPr>
-          <p:cNvPr id="10" name="wk-h-1"/>
-          <p:cNvSpPr txBox="1"/>
-          <p:nvPr/>
-        </p:nvSpPr>
-        <p:spPr>
-          <a:xfrm>
-            <a:off x="2560320" y="2011680"/>
-            <a:ext cx="1920240" cy="320040"/>
+          <p:cNvPr id="14" name="packs-next"/>
+          <p:cNvSpPr txBox="1"/>
+          <p:nvPr/>
+        </p:nvSpPr>
+        <p:spPr>
+          <a:xfrm>
+            <a:off x="5486400" y="1143000"/>
+            <a:ext cx="3200400" cy="274320"/>
           </a:xfrm>
           <a:prstGeom prst="rect">
             <a:avLst/>
@@ -4337,387 +4720,73 @@
               <a:buNone/>
             </a:pPr>
             <a:r>
-              <a:rPr lang="en-US" sz="1600" b="1" dirty="0">
-                <a:solidFill>
-                  <a:schemeClr val="tx1"/>
-                </a:solidFill>
-              </a:rPr>
-              <a:t>Configure &amp; test</a:t>
-            </a:r>
-            <a:endParaRPr lang="en-US" sz="1600" dirty="0"/>
-          </a:p>
-        </p:txBody>
-      </p:sp>
-      <p:sp>
-        <p:nvSpPr>
-          <p:cNvPr id="11" name="wk-b-1"/>
-          <p:cNvSpPr txBox="1"/>
-          <p:nvPr/>
-        </p:nvSpPr>
-        <p:spPr>
-          <a:xfrm>
-            <a:off x="2560320" y="2377440"/>
-            <a:ext cx="1874520" cy="868680"/>
-          </a:xfrm>
-          <a:prstGeom prst="rect">
-            <a:avLst/>
-          </a:prstGeom>
-          <a:noFill/>
-          <a:ln/>
-        </p:spPr>
-        <p:txBody>
-          <a:bodyPr wrap="square" lIns="0" tIns="0" rIns="0" bIns="0" rtlCol="0" anchor="t"/>
-          <a:lstStyle/>
-          <a:p>
-            <a:pPr indent="0" marL="0">
-              <a:buNone/>
-            </a:pPr>
-            <a:r>
-              <a:rPr lang="en-US" sz="1200" dirty="0">
+              <a:rPr lang="en-US" sz="1100" b="1" spc="200" kern="0" dirty="0">
                 <a:solidFill>
                   <a:schemeClr val="accent4"/>
                 </a:solidFill>
               </a:rPr>
-              <a:t>Greeting, tone and pack set up. Your team tests as customers.</a:t>
-            </a:r>
-            <a:endParaRPr lang="en-US" sz="1200" dirty="0"/>
-          </a:p>
-        </p:txBody>
-      </p:sp>
-      <p:sp>
-        <p:nvSpPr>
-          <p:cNvPr id="12" name="dot-2"/>
+              <a:t>ON THE ROADMAP</a:t>
+            </a:r>
+            <a:endParaRPr lang="en-US" sz="1100" dirty="0"/>
+          </a:p>
+        </p:txBody>
+      </p:sp>
+      <p:sp>
+        <p:nvSpPr>
+          <p:cNvPr id="15" name="next-0"/>
           <p:cNvSpPr/>
           <p:nvPr/>
         </p:nvSpPr>
         <p:spPr>
           <a:xfrm>
-            <a:off x="4846320" y="1344168"/>
-            <a:ext cx="274320" cy="274320"/>
-          </a:xfrm>
-          <a:prstGeom prst="ellipse">
-            <a:avLst/>
-          </a:prstGeom>
-          <a:solidFill>
-            <a:schemeClr val="accent2"/>
-          </a:solidFill>
-          <a:ln w="25400">
-            <a:solidFill>
-              <a:schemeClr val="bg1"/>
-            </a:solidFill>
-            <a:prstDash val="solid"/>
-          </a:ln>
-        </p:spPr>
-      </p:sp>
-      <p:sp>
-        <p:nvSpPr>
-          <p:cNvPr id="13" name="wk-2"/>
-          <p:cNvSpPr txBox="1"/>
-          <p:nvPr/>
-        </p:nvSpPr>
-        <p:spPr>
-          <a:xfrm>
-            <a:off x="4663440" y="1737360"/>
-            <a:ext cx="1920240" cy="274320"/>
-          </a:xfrm>
-          <a:prstGeom prst="rect">
-            <a:avLst/>
-          </a:prstGeom>
-          <a:noFill/>
-          <a:ln/>
-        </p:spPr>
-        <p:txBody>
-          <a:bodyPr wrap="square" lIns="0" tIns="0" rIns="0" bIns="0" rtlCol="0" anchor="t"/>
-          <a:lstStyle/>
-          <a:p>
-            <a:pPr indent="0" marL="0">
-              <a:buNone/>
-            </a:pPr>
-            <a:r>
-              <a:rPr lang="en-US" sz="1200" b="1" dirty="0">
-                <a:solidFill>
-                  <a:schemeClr val="accent2"/>
-                </a:solidFill>
-              </a:rPr>
-              <a:t>Week 3</a:t>
-            </a:r>
-            <a:endParaRPr lang="en-US" sz="1200" dirty="0"/>
-          </a:p>
-        </p:txBody>
-      </p:sp>
-      <p:sp>
-        <p:nvSpPr>
-          <p:cNvPr id="14" name="wk-h-2"/>
-          <p:cNvSpPr txBox="1"/>
-          <p:nvPr/>
-        </p:nvSpPr>
-        <p:spPr>
-          <a:xfrm>
-            <a:off x="4663440" y="2011680"/>
-            <a:ext cx="1920240" cy="320040"/>
-          </a:xfrm>
-          <a:prstGeom prst="rect">
-            <a:avLst/>
-          </a:prstGeom>
-          <a:noFill/>
-          <a:ln/>
-        </p:spPr>
-        <p:txBody>
-          <a:bodyPr wrap="square" lIns="0" tIns="0" rIns="0" bIns="0" rtlCol="0" anchor="t"/>
-          <a:lstStyle/>
-          <a:p>
-            <a:pPr indent="0" marL="0">
-              <a:buNone/>
-            </a:pPr>
-            <a:r>
-              <a:rPr lang="en-US" sz="1600" b="1" dirty="0">
-                <a:solidFill>
-                  <a:schemeClr val="tx1"/>
-                </a:solidFill>
-              </a:rPr>
-              <a:t>Soft launch</a:t>
-            </a:r>
-            <a:endParaRPr lang="en-US" sz="1600" dirty="0"/>
-          </a:p>
-        </p:txBody>
-      </p:sp>
-      <p:sp>
-        <p:nvSpPr>
-          <p:cNvPr id="15" name="wk-b-2"/>
-          <p:cNvSpPr txBox="1"/>
-          <p:nvPr/>
-        </p:nvSpPr>
-        <p:spPr>
-          <a:xfrm>
-            <a:off x="4663440" y="2377440"/>
-            <a:ext cx="1874520" cy="868680"/>
-          </a:xfrm>
-          <a:prstGeom prst="rect">
-            <a:avLst/>
-          </a:prstGeom>
-          <a:noFill/>
-          <a:ln/>
-        </p:spPr>
-        <p:txBody>
-          <a:bodyPr wrap="square" lIns="0" tIns="0" rIns="0" bIns="0" rtlCol="0" anchor="t"/>
-          <a:lstStyle/>
-          <a:p>
-            <a:pPr indent="0" marL="0">
-              <a:buNone/>
-            </a:pPr>
-            <a:r>
-              <a:rPr lang="en-US" sz="1200" dirty="0">
-                <a:solidFill>
-                  <a:schemeClr val="accent4"/>
-                </a:solidFill>
-              </a:rPr>
-              <a:t>Live on your WhatsApp number. Your team handles hand-overs from the Inbox.</a:t>
-            </a:r>
-            <a:endParaRPr lang="en-US" sz="1200" dirty="0"/>
-          </a:p>
-        </p:txBody>
-      </p:sp>
-      <p:sp>
-        <p:nvSpPr>
-          <p:cNvPr id="16" name="dot-3"/>
-          <p:cNvSpPr/>
-          <p:nvPr/>
-        </p:nvSpPr>
-        <p:spPr>
-          <a:xfrm>
-            <a:off x="6949440" y="1344168"/>
-            <a:ext cx="274320" cy="274320"/>
-          </a:xfrm>
-          <a:prstGeom prst="ellipse">
-            <a:avLst/>
-          </a:prstGeom>
-          <a:solidFill>
-            <a:schemeClr val="accent1"/>
-          </a:solidFill>
-          <a:ln w="25400">
-            <a:solidFill>
-              <a:schemeClr val="bg1"/>
-            </a:solidFill>
-            <a:prstDash val="solid"/>
-          </a:ln>
-        </p:spPr>
-      </p:sp>
-      <p:sp>
-        <p:nvSpPr>
-          <p:cNvPr id="17" name="wk-3"/>
-          <p:cNvSpPr txBox="1"/>
-          <p:nvPr/>
-        </p:nvSpPr>
-        <p:spPr>
-          <a:xfrm>
-            <a:off x="6766560" y="1737360"/>
-            <a:ext cx="1920240" cy="274320"/>
-          </a:xfrm>
-          <a:prstGeom prst="rect">
-            <a:avLst/>
-          </a:prstGeom>
-          <a:noFill/>
-          <a:ln/>
-        </p:spPr>
-        <p:txBody>
-          <a:bodyPr wrap="square" lIns="0" tIns="0" rIns="0" bIns="0" rtlCol="0" anchor="t"/>
-          <a:lstStyle/>
-          <a:p>
-            <a:pPr indent="0" marL="0">
-              <a:buNone/>
-            </a:pPr>
-            <a:r>
-              <a:rPr lang="en-US" sz="1200" b="1" dirty="0">
-                <a:solidFill>
-                  <a:schemeClr val="accent1"/>
-                </a:solidFill>
-              </a:rPr>
-              <a:t>Week 4</a:t>
-            </a:r>
-            <a:endParaRPr lang="en-US" sz="1200" dirty="0"/>
-          </a:p>
-        </p:txBody>
-      </p:sp>
-      <p:sp>
-        <p:nvSpPr>
-          <p:cNvPr id="18" name="wk-h-3"/>
-          <p:cNvSpPr txBox="1"/>
-          <p:nvPr/>
-        </p:nvSpPr>
-        <p:spPr>
-          <a:xfrm>
-            <a:off x="6766560" y="2011680"/>
-            <a:ext cx="1920240" cy="320040"/>
-          </a:xfrm>
-          <a:prstGeom prst="rect">
-            <a:avLst/>
-          </a:prstGeom>
-          <a:noFill/>
-          <a:ln/>
-        </p:spPr>
-        <p:txBody>
-          <a:bodyPr wrap="square" lIns="0" tIns="0" rIns="0" bIns="0" rtlCol="0" anchor="t"/>
-          <a:lstStyle/>
-          <a:p>
-            <a:pPr indent="0" marL="0">
-              <a:buNone/>
-            </a:pPr>
-            <a:r>
-              <a:rPr lang="en-US" sz="1600" b="1" dirty="0">
-                <a:solidFill>
-                  <a:schemeClr val="tx1"/>
-                </a:solidFill>
-              </a:rPr>
-              <a:t>Review &amp; go live</a:t>
-            </a:r>
-            <a:endParaRPr lang="en-US" sz="1600" dirty="0"/>
-          </a:p>
-        </p:txBody>
-      </p:sp>
-      <p:sp>
-        <p:nvSpPr>
-          <p:cNvPr id="19" name="wk-b-3"/>
-          <p:cNvSpPr txBox="1"/>
-          <p:nvPr/>
-        </p:nvSpPr>
-        <p:spPr>
-          <a:xfrm>
-            <a:off x="6766560" y="2377440"/>
-            <a:ext cx="1874520" cy="868680"/>
-          </a:xfrm>
-          <a:prstGeom prst="rect">
-            <a:avLst/>
-          </a:prstGeom>
-          <a:noFill/>
-          <a:ln/>
-        </p:spPr>
-        <p:txBody>
-          <a:bodyPr wrap="square" lIns="0" tIns="0" rIns="0" bIns="0" rtlCol="0" anchor="t"/>
-          <a:lstStyle/>
-          <a:p>
-            <a:pPr indent="0" marL="0">
-              <a:buNone/>
-            </a:pPr>
-            <a:r>
-              <a:rPr lang="en-US" sz="1200" dirty="0">
-                <a:solidFill>
-                  <a:schemeClr val="accent4"/>
-                </a:solidFill>
-              </a:rPr>
-              <a:t>We review the numbers together, fill knowledge gaps and switch fully on.</a:t>
-            </a:r>
-            <a:endParaRPr lang="en-US" sz="1200" dirty="0"/>
-          </a:p>
-        </p:txBody>
-      </p:sp>
-      <p:sp>
-        <p:nvSpPr>
-          <p:cNvPr id="20" name="kpi-label"/>
-          <p:cNvSpPr txBox="1"/>
-          <p:nvPr/>
-        </p:nvSpPr>
-        <p:spPr>
-          <a:xfrm>
-            <a:off x="457200" y="3429000"/>
-            <a:ext cx="3657600" cy="274320"/>
-          </a:xfrm>
-          <a:prstGeom prst="rect">
-            <a:avLst/>
-          </a:prstGeom>
-          <a:noFill/>
-          <a:ln/>
-        </p:spPr>
-        <p:txBody>
-          <a:bodyPr wrap="square" lIns="0" tIns="0" rIns="0" bIns="0" rtlCol="0" anchor="t"/>
-          <a:lstStyle/>
-          <a:p>
-            <a:pPr indent="0" marL="0">
-              <a:buNone/>
-            </a:pPr>
-            <a:r>
-              <a:rPr lang="en-US" sz="1100" b="1" spc="200" kern="0" dirty="0">
-                <a:solidFill>
-                  <a:schemeClr val="accent4"/>
-                </a:solidFill>
-              </a:rPr>
-              <a:t>WHAT WE MEASURE</a:t>
-            </a:r>
-            <a:endParaRPr lang="en-US" sz="1100" dirty="0"/>
-          </a:p>
-        </p:txBody>
-      </p:sp>
-      <p:sp>
-        <p:nvSpPr>
-          <p:cNvPr id="21" name="kpi-0"/>
-          <p:cNvSpPr/>
-          <p:nvPr/>
-        </p:nvSpPr>
-        <p:spPr>
-          <a:xfrm>
-            <a:off x="457200" y="3749040"/>
-            <a:ext cx="1965960" cy="685800"/>
+            <a:off x="5486400" y="1463040"/>
+            <a:ext cx="3200400" cy="411480"/>
           </a:xfrm>
           <a:prstGeom prst="roundRect">
             <a:avLst>
-              <a:gd name="adj" fmla="val 16000"/>
+              <a:gd name="adj" fmla="val 26667"/>
             </a:avLst>
           </a:prstGeom>
           <a:solidFill>
-            <a:schemeClr val="accent5"/>
+            <a:schemeClr val="bg2"/>
           </a:solidFill>
           <a:ln/>
         </p:spPr>
       </p:sp>
-      <p:sp>
-        <p:nvSpPr>
-          <p:cNvPr id="22" name="kpi-t-0"/>
-          <p:cNvSpPr txBox="1"/>
-          <p:nvPr/>
-        </p:nvSpPr>
-        <p:spPr>
-          <a:xfrm>
-            <a:off x="594360" y="3749040"/>
-            <a:ext cx="1691640" cy="685800"/>
+      <p:pic>
+        <p:nvPicPr>
+          <p:cNvPr id="16" name="next-icon-0" descr="preencoded.png">    </p:cNvPr>
+          <p:cNvPicPr>
+            <a:picLocks noChangeAspect="1"/>
+          </p:cNvPicPr>
+          <p:nvPr/>
+        </p:nvPicPr>
+        <p:blipFill>
+          <a:blip r:embed="rId3"/>
+          <a:stretch>
+            <a:fillRect/>
+          </a:stretch>
+        </p:blipFill>
+        <p:spPr>
+          <a:xfrm>
+            <a:off x="5641848" y="1554480"/>
+            <a:ext cx="228600" cy="228600"/>
+          </a:xfrm>
+          <a:prstGeom prst="rect">
+            <a:avLst/>
+          </a:prstGeom>
+        </p:spPr>
+      </p:pic>
+      <p:sp>
+        <p:nvSpPr>
+          <p:cNvPr id="17" name="next-t-0"/>
+          <p:cNvSpPr txBox="1"/>
+          <p:nvPr/>
+        </p:nvSpPr>
+        <p:spPr>
+          <a:xfrm>
+            <a:off x="6035040" y="1463040"/>
+            <a:ext cx="2560320" cy="411480"/>
           </a:xfrm>
           <a:prstGeom prst="rect">
             <a:avLst/>
@@ -4733,12 +4802,12 @@
               <a:buNone/>
             </a:pPr>
             <a:r>
-              <a:rPr lang="en-US" sz="1300" b="1" dirty="0">
+              <a:rPr lang="en-US" sz="1300" dirty="0">
                 <a:solidFill>
                   <a:schemeClr val="tx1"/>
                 </a:solidFill>
               </a:rPr>
-              <a:t>Questions answered by the bot</a:t>
+              <a:t>Sales &amp; leads</a:t>
             </a:r>
             <a:endParaRPr lang="en-US" sz="1300" dirty="0"/>
           </a:p>
@@ -4746,36 +4815,60 @@
       </p:sp>
       <p:sp>
         <p:nvSpPr>
-          <p:cNvPr id="23" name="kpi-1"/>
+          <p:cNvPr id="18" name="next-1"/>
           <p:cNvSpPr/>
           <p:nvPr/>
         </p:nvSpPr>
         <p:spPr>
           <a:xfrm>
-            <a:off x="2560320" y="3749040"/>
-            <a:ext cx="1965960" cy="685800"/>
+            <a:off x="5486400" y="1970532"/>
+            <a:ext cx="3200400" cy="411480"/>
           </a:xfrm>
           <a:prstGeom prst="roundRect">
             <a:avLst>
-              <a:gd name="adj" fmla="val 16000"/>
+              <a:gd name="adj" fmla="val 26667"/>
             </a:avLst>
           </a:prstGeom>
           <a:solidFill>
-            <a:schemeClr val="accent5"/>
+            <a:schemeClr val="bg2"/>
           </a:solidFill>
           <a:ln/>
         </p:spPr>
       </p:sp>
-      <p:sp>
-        <p:nvSpPr>
-          <p:cNvPr id="24" name="kpi-t-1"/>
-          <p:cNvSpPr txBox="1"/>
-          <p:nvPr/>
-        </p:nvSpPr>
-        <p:spPr>
-          <a:xfrm>
-            <a:off x="2697480" y="3749040"/>
-            <a:ext cx="1691640" cy="685800"/>
+      <p:pic>
+        <p:nvPicPr>
+          <p:cNvPr id="19" name="next-icon-1" descr="preencoded.png">    </p:cNvPr>
+          <p:cNvPicPr>
+            <a:picLocks noChangeAspect="1"/>
+          </p:cNvPicPr>
+          <p:nvPr/>
+        </p:nvPicPr>
+        <p:blipFill>
+          <a:blip r:embed="rId4"/>
+          <a:stretch>
+            <a:fillRect/>
+          </a:stretch>
+        </p:blipFill>
+        <p:spPr>
+          <a:xfrm>
+            <a:off x="5641848" y="2061972"/>
+            <a:ext cx="228600" cy="228600"/>
+          </a:xfrm>
+          <a:prstGeom prst="rect">
+            <a:avLst/>
+          </a:prstGeom>
+        </p:spPr>
+      </p:pic>
+      <p:sp>
+        <p:nvSpPr>
+          <p:cNvPr id="20" name="next-t-1"/>
+          <p:cNvSpPr txBox="1"/>
+          <p:nvPr/>
+        </p:nvSpPr>
+        <p:spPr>
+          <a:xfrm>
+            <a:off x="6035040" y="1970532"/>
+            <a:ext cx="2560320" cy="411480"/>
           </a:xfrm>
           <a:prstGeom prst="rect">
             <a:avLst/>
@@ -4791,12 +4884,12 @@
               <a:buNone/>
             </a:pPr>
             <a:r>
-              <a:rPr lang="en-US" sz="1300" b="1" dirty="0">
+              <a:rPr lang="en-US" sz="1300" dirty="0">
                 <a:solidFill>
                   <a:schemeClr val="tx1"/>
                 </a:solidFill>
               </a:rPr>
-              <a:t>First-reply time</a:t>
+              <a:t>Collections</a:t>
             </a:r>
             <a:endParaRPr lang="en-US" sz="1300" dirty="0"/>
           </a:p>
@@ -4804,36 +4897,60 @@
       </p:sp>
       <p:sp>
         <p:nvSpPr>
-          <p:cNvPr id="25" name="kpi-2"/>
+          <p:cNvPr id="21" name="next-2"/>
           <p:cNvSpPr/>
           <p:nvPr/>
         </p:nvSpPr>
         <p:spPr>
           <a:xfrm>
-            <a:off x="4663440" y="3749040"/>
-            <a:ext cx="1965960" cy="685800"/>
+            <a:off x="5486400" y="2478024"/>
+            <a:ext cx="3200400" cy="411480"/>
           </a:xfrm>
           <a:prstGeom prst="roundRect">
             <a:avLst>
-              <a:gd name="adj" fmla="val 16000"/>
+              <a:gd name="adj" fmla="val 26667"/>
             </a:avLst>
           </a:prstGeom>
           <a:solidFill>
-            <a:schemeClr val="accent5"/>
+            <a:schemeClr val="bg2"/>
           </a:solidFill>
           <a:ln/>
         </p:spPr>
       </p:sp>
-      <p:sp>
-        <p:nvSpPr>
-          <p:cNvPr id="26" name="kpi-t-2"/>
-          <p:cNvSpPr txBox="1"/>
-          <p:nvPr/>
-        </p:nvSpPr>
-        <p:spPr>
-          <a:xfrm>
-            <a:off x="4800600" y="3749040"/>
-            <a:ext cx="1691640" cy="685800"/>
+      <p:pic>
+        <p:nvPicPr>
+          <p:cNvPr id="22" name="next-icon-2" descr="preencoded.png">    </p:cNvPr>
+          <p:cNvPicPr>
+            <a:picLocks noChangeAspect="1"/>
+          </p:cNvPicPr>
+          <p:nvPr/>
+        </p:nvPicPr>
+        <p:blipFill>
+          <a:blip r:embed="rId5"/>
+          <a:stretch>
+            <a:fillRect/>
+          </a:stretch>
+        </p:blipFill>
+        <p:spPr>
+          <a:xfrm>
+            <a:off x="5641848" y="2569464"/>
+            <a:ext cx="228600" cy="228600"/>
+          </a:xfrm>
+          <a:prstGeom prst="rect">
+            <a:avLst/>
+          </a:prstGeom>
+        </p:spPr>
+      </p:pic>
+      <p:sp>
+        <p:nvSpPr>
+          <p:cNvPr id="23" name="next-t-2"/>
+          <p:cNvSpPr txBox="1"/>
+          <p:nvPr/>
+        </p:nvSpPr>
+        <p:spPr>
+          <a:xfrm>
+            <a:off x="6035040" y="2478024"/>
+            <a:ext cx="2560320" cy="411480"/>
           </a:xfrm>
           <a:prstGeom prst="rect">
             <a:avLst/>
@@ -4849,12 +4966,12 @@
               <a:buNone/>
             </a:pPr>
             <a:r>
-              <a:rPr lang="en-US" sz="1300" b="1" dirty="0">
+              <a:rPr lang="en-US" sz="1300" dirty="0">
                 <a:solidFill>
                   <a:schemeClr val="tx1"/>
                 </a:solidFill>
               </a:rPr>
-              <a:t>Chats handed to your team</a:t>
+              <a:t>HR &amp; hiring</a:t>
             </a:r>
             <a:endParaRPr lang="en-US" sz="1300" dirty="0"/>
           </a:p>
@@ -4862,36 +4979,60 @@
       </p:sp>
       <p:sp>
         <p:nvSpPr>
-          <p:cNvPr id="27" name="kpi-3"/>
+          <p:cNvPr id="24" name="next-3"/>
           <p:cNvSpPr/>
           <p:nvPr/>
         </p:nvSpPr>
         <p:spPr>
           <a:xfrm>
-            <a:off x="6766560" y="3749040"/>
-            <a:ext cx="1965960" cy="685800"/>
+            <a:off x="5486400" y="2985516"/>
+            <a:ext cx="3200400" cy="411480"/>
           </a:xfrm>
           <a:prstGeom prst="roundRect">
             <a:avLst>
-              <a:gd name="adj" fmla="val 16000"/>
+              <a:gd name="adj" fmla="val 26667"/>
             </a:avLst>
           </a:prstGeom>
           <a:solidFill>
-            <a:schemeClr val="accent5"/>
+            <a:schemeClr val="bg2"/>
           </a:solidFill>
           <a:ln/>
         </p:spPr>
       </p:sp>
-      <p:sp>
-        <p:nvSpPr>
-          <p:cNvPr id="28" name="kpi-t-3"/>
-          <p:cNvSpPr txBox="1"/>
-          <p:nvPr/>
-        </p:nvSpPr>
-        <p:spPr>
-          <a:xfrm>
-            <a:off x="6903720" y="3749040"/>
-            <a:ext cx="1691640" cy="685800"/>
+      <p:pic>
+        <p:nvPicPr>
+          <p:cNvPr id="25" name="next-icon-3" descr="preencoded.png">    </p:cNvPr>
+          <p:cNvPicPr>
+            <a:picLocks noChangeAspect="1"/>
+          </p:cNvPicPr>
+          <p:nvPr/>
+        </p:nvPicPr>
+        <p:blipFill>
+          <a:blip r:embed="rId6"/>
+          <a:stretch>
+            <a:fillRect/>
+          </a:stretch>
+        </p:blipFill>
+        <p:spPr>
+          <a:xfrm>
+            <a:off x="5641848" y="3076956"/>
+            <a:ext cx="228600" cy="228600"/>
+          </a:xfrm>
+          <a:prstGeom prst="rect">
+            <a:avLst/>
+          </a:prstGeom>
+        </p:spPr>
+      </p:pic>
+      <p:sp>
+        <p:nvSpPr>
+          <p:cNvPr id="26" name="next-t-3"/>
+          <p:cNvSpPr txBox="1"/>
+          <p:nvPr/>
+        </p:nvSpPr>
+        <p:spPr>
+          <a:xfrm>
+            <a:off x="6035040" y="2985516"/>
+            <a:ext cx="2560320" cy="411480"/>
           </a:xfrm>
           <a:prstGeom prst="rect">
             <a:avLst/>
@@ -4907,12 +5048,176 @@
               <a:buNone/>
             </a:pPr>
             <a:r>
-              <a:rPr lang="en-US" sz="1300" b="1" dirty="0">
+              <a:rPr lang="en-US" sz="1300" dirty="0">
                 <a:solidFill>
                   <a:schemeClr val="tx1"/>
                 </a:solidFill>
               </a:rPr>
-              <a:t>Customer satisfaction</a:t>
+              <a:t>Real estate</a:t>
+            </a:r>
+            <a:endParaRPr lang="en-US" sz="1300" dirty="0"/>
+          </a:p>
+        </p:txBody>
+      </p:sp>
+      <p:sp>
+        <p:nvSpPr>
+          <p:cNvPr id="27" name="next-4"/>
+          <p:cNvSpPr/>
+          <p:nvPr/>
+        </p:nvSpPr>
+        <p:spPr>
+          <a:xfrm>
+            <a:off x="5486400" y="3493008"/>
+            <a:ext cx="3200400" cy="411480"/>
+          </a:xfrm>
+          <a:prstGeom prst="roundRect">
+            <a:avLst>
+              <a:gd name="adj" fmla="val 26667"/>
+            </a:avLst>
+          </a:prstGeom>
+          <a:solidFill>
+            <a:schemeClr val="bg2"/>
+          </a:solidFill>
+          <a:ln/>
+        </p:spPr>
+      </p:sp>
+      <p:pic>
+        <p:nvPicPr>
+          <p:cNvPr id="28" name="next-icon-4" descr="preencoded.png">    </p:cNvPr>
+          <p:cNvPicPr>
+            <a:picLocks noChangeAspect="1"/>
+          </p:cNvPicPr>
+          <p:nvPr/>
+        </p:nvPicPr>
+        <p:blipFill>
+          <a:blip r:embed="rId7"/>
+          <a:stretch>
+            <a:fillRect/>
+          </a:stretch>
+        </p:blipFill>
+        <p:spPr>
+          <a:xfrm>
+            <a:off x="5641848" y="3584448"/>
+            <a:ext cx="228600" cy="228600"/>
+          </a:xfrm>
+          <a:prstGeom prst="rect">
+            <a:avLst/>
+          </a:prstGeom>
+        </p:spPr>
+      </p:pic>
+      <p:sp>
+        <p:nvSpPr>
+          <p:cNvPr id="29" name="next-t-4"/>
+          <p:cNvSpPr txBox="1"/>
+          <p:nvPr/>
+        </p:nvSpPr>
+        <p:spPr>
+          <a:xfrm>
+            <a:off x="6035040" y="3493008"/>
+            <a:ext cx="2560320" cy="411480"/>
+          </a:xfrm>
+          <a:prstGeom prst="rect">
+            <a:avLst/>
+          </a:prstGeom>
+          <a:noFill/>
+          <a:ln/>
+        </p:spPr>
+        <p:txBody>
+          <a:bodyPr wrap="square" lIns="0" tIns="0" rIns="0" bIns="0" rtlCol="0" anchor="ctr"/>
+          <a:lstStyle/>
+          <a:p>
+            <a:pPr indent="0" marL="0">
+              <a:buNone/>
+            </a:pPr>
+            <a:r>
+              <a:rPr lang="en-US" sz="1300" dirty="0">
+                <a:solidFill>
+                  <a:schemeClr val="tx1"/>
+                </a:solidFill>
+              </a:rPr>
+              <a:t>Education</a:t>
+            </a:r>
+            <a:endParaRPr lang="en-US" sz="1300" dirty="0"/>
+          </a:p>
+        </p:txBody>
+      </p:sp>
+      <p:sp>
+        <p:nvSpPr>
+          <p:cNvPr id="30" name="next-5"/>
+          <p:cNvSpPr/>
+          <p:nvPr/>
+        </p:nvSpPr>
+        <p:spPr>
+          <a:xfrm>
+            <a:off x="5486400" y="4000500"/>
+            <a:ext cx="3200400" cy="411480"/>
+          </a:xfrm>
+          <a:prstGeom prst="roundRect">
+            <a:avLst>
+              <a:gd name="adj" fmla="val 26667"/>
+            </a:avLst>
+          </a:prstGeom>
+          <a:solidFill>
+            <a:schemeClr val="bg2"/>
+          </a:solidFill>
+          <a:ln/>
+        </p:spPr>
+      </p:sp>
+      <p:pic>
+        <p:nvPicPr>
+          <p:cNvPr id="31" name="next-icon-5" descr="preencoded.png">    </p:cNvPr>
+          <p:cNvPicPr>
+            <a:picLocks noChangeAspect="1"/>
+          </p:cNvPicPr>
+          <p:nvPr/>
+        </p:nvPicPr>
+        <p:blipFill>
+          <a:blip r:embed="rId8"/>
+          <a:stretch>
+            <a:fillRect/>
+          </a:stretch>
+        </p:blipFill>
+        <p:spPr>
+          <a:xfrm>
+            <a:off x="5641848" y="4091940"/>
+            <a:ext cx="228600" cy="228600"/>
+          </a:xfrm>
+          <a:prstGeom prst="rect">
+            <a:avLst/>
+          </a:prstGeom>
+        </p:spPr>
+      </p:pic>
+      <p:sp>
+        <p:nvSpPr>
+          <p:cNvPr id="32" name="next-t-5"/>
+          <p:cNvSpPr txBox="1"/>
+          <p:nvPr/>
+        </p:nvSpPr>
+        <p:spPr>
+          <a:xfrm>
+            <a:off x="6035040" y="4000500"/>
+            <a:ext cx="2560320" cy="411480"/>
+          </a:xfrm>
+          <a:prstGeom prst="rect">
+            <a:avLst/>
+          </a:prstGeom>
+          <a:noFill/>
+          <a:ln/>
+        </p:spPr>
+        <p:txBody>
+          <a:bodyPr wrap="square" lIns="0" tIns="0" rIns="0" bIns="0" rtlCol="0" anchor="ctr"/>
+          <a:lstStyle/>
+          <a:p>
+            <a:pPr indent="0" marL="0">
+              <a:buNone/>
+            </a:pPr>
+            <a:r>
+              <a:rPr lang="en-US" sz="1300" dirty="0">
+                <a:solidFill>
+                  <a:schemeClr val="tx1"/>
+                </a:solidFill>
+              </a:rPr>
+              <a:t>D2C commerce</a:t>
             </a:r>
             <a:endParaRPr lang="en-US" sz="1300" dirty="0"/>
           </a:p>
@@ -5020,7 +5325,7 @@
                   <a:schemeClr val="tx1"/>
                 </a:solidFill>
               </a:rPr>
-              <a:t>Simple, predictable pricing</a:t>
+              <a:t>Live in four weeks</a:t>
             </a:r>
             <a:endParaRPr lang="en-US" sz="3200" dirty="0"/>
           </a:p>
@@ -5028,513 +5333,801 @@
       </p:sp>
       <p:sp>
         <p:nvSpPr>
-          <p:cNvPr id="3" name="plan-0"/>
+          <p:cNvPr id="3" name="timeline"/>
           <p:cNvSpPr/>
           <p:nvPr/>
         </p:nvSpPr>
         <p:spPr>
           <a:xfrm>
-            <a:off x="457200" y="1143000"/>
-            <a:ext cx="2615184" cy="3108960"/>
+            <a:off x="777240" y="1481328"/>
+            <a:ext cx="6309360" cy="0"/>
+          </a:xfrm>
+          <a:prstGeom prst="line">
+            <a:avLst/>
+          </a:prstGeom>
+          <a:noFill/>
+          <a:ln w="19050">
+            <a:solidFill>
+              <a:schemeClr val="accent4"/>
+            </a:solidFill>
+            <a:prstDash val="solid"/>
+          </a:ln>
+        </p:spPr>
+      </p:sp>
+      <p:sp>
+        <p:nvSpPr>
+          <p:cNvPr id="4" name="dot-0"/>
+          <p:cNvSpPr/>
+          <p:nvPr/>
+        </p:nvSpPr>
+        <p:spPr>
+          <a:xfrm>
+            <a:off x="640080" y="1344168"/>
+            <a:ext cx="274320" cy="274320"/>
+          </a:xfrm>
+          <a:prstGeom prst="ellipse">
+            <a:avLst/>
+          </a:prstGeom>
+          <a:solidFill>
+            <a:schemeClr val="accent2"/>
+          </a:solidFill>
+          <a:ln w="25400">
+            <a:solidFill>
+              <a:schemeClr val="bg1"/>
+            </a:solidFill>
+            <a:prstDash val="solid"/>
+          </a:ln>
+        </p:spPr>
+      </p:sp>
+      <p:sp>
+        <p:nvSpPr>
+          <p:cNvPr id="5" name="wk-0"/>
+          <p:cNvSpPr txBox="1"/>
+          <p:nvPr/>
+        </p:nvSpPr>
+        <p:spPr>
+          <a:xfrm>
+            <a:off x="457200" y="1737360"/>
+            <a:ext cx="1920240" cy="274320"/>
+          </a:xfrm>
+          <a:prstGeom prst="rect">
+            <a:avLst/>
+          </a:prstGeom>
+          <a:noFill/>
+          <a:ln/>
+        </p:spPr>
+        <p:txBody>
+          <a:bodyPr wrap="square" lIns="0" tIns="0" rIns="0" bIns="0" rtlCol="0" anchor="t"/>
+          <a:lstStyle/>
+          <a:p>
+            <a:pPr indent="0" marL="0">
+              <a:buNone/>
+            </a:pPr>
+            <a:r>
+              <a:rPr lang="en-US" sz="1200" b="1" dirty="0">
+                <a:solidFill>
+                  <a:schemeClr val="accent2"/>
+                </a:solidFill>
+              </a:rPr>
+              <a:t>Week 1</a:t>
+            </a:r>
+            <a:endParaRPr lang="en-US" sz="1200" dirty="0"/>
+          </a:p>
+        </p:txBody>
+      </p:sp>
+      <p:sp>
+        <p:nvSpPr>
+          <p:cNvPr id="6" name="wk-h-0"/>
+          <p:cNvSpPr txBox="1"/>
+          <p:nvPr/>
+        </p:nvSpPr>
+        <p:spPr>
+          <a:xfrm>
+            <a:off x="457200" y="2011680"/>
+            <a:ext cx="1920240" cy="320040"/>
+          </a:xfrm>
+          <a:prstGeom prst="rect">
+            <a:avLst/>
+          </a:prstGeom>
+          <a:noFill/>
+          <a:ln/>
+        </p:spPr>
+        <p:txBody>
+          <a:bodyPr wrap="square" lIns="0" tIns="0" rIns="0" bIns="0" rtlCol="0" anchor="t"/>
+          <a:lstStyle/>
+          <a:p>
+            <a:pPr indent="0" marL="0">
+              <a:buNone/>
+            </a:pPr>
+            <a:r>
+              <a:rPr lang="en-US" sz="1600" b="1" dirty="0">
+                <a:solidFill>
+                  <a:schemeClr val="tx1"/>
+                </a:solidFill>
+              </a:rPr>
+              <a:t>Discover &amp; load</a:t>
+            </a:r>
+            <a:endParaRPr lang="en-US" sz="1600" dirty="0"/>
+          </a:p>
+        </p:txBody>
+      </p:sp>
+      <p:sp>
+        <p:nvSpPr>
+          <p:cNvPr id="7" name="wk-b-0"/>
+          <p:cNvSpPr txBox="1"/>
+          <p:nvPr/>
+        </p:nvSpPr>
+        <p:spPr>
+          <a:xfrm>
+            <a:off x="457200" y="2377440"/>
+            <a:ext cx="1874520" cy="868680"/>
+          </a:xfrm>
+          <a:prstGeom prst="rect">
+            <a:avLst/>
+          </a:prstGeom>
+          <a:noFill/>
+          <a:ln/>
+        </p:spPr>
+        <p:txBody>
+          <a:bodyPr wrap="square" lIns="0" tIns="0" rIns="0" bIns="0" rtlCol="0" anchor="t"/>
+          <a:lstStyle/>
+          <a:p>
+            <a:pPr indent="0" marL="0">
+              <a:buNone/>
+            </a:pPr>
+            <a:r>
+              <a:rPr lang="en-US" sz="1200" dirty="0">
+                <a:solidFill>
+                  <a:schemeClr val="accent4"/>
+                </a:solidFill>
+              </a:rPr>
+              <a:t>Your top questions, hand-over rules and documents go into the knowledge base.</a:t>
+            </a:r>
+            <a:endParaRPr lang="en-US" sz="1200" dirty="0"/>
+          </a:p>
+        </p:txBody>
+      </p:sp>
+      <p:sp>
+        <p:nvSpPr>
+          <p:cNvPr id="8" name="dot-1"/>
+          <p:cNvSpPr/>
+          <p:nvPr/>
+        </p:nvSpPr>
+        <p:spPr>
+          <a:xfrm>
+            <a:off x="2743200" y="1344168"/>
+            <a:ext cx="274320" cy="274320"/>
+          </a:xfrm>
+          <a:prstGeom prst="ellipse">
+            <a:avLst/>
+          </a:prstGeom>
+          <a:solidFill>
+            <a:schemeClr val="accent2"/>
+          </a:solidFill>
+          <a:ln w="25400">
+            <a:solidFill>
+              <a:schemeClr val="bg1"/>
+            </a:solidFill>
+            <a:prstDash val="solid"/>
+          </a:ln>
+        </p:spPr>
+      </p:sp>
+      <p:sp>
+        <p:nvSpPr>
+          <p:cNvPr id="9" name="wk-1"/>
+          <p:cNvSpPr txBox="1"/>
+          <p:nvPr/>
+        </p:nvSpPr>
+        <p:spPr>
+          <a:xfrm>
+            <a:off x="2560320" y="1737360"/>
+            <a:ext cx="1920240" cy="274320"/>
+          </a:xfrm>
+          <a:prstGeom prst="rect">
+            <a:avLst/>
+          </a:prstGeom>
+          <a:noFill/>
+          <a:ln/>
+        </p:spPr>
+        <p:txBody>
+          <a:bodyPr wrap="square" lIns="0" tIns="0" rIns="0" bIns="0" rtlCol="0" anchor="t"/>
+          <a:lstStyle/>
+          <a:p>
+            <a:pPr indent="0" marL="0">
+              <a:buNone/>
+            </a:pPr>
+            <a:r>
+              <a:rPr lang="en-US" sz="1200" b="1" dirty="0">
+                <a:solidFill>
+                  <a:schemeClr val="accent2"/>
+                </a:solidFill>
+              </a:rPr>
+              <a:t>Week 2</a:t>
+            </a:r>
+            <a:endParaRPr lang="en-US" sz="1200" dirty="0"/>
+          </a:p>
+        </p:txBody>
+      </p:sp>
+      <p:sp>
+        <p:nvSpPr>
+          <p:cNvPr id="10" name="wk-h-1"/>
+          <p:cNvSpPr txBox="1"/>
+          <p:nvPr/>
+        </p:nvSpPr>
+        <p:spPr>
+          <a:xfrm>
+            <a:off x="2560320" y="2011680"/>
+            <a:ext cx="1920240" cy="320040"/>
+          </a:xfrm>
+          <a:prstGeom prst="rect">
+            <a:avLst/>
+          </a:prstGeom>
+          <a:noFill/>
+          <a:ln/>
+        </p:spPr>
+        <p:txBody>
+          <a:bodyPr wrap="square" lIns="0" tIns="0" rIns="0" bIns="0" rtlCol="0" anchor="t"/>
+          <a:lstStyle/>
+          <a:p>
+            <a:pPr indent="0" marL="0">
+              <a:buNone/>
+            </a:pPr>
+            <a:r>
+              <a:rPr lang="en-US" sz="1600" b="1" dirty="0">
+                <a:solidFill>
+                  <a:schemeClr val="tx1"/>
+                </a:solidFill>
+              </a:rPr>
+              <a:t>Configure &amp; test</a:t>
+            </a:r>
+            <a:endParaRPr lang="en-US" sz="1600" dirty="0"/>
+          </a:p>
+        </p:txBody>
+      </p:sp>
+      <p:sp>
+        <p:nvSpPr>
+          <p:cNvPr id="11" name="wk-b-1"/>
+          <p:cNvSpPr txBox="1"/>
+          <p:nvPr/>
+        </p:nvSpPr>
+        <p:spPr>
+          <a:xfrm>
+            <a:off x="2560320" y="2377440"/>
+            <a:ext cx="1874520" cy="868680"/>
+          </a:xfrm>
+          <a:prstGeom prst="rect">
+            <a:avLst/>
+          </a:prstGeom>
+          <a:noFill/>
+          <a:ln/>
+        </p:spPr>
+        <p:txBody>
+          <a:bodyPr wrap="square" lIns="0" tIns="0" rIns="0" bIns="0" rtlCol="0" anchor="t"/>
+          <a:lstStyle/>
+          <a:p>
+            <a:pPr indent="0" marL="0">
+              <a:buNone/>
+            </a:pPr>
+            <a:r>
+              <a:rPr lang="en-US" sz="1200" dirty="0">
+                <a:solidFill>
+                  <a:schemeClr val="accent4"/>
+                </a:solidFill>
+              </a:rPr>
+              <a:t>Greeting, tone and pack set up. Your team tests as customers.</a:t>
+            </a:r>
+            <a:endParaRPr lang="en-US" sz="1200" dirty="0"/>
+          </a:p>
+        </p:txBody>
+      </p:sp>
+      <p:sp>
+        <p:nvSpPr>
+          <p:cNvPr id="12" name="dot-2"/>
+          <p:cNvSpPr/>
+          <p:nvPr/>
+        </p:nvSpPr>
+        <p:spPr>
+          <a:xfrm>
+            <a:off x="4846320" y="1344168"/>
+            <a:ext cx="274320" cy="274320"/>
+          </a:xfrm>
+          <a:prstGeom prst="ellipse">
+            <a:avLst/>
+          </a:prstGeom>
+          <a:solidFill>
+            <a:schemeClr val="accent2"/>
+          </a:solidFill>
+          <a:ln w="25400">
+            <a:solidFill>
+              <a:schemeClr val="bg1"/>
+            </a:solidFill>
+            <a:prstDash val="solid"/>
+          </a:ln>
+        </p:spPr>
+      </p:sp>
+      <p:sp>
+        <p:nvSpPr>
+          <p:cNvPr id="13" name="wk-2"/>
+          <p:cNvSpPr txBox="1"/>
+          <p:nvPr/>
+        </p:nvSpPr>
+        <p:spPr>
+          <a:xfrm>
+            <a:off x="4663440" y="1737360"/>
+            <a:ext cx="1920240" cy="274320"/>
+          </a:xfrm>
+          <a:prstGeom prst="rect">
+            <a:avLst/>
+          </a:prstGeom>
+          <a:noFill/>
+          <a:ln/>
+        </p:spPr>
+        <p:txBody>
+          <a:bodyPr wrap="square" lIns="0" tIns="0" rIns="0" bIns="0" rtlCol="0" anchor="t"/>
+          <a:lstStyle/>
+          <a:p>
+            <a:pPr indent="0" marL="0">
+              <a:buNone/>
+            </a:pPr>
+            <a:r>
+              <a:rPr lang="en-US" sz="1200" b="1" dirty="0">
+                <a:solidFill>
+                  <a:schemeClr val="accent2"/>
+                </a:solidFill>
+              </a:rPr>
+              <a:t>Week 3</a:t>
+            </a:r>
+            <a:endParaRPr lang="en-US" sz="1200" dirty="0"/>
+          </a:p>
+        </p:txBody>
+      </p:sp>
+      <p:sp>
+        <p:nvSpPr>
+          <p:cNvPr id="14" name="wk-h-2"/>
+          <p:cNvSpPr txBox="1"/>
+          <p:nvPr/>
+        </p:nvSpPr>
+        <p:spPr>
+          <a:xfrm>
+            <a:off x="4663440" y="2011680"/>
+            <a:ext cx="1920240" cy="320040"/>
+          </a:xfrm>
+          <a:prstGeom prst="rect">
+            <a:avLst/>
+          </a:prstGeom>
+          <a:noFill/>
+          <a:ln/>
+        </p:spPr>
+        <p:txBody>
+          <a:bodyPr wrap="square" lIns="0" tIns="0" rIns="0" bIns="0" rtlCol="0" anchor="t"/>
+          <a:lstStyle/>
+          <a:p>
+            <a:pPr indent="0" marL="0">
+              <a:buNone/>
+            </a:pPr>
+            <a:r>
+              <a:rPr lang="en-US" sz="1600" b="1" dirty="0">
+                <a:solidFill>
+                  <a:schemeClr val="tx1"/>
+                </a:solidFill>
+              </a:rPr>
+              <a:t>Soft launch</a:t>
+            </a:r>
+            <a:endParaRPr lang="en-US" sz="1600" dirty="0"/>
+          </a:p>
+        </p:txBody>
+      </p:sp>
+      <p:sp>
+        <p:nvSpPr>
+          <p:cNvPr id="15" name="wk-b-2"/>
+          <p:cNvSpPr txBox="1"/>
+          <p:nvPr/>
+        </p:nvSpPr>
+        <p:spPr>
+          <a:xfrm>
+            <a:off x="4663440" y="2377440"/>
+            <a:ext cx="1874520" cy="868680"/>
+          </a:xfrm>
+          <a:prstGeom prst="rect">
+            <a:avLst/>
+          </a:prstGeom>
+          <a:noFill/>
+          <a:ln/>
+        </p:spPr>
+        <p:txBody>
+          <a:bodyPr wrap="square" lIns="0" tIns="0" rIns="0" bIns="0" rtlCol="0" anchor="t"/>
+          <a:lstStyle/>
+          <a:p>
+            <a:pPr indent="0" marL="0">
+              <a:buNone/>
+            </a:pPr>
+            <a:r>
+              <a:rPr lang="en-US" sz="1200" dirty="0">
+                <a:solidFill>
+                  <a:schemeClr val="accent4"/>
+                </a:solidFill>
+              </a:rPr>
+              <a:t>Live on your WhatsApp number. Your team handles hand-overs from the Inbox.</a:t>
+            </a:r>
+            <a:endParaRPr lang="en-US" sz="1200" dirty="0"/>
+          </a:p>
+        </p:txBody>
+      </p:sp>
+      <p:sp>
+        <p:nvSpPr>
+          <p:cNvPr id="16" name="dot-3"/>
+          <p:cNvSpPr/>
+          <p:nvPr/>
+        </p:nvSpPr>
+        <p:spPr>
+          <a:xfrm>
+            <a:off x="6949440" y="1344168"/>
+            <a:ext cx="274320" cy="274320"/>
+          </a:xfrm>
+          <a:prstGeom prst="ellipse">
+            <a:avLst/>
+          </a:prstGeom>
+          <a:solidFill>
+            <a:schemeClr val="accent1"/>
+          </a:solidFill>
+          <a:ln w="25400">
+            <a:solidFill>
+              <a:schemeClr val="bg1"/>
+            </a:solidFill>
+            <a:prstDash val="solid"/>
+          </a:ln>
+        </p:spPr>
+      </p:sp>
+      <p:sp>
+        <p:nvSpPr>
+          <p:cNvPr id="17" name="wk-3"/>
+          <p:cNvSpPr txBox="1"/>
+          <p:nvPr/>
+        </p:nvSpPr>
+        <p:spPr>
+          <a:xfrm>
+            <a:off x="6766560" y="1737360"/>
+            <a:ext cx="1920240" cy="274320"/>
+          </a:xfrm>
+          <a:prstGeom prst="rect">
+            <a:avLst/>
+          </a:prstGeom>
+          <a:noFill/>
+          <a:ln/>
+        </p:spPr>
+        <p:txBody>
+          <a:bodyPr wrap="square" lIns="0" tIns="0" rIns="0" bIns="0" rtlCol="0" anchor="t"/>
+          <a:lstStyle/>
+          <a:p>
+            <a:pPr indent="0" marL="0">
+              <a:buNone/>
+            </a:pPr>
+            <a:r>
+              <a:rPr lang="en-US" sz="1200" b="1" dirty="0">
+                <a:solidFill>
+                  <a:schemeClr val="accent1"/>
+                </a:solidFill>
+              </a:rPr>
+              <a:t>Week 4</a:t>
+            </a:r>
+            <a:endParaRPr lang="en-US" sz="1200" dirty="0"/>
+          </a:p>
+        </p:txBody>
+      </p:sp>
+      <p:sp>
+        <p:nvSpPr>
+          <p:cNvPr id="18" name="wk-h-3"/>
+          <p:cNvSpPr txBox="1"/>
+          <p:nvPr/>
+        </p:nvSpPr>
+        <p:spPr>
+          <a:xfrm>
+            <a:off x="6766560" y="2011680"/>
+            <a:ext cx="1920240" cy="320040"/>
+          </a:xfrm>
+          <a:prstGeom prst="rect">
+            <a:avLst/>
+          </a:prstGeom>
+          <a:noFill/>
+          <a:ln/>
+        </p:spPr>
+        <p:txBody>
+          <a:bodyPr wrap="square" lIns="0" tIns="0" rIns="0" bIns="0" rtlCol="0" anchor="t"/>
+          <a:lstStyle/>
+          <a:p>
+            <a:pPr indent="0" marL="0">
+              <a:buNone/>
+            </a:pPr>
+            <a:r>
+              <a:rPr lang="en-US" sz="1600" b="1" dirty="0">
+                <a:solidFill>
+                  <a:schemeClr val="tx1"/>
+                </a:solidFill>
+              </a:rPr>
+              <a:t>Review &amp; go live</a:t>
+            </a:r>
+            <a:endParaRPr lang="en-US" sz="1600" dirty="0"/>
+          </a:p>
+        </p:txBody>
+      </p:sp>
+      <p:sp>
+        <p:nvSpPr>
+          <p:cNvPr id="19" name="wk-b-3"/>
+          <p:cNvSpPr txBox="1"/>
+          <p:nvPr/>
+        </p:nvSpPr>
+        <p:spPr>
+          <a:xfrm>
+            <a:off x="6766560" y="2377440"/>
+            <a:ext cx="1874520" cy="868680"/>
+          </a:xfrm>
+          <a:prstGeom prst="rect">
+            <a:avLst/>
+          </a:prstGeom>
+          <a:noFill/>
+          <a:ln/>
+        </p:spPr>
+        <p:txBody>
+          <a:bodyPr wrap="square" lIns="0" tIns="0" rIns="0" bIns="0" rtlCol="0" anchor="t"/>
+          <a:lstStyle/>
+          <a:p>
+            <a:pPr indent="0" marL="0">
+              <a:buNone/>
+            </a:pPr>
+            <a:r>
+              <a:rPr lang="en-US" sz="1200" dirty="0">
+                <a:solidFill>
+                  <a:schemeClr val="accent4"/>
+                </a:solidFill>
+              </a:rPr>
+              <a:t>We review the numbers together, fill knowledge gaps and switch fully on.</a:t>
+            </a:r>
+            <a:endParaRPr lang="en-US" sz="1200" dirty="0"/>
+          </a:p>
+        </p:txBody>
+      </p:sp>
+      <p:sp>
+        <p:nvSpPr>
+          <p:cNvPr id="20" name="kpi-label"/>
+          <p:cNvSpPr txBox="1"/>
+          <p:nvPr/>
+        </p:nvSpPr>
+        <p:spPr>
+          <a:xfrm>
+            <a:off x="457200" y="3429000"/>
+            <a:ext cx="3657600" cy="274320"/>
+          </a:xfrm>
+          <a:prstGeom prst="rect">
+            <a:avLst/>
+          </a:prstGeom>
+          <a:noFill/>
+          <a:ln/>
+        </p:spPr>
+        <p:txBody>
+          <a:bodyPr wrap="square" lIns="0" tIns="0" rIns="0" bIns="0" rtlCol="0" anchor="t"/>
+          <a:lstStyle/>
+          <a:p>
+            <a:pPr indent="0" marL="0">
+              <a:buNone/>
+            </a:pPr>
+            <a:r>
+              <a:rPr lang="en-US" sz="1100" b="1" spc="200" kern="0" dirty="0">
+                <a:solidFill>
+                  <a:schemeClr val="accent4"/>
+                </a:solidFill>
+              </a:rPr>
+              <a:t>WHAT WE MEASURE</a:t>
+            </a:r>
+            <a:endParaRPr lang="en-US" sz="1100" dirty="0"/>
+          </a:p>
+        </p:txBody>
+      </p:sp>
+      <p:sp>
+        <p:nvSpPr>
+          <p:cNvPr id="21" name="kpi-0"/>
+          <p:cNvSpPr/>
+          <p:nvPr/>
+        </p:nvSpPr>
+        <p:spPr>
+          <a:xfrm>
+            <a:off x="457200" y="3749040"/>
+            <a:ext cx="1965960" cy="685800"/>
           </a:xfrm>
           <a:prstGeom prst="roundRect">
             <a:avLst>
-              <a:gd name="adj" fmla="val 4196"/>
+              <a:gd name="adj" fmla="val 16000"/>
             </a:avLst>
           </a:prstGeom>
           <a:solidFill>
-            <a:schemeClr val="bg2"/>
+            <a:schemeClr val="accent5"/>
           </a:solidFill>
           <a:ln/>
         </p:spPr>
       </p:sp>
       <p:sp>
         <p:nvSpPr>
-          <p:cNvPr id="4" name="plan-name-0"/>
-          <p:cNvSpPr txBox="1"/>
-          <p:nvPr/>
-        </p:nvSpPr>
-        <p:spPr>
-          <a:xfrm>
-            <a:off x="685800" y="1298448"/>
-            <a:ext cx="2194560" cy="320040"/>
-          </a:xfrm>
-          <a:prstGeom prst="rect">
-            <a:avLst/>
-          </a:prstGeom>
-          <a:noFill/>
-          <a:ln/>
-        </p:spPr>
-        <p:txBody>
-          <a:bodyPr wrap="square" lIns="0" tIns="0" rIns="0" bIns="0" rtlCol="0" anchor="t"/>
+          <p:cNvPr id="22" name="kpi-t-0"/>
+          <p:cNvSpPr txBox="1"/>
+          <p:nvPr/>
+        </p:nvSpPr>
+        <p:spPr>
+          <a:xfrm>
+            <a:off x="594360" y="3749040"/>
+            <a:ext cx="1691640" cy="685800"/>
+          </a:xfrm>
+          <a:prstGeom prst="rect">
+            <a:avLst/>
+          </a:prstGeom>
+          <a:noFill/>
+          <a:ln/>
+        </p:spPr>
+        <p:txBody>
+          <a:bodyPr wrap="square" lIns="0" tIns="0" rIns="0" bIns="0" rtlCol="0" anchor="ctr"/>
           <a:lstStyle/>
           <a:p>
             <a:pPr indent="0" marL="0">
               <a:buNone/>
             </a:pPr>
             <a:r>
-              <a:rPr lang="en-US" sz="1600" b="1" dirty="0">
+              <a:rPr lang="en-US" sz="1300" b="1" dirty="0">
                 <a:solidFill>
                   <a:schemeClr val="tx1"/>
                 </a:solidFill>
               </a:rPr>
-              <a:t>Starter</a:t>
-            </a:r>
-            <a:endParaRPr lang="en-US" sz="1600" dirty="0"/>
-          </a:p>
-        </p:txBody>
-      </p:sp>
-      <p:sp>
-        <p:nvSpPr>
-          <p:cNvPr id="5" name="plan-price-0"/>
-          <p:cNvSpPr txBox="1"/>
-          <p:nvPr/>
-        </p:nvSpPr>
-        <p:spPr>
-          <a:xfrm>
-            <a:off x="685800" y="1645920"/>
-            <a:ext cx="2194560" cy="548640"/>
-          </a:xfrm>
-          <a:prstGeom prst="rect">
-            <a:avLst/>
-          </a:prstGeom>
-          <a:noFill/>
-          <a:ln/>
-        </p:spPr>
-        <p:txBody>
-          <a:bodyPr wrap="square" lIns="0" tIns="0" rIns="0" bIns="0" rtlCol="0" anchor="ctr"/>
-          <a:lstStyle/>
-          <a:p>
-            <a:pPr indent="0" marL="0">
-              <a:buNone/>
-            </a:pPr>
-            <a:r>
-              <a:rPr lang="en-US" sz="3000" b="1" dirty="0">
-                <a:solidFill>
-                  <a:schemeClr val="tx1"/>
-                </a:solidFill>
-              </a:rPr>
-              <a:t>₹4,999</a:t>
-            </a:r>
-            <a:pPr indent="0" marL="0">
-              <a:buNone/>
-            </a:pPr>
-            <a:r>
-              <a:rPr lang="en-US" sz="1200" dirty="0">
-                <a:solidFill>
-                  <a:schemeClr val="accent4"/>
-                </a:solidFill>
-              </a:rPr>
-              <a:t> /month</a:t>
-            </a:r>
-            <a:endParaRPr lang="en-US" sz="1400" dirty="0"/>
-          </a:p>
-        </p:txBody>
-      </p:sp>
-      <p:sp>
-        <p:nvSpPr>
-          <p:cNvPr id="6" name="plan-feats-0"/>
-          <p:cNvSpPr txBox="1"/>
-          <p:nvPr/>
-        </p:nvSpPr>
-        <p:spPr>
-          <a:xfrm>
-            <a:off x="685800" y="2331720"/>
-            <a:ext cx="2240280" cy="1828800"/>
-          </a:xfrm>
-          <a:prstGeom prst="rect">
-            <a:avLst/>
-          </a:prstGeom>
-          <a:noFill/>
-          <a:ln/>
-        </p:spPr>
-        <p:txBody>
-          <a:bodyPr wrap="square" lIns="0" tIns="0" rIns="0" bIns="0" rtlCol="0" anchor="t"/>
-          <a:lstStyle/>
-          <a:p>
-            <a:pPr marL="152400" indent="-152400">
-              <a:spcAft>
-                <a:spcPts val="400"/>
-              </a:spcAft>
-              <a:buSzPct val="100000"/>
-              <a:buChar char="•"/>
-            </a:pPr>
-            <a:r>
-              <a:rPr lang="en-US" sz="1200" dirty="0">
-                <a:solidFill>
-                  <a:schemeClr val="tx1"/>
-                </a:solidFill>
-              </a:rPr>
-              <a:t>1 channel (WhatsApp or Telegram)</a:t>
-            </a:r>
-            <a:endParaRPr lang="en-US" sz="1200" dirty="0"/>
-          </a:p>
-          <a:p>
-            <a:pPr marL="152400" indent="-152400">
-              <a:spcAft>
-                <a:spcPts val="400"/>
-              </a:spcAft>
-              <a:buSzPct val="100000"/>
-              <a:buChar char="•"/>
-            </a:pPr>
-            <a:r>
-              <a:rPr lang="en-US" sz="1200" dirty="0">
-                <a:solidFill>
-                  <a:schemeClr val="tx1"/>
-                </a:solidFill>
-              </a:rPr>
-              <a:t>3 team seats</a:t>
-            </a:r>
-            <a:endParaRPr lang="en-US" sz="1200" dirty="0"/>
-          </a:p>
-          <a:p>
-            <a:pPr marL="152400" indent="-152400">
-              <a:spcAft>
-                <a:spcPts val="400"/>
-              </a:spcAft>
-              <a:buSzPct val="100000"/>
-              <a:buChar char="•"/>
-            </a:pPr>
-            <a:r>
-              <a:rPr lang="en-US" sz="1200" dirty="0">
-                <a:solidFill>
-                  <a:schemeClr val="tx1"/>
-                </a:solidFill>
-              </a:rPr>
-              <a:t>500 customer chats / month</a:t>
-            </a:r>
-            <a:endParaRPr lang="en-US" sz="1200" dirty="0"/>
-          </a:p>
-          <a:p>
-            <a:pPr marL="152400" indent="-152400">
-              <a:spcAft>
-                <a:spcPts val="400"/>
-              </a:spcAft>
-              <a:buSzPct val="100000"/>
-              <a:buChar char="•"/>
-            </a:pPr>
-            <a:r>
-              <a:rPr lang="en-US" sz="1200" dirty="0">
-                <a:solidFill>
-                  <a:schemeClr val="tx1"/>
-                </a:solidFill>
-              </a:rPr>
-              <a:t>50 documents</a:t>
-            </a:r>
-            <a:endParaRPr lang="en-US" sz="1200" dirty="0"/>
-          </a:p>
-          <a:p>
-            <a:pPr marL="152400" indent="-152400">
-              <a:spcAft>
-                <a:spcPts val="400"/>
-              </a:spcAft>
-              <a:buSzPct val="100000"/>
-              <a:buChar char="•"/>
-            </a:pPr>
-            <a:r>
-              <a:rPr lang="en-US" sz="1200" dirty="0">
-                <a:solidFill>
-                  <a:schemeClr val="tx1"/>
-                </a:solidFill>
-              </a:rPr>
-              <a:t>Email support</a:t>
-            </a:r>
-            <a:endParaRPr lang="en-US" sz="1200" dirty="0"/>
-          </a:p>
-        </p:txBody>
-      </p:sp>
-      <p:sp>
-        <p:nvSpPr>
-          <p:cNvPr id="7" name="plan-1"/>
+              <a:t>Questions answered by the bot</a:t>
+            </a:r>
+            <a:endParaRPr lang="en-US" sz="1300" dirty="0"/>
+          </a:p>
+        </p:txBody>
+      </p:sp>
+      <p:sp>
+        <p:nvSpPr>
+          <p:cNvPr id="23" name="kpi-1"/>
           <p:cNvSpPr/>
           <p:nvPr/>
         </p:nvSpPr>
         <p:spPr>
           <a:xfrm>
-            <a:off x="3273552" y="1143000"/>
-            <a:ext cx="2615184" cy="3108960"/>
+            <a:off x="2560320" y="3749040"/>
+            <a:ext cx="1965960" cy="685800"/>
           </a:xfrm>
           <a:prstGeom prst="roundRect">
             <a:avLst>
-              <a:gd name="adj" fmla="val 4196"/>
+              <a:gd name="adj" fmla="val 16000"/>
             </a:avLst>
           </a:prstGeom>
           <a:solidFill>
-            <a:schemeClr val="tx2"/>
+            <a:schemeClr val="accent5"/>
           </a:solidFill>
           <a:ln/>
-          <a:effectLst>
-            <a:outerShdw sx="100000" sy="100000" kx="0" ky="0" algn="bl" rotWithShape="0" blurRad="101600" dist="25400" dir="5400000">
-              <a:srgbClr val="000000">
-                <a:alpha val="18000"/>
-              </a:srgbClr>
-            </a:outerShdw>
-          </a:effectLst>
-        </p:spPr>
-      </p:sp>
-      <p:sp>
-        <p:nvSpPr>
-          <p:cNvPr id="8" name="plan-name-1"/>
-          <p:cNvSpPr txBox="1"/>
-          <p:nvPr/>
-        </p:nvSpPr>
-        <p:spPr>
-          <a:xfrm>
-            <a:off x="3502152" y="1298448"/>
-            <a:ext cx="2194560" cy="320040"/>
-          </a:xfrm>
-          <a:prstGeom prst="rect">
-            <a:avLst/>
-          </a:prstGeom>
-          <a:noFill/>
-          <a:ln/>
-        </p:spPr>
-        <p:txBody>
-          <a:bodyPr wrap="square" lIns="0" tIns="0" rIns="0" bIns="0" rtlCol="0" anchor="t"/>
+        </p:spPr>
+      </p:sp>
+      <p:sp>
+        <p:nvSpPr>
+          <p:cNvPr id="24" name="kpi-t-1"/>
+          <p:cNvSpPr txBox="1"/>
+          <p:nvPr/>
+        </p:nvSpPr>
+        <p:spPr>
+          <a:xfrm>
+            <a:off x="2697480" y="3749040"/>
+            <a:ext cx="1691640" cy="685800"/>
+          </a:xfrm>
+          <a:prstGeom prst="rect">
+            <a:avLst/>
+          </a:prstGeom>
+          <a:noFill/>
+          <a:ln/>
+        </p:spPr>
+        <p:txBody>
+          <a:bodyPr wrap="square" lIns="0" tIns="0" rIns="0" bIns="0" rtlCol="0" anchor="ctr"/>
           <a:lstStyle/>
           <a:p>
             <a:pPr indent="0" marL="0">
               <a:buNone/>
             </a:pPr>
             <a:r>
-              <a:rPr lang="en-US" sz="1600" b="1" dirty="0">
-                <a:solidFill>
-                  <a:schemeClr val="accent5"/>
-                </a:solidFill>
-              </a:rPr>
-              <a:t>Growth</a:t>
-            </a:r>
-            <a:endParaRPr lang="en-US" sz="1600" dirty="0"/>
-          </a:p>
-        </p:txBody>
-      </p:sp>
-      <p:sp>
-        <p:nvSpPr>
-          <p:cNvPr id="9" name="plan-price-1"/>
-          <p:cNvSpPr txBox="1"/>
-          <p:nvPr/>
-        </p:nvSpPr>
-        <p:spPr>
-          <a:xfrm>
-            <a:off x="3502152" y="1645920"/>
-            <a:ext cx="2194560" cy="548640"/>
-          </a:xfrm>
-          <a:prstGeom prst="rect">
-            <a:avLst/>
-          </a:prstGeom>
-          <a:noFill/>
-          <a:ln/>
-        </p:spPr>
-        <p:txBody>
-          <a:bodyPr wrap="square" lIns="0" tIns="0" rIns="0" bIns="0" rtlCol="0" anchor="ctr"/>
-          <a:lstStyle/>
-          <a:p>
-            <a:pPr indent="0" marL="0">
-              <a:buNone/>
-            </a:pPr>
-            <a:r>
-              <a:rPr lang="en-US" sz="3000" b="1" dirty="0">
-                <a:solidFill>
-                  <a:schemeClr val="bg1"/>
-                </a:solidFill>
-              </a:rPr>
-              <a:t>₹12,999</a:t>
-            </a:r>
-            <a:pPr indent="0" marL="0">
-              <a:buNone/>
-            </a:pPr>
-            <a:r>
-              <a:rPr lang="en-US" sz="1200" dirty="0">
-                <a:solidFill>
-                  <a:srgbClr val="E7E5E4"/>
-                </a:solidFill>
-              </a:rPr>
-              <a:t> /month</a:t>
-            </a:r>
-            <a:endParaRPr lang="en-US" sz="1400" dirty="0"/>
-          </a:p>
-        </p:txBody>
-      </p:sp>
-      <p:sp>
-        <p:nvSpPr>
-          <p:cNvPr id="10" name="plan-feats-1"/>
-          <p:cNvSpPr txBox="1"/>
-          <p:nvPr/>
-        </p:nvSpPr>
-        <p:spPr>
-          <a:xfrm>
-            <a:off x="3502152" y="2331720"/>
-            <a:ext cx="2240280" cy="1828800"/>
-          </a:xfrm>
-          <a:prstGeom prst="rect">
-            <a:avLst/>
-          </a:prstGeom>
-          <a:noFill/>
-          <a:ln/>
-        </p:spPr>
-        <p:txBody>
-          <a:bodyPr wrap="square" lIns="0" tIns="0" rIns="0" bIns="0" rtlCol="0" anchor="t"/>
-          <a:lstStyle/>
-          <a:p>
-            <a:pPr marL="152400" indent="-152400">
-              <a:spcAft>
-                <a:spcPts val="400"/>
-              </a:spcAft>
-              <a:buSzPct val="100000"/>
-              <a:buChar char="•"/>
-            </a:pPr>
-            <a:r>
-              <a:rPr lang="en-US" sz="1200" dirty="0">
-                <a:solidFill>
-                  <a:schemeClr val="bg1"/>
-                </a:solidFill>
-              </a:rPr>
-              <a:t>WhatsApp + Telegram + web</a:t>
-            </a:r>
-            <a:endParaRPr lang="en-US" sz="1200" dirty="0"/>
-          </a:p>
-          <a:p>
-            <a:pPr marL="152400" indent="-152400">
-              <a:spcAft>
-                <a:spcPts val="400"/>
-              </a:spcAft>
-              <a:buSzPct val="100000"/>
-              <a:buChar char="•"/>
-            </a:pPr>
-            <a:r>
-              <a:rPr lang="en-US" sz="1200" dirty="0">
-                <a:solidFill>
-                  <a:schemeClr val="bg1"/>
-                </a:solidFill>
-              </a:rPr>
-              <a:t>10 team seats</a:t>
-            </a:r>
-            <a:endParaRPr lang="en-US" sz="1200" dirty="0"/>
-          </a:p>
-          <a:p>
-            <a:pPr marL="152400" indent="-152400">
-              <a:spcAft>
-                <a:spcPts val="400"/>
-              </a:spcAft>
-              <a:buSzPct val="100000"/>
-              <a:buChar char="•"/>
-            </a:pPr>
-            <a:r>
-              <a:rPr lang="en-US" sz="1200" dirty="0">
-                <a:solidFill>
-                  <a:schemeClr val="bg1"/>
-                </a:solidFill>
-              </a:rPr>
-              <a:t>3,000 customer chats / month</a:t>
-            </a:r>
-            <a:endParaRPr lang="en-US" sz="1200" dirty="0"/>
-          </a:p>
-          <a:p>
-            <a:pPr marL="152400" indent="-152400">
-              <a:spcAft>
-                <a:spcPts val="400"/>
-              </a:spcAft>
-              <a:buSzPct val="100000"/>
-              <a:buChar char="•"/>
-            </a:pPr>
-            <a:r>
-              <a:rPr lang="en-US" sz="1200" dirty="0">
-                <a:solidFill>
-                  <a:schemeClr val="bg1"/>
-                </a:solidFill>
-              </a:rPr>
-              <a:t>Industry pack + custom agents</a:t>
-            </a:r>
-            <a:endParaRPr lang="en-US" sz="1200" dirty="0"/>
-          </a:p>
-          <a:p>
-            <a:pPr marL="152400" indent="-152400">
-              <a:spcAft>
-                <a:spcPts val="400"/>
-              </a:spcAft>
-              <a:buSzPct val="100000"/>
-              <a:buChar char="•"/>
-            </a:pPr>
-            <a:r>
-              <a:rPr lang="en-US" sz="1200" dirty="0">
-                <a:solidFill>
-                  <a:schemeClr val="bg1"/>
-                </a:solidFill>
-              </a:rPr>
-              <a:t>Team assistant for staff</a:t>
-            </a:r>
-            <a:endParaRPr lang="en-US" sz="1200" dirty="0"/>
-          </a:p>
-        </p:txBody>
-      </p:sp>
-      <p:sp>
-        <p:nvSpPr>
-          <p:cNvPr id="11" name="plan-2"/>
+              <a:rPr lang="en-US" sz="1300" b="1" dirty="0">
+                <a:solidFill>
+                  <a:schemeClr val="tx1"/>
+                </a:solidFill>
+              </a:rPr>
+              <a:t>First-reply time</a:t>
+            </a:r>
+            <a:endParaRPr lang="en-US" sz="1300" dirty="0"/>
+          </a:p>
+        </p:txBody>
+      </p:sp>
+      <p:sp>
+        <p:nvSpPr>
+          <p:cNvPr id="25" name="kpi-2"/>
           <p:cNvSpPr/>
           <p:nvPr/>
         </p:nvSpPr>
         <p:spPr>
           <a:xfrm>
-            <a:off x="6089904" y="1143000"/>
-            <a:ext cx="2615184" cy="3108960"/>
+            <a:off x="4663440" y="3749040"/>
+            <a:ext cx="1965960" cy="685800"/>
           </a:xfrm>
           <a:prstGeom prst="roundRect">
             <a:avLst>
-              <a:gd name="adj" fmla="val 4196"/>
+              <a:gd name="adj" fmla="val 16000"/>
             </a:avLst>
           </a:prstGeom>
           <a:solidFill>
-            <a:schemeClr val="bg2"/>
+            <a:schemeClr val="accent5"/>
           </a:solidFill>
           <a:ln/>
         </p:spPr>
       </p:sp>
       <p:sp>
         <p:nvSpPr>
-          <p:cNvPr id="12" name="plan-name-2"/>
-          <p:cNvSpPr txBox="1"/>
-          <p:nvPr/>
-        </p:nvSpPr>
-        <p:spPr>
-          <a:xfrm>
-            <a:off x="6318504" y="1298448"/>
-            <a:ext cx="2194560" cy="320040"/>
-          </a:xfrm>
-          <a:prstGeom prst="rect">
-            <a:avLst/>
-          </a:prstGeom>
-          <a:noFill/>
-          <a:ln/>
-        </p:spPr>
-        <p:txBody>
-          <a:bodyPr wrap="square" lIns="0" tIns="0" rIns="0" bIns="0" rtlCol="0" anchor="t"/>
+          <p:cNvPr id="26" name="kpi-t-2"/>
+          <p:cNvSpPr txBox="1"/>
+          <p:nvPr/>
+        </p:nvSpPr>
+        <p:spPr>
+          <a:xfrm>
+            <a:off x="4800600" y="3749040"/>
+            <a:ext cx="1691640" cy="685800"/>
+          </a:xfrm>
+          <a:prstGeom prst="rect">
+            <a:avLst/>
+          </a:prstGeom>
+          <a:noFill/>
+          <a:ln/>
+        </p:spPr>
+        <p:txBody>
+          <a:bodyPr wrap="square" lIns="0" tIns="0" rIns="0" bIns="0" rtlCol="0" anchor="ctr"/>
           <a:lstStyle/>
           <a:p>
             <a:pPr indent="0" marL="0">
               <a:buNone/>
             </a:pPr>
             <a:r>
-              <a:rPr lang="en-US" sz="1600" b="1" dirty="0">
+              <a:rPr lang="en-US" sz="1300" b="1" dirty="0">
                 <a:solidFill>
                   <a:schemeClr val="tx1"/>
                 </a:solidFill>
               </a:rPr>
-              <a:t>Enterprise</a:t>
-            </a:r>
-            <a:endParaRPr lang="en-US" sz="1600" dirty="0"/>
-          </a:p>
-        </p:txBody>
-      </p:sp>
-      <p:sp>
-        <p:nvSpPr>
-          <p:cNvPr id="13" name="plan-price-2"/>
-          <p:cNvSpPr txBox="1"/>
-          <p:nvPr/>
-        </p:nvSpPr>
-        <p:spPr>
-          <a:xfrm>
-            <a:off x="6318504" y="1645920"/>
-            <a:ext cx="2194560" cy="548640"/>
+              <a:t>Chats handed to your team</a:t>
+            </a:r>
+            <a:endParaRPr lang="en-US" sz="1300" dirty="0"/>
+          </a:p>
+        </p:txBody>
+      </p:sp>
+      <p:sp>
+        <p:nvSpPr>
+          <p:cNvPr id="27" name="kpi-3"/>
+          <p:cNvSpPr/>
+          <p:nvPr/>
+        </p:nvSpPr>
+        <p:spPr>
+          <a:xfrm>
+            <a:off x="6766560" y="3749040"/>
+            <a:ext cx="1965960" cy="685800"/>
+          </a:xfrm>
+          <a:prstGeom prst="roundRect">
+            <a:avLst>
+              <a:gd name="adj" fmla="val 16000"/>
+            </a:avLst>
+          </a:prstGeom>
+          <a:solidFill>
+            <a:schemeClr val="accent5"/>
+          </a:solidFill>
+          <a:ln/>
+        </p:spPr>
+      </p:sp>
+      <p:sp>
+        <p:nvSpPr>
+          <p:cNvPr id="28" name="kpi-t-3"/>
+          <p:cNvSpPr txBox="1"/>
+          <p:nvPr/>
+        </p:nvSpPr>
+        <p:spPr>
+          <a:xfrm>
+            <a:off x="6903720" y="3749040"/>
+            <a:ext cx="1691640" cy="685800"/>
           </a:xfrm>
           <a:prstGeom prst="rect">
             <a:avLst/>
@@ -5550,165 +6143,14 @@
               <a:buNone/>
             </a:pPr>
             <a:r>
-              <a:rPr lang="en-US" sz="3000" b="1" dirty="0">
+              <a:rPr lang="en-US" sz="1300" b="1" dirty="0">
                 <a:solidFill>
                   <a:schemeClr val="tx1"/>
                 </a:solidFill>
               </a:rPr>
-              <a:t>Custom</a:t>
-            </a:r>
-            <a:pPr indent="0" marL="0">
-              <a:buNone/>
-            </a:pPr>
-            <a:endParaRPr lang="en-US" sz="1400" dirty="0"/>
-          </a:p>
-        </p:txBody>
-      </p:sp>
-      <p:sp>
-        <p:nvSpPr>
-          <p:cNvPr id="14" name="plan-feats-2"/>
-          <p:cNvSpPr txBox="1"/>
-          <p:nvPr/>
-        </p:nvSpPr>
-        <p:spPr>
-          <a:xfrm>
-            <a:off x="6318504" y="2331720"/>
-            <a:ext cx="2240280" cy="1828800"/>
-          </a:xfrm>
-          <a:prstGeom prst="rect">
-            <a:avLst/>
-          </a:prstGeom>
-          <a:noFill/>
-          <a:ln/>
-        </p:spPr>
-        <p:txBody>
-          <a:bodyPr wrap="square" lIns="0" tIns="0" rIns="0" bIns="0" rtlCol="0" anchor="t"/>
-          <a:lstStyle/>
-          <a:p>
-            <a:pPr marL="152400" indent="-152400">
-              <a:spcAft>
-                <a:spcPts val="400"/>
-              </a:spcAft>
-              <a:buSzPct val="100000"/>
-              <a:buChar char="•"/>
-            </a:pPr>
-            <a:r>
-              <a:rPr lang="en-US" sz="1200" dirty="0">
-                <a:solidFill>
-                  <a:schemeClr val="tx1"/>
-                </a:solidFill>
-              </a:rPr>
-              <a:t>Unlimited seats and chats</a:t>
-            </a:r>
-            <a:endParaRPr lang="en-US" sz="1200" dirty="0"/>
-          </a:p>
-          <a:p>
-            <a:pPr marL="152400" indent="-152400">
-              <a:spcAft>
-                <a:spcPts val="400"/>
-              </a:spcAft>
-              <a:buSzPct val="100000"/>
-              <a:buChar char="•"/>
-            </a:pPr>
-            <a:r>
-              <a:rPr lang="en-US" sz="1200" dirty="0">
-                <a:solidFill>
-                  <a:schemeClr val="tx1"/>
-                </a:solidFill>
-              </a:rPr>
-              <a:t>Your own cloud or server</a:t>
-            </a:r>
-            <a:endParaRPr lang="en-US" sz="1200" dirty="0"/>
-          </a:p>
-          <a:p>
-            <a:pPr marL="152400" indent="-152400">
-              <a:spcAft>
-                <a:spcPts val="400"/>
-              </a:spcAft>
-              <a:buSzPct val="100000"/>
-              <a:buChar char="•"/>
-            </a:pPr>
-            <a:r>
-              <a:rPr lang="en-US" sz="1200" dirty="0">
-                <a:solidFill>
-                  <a:schemeClr val="tx1"/>
-                </a:solidFill>
-              </a:rPr>
-              <a:t>Your own AI account and keys</a:t>
-            </a:r>
-            <a:endParaRPr lang="en-US" sz="1200" dirty="0"/>
-          </a:p>
-          <a:p>
-            <a:pPr marL="152400" indent="-152400">
-              <a:spcAft>
-                <a:spcPts val="400"/>
-              </a:spcAft>
-              <a:buSzPct val="100000"/>
-              <a:buChar char="•"/>
-            </a:pPr>
-            <a:r>
-              <a:rPr lang="en-US" sz="1200" dirty="0">
-                <a:solidFill>
-                  <a:schemeClr val="tx1"/>
-                </a:solidFill>
-              </a:rPr>
-              <a:t>Custom integrations</a:t>
-            </a:r>
-            <a:endParaRPr lang="en-US" sz="1200" dirty="0"/>
-          </a:p>
-          <a:p>
-            <a:pPr marL="152400" indent="-152400">
-              <a:spcAft>
-                <a:spcPts val="400"/>
-              </a:spcAft>
-              <a:buSzPct val="100000"/>
-              <a:buChar char="•"/>
-            </a:pPr>
-            <a:r>
-              <a:rPr lang="en-US" sz="1200" dirty="0">
-                <a:solidFill>
-                  <a:schemeClr val="tx1"/>
-                </a:solidFill>
-              </a:rPr>
-              <a:t>Priority support</a:t>
-            </a:r>
-            <a:endParaRPr lang="en-US" sz="1200" dirty="0"/>
-          </a:p>
-        </p:txBody>
-      </p:sp>
-      <p:sp>
-        <p:nvSpPr>
-          <p:cNvPr id="15" name="pricing-note"/>
-          <p:cNvSpPr txBox="1"/>
-          <p:nvPr/>
-        </p:nvSpPr>
-        <p:spPr>
-          <a:xfrm>
-            <a:off x="457200" y="4343400"/>
-            <a:ext cx="8229600" cy="411480"/>
-          </a:xfrm>
-          <a:prstGeom prst="rect">
-            <a:avLst/>
-          </a:prstGeom>
-          <a:noFill/>
-          <a:ln/>
-        </p:spPr>
-        <p:txBody>
-          <a:bodyPr wrap="square" lIns="0" tIns="0" rIns="0" bIns="0" rtlCol="0" anchor="t"/>
-          <a:lstStyle/>
-          <a:p>
-            <a:pPr indent="0" marL="0">
-              <a:buNone/>
-            </a:pPr>
-            <a:r>
-              <a:rPr lang="en-US" sz="1000" dirty="0">
-                <a:solidFill>
-                  <a:schemeClr val="accent4"/>
-                </a:solidFill>
-              </a:rPr>
-              <a:t>All plans are hosted 24×7 with HTTPS and nightly backups. One-time setup from ₹25,000 per pack. WhatsApp charges from Meta are billed at cost. Prices exclude GST and are indicative — the final quote follows the discovery call.</a:t>
-            </a:r>
-            <a:endParaRPr lang="en-US" sz="1000" dirty="0"/>
+              <a:t>Customer satisfaction</a:t>
+            </a:r>
+            <a:endParaRPr lang="en-US" sz="1300" dirty="0"/>
           </a:p>
         </p:txBody>
       </p:sp>
@@ -5792,6 +6234,800 @@
         </p:nvSpPr>
         <p:spPr>
           <a:xfrm>
+            <a:off x="457200" y="274320"/>
+            <a:ext cx="8229600" cy="685800"/>
+          </a:xfrm>
+          <a:prstGeom prst="rect">
+            <a:avLst/>
+          </a:prstGeom>
+          <a:noFill/>
+          <a:ln/>
+        </p:spPr>
+        <p:txBody>
+          <a:bodyPr wrap="square" lIns="0" tIns="0" rIns="0" bIns="0" rtlCol="0" anchor="ctr"/>
+          <a:lstStyle/>
+          <a:p>
+            <a:pPr algn="l" indent="0" marL="0">
+              <a:buNone/>
+            </a:pPr>
+            <a:r>
+              <a:rPr lang="en-US" sz="3200" b="1" dirty="0">
+                <a:solidFill>
+                  <a:schemeClr val="tx1"/>
+                </a:solidFill>
+              </a:rPr>
+              <a:t>Simple, predictable pricing</a:t>
+            </a:r>
+            <a:endParaRPr lang="en-US" sz="3200" dirty="0"/>
+          </a:p>
+        </p:txBody>
+      </p:sp>
+      <p:sp>
+        <p:nvSpPr>
+          <p:cNvPr id="3" name="plan-0"/>
+          <p:cNvSpPr/>
+          <p:nvPr/>
+        </p:nvSpPr>
+        <p:spPr>
+          <a:xfrm>
+            <a:off x="457200" y="1143000"/>
+            <a:ext cx="2615184" cy="3108960"/>
+          </a:xfrm>
+          <a:prstGeom prst="roundRect">
+            <a:avLst>
+              <a:gd name="adj" fmla="val 4196"/>
+            </a:avLst>
+          </a:prstGeom>
+          <a:solidFill>
+            <a:schemeClr val="bg2"/>
+          </a:solidFill>
+          <a:ln/>
+        </p:spPr>
+      </p:sp>
+      <p:sp>
+        <p:nvSpPr>
+          <p:cNvPr id="4" name="plan-name-0"/>
+          <p:cNvSpPr txBox="1"/>
+          <p:nvPr/>
+        </p:nvSpPr>
+        <p:spPr>
+          <a:xfrm>
+            <a:off x="685800" y="1298448"/>
+            <a:ext cx="2194560" cy="320040"/>
+          </a:xfrm>
+          <a:prstGeom prst="rect">
+            <a:avLst/>
+          </a:prstGeom>
+          <a:noFill/>
+          <a:ln/>
+        </p:spPr>
+        <p:txBody>
+          <a:bodyPr wrap="square" lIns="0" tIns="0" rIns="0" bIns="0" rtlCol="0" anchor="t"/>
+          <a:lstStyle/>
+          <a:p>
+            <a:pPr indent="0" marL="0">
+              <a:buNone/>
+            </a:pPr>
+            <a:r>
+              <a:rPr lang="en-US" sz="1600" b="1" dirty="0">
+                <a:solidFill>
+                  <a:schemeClr val="tx1"/>
+                </a:solidFill>
+              </a:rPr>
+              <a:t>Starter</a:t>
+            </a:r>
+            <a:endParaRPr lang="en-US" sz="1600" dirty="0"/>
+          </a:p>
+        </p:txBody>
+      </p:sp>
+      <p:sp>
+        <p:nvSpPr>
+          <p:cNvPr id="5" name="plan-price-0"/>
+          <p:cNvSpPr txBox="1"/>
+          <p:nvPr/>
+        </p:nvSpPr>
+        <p:spPr>
+          <a:xfrm>
+            <a:off x="685800" y="1645920"/>
+            <a:ext cx="2194560" cy="548640"/>
+          </a:xfrm>
+          <a:prstGeom prst="rect">
+            <a:avLst/>
+          </a:prstGeom>
+          <a:noFill/>
+          <a:ln/>
+        </p:spPr>
+        <p:txBody>
+          <a:bodyPr wrap="square" lIns="0" tIns="0" rIns="0" bIns="0" rtlCol="0" anchor="ctr"/>
+          <a:lstStyle/>
+          <a:p>
+            <a:pPr indent="0" marL="0">
+              <a:buNone/>
+            </a:pPr>
+            <a:r>
+              <a:rPr lang="en-US" sz="3000" b="1" dirty="0">
+                <a:solidFill>
+                  <a:schemeClr val="tx1"/>
+                </a:solidFill>
+              </a:rPr>
+              <a:t>₹4,999</a:t>
+            </a:r>
+            <a:pPr indent="0" marL="0">
+              <a:buNone/>
+            </a:pPr>
+            <a:r>
+              <a:rPr lang="en-US" sz="1200" dirty="0">
+                <a:solidFill>
+                  <a:schemeClr val="accent4"/>
+                </a:solidFill>
+              </a:rPr>
+              <a:t> /month</a:t>
+            </a:r>
+            <a:endParaRPr lang="en-US" sz="1400" dirty="0"/>
+          </a:p>
+        </p:txBody>
+      </p:sp>
+      <p:sp>
+        <p:nvSpPr>
+          <p:cNvPr id="6" name="plan-feats-0"/>
+          <p:cNvSpPr txBox="1"/>
+          <p:nvPr/>
+        </p:nvSpPr>
+        <p:spPr>
+          <a:xfrm>
+            <a:off x="685800" y="2331720"/>
+            <a:ext cx="2240280" cy="1828800"/>
+          </a:xfrm>
+          <a:prstGeom prst="rect">
+            <a:avLst/>
+          </a:prstGeom>
+          <a:noFill/>
+          <a:ln/>
+        </p:spPr>
+        <p:txBody>
+          <a:bodyPr wrap="square" lIns="0" tIns="0" rIns="0" bIns="0" rtlCol="0" anchor="t"/>
+          <a:lstStyle/>
+          <a:p>
+            <a:pPr marL="152400" indent="-152400">
+              <a:spcAft>
+                <a:spcPts val="400"/>
+              </a:spcAft>
+              <a:buSzPct val="100000"/>
+              <a:buChar char="•"/>
+            </a:pPr>
+            <a:r>
+              <a:rPr lang="en-US" sz="1200" dirty="0">
+                <a:solidFill>
+                  <a:schemeClr val="tx1"/>
+                </a:solidFill>
+              </a:rPr>
+              <a:t>1 channel (WhatsApp or Telegram)</a:t>
+            </a:r>
+            <a:endParaRPr lang="en-US" sz="1200" dirty="0"/>
+          </a:p>
+          <a:p>
+            <a:pPr marL="152400" indent="-152400">
+              <a:spcAft>
+                <a:spcPts val="400"/>
+              </a:spcAft>
+              <a:buSzPct val="100000"/>
+              <a:buChar char="•"/>
+            </a:pPr>
+            <a:r>
+              <a:rPr lang="en-US" sz="1200" dirty="0">
+                <a:solidFill>
+                  <a:schemeClr val="tx1"/>
+                </a:solidFill>
+              </a:rPr>
+              <a:t>3 team seats</a:t>
+            </a:r>
+            <a:endParaRPr lang="en-US" sz="1200" dirty="0"/>
+          </a:p>
+          <a:p>
+            <a:pPr marL="152400" indent="-152400">
+              <a:spcAft>
+                <a:spcPts val="400"/>
+              </a:spcAft>
+              <a:buSzPct val="100000"/>
+              <a:buChar char="•"/>
+            </a:pPr>
+            <a:r>
+              <a:rPr lang="en-US" sz="1200" dirty="0">
+                <a:solidFill>
+                  <a:schemeClr val="tx1"/>
+                </a:solidFill>
+              </a:rPr>
+              <a:t>500 customer chats / month</a:t>
+            </a:r>
+            <a:endParaRPr lang="en-US" sz="1200" dirty="0"/>
+          </a:p>
+          <a:p>
+            <a:pPr marL="152400" indent="-152400">
+              <a:spcAft>
+                <a:spcPts val="400"/>
+              </a:spcAft>
+              <a:buSzPct val="100000"/>
+              <a:buChar char="•"/>
+            </a:pPr>
+            <a:r>
+              <a:rPr lang="en-US" sz="1200" dirty="0">
+                <a:solidFill>
+                  <a:schemeClr val="tx1"/>
+                </a:solidFill>
+              </a:rPr>
+              <a:t>50 documents</a:t>
+            </a:r>
+            <a:endParaRPr lang="en-US" sz="1200" dirty="0"/>
+          </a:p>
+          <a:p>
+            <a:pPr marL="152400" indent="-152400">
+              <a:spcAft>
+                <a:spcPts val="400"/>
+              </a:spcAft>
+              <a:buSzPct val="100000"/>
+              <a:buChar char="•"/>
+            </a:pPr>
+            <a:r>
+              <a:rPr lang="en-US" sz="1200" dirty="0">
+                <a:solidFill>
+                  <a:schemeClr val="tx1"/>
+                </a:solidFill>
+              </a:rPr>
+              <a:t>Email support</a:t>
+            </a:r>
+            <a:endParaRPr lang="en-US" sz="1200" dirty="0"/>
+          </a:p>
+        </p:txBody>
+      </p:sp>
+      <p:sp>
+        <p:nvSpPr>
+          <p:cNvPr id="7" name="plan-1"/>
+          <p:cNvSpPr/>
+          <p:nvPr/>
+        </p:nvSpPr>
+        <p:spPr>
+          <a:xfrm>
+            <a:off x="3273552" y="1143000"/>
+            <a:ext cx="2615184" cy="3108960"/>
+          </a:xfrm>
+          <a:prstGeom prst="roundRect">
+            <a:avLst>
+              <a:gd name="adj" fmla="val 4196"/>
+            </a:avLst>
+          </a:prstGeom>
+          <a:solidFill>
+            <a:schemeClr val="tx2"/>
+          </a:solidFill>
+          <a:ln/>
+          <a:effectLst>
+            <a:outerShdw sx="100000" sy="100000" kx="0" ky="0" algn="bl" rotWithShape="0" blurRad="101600" dist="25400" dir="5400000">
+              <a:srgbClr val="000000">
+                <a:alpha val="18000"/>
+              </a:srgbClr>
+            </a:outerShdw>
+          </a:effectLst>
+        </p:spPr>
+      </p:sp>
+      <p:sp>
+        <p:nvSpPr>
+          <p:cNvPr id="8" name="plan-name-1"/>
+          <p:cNvSpPr txBox="1"/>
+          <p:nvPr/>
+        </p:nvSpPr>
+        <p:spPr>
+          <a:xfrm>
+            <a:off x="3502152" y="1298448"/>
+            <a:ext cx="2194560" cy="320040"/>
+          </a:xfrm>
+          <a:prstGeom prst="rect">
+            <a:avLst/>
+          </a:prstGeom>
+          <a:noFill/>
+          <a:ln/>
+        </p:spPr>
+        <p:txBody>
+          <a:bodyPr wrap="square" lIns="0" tIns="0" rIns="0" bIns="0" rtlCol="0" anchor="t"/>
+          <a:lstStyle/>
+          <a:p>
+            <a:pPr indent="0" marL="0">
+              <a:buNone/>
+            </a:pPr>
+            <a:r>
+              <a:rPr lang="en-US" sz="1600" b="1" dirty="0">
+                <a:solidFill>
+                  <a:schemeClr val="accent5"/>
+                </a:solidFill>
+              </a:rPr>
+              <a:t>Growth</a:t>
+            </a:r>
+            <a:endParaRPr lang="en-US" sz="1600" dirty="0"/>
+          </a:p>
+        </p:txBody>
+      </p:sp>
+      <p:sp>
+        <p:nvSpPr>
+          <p:cNvPr id="9" name="plan-price-1"/>
+          <p:cNvSpPr txBox="1"/>
+          <p:nvPr/>
+        </p:nvSpPr>
+        <p:spPr>
+          <a:xfrm>
+            <a:off x="3502152" y="1645920"/>
+            <a:ext cx="2194560" cy="548640"/>
+          </a:xfrm>
+          <a:prstGeom prst="rect">
+            <a:avLst/>
+          </a:prstGeom>
+          <a:noFill/>
+          <a:ln/>
+        </p:spPr>
+        <p:txBody>
+          <a:bodyPr wrap="square" lIns="0" tIns="0" rIns="0" bIns="0" rtlCol="0" anchor="ctr"/>
+          <a:lstStyle/>
+          <a:p>
+            <a:pPr indent="0" marL="0">
+              <a:buNone/>
+            </a:pPr>
+            <a:r>
+              <a:rPr lang="en-US" sz="3000" b="1" dirty="0">
+                <a:solidFill>
+                  <a:schemeClr val="bg1"/>
+                </a:solidFill>
+              </a:rPr>
+              <a:t>₹12,999</a:t>
+            </a:r>
+            <a:pPr indent="0" marL="0">
+              <a:buNone/>
+            </a:pPr>
+            <a:r>
+              <a:rPr lang="en-US" sz="1200" dirty="0">
+                <a:solidFill>
+                  <a:srgbClr val="E7E5E4"/>
+                </a:solidFill>
+              </a:rPr>
+              <a:t> /month</a:t>
+            </a:r>
+            <a:endParaRPr lang="en-US" sz="1400" dirty="0"/>
+          </a:p>
+        </p:txBody>
+      </p:sp>
+      <p:sp>
+        <p:nvSpPr>
+          <p:cNvPr id="10" name="plan-feats-1"/>
+          <p:cNvSpPr txBox="1"/>
+          <p:nvPr/>
+        </p:nvSpPr>
+        <p:spPr>
+          <a:xfrm>
+            <a:off x="3502152" y="2331720"/>
+            <a:ext cx="2240280" cy="1828800"/>
+          </a:xfrm>
+          <a:prstGeom prst="rect">
+            <a:avLst/>
+          </a:prstGeom>
+          <a:noFill/>
+          <a:ln/>
+        </p:spPr>
+        <p:txBody>
+          <a:bodyPr wrap="square" lIns="0" tIns="0" rIns="0" bIns="0" rtlCol="0" anchor="t"/>
+          <a:lstStyle/>
+          <a:p>
+            <a:pPr marL="152400" indent="-152400">
+              <a:spcAft>
+                <a:spcPts val="400"/>
+              </a:spcAft>
+              <a:buSzPct val="100000"/>
+              <a:buChar char="•"/>
+            </a:pPr>
+            <a:r>
+              <a:rPr lang="en-US" sz="1200" dirty="0">
+                <a:solidFill>
+                  <a:schemeClr val="bg1"/>
+                </a:solidFill>
+              </a:rPr>
+              <a:t>WhatsApp + Telegram + web</a:t>
+            </a:r>
+            <a:endParaRPr lang="en-US" sz="1200" dirty="0"/>
+          </a:p>
+          <a:p>
+            <a:pPr marL="152400" indent="-152400">
+              <a:spcAft>
+                <a:spcPts val="400"/>
+              </a:spcAft>
+              <a:buSzPct val="100000"/>
+              <a:buChar char="•"/>
+            </a:pPr>
+            <a:r>
+              <a:rPr lang="en-US" sz="1200" dirty="0">
+                <a:solidFill>
+                  <a:schemeClr val="bg1"/>
+                </a:solidFill>
+              </a:rPr>
+              <a:t>10 team seats</a:t>
+            </a:r>
+            <a:endParaRPr lang="en-US" sz="1200" dirty="0"/>
+          </a:p>
+          <a:p>
+            <a:pPr marL="152400" indent="-152400">
+              <a:spcAft>
+                <a:spcPts val="400"/>
+              </a:spcAft>
+              <a:buSzPct val="100000"/>
+              <a:buChar char="•"/>
+            </a:pPr>
+            <a:r>
+              <a:rPr lang="en-US" sz="1200" dirty="0">
+                <a:solidFill>
+                  <a:schemeClr val="bg1"/>
+                </a:solidFill>
+              </a:rPr>
+              <a:t>3,000 customer chats / month</a:t>
+            </a:r>
+            <a:endParaRPr lang="en-US" sz="1200" dirty="0"/>
+          </a:p>
+          <a:p>
+            <a:pPr marL="152400" indent="-152400">
+              <a:spcAft>
+                <a:spcPts val="400"/>
+              </a:spcAft>
+              <a:buSzPct val="100000"/>
+              <a:buChar char="•"/>
+            </a:pPr>
+            <a:r>
+              <a:rPr lang="en-US" sz="1200" dirty="0">
+                <a:solidFill>
+                  <a:schemeClr val="bg1"/>
+                </a:solidFill>
+              </a:rPr>
+              <a:t>Industry pack + custom agents</a:t>
+            </a:r>
+            <a:endParaRPr lang="en-US" sz="1200" dirty="0"/>
+          </a:p>
+          <a:p>
+            <a:pPr marL="152400" indent="-152400">
+              <a:spcAft>
+                <a:spcPts val="400"/>
+              </a:spcAft>
+              <a:buSzPct val="100000"/>
+              <a:buChar char="•"/>
+            </a:pPr>
+            <a:r>
+              <a:rPr lang="en-US" sz="1200" dirty="0">
+                <a:solidFill>
+                  <a:schemeClr val="bg1"/>
+                </a:solidFill>
+              </a:rPr>
+              <a:t>Team assistant + content studio</a:t>
+            </a:r>
+            <a:endParaRPr lang="en-US" sz="1200" dirty="0"/>
+          </a:p>
+        </p:txBody>
+      </p:sp>
+      <p:sp>
+        <p:nvSpPr>
+          <p:cNvPr id="11" name="plan-2"/>
+          <p:cNvSpPr/>
+          <p:nvPr/>
+        </p:nvSpPr>
+        <p:spPr>
+          <a:xfrm>
+            <a:off x="6089904" y="1143000"/>
+            <a:ext cx="2615184" cy="3108960"/>
+          </a:xfrm>
+          <a:prstGeom prst="roundRect">
+            <a:avLst>
+              <a:gd name="adj" fmla="val 4196"/>
+            </a:avLst>
+          </a:prstGeom>
+          <a:solidFill>
+            <a:schemeClr val="bg2"/>
+          </a:solidFill>
+          <a:ln/>
+        </p:spPr>
+      </p:sp>
+      <p:sp>
+        <p:nvSpPr>
+          <p:cNvPr id="12" name="plan-name-2"/>
+          <p:cNvSpPr txBox="1"/>
+          <p:nvPr/>
+        </p:nvSpPr>
+        <p:spPr>
+          <a:xfrm>
+            <a:off x="6318504" y="1298448"/>
+            <a:ext cx="2194560" cy="320040"/>
+          </a:xfrm>
+          <a:prstGeom prst="rect">
+            <a:avLst/>
+          </a:prstGeom>
+          <a:noFill/>
+          <a:ln/>
+        </p:spPr>
+        <p:txBody>
+          <a:bodyPr wrap="square" lIns="0" tIns="0" rIns="0" bIns="0" rtlCol="0" anchor="t"/>
+          <a:lstStyle/>
+          <a:p>
+            <a:pPr indent="0" marL="0">
+              <a:buNone/>
+            </a:pPr>
+            <a:r>
+              <a:rPr lang="en-US" sz="1600" b="1" dirty="0">
+                <a:solidFill>
+                  <a:schemeClr val="tx1"/>
+                </a:solidFill>
+              </a:rPr>
+              <a:t>Enterprise</a:t>
+            </a:r>
+            <a:endParaRPr lang="en-US" sz="1600" dirty="0"/>
+          </a:p>
+        </p:txBody>
+      </p:sp>
+      <p:sp>
+        <p:nvSpPr>
+          <p:cNvPr id="13" name="plan-price-2"/>
+          <p:cNvSpPr txBox="1"/>
+          <p:nvPr/>
+        </p:nvSpPr>
+        <p:spPr>
+          <a:xfrm>
+            <a:off x="6318504" y="1645920"/>
+            <a:ext cx="2194560" cy="548640"/>
+          </a:xfrm>
+          <a:prstGeom prst="rect">
+            <a:avLst/>
+          </a:prstGeom>
+          <a:noFill/>
+          <a:ln/>
+        </p:spPr>
+        <p:txBody>
+          <a:bodyPr wrap="square" lIns="0" tIns="0" rIns="0" bIns="0" rtlCol="0" anchor="ctr"/>
+          <a:lstStyle/>
+          <a:p>
+            <a:pPr indent="0" marL="0">
+              <a:buNone/>
+            </a:pPr>
+            <a:r>
+              <a:rPr lang="en-US" sz="3000" b="1" dirty="0">
+                <a:solidFill>
+                  <a:schemeClr val="tx1"/>
+                </a:solidFill>
+              </a:rPr>
+              <a:t>Custom</a:t>
+            </a:r>
+            <a:pPr indent="0" marL="0">
+              <a:buNone/>
+            </a:pPr>
+            <a:endParaRPr lang="en-US" sz="1400" dirty="0"/>
+          </a:p>
+        </p:txBody>
+      </p:sp>
+      <p:sp>
+        <p:nvSpPr>
+          <p:cNvPr id="14" name="plan-feats-2"/>
+          <p:cNvSpPr txBox="1"/>
+          <p:nvPr/>
+        </p:nvSpPr>
+        <p:spPr>
+          <a:xfrm>
+            <a:off x="6318504" y="2331720"/>
+            <a:ext cx="2240280" cy="1828800"/>
+          </a:xfrm>
+          <a:prstGeom prst="rect">
+            <a:avLst/>
+          </a:prstGeom>
+          <a:noFill/>
+          <a:ln/>
+        </p:spPr>
+        <p:txBody>
+          <a:bodyPr wrap="square" lIns="0" tIns="0" rIns="0" bIns="0" rtlCol="0" anchor="t"/>
+          <a:lstStyle/>
+          <a:p>
+            <a:pPr marL="152400" indent="-152400">
+              <a:spcAft>
+                <a:spcPts val="400"/>
+              </a:spcAft>
+              <a:buSzPct val="100000"/>
+              <a:buChar char="•"/>
+            </a:pPr>
+            <a:r>
+              <a:rPr lang="en-US" sz="1200" dirty="0">
+                <a:solidFill>
+                  <a:schemeClr val="tx1"/>
+                </a:solidFill>
+              </a:rPr>
+              <a:t>Unlimited seats and chats</a:t>
+            </a:r>
+            <a:endParaRPr lang="en-US" sz="1200" dirty="0"/>
+          </a:p>
+          <a:p>
+            <a:pPr marL="152400" indent="-152400">
+              <a:spcAft>
+                <a:spcPts val="400"/>
+              </a:spcAft>
+              <a:buSzPct val="100000"/>
+              <a:buChar char="•"/>
+            </a:pPr>
+            <a:r>
+              <a:rPr lang="en-US" sz="1200" dirty="0">
+                <a:solidFill>
+                  <a:schemeClr val="tx1"/>
+                </a:solidFill>
+              </a:rPr>
+              <a:t>Your own cloud or server</a:t>
+            </a:r>
+            <a:endParaRPr lang="en-US" sz="1200" dirty="0"/>
+          </a:p>
+          <a:p>
+            <a:pPr marL="152400" indent="-152400">
+              <a:spcAft>
+                <a:spcPts val="400"/>
+              </a:spcAft>
+              <a:buSzPct val="100000"/>
+              <a:buChar char="•"/>
+            </a:pPr>
+            <a:r>
+              <a:rPr lang="en-US" sz="1200" dirty="0">
+                <a:solidFill>
+                  <a:schemeClr val="tx1"/>
+                </a:solidFill>
+              </a:rPr>
+              <a:t>Your own AI account and keys</a:t>
+            </a:r>
+            <a:endParaRPr lang="en-US" sz="1200" dirty="0"/>
+          </a:p>
+          <a:p>
+            <a:pPr marL="152400" indent="-152400">
+              <a:spcAft>
+                <a:spcPts val="400"/>
+              </a:spcAft>
+              <a:buSzPct val="100000"/>
+              <a:buChar char="•"/>
+            </a:pPr>
+            <a:r>
+              <a:rPr lang="en-US" sz="1200" dirty="0">
+                <a:solidFill>
+                  <a:schemeClr val="tx1"/>
+                </a:solidFill>
+              </a:rPr>
+              <a:t>Custom integrations</a:t>
+            </a:r>
+            <a:endParaRPr lang="en-US" sz="1200" dirty="0"/>
+          </a:p>
+          <a:p>
+            <a:pPr marL="152400" indent="-152400">
+              <a:spcAft>
+                <a:spcPts val="400"/>
+              </a:spcAft>
+              <a:buSzPct val="100000"/>
+              <a:buChar char="•"/>
+            </a:pPr>
+            <a:r>
+              <a:rPr lang="en-US" sz="1200" dirty="0">
+                <a:solidFill>
+                  <a:schemeClr val="tx1"/>
+                </a:solidFill>
+              </a:rPr>
+              <a:t>Priority support</a:t>
+            </a:r>
+            <a:endParaRPr lang="en-US" sz="1200" dirty="0"/>
+          </a:p>
+        </p:txBody>
+      </p:sp>
+      <p:sp>
+        <p:nvSpPr>
+          <p:cNvPr id="15" name="pricing-note"/>
+          <p:cNvSpPr txBox="1"/>
+          <p:nvPr/>
+        </p:nvSpPr>
+        <p:spPr>
+          <a:xfrm>
+            <a:off x="457200" y="4343400"/>
+            <a:ext cx="8229600" cy="411480"/>
+          </a:xfrm>
+          <a:prstGeom prst="rect">
+            <a:avLst/>
+          </a:prstGeom>
+          <a:noFill/>
+          <a:ln/>
+        </p:spPr>
+        <p:txBody>
+          <a:bodyPr wrap="square" lIns="0" tIns="0" rIns="0" bIns="0" rtlCol="0" anchor="t"/>
+          <a:lstStyle/>
+          <a:p>
+            <a:pPr indent="0" marL="0">
+              <a:buNone/>
+            </a:pPr>
+            <a:r>
+              <a:rPr lang="en-US" sz="1000" dirty="0">
+                <a:solidFill>
+                  <a:schemeClr val="accent4"/>
+                </a:solidFill>
+              </a:rPr>
+              <a:t>All plans are hosted 24×7 with HTTPS and nightly backups. One-time setup from ₹25,000 per pack. WhatsApp charges from Meta are billed at cost. Prices exclude GST and are indicative — the final quote follows the discovery call.</a:t>
+            </a:r>
+            <a:endParaRPr lang="en-US" sz="1000" dirty="0"/>
+          </a:p>
+        </p:txBody>
+      </p:sp>
+      <p:sp>
+        <p:nvSpPr>
+          <p:cNvPr id="25" name="Slide Number Placeholder 0"/>
+          <p:cNvSpPr>
+            <a:spLocks noGrp="1"/>
+          </p:cNvSpPr>
+          <p:nvPr>
+            <p:ph type="sldNum" sz="quarter" idx="4294967295"/>
+          </p:nvPr>
+        </p:nvSpPr>
+        <p:spPr>
+          <a:xfrm>
+            <a:off x="8229600" y="4754880"/>
+            <a:ext cx="457200" cy="274320"/>
+          </a:xfrm>
+          <a:prstGeom prst="rect">
+            <a:avLst/>
+          </a:prstGeom>
+          <a:extLst>
+            <a:ext uri="{C572A759-6A51-4108-AA02-DFA0A04FC94B}">
+              <ma14:wrappingTextBoxFlag xmlns:ma14="http://schemas.microsoft.com/office/mac/drawingml/2011/main" val="0"/>
+            </a:ext>
+          </a:extLst>
+        </p:spPr>
+        <p:txBody>
+          <a:bodyPr/>
+          <a:lstStyle>
+            <a:lvl1pPr>
+              <a:defRPr sz="1000">
+                <a:solidFill>
+                  <a:schemeClr val="accent4"/>
+                </a:solidFill>
+              </a:defRPr>
+            </a:lvl1pPr>
+          </a:lstStyle>
+          <a:p>
+            <a:pPr algn="r"/>
+            <a:fld id="{F7021451-1387-4CA6-816F-3879F97B5CBC}" type="slidenum">
+              <a:rPr b="0" lang="en-US"/>
+              <a:t>14</a:t>
+            </a:fld>
+            <a:endParaRPr lang="en-US"/>
+          </a:p>
+        </p:txBody>
+      </p:sp>
+    </p:spTree>
+  </p:cSld>
+  <p:clrMapOvr>
+    <a:masterClrMapping/>
+  </p:clrMapOvr>
+</p:sld>
+</file>
+
+<file path=ppt/slides/slide15.xml><?xml version="1.0" encoding="utf-8"?>
+<p:sld xmlns:a="http://schemas.openxmlformats.org/drawingml/2006/main" xmlns:r="http://schemas.openxmlformats.org/officeDocument/2006/relationships" xmlns:p="http://schemas.openxmlformats.org/presentationml/2006/main">
+  <p:cSld name="Slide 15">
+    <p:spTree>
+      <p:nvGrpSpPr>
+        <p:cNvPr id="1" name=""/>
+        <p:cNvGrpSpPr/>
+        <p:nvPr/>
+      </p:nvGrpSpPr>
+      <p:grpSpPr>
+        <a:xfrm>
+          <a:off x="0" y="0"/>
+          <a:ext cx="0" cy="0"/>
+          <a:chOff x="0" y="0"/>
+          <a:chExt cx="0" cy="0"/>
+        </a:xfrm>
+      </p:grpSpPr>
+      <p:sp>
+        <p:nvSpPr>
+          <p:cNvPr id="2" name="Text 0"/>
+          <p:cNvSpPr/>
+          <p:nvPr>
+            <p:ph idx="100" type="title" hasCustomPrompt="1"/>
+          </p:nvPr>
+        </p:nvSpPr>
+        <p:spPr>
+          <a:xfrm>
             <a:off x="548640" y="1417320"/>
             <a:ext cx="8046720" cy="1371600"/>
           </a:xfrm>
@@ -11091,7 +12327,7 @@
                   <a:schemeClr val="tx1"/>
                 </a:solidFill>
               </a:rPr>
-              <a:t>You stay in control</a:t>
+              <a:t>A content studio for creators</a:t>
             </a:r>
             <a:endParaRPr lang="en-US" sz="3200" dirty="0"/>
           </a:p>
@@ -11099,36 +12335,14 @@
       </p:sp>
       <p:sp>
         <p:nvSpPr>
-          <p:cNvPr id="3" name="ctl-0"/>
+          <p:cNvPr id="3" name="circle-studio-0"/>
           <p:cNvSpPr/>
           <p:nvPr/>
         </p:nvSpPr>
         <p:spPr>
           <a:xfrm>
-            <a:off x="457200" y="1188720"/>
-            <a:ext cx="2615184" cy="1554480"/>
-          </a:xfrm>
-          <a:prstGeom prst="roundRect">
-            <a:avLst>
-              <a:gd name="adj" fmla="val 7059"/>
-            </a:avLst>
-          </a:prstGeom>
-          <a:solidFill>
-            <a:schemeClr val="bg2"/>
-          </a:solidFill>
-          <a:ln/>
-        </p:spPr>
-      </p:sp>
-      <p:sp>
-        <p:nvSpPr>
-          <p:cNvPr id="4" name="circle-ctl-0"/>
-          <p:cNvSpPr/>
-          <p:nvPr/>
-        </p:nvSpPr>
-        <p:spPr>
-          <a:xfrm>
-            <a:off x="685800" y="1417320"/>
-            <a:ext cx="475488" cy="475488"/>
+            <a:off x="457200" y="1225296"/>
+            <a:ext cx="502920" cy="502920"/>
           </a:xfrm>
           <a:prstGeom prst="ellipse">
             <a:avLst/>
@@ -11141,7 +12355,7 @@
       </p:sp>
       <p:pic>
         <p:nvPicPr>
-          <p:cNvPr id="5" name="icon-ctl-0" descr="preencoded.png">    </p:cNvPr>
+          <p:cNvPr id="4" name="icon-studio-0" descr="preencoded.png">    </p:cNvPr>
           <p:cNvPicPr>
             <a:picLocks noChangeAspect="1"/>
           </p:cNvPicPr>
@@ -11155,8 +12369,8 @@
         </p:blipFill>
         <p:spPr>
           <a:xfrm>
-            <a:off x="804672" y="1536192"/>
-            <a:ext cx="237744" cy="237744"/>
+            <a:off x="582930" y="1351026"/>
+            <a:ext cx="251460" cy="251460"/>
           </a:xfrm>
           <a:prstGeom prst="rect">
             <a:avLst/>
@@ -11165,50 +12379,50 @@
       </p:pic>
       <p:sp>
         <p:nvSpPr>
-          <p:cNvPr id="6" name="ctl-h-0"/>
-          <p:cNvSpPr txBox="1"/>
-          <p:nvPr/>
-        </p:nvSpPr>
-        <p:spPr>
-          <a:xfrm>
-            <a:off x="1280160" y="1417320"/>
-            <a:ext cx="1691640" cy="502920"/>
-          </a:xfrm>
-          <a:prstGeom prst="rect">
-            <a:avLst/>
-          </a:prstGeom>
-          <a:noFill/>
-          <a:ln/>
-        </p:spPr>
-        <p:txBody>
-          <a:bodyPr wrap="square" lIns="0" tIns="0" rIns="0" bIns="0" rtlCol="0" anchor="ctr"/>
+          <p:cNvPr id="5" name="studio-h-0"/>
+          <p:cNvSpPr txBox="1"/>
+          <p:nvPr/>
+        </p:nvSpPr>
+        <p:spPr>
+          <a:xfrm>
+            <a:off x="1143000" y="1188720"/>
+            <a:ext cx="2743200" cy="292608"/>
+          </a:xfrm>
+          <a:prstGeom prst="rect">
+            <a:avLst/>
+          </a:prstGeom>
+          <a:noFill/>
+          <a:ln/>
+        </p:spPr>
+        <p:txBody>
+          <a:bodyPr wrap="square" lIns="0" tIns="0" rIns="0" bIns="0" rtlCol="0" anchor="t"/>
           <a:lstStyle/>
           <a:p>
             <a:pPr indent="0" marL="0">
               <a:buNone/>
             </a:pPr>
             <a:r>
-              <a:rPr lang="en-US" sz="1400" b="1" dirty="0">
+              <a:rPr lang="en-US" sz="1500" b="1" dirty="0">
                 <a:solidFill>
                   <a:schemeClr val="tx1"/>
                 </a:solidFill>
               </a:rPr>
-              <a:t>Approval before action</a:t>
-            </a:r>
-            <a:endParaRPr lang="en-US" sz="1400" dirty="0"/>
-          </a:p>
-        </p:txBody>
-      </p:sp>
-      <p:sp>
-        <p:nvSpPr>
-          <p:cNvPr id="7" name="ctl-b-0"/>
-          <p:cNvSpPr txBox="1"/>
-          <p:nvPr/>
-        </p:nvSpPr>
-        <p:spPr>
-          <a:xfrm>
-            <a:off x="685800" y="2011680"/>
-            <a:ext cx="2240280" cy="685800"/>
+              <a:t>Research in seconds</a:t>
+            </a:r>
+            <a:endParaRPr lang="en-US" sz="1500" dirty="0"/>
+          </a:p>
+        </p:txBody>
+      </p:sp>
+      <p:sp>
+        <p:nvSpPr>
+          <p:cNvPr id="6" name="studio-b-0"/>
+          <p:cNvSpPr txBox="1"/>
+          <p:nvPr/>
+        </p:nvSpPr>
+        <p:spPr>
+          <a:xfrm>
+            <a:off x="1143000" y="1490472"/>
+            <a:ext cx="2743200" cy="548640"/>
           </a:xfrm>
           <a:prstGeom prst="rect">
             <a:avLst/>
@@ -11229,7 +12443,7 @@
                   <a:schemeClr val="accent4"/>
                 </a:solidFill>
               </a:rPr>
-              <a:t>Sending email, deleting, or any tool you choose waits for a person to approve.</a:t>
+              <a:t>Latest news and web sources, summarised into key facts with links.</a:t>
             </a:r>
             <a:endParaRPr lang="en-US" sz="1200" dirty="0"/>
           </a:p>
@@ -11237,49 +12451,27 @@
       </p:sp>
       <p:sp>
         <p:nvSpPr>
-          <p:cNvPr id="8" name="ctl-1"/>
+          <p:cNvPr id="7" name="circle-studio-1"/>
           <p:cNvSpPr/>
           <p:nvPr/>
         </p:nvSpPr>
         <p:spPr>
           <a:xfrm>
-            <a:off x="3273552" y="1188720"/>
-            <a:ext cx="2615184" cy="1554480"/>
-          </a:xfrm>
-          <a:prstGeom prst="roundRect">
-            <a:avLst>
-              <a:gd name="adj" fmla="val 7059"/>
-            </a:avLst>
+            <a:off x="457200" y="2121408"/>
+            <a:ext cx="502920" cy="502920"/>
+          </a:xfrm>
+          <a:prstGeom prst="ellipse">
+            <a:avLst/>
           </a:prstGeom>
           <a:solidFill>
-            <a:schemeClr val="bg2"/>
-          </a:solidFill>
-          <a:ln/>
-        </p:spPr>
-      </p:sp>
-      <p:sp>
-        <p:nvSpPr>
-          <p:cNvPr id="9" name="circle-ctl-1"/>
-          <p:cNvSpPr/>
-          <p:nvPr/>
-        </p:nvSpPr>
-        <p:spPr>
-          <a:xfrm>
-            <a:off x="3502152" y="1417320"/>
-            <a:ext cx="475488" cy="475488"/>
-          </a:xfrm>
-          <a:prstGeom prst="ellipse">
-            <a:avLst/>
-          </a:prstGeom>
-          <a:solidFill>
-            <a:schemeClr val="accent2"/>
+            <a:schemeClr val="accent1"/>
           </a:solidFill>
           <a:ln/>
         </p:spPr>
       </p:sp>
       <p:pic>
         <p:nvPicPr>
-          <p:cNvPr id="10" name="icon-ctl-1" descr="preencoded.png">    </p:cNvPr>
+          <p:cNvPr id="8" name="icon-studio-1" descr="preencoded.png">    </p:cNvPr>
           <p:cNvPicPr>
             <a:picLocks noChangeAspect="1"/>
           </p:cNvPicPr>
@@ -11293,8 +12485,8 @@
         </p:blipFill>
         <p:spPr>
           <a:xfrm>
-            <a:off x="3621024" y="1536192"/>
-            <a:ext cx="237744" cy="237744"/>
+            <a:off x="582930" y="2247138"/>
+            <a:ext cx="251460" cy="251460"/>
           </a:xfrm>
           <a:prstGeom prst="rect">
             <a:avLst/>
@@ -11303,50 +12495,50 @@
       </p:pic>
       <p:sp>
         <p:nvSpPr>
-          <p:cNvPr id="11" name="ctl-h-1"/>
-          <p:cNvSpPr txBox="1"/>
-          <p:nvPr/>
-        </p:nvSpPr>
-        <p:spPr>
-          <a:xfrm>
-            <a:off x="4096512" y="1417320"/>
-            <a:ext cx="1691640" cy="502920"/>
-          </a:xfrm>
-          <a:prstGeom prst="rect">
-            <a:avLst/>
-          </a:prstGeom>
-          <a:noFill/>
-          <a:ln/>
-        </p:spPr>
-        <p:txBody>
-          <a:bodyPr wrap="square" lIns="0" tIns="0" rIns="0" bIns="0" rtlCol="0" anchor="ctr"/>
+          <p:cNvPr id="9" name="studio-h-1"/>
+          <p:cNvSpPr txBox="1"/>
+          <p:nvPr/>
+        </p:nvSpPr>
+        <p:spPr>
+          <a:xfrm>
+            <a:off x="1143000" y="2084832"/>
+            <a:ext cx="2743200" cy="292608"/>
+          </a:xfrm>
+          <a:prstGeom prst="rect">
+            <a:avLst/>
+          </a:prstGeom>
+          <a:noFill/>
+          <a:ln/>
+        </p:spPr>
+        <p:txBody>
+          <a:bodyPr wrap="square" lIns="0" tIns="0" rIns="0" bIns="0" rtlCol="0" anchor="t"/>
           <a:lstStyle/>
           <a:p>
             <a:pPr indent="0" marL="0">
               <a:buNone/>
             </a:pPr>
             <a:r>
-              <a:rPr lang="en-US" sz="1400" b="1" dirty="0">
+              <a:rPr lang="en-US" sz="1500" b="1" dirty="0">
                 <a:solidFill>
                   <a:schemeClr val="tx1"/>
                 </a:solidFill>
               </a:rPr>
-              <a:t>Customers stay in their lane</a:t>
-            </a:r>
-            <a:endParaRPr lang="en-US" sz="1400" dirty="0"/>
-          </a:p>
-        </p:txBody>
-      </p:sp>
-      <p:sp>
-        <p:nvSpPr>
-          <p:cNvPr id="12" name="ctl-b-1"/>
-          <p:cNvSpPr txBox="1"/>
-          <p:nvPr/>
-        </p:nvSpPr>
-        <p:spPr>
-          <a:xfrm>
-            <a:off x="3502152" y="2011680"/>
-            <a:ext cx="2240280" cy="685800"/>
+              <a:t>A script that fits</a:t>
+            </a:r>
+            <a:endParaRPr lang="en-US" sz="1500" dirty="0"/>
+          </a:p>
+        </p:txBody>
+      </p:sp>
+      <p:sp>
+        <p:nvSpPr>
+          <p:cNvPr id="10" name="studio-b-1"/>
+          <p:cNvSpPr txBox="1"/>
+          <p:nvPr/>
+        </p:nvSpPr>
+        <p:spPr>
+          <a:xfrm>
+            <a:off x="1143000" y="2386584"/>
+            <a:ext cx="2743200" cy="548640"/>
           </a:xfrm>
           <a:prstGeom prst="rect">
             <a:avLst/>
@@ -11367,7 +12559,7 @@
                   <a:schemeClr val="accent4"/>
                 </a:solidFill>
               </a:rPr>
-              <a:t>Customer chats can only use safe tools — never your mailbox, tasks or files.</a:t>
+              <a:t>Shorts and Reels scripts timed to 30–90 s, beat by beat.</a:t>
             </a:r>
             <a:endParaRPr lang="en-US" sz="1200" dirty="0"/>
           </a:p>
@@ -11375,36 +12567,14 @@
       </p:sp>
       <p:sp>
         <p:nvSpPr>
-          <p:cNvPr id="13" name="ctl-2"/>
+          <p:cNvPr id="11" name="circle-studio-2"/>
           <p:cNvSpPr/>
           <p:nvPr/>
         </p:nvSpPr>
         <p:spPr>
           <a:xfrm>
-            <a:off x="6089904" y="1188720"/>
-            <a:ext cx="2615184" cy="1554480"/>
-          </a:xfrm>
-          <a:prstGeom prst="roundRect">
-            <a:avLst>
-              <a:gd name="adj" fmla="val 7059"/>
-            </a:avLst>
-          </a:prstGeom>
-          <a:solidFill>
-            <a:schemeClr val="bg2"/>
-          </a:solidFill>
-          <a:ln/>
-        </p:spPr>
-      </p:sp>
-      <p:sp>
-        <p:nvSpPr>
-          <p:cNvPr id="14" name="circle-ctl-2"/>
-          <p:cNvSpPr/>
-          <p:nvPr/>
-        </p:nvSpPr>
-        <p:spPr>
-          <a:xfrm>
-            <a:off x="6318504" y="1417320"/>
-            <a:ext cx="475488" cy="475488"/>
+            <a:off x="457200" y="3017520"/>
+            <a:ext cx="502920" cy="502920"/>
           </a:xfrm>
           <a:prstGeom prst="ellipse">
             <a:avLst/>
@@ -11417,7 +12587,7 @@
       </p:sp>
       <p:pic>
         <p:nvPicPr>
-          <p:cNvPr id="15" name="icon-ctl-2" descr="preencoded.png">    </p:cNvPr>
+          <p:cNvPr id="12" name="icon-studio-2" descr="preencoded.png">    </p:cNvPr>
           <p:cNvPicPr>
             <a:picLocks noChangeAspect="1"/>
           </p:cNvPicPr>
@@ -11431,8 +12601,8 @@
         </p:blipFill>
         <p:spPr>
           <a:xfrm>
-            <a:off x="6437376" y="1536192"/>
-            <a:ext cx="237744" cy="237744"/>
+            <a:off x="582930" y="3143250"/>
+            <a:ext cx="251460" cy="251460"/>
           </a:xfrm>
           <a:prstGeom prst="rect">
             <a:avLst/>
@@ -11441,50 +12611,50 @@
       </p:pic>
       <p:sp>
         <p:nvSpPr>
-          <p:cNvPr id="16" name="ctl-h-2"/>
-          <p:cNvSpPr txBox="1"/>
-          <p:nvPr/>
-        </p:nvSpPr>
-        <p:spPr>
-          <a:xfrm>
-            <a:off x="6912864" y="1417320"/>
-            <a:ext cx="1691640" cy="502920"/>
-          </a:xfrm>
-          <a:prstGeom prst="rect">
-            <a:avLst/>
-          </a:prstGeom>
-          <a:noFill/>
-          <a:ln/>
-        </p:spPr>
-        <p:txBody>
-          <a:bodyPr wrap="square" lIns="0" tIns="0" rIns="0" bIns="0" rtlCol="0" anchor="ctr"/>
+          <p:cNvPr id="13" name="studio-h-2"/>
+          <p:cNvSpPr txBox="1"/>
+          <p:nvPr/>
+        </p:nvSpPr>
+        <p:spPr>
+          <a:xfrm>
+            <a:off x="1143000" y="2980944"/>
+            <a:ext cx="2743200" cy="292608"/>
+          </a:xfrm>
+          <a:prstGeom prst="rect">
+            <a:avLst/>
+          </a:prstGeom>
+          <a:noFill/>
+          <a:ln/>
+        </p:spPr>
+        <p:txBody>
+          <a:bodyPr wrap="square" lIns="0" tIns="0" rIns="0" bIns="0" rtlCol="0" anchor="t"/>
           <a:lstStyle/>
           <a:p>
             <a:pPr indent="0" marL="0">
               <a:buNone/>
             </a:pPr>
             <a:r>
-              <a:rPr lang="en-US" sz="1400" b="1" dirty="0">
+              <a:rPr lang="en-US" sz="1500" b="1" dirty="0">
                 <a:solidFill>
                   <a:schemeClr val="tx1"/>
                 </a:solidFill>
               </a:rPr>
-              <a:t>Roles for your team</a:t>
-            </a:r>
-            <a:endParaRPr lang="en-US" sz="1400" dirty="0"/>
-          </a:p>
-        </p:txBody>
-      </p:sp>
-      <p:sp>
-        <p:nvSpPr>
-          <p:cNvPr id="17" name="ctl-b-2"/>
-          <p:cNvSpPr txBox="1"/>
-          <p:nvPr/>
-        </p:nvSpPr>
-        <p:spPr>
-          <a:xfrm>
-            <a:off x="6318504" y="2011680"/>
-            <a:ext cx="2240280" cy="685800"/>
+              <a:t>Ready to shoot</a:t>
+            </a:r>
+            <a:endParaRPr lang="en-US" sz="1500" dirty="0"/>
+          </a:p>
+        </p:txBody>
+      </p:sp>
+      <p:sp>
+        <p:nvSpPr>
+          <p:cNvPr id="14" name="studio-b-2"/>
+          <p:cNvSpPr txBox="1"/>
+          <p:nvPr/>
+        </p:nvSpPr>
+        <p:spPr>
+          <a:xfrm>
+            <a:off x="1143000" y="3282696"/>
+            <a:ext cx="2743200" cy="548640"/>
           </a:xfrm>
           <a:prstGeom prst="rect">
             <a:avLst/>
@@ -11505,7 +12675,7 @@
                   <a:schemeClr val="accent4"/>
                 </a:solidFill>
               </a:rPr>
-              <a:t>Owner, admin, agent and member. Invite links that expire after 7 days.</a:t>
+              <a:t>Caption, hashtags, thumbnails and music; download the script or teleprompter text.</a:t>
             </a:r>
             <a:endParaRPr lang="en-US" sz="1200" dirty="0"/>
           </a:p>
@@ -11513,49 +12683,29 @@
       </p:sp>
       <p:sp>
         <p:nvSpPr>
-          <p:cNvPr id="18" name="ctl-3"/>
+          <p:cNvPr id="15" name="studio-chip-0"/>
           <p:cNvSpPr/>
           <p:nvPr/>
         </p:nvSpPr>
         <p:spPr>
           <a:xfrm>
-            <a:off x="457200" y="2907792"/>
-            <a:ext cx="2615184" cy="1554480"/>
+            <a:off x="457200" y="3977640"/>
+            <a:ext cx="1691640" cy="457200"/>
           </a:xfrm>
           <a:prstGeom prst="roundRect">
             <a:avLst>
-              <a:gd name="adj" fmla="val 7059"/>
+              <a:gd name="adj" fmla="val 24000"/>
             </a:avLst>
           </a:prstGeom>
           <a:solidFill>
-            <a:schemeClr val="bg2"/>
-          </a:solidFill>
-          <a:ln/>
-        </p:spPr>
-      </p:sp>
-      <p:sp>
-        <p:nvSpPr>
-          <p:cNvPr id="19" name="circle-ctl-3"/>
-          <p:cNvSpPr/>
-          <p:nvPr/>
-        </p:nvSpPr>
-        <p:spPr>
-          <a:xfrm>
-            <a:off x="685800" y="3136392"/>
-            <a:ext cx="475488" cy="475488"/>
-          </a:xfrm>
-          <a:prstGeom prst="ellipse">
-            <a:avLst/>
-          </a:prstGeom>
-          <a:solidFill>
-            <a:schemeClr val="accent2"/>
+            <a:schemeClr val="accent5"/>
           </a:solidFill>
           <a:ln/>
         </p:spPr>
       </p:sp>
       <p:pic>
         <p:nvPicPr>
-          <p:cNvPr id="20" name="icon-ctl-3" descr="preencoded.png">    </p:cNvPr>
+          <p:cNvPr id="16" name="studio-chip-icon-0" descr="preencoded.png">    </p:cNvPr>
           <p:cNvPicPr>
             <a:picLocks noChangeAspect="1"/>
           </p:cNvPicPr>
@@ -11569,7 +12719,7 @@
         </p:blipFill>
         <p:spPr>
           <a:xfrm>
-            <a:off x="804672" y="3255264"/>
+            <a:off x="576072" y="4087368"/>
             <a:ext cx="237744" cy="237744"/>
           </a:xfrm>
           <a:prstGeom prst="rect">
@@ -11579,14 +12729,14 @@
       </p:pic>
       <p:sp>
         <p:nvSpPr>
-          <p:cNvPr id="21" name="ctl-h-3"/>
-          <p:cNvSpPr txBox="1"/>
-          <p:nvPr/>
-        </p:nvSpPr>
-        <p:spPr>
-          <a:xfrm>
-            <a:off x="1280160" y="3136392"/>
-            <a:ext cx="1691640" cy="502920"/>
+          <p:cNvPr id="17" name="studio-chip-t-0"/>
+          <p:cNvSpPr txBox="1"/>
+          <p:nvPr/>
+        </p:nvSpPr>
+        <p:spPr>
+          <a:xfrm>
+            <a:off x="886968" y="3977640"/>
+            <a:ext cx="1243584" cy="457200"/>
           </a:xfrm>
           <a:prstGeom prst="rect">
             <a:avLst/>
@@ -11602,98 +12752,42 @@
               <a:buNone/>
             </a:pPr>
             <a:r>
-              <a:rPr lang="en-US" sz="1400" b="1" dirty="0">
+              <a:rPr lang="en-US" sz="1100" b="1" dirty="0">
                 <a:solidFill>
                   <a:schemeClr val="tx1"/>
                 </a:solidFill>
               </a:rPr>
-              <a:t>Full audit log</a:t>
-            </a:r>
-            <a:endParaRPr lang="en-US" sz="1400" dirty="0"/>
-          </a:p>
-        </p:txBody>
-      </p:sp>
-      <p:sp>
-        <p:nvSpPr>
-          <p:cNvPr id="22" name="ctl-b-3"/>
-          <p:cNvSpPr txBox="1"/>
-          <p:nvPr/>
-        </p:nvSpPr>
-        <p:spPr>
-          <a:xfrm>
-            <a:off x="685800" y="3730752"/>
-            <a:ext cx="2240280" cy="685800"/>
-          </a:xfrm>
-          <a:prstGeom prst="rect">
-            <a:avLst/>
-          </a:prstGeom>
-          <a:noFill/>
-          <a:ln/>
-        </p:spPr>
-        <p:txBody>
-          <a:bodyPr wrap="square" lIns="0" tIns="0" rIns="0" bIns="0" rtlCol="0" anchor="t"/>
-          <a:lstStyle/>
-          <a:p>
-            <a:pPr indent="0" marL="0">
-              <a:buNone/>
-            </a:pPr>
-            <a:r>
-              <a:rPr lang="en-US" sz="1200" dirty="0">
-                <a:solidFill>
-                  <a:schemeClr val="accent4"/>
-                </a:solidFill>
-              </a:rPr>
-              <a:t>Every action, take-over and reply is recorded and searchable.</a:t>
-            </a:r>
-            <a:endParaRPr lang="en-US" sz="1200" dirty="0"/>
-          </a:p>
-        </p:txBody>
-      </p:sp>
-      <p:sp>
-        <p:nvSpPr>
-          <p:cNvPr id="23" name="ctl-4"/>
+              <a:t>Hindi, Hinglish &amp; more</a:t>
+            </a:r>
+            <a:endParaRPr lang="en-US" sz="1100" dirty="0"/>
+          </a:p>
+        </p:txBody>
+      </p:sp>
+      <p:sp>
+        <p:nvSpPr>
+          <p:cNvPr id="18" name="studio-chip-1"/>
           <p:cNvSpPr/>
           <p:nvPr/>
         </p:nvSpPr>
         <p:spPr>
           <a:xfrm>
-            <a:off x="3273552" y="2907792"/>
-            <a:ext cx="2615184" cy="1554480"/>
+            <a:off x="2240280" y="3977640"/>
+            <a:ext cx="1691640" cy="457200"/>
           </a:xfrm>
           <a:prstGeom prst="roundRect">
             <a:avLst>
-              <a:gd name="adj" fmla="val 7059"/>
+              <a:gd name="adj" fmla="val 24000"/>
             </a:avLst>
           </a:prstGeom>
           <a:solidFill>
-            <a:schemeClr val="bg2"/>
-          </a:solidFill>
-          <a:ln/>
-        </p:spPr>
-      </p:sp>
-      <p:sp>
-        <p:nvSpPr>
-          <p:cNvPr id="24" name="circle-ctl-4"/>
-          <p:cNvSpPr/>
-          <p:nvPr/>
-        </p:nvSpPr>
-        <p:spPr>
-          <a:xfrm>
-            <a:off x="3502152" y="3136392"/>
-            <a:ext cx="475488" cy="475488"/>
-          </a:xfrm>
-          <a:prstGeom prst="ellipse">
-            <a:avLst/>
-          </a:prstGeom>
-          <a:solidFill>
-            <a:schemeClr val="accent2"/>
+            <a:schemeClr val="accent5"/>
           </a:solidFill>
           <a:ln/>
         </p:spPr>
       </p:sp>
       <p:pic>
         <p:nvPicPr>
-          <p:cNvPr id="25" name="icon-ctl-4" descr="preencoded.png">    </p:cNvPr>
+          <p:cNvPr id="19" name="studio-chip-icon-1" descr="preencoded.png">    </p:cNvPr>
           <p:cNvPicPr>
             <a:picLocks noChangeAspect="1"/>
           </p:cNvPicPr>
@@ -11707,7 +12801,7 @@
         </p:blipFill>
         <p:spPr>
           <a:xfrm>
-            <a:off x="3621024" y="3255264"/>
+            <a:off x="2359152" y="4087368"/>
             <a:ext cx="237744" cy="237744"/>
           </a:xfrm>
           <a:prstGeom prst="rect">
@@ -11717,14 +12811,14 @@
       </p:pic>
       <p:sp>
         <p:nvSpPr>
-          <p:cNvPr id="26" name="ctl-h-4"/>
-          <p:cNvSpPr txBox="1"/>
-          <p:nvPr/>
-        </p:nvSpPr>
-        <p:spPr>
-          <a:xfrm>
-            <a:off x="4096512" y="3136392"/>
-            <a:ext cx="1691640" cy="502920"/>
+          <p:cNvPr id="20" name="studio-chip-t-1"/>
+          <p:cNvSpPr txBox="1"/>
+          <p:nvPr/>
+        </p:nvSpPr>
+        <p:spPr>
+          <a:xfrm>
+            <a:off x="2670048" y="3977640"/>
+            <a:ext cx="1243584" cy="457200"/>
           </a:xfrm>
           <a:prstGeom prst="rect">
             <a:avLst/>
@@ -11740,98 +12834,20 @@
               <a:buNone/>
             </a:pPr>
             <a:r>
-              <a:rPr lang="en-US" sz="1400" b="1" dirty="0">
+              <a:rPr lang="en-US" sz="1100" b="1" dirty="0">
                 <a:solidFill>
                   <a:schemeClr val="tx1"/>
                 </a:solidFill>
               </a:rPr>
-              <a:t>Your data, kept separate</a:t>
-            </a:r>
-            <a:endParaRPr lang="en-US" sz="1400" dirty="0"/>
-          </a:p>
-        </p:txBody>
-      </p:sp>
-      <p:sp>
-        <p:nvSpPr>
-          <p:cNvPr id="27" name="ctl-b-4"/>
-          <p:cNvSpPr txBox="1"/>
-          <p:nvPr/>
-        </p:nvSpPr>
-        <p:spPr>
-          <a:xfrm>
-            <a:off x="3502152" y="3730752"/>
-            <a:ext cx="2240280" cy="685800"/>
-          </a:xfrm>
-          <a:prstGeom prst="rect">
-            <a:avLst/>
-          </a:prstGeom>
-          <a:noFill/>
-          <a:ln/>
-        </p:spPr>
-        <p:txBody>
-          <a:bodyPr wrap="square" lIns="0" tIns="0" rIns="0" bIns="0" rtlCol="0" anchor="t"/>
-          <a:lstStyle/>
-          <a:p>
-            <a:pPr indent="0" marL="0">
-              <a:buNone/>
-            </a:pPr>
-            <a:r>
-              <a:rPr lang="en-US" sz="1200" dirty="0">
-                <a:solidFill>
-                  <a:schemeClr val="accent4"/>
-                </a:solidFill>
-              </a:rPr>
-              <a:t>Documents and conversations are isolated per organisation.</a:t>
-            </a:r>
-            <a:endParaRPr lang="en-US" sz="1200" dirty="0"/>
-          </a:p>
-        </p:txBody>
-      </p:sp>
-      <p:sp>
-        <p:nvSpPr>
-          <p:cNvPr id="28" name="ctl-5"/>
-          <p:cNvSpPr/>
-          <p:nvPr/>
-        </p:nvSpPr>
-        <p:spPr>
-          <a:xfrm>
-            <a:off x="6089904" y="2907792"/>
-            <a:ext cx="2615184" cy="1554480"/>
-          </a:xfrm>
-          <a:prstGeom prst="roundRect">
-            <a:avLst>
-              <a:gd name="adj" fmla="val 7059"/>
-            </a:avLst>
-          </a:prstGeom>
-          <a:solidFill>
-            <a:schemeClr val="bg2"/>
-          </a:solidFill>
-          <a:ln/>
-        </p:spPr>
-      </p:sp>
-      <p:sp>
-        <p:nvSpPr>
-          <p:cNvPr id="29" name="circle-ctl-5"/>
-          <p:cNvSpPr/>
-          <p:nvPr/>
-        </p:nvSpPr>
-        <p:spPr>
-          <a:xfrm>
-            <a:off x="6318504" y="3136392"/>
-            <a:ext cx="475488" cy="475488"/>
-          </a:xfrm>
-          <a:prstGeom prst="ellipse">
-            <a:avLst/>
-          </a:prstGeom>
-          <a:solidFill>
-            <a:schemeClr val="accent2"/>
-          </a:solidFill>
-          <a:ln/>
-        </p:spPr>
+              <a:t>Works with Claude (MCP)</a:t>
+            </a:r>
+            <a:endParaRPr lang="en-US" sz="1100" dirty="0"/>
+          </a:p>
+        </p:txBody>
       </p:sp>
       <p:pic>
         <p:nvPicPr>
-          <p:cNvPr id="30" name="icon-ctl-5" descr="preencoded.png">    </p:cNvPr>
+          <p:cNvPr id="21" name="studio-shot" descr="Studio tab showing a generated 30-second YouTube Shorts script with timed beats, caption, hashtags and thumbnail ideas">    </p:cNvPr>
           <p:cNvPicPr>
             <a:picLocks noChangeAspect="1"/>
           </p:cNvPicPr>
@@ -11845,86 +12861,21 @@
         </p:blipFill>
         <p:spPr>
           <a:xfrm>
-            <a:off x="6437376" y="3255264"/>
-            <a:ext cx="237744" cy="237744"/>
-          </a:xfrm>
-          <a:prstGeom prst="rect">
-            <a:avLst/>
-          </a:prstGeom>
+            <a:off x="4069080" y="1188720"/>
+            <a:ext cx="4617720" cy="3028013"/>
+          </a:xfrm>
+          <a:prstGeom prst="rect">
+            <a:avLst/>
+          </a:prstGeom>
+          <a:effectLst>
+            <a:outerShdw sx="100000" sy="100000" kx="0" ky="0" algn="bl" rotWithShape="0" blurRad="101600" dist="25400" dir="5400000">
+              <a:srgbClr val="000000">
+                <a:alpha val="18000"/>
+              </a:srgbClr>
+            </a:outerShdw>
+          </a:effectLst>
         </p:spPr>
       </p:pic>
-      <p:sp>
-        <p:nvSpPr>
-          <p:cNvPr id="31" name="ctl-h-5"/>
-          <p:cNvSpPr txBox="1"/>
-          <p:nvPr/>
-        </p:nvSpPr>
-        <p:spPr>
-          <a:xfrm>
-            <a:off x="6912864" y="3136392"/>
-            <a:ext cx="1691640" cy="502920"/>
-          </a:xfrm>
-          <a:prstGeom prst="rect">
-            <a:avLst/>
-          </a:prstGeom>
-          <a:noFill/>
-          <a:ln/>
-        </p:spPr>
-        <p:txBody>
-          <a:bodyPr wrap="square" lIns="0" tIns="0" rIns="0" bIns="0" rtlCol="0" anchor="ctr"/>
-          <a:lstStyle/>
-          <a:p>
-            <a:pPr indent="0" marL="0">
-              <a:buNone/>
-            </a:pPr>
-            <a:r>
-              <a:rPr lang="en-US" sz="1400" b="1" dirty="0">
-                <a:solidFill>
-                  <a:schemeClr val="tx1"/>
-                </a:solidFill>
-              </a:rPr>
-              <a:t>Your own AI account</a:t>
-            </a:r>
-            <a:endParaRPr lang="en-US" sz="1400" dirty="0"/>
-          </a:p>
-        </p:txBody>
-      </p:sp>
-      <p:sp>
-        <p:nvSpPr>
-          <p:cNvPr id="32" name="ctl-b-5"/>
-          <p:cNvSpPr txBox="1"/>
-          <p:nvPr/>
-        </p:nvSpPr>
-        <p:spPr>
-          <a:xfrm>
-            <a:off x="6318504" y="3730752"/>
-            <a:ext cx="2240280" cy="685800"/>
-          </a:xfrm>
-          <a:prstGeom prst="rect">
-            <a:avLst/>
-          </a:prstGeom>
-          <a:noFill/>
-          <a:ln/>
-        </p:spPr>
-        <p:txBody>
-          <a:bodyPr wrap="square" lIns="0" tIns="0" rIns="0" bIns="0" rtlCol="0" anchor="t"/>
-          <a:lstStyle/>
-          <a:p>
-            <a:pPr indent="0" marL="0">
-              <a:buNone/>
-            </a:pPr>
-            <a:r>
-              <a:rPr lang="en-US" sz="1200" dirty="0">
-                <a:solidFill>
-                  <a:schemeClr val="accent4"/>
-                </a:solidFill>
-              </a:rPr>
-              <a:t>Optionally use your own OpenAI key, stored encrypted.</a:t>
-            </a:r>
-            <a:endParaRPr lang="en-US" sz="1200" dirty="0"/>
-          </a:p>
-        </p:txBody>
-      </p:sp>
       <p:sp>
         <p:nvSpPr>
           <p:cNvPr id="25" name="Slide Number Placeholder 0"/>
@@ -12027,7 +12978,7 @@
                   <a:schemeClr val="tx1"/>
                 </a:solidFill>
               </a:rPr>
-              <a:t>Always on, safely hosted</a:t>
+              <a:t>You stay in control</a:t>
             </a:r>
             <a:endParaRPr lang="en-US" sz="3200" dirty="0"/>
           </a:p>
@@ -12035,18 +12986,18 @@
       </p:sp>
       <p:sp>
         <p:nvSpPr>
-          <p:cNvPr id="3" name="host-0"/>
+          <p:cNvPr id="3" name="ctl-0"/>
           <p:cNvSpPr/>
           <p:nvPr/>
         </p:nvSpPr>
         <p:spPr>
           <a:xfrm>
             <a:off x="457200" y="1188720"/>
-            <a:ext cx="1828800" cy="1965960"/>
+            <a:ext cx="2615184" cy="1554480"/>
           </a:xfrm>
           <a:prstGeom prst="roundRect">
             <a:avLst>
-              <a:gd name="adj" fmla="val 6000"/>
+              <a:gd name="adj" fmla="val 7059"/>
             </a:avLst>
           </a:prstGeom>
           <a:solidFill>
@@ -12057,27 +13008,27 @@
       </p:sp>
       <p:sp>
         <p:nvSpPr>
-          <p:cNvPr id="4" name="circle-host-0"/>
+          <p:cNvPr id="4" name="circle-ctl-0"/>
           <p:cNvSpPr/>
           <p:nvPr/>
         </p:nvSpPr>
         <p:spPr>
           <a:xfrm>
-            <a:off x="1097280" y="1325880"/>
-            <a:ext cx="548640" cy="548640"/>
+            <a:off x="685800" y="1417320"/>
+            <a:ext cx="475488" cy="475488"/>
           </a:xfrm>
           <a:prstGeom prst="ellipse">
             <a:avLst/>
           </a:prstGeom>
           <a:solidFill>
-            <a:schemeClr val="accent4"/>
+            <a:schemeClr val="accent2"/>
           </a:solidFill>
           <a:ln/>
         </p:spPr>
       </p:sp>
       <p:pic>
         <p:nvPicPr>
-          <p:cNvPr id="5" name="icon-host-0" descr="preencoded.png">    </p:cNvPr>
+          <p:cNvPr id="5" name="icon-ctl-0" descr="preencoded.png">    </p:cNvPr>
           <p:cNvPicPr>
             <a:picLocks noChangeAspect="1"/>
           </p:cNvPicPr>
@@ -12091,8 +13042,8 @@
         </p:blipFill>
         <p:spPr>
           <a:xfrm>
-            <a:off x="1234440" y="1463040"/>
-            <a:ext cx="274320" cy="274320"/>
+            <a:off x="804672" y="1536192"/>
+            <a:ext cx="237744" cy="237744"/>
           </a:xfrm>
           <a:prstGeom prst="rect">
             <a:avLst/>
@@ -12101,14 +13052,50 @@
       </p:pic>
       <p:sp>
         <p:nvSpPr>
-          <p:cNvPr id="6" name="host-h-0"/>
-          <p:cNvSpPr txBox="1"/>
-          <p:nvPr/>
-        </p:nvSpPr>
-        <p:spPr>
-          <a:xfrm>
-            <a:off x="566928" y="1965960"/>
-            <a:ext cx="1609344" cy="320040"/>
+          <p:cNvPr id="6" name="ctl-h-0"/>
+          <p:cNvSpPr txBox="1"/>
+          <p:nvPr/>
+        </p:nvSpPr>
+        <p:spPr>
+          <a:xfrm>
+            <a:off x="1280160" y="1417320"/>
+            <a:ext cx="1691640" cy="502920"/>
+          </a:xfrm>
+          <a:prstGeom prst="rect">
+            <a:avLst/>
+          </a:prstGeom>
+          <a:noFill/>
+          <a:ln/>
+        </p:spPr>
+        <p:txBody>
+          <a:bodyPr wrap="square" lIns="0" tIns="0" rIns="0" bIns="0" rtlCol="0" anchor="ctr"/>
+          <a:lstStyle/>
+          <a:p>
+            <a:pPr indent="0" marL="0">
+              <a:buNone/>
+            </a:pPr>
+            <a:r>
+              <a:rPr lang="en-US" sz="1400" b="1" dirty="0">
+                <a:solidFill>
+                  <a:schemeClr val="tx1"/>
+                </a:solidFill>
+              </a:rPr>
+              <a:t>Approval before action</a:t>
+            </a:r>
+            <a:endParaRPr lang="en-US" sz="1400" dirty="0"/>
+          </a:p>
+        </p:txBody>
+      </p:sp>
+      <p:sp>
+        <p:nvSpPr>
+          <p:cNvPr id="7" name="ctl-b-0"/>
+          <p:cNvSpPr txBox="1"/>
+          <p:nvPr/>
+        </p:nvSpPr>
+        <p:spPr>
+          <a:xfrm>
+            <a:off x="685800" y="2011680"/>
+            <a:ext cx="2240280" cy="685800"/>
           </a:xfrm>
           <a:prstGeom prst="rect">
             <a:avLst/>
@@ -12120,95 +13107,35 @@
           <a:bodyPr wrap="square" lIns="0" tIns="0" rIns="0" bIns="0" rtlCol="0" anchor="t"/>
           <a:lstStyle/>
           <a:p>
-            <a:pPr algn="ctr" indent="0" marL="0">
-              <a:buNone/>
-            </a:pPr>
-            <a:r>
-              <a:rPr lang="en-US" sz="1400" b="1" dirty="0">
-                <a:solidFill>
-                  <a:schemeClr val="tx1"/>
-                </a:solidFill>
-              </a:rPr>
-              <a:t>Customers &amp; team</a:t>
-            </a:r>
-            <a:endParaRPr lang="en-US" sz="1400" dirty="0"/>
-          </a:p>
-        </p:txBody>
-      </p:sp>
-      <p:sp>
-        <p:nvSpPr>
-          <p:cNvPr id="7" name="host-b-0"/>
-          <p:cNvSpPr txBox="1"/>
-          <p:nvPr/>
-        </p:nvSpPr>
-        <p:spPr>
-          <a:xfrm>
-            <a:off x="594360" y="2304288"/>
-            <a:ext cx="1554480" cy="804672"/>
-          </a:xfrm>
-          <a:prstGeom prst="rect">
-            <a:avLst/>
-          </a:prstGeom>
-          <a:noFill/>
-          <a:ln/>
-        </p:spPr>
-        <p:txBody>
-          <a:bodyPr wrap="square" lIns="0" tIns="0" rIns="0" bIns="0" rtlCol="0" anchor="t"/>
-          <a:lstStyle/>
-          <a:p>
-            <a:pPr algn="ctr" indent="0" marL="0">
-              <a:buNone/>
-            </a:pPr>
-            <a:r>
-              <a:rPr lang="en-US" sz="1100" dirty="0">
+            <a:pPr indent="0" marL="0">
+              <a:buNone/>
+            </a:pPr>
+            <a:r>
+              <a:rPr lang="en-US" sz="1200" dirty="0">
                 <a:solidFill>
                   <a:schemeClr val="accent4"/>
                 </a:solidFill>
               </a:rPr>
-              <a:t>WhatsApp, Telegram and the web app — from any phone or browser.</a:t>
-            </a:r>
-            <a:endParaRPr lang="en-US" sz="1100" dirty="0"/>
-          </a:p>
-        </p:txBody>
-      </p:sp>
-      <p:sp>
-        <p:nvSpPr>
-          <p:cNvPr id="8" name="host-arrow-0"/>
+              <a:t>Sending email, deleting, or any tool you choose waits for a person to approve.</a:t>
+            </a:r>
+            <a:endParaRPr lang="en-US" sz="1200" dirty="0"/>
+          </a:p>
+        </p:txBody>
+      </p:sp>
+      <p:sp>
+        <p:nvSpPr>
+          <p:cNvPr id="8" name="ctl-1"/>
           <p:cNvSpPr/>
           <p:nvPr/>
         </p:nvSpPr>
         <p:spPr>
           <a:xfrm>
-            <a:off x="2313432" y="2167128"/>
-            <a:ext cx="237744" cy="0"/>
-          </a:xfrm>
-          <a:prstGeom prst="line">
-            <a:avLst/>
-          </a:prstGeom>
-          <a:noFill/>
-          <a:ln w="19050">
-            <a:solidFill>
-              <a:schemeClr val="accent4"/>
-            </a:solidFill>
-            <a:prstDash val="solid"/>
-            <a:tailEnd type="triangle"/>
-          </a:ln>
-        </p:spPr>
-      </p:sp>
-      <p:sp>
-        <p:nvSpPr>
-          <p:cNvPr id="9" name="host-1"/>
-          <p:cNvSpPr/>
-          <p:nvPr/>
-        </p:nvSpPr>
-        <p:spPr>
-          <a:xfrm>
-            <a:off x="2578608" y="1188720"/>
-            <a:ext cx="1828800" cy="1965960"/>
+            <a:off x="3273552" y="1188720"/>
+            <a:ext cx="2615184" cy="1554480"/>
           </a:xfrm>
           <a:prstGeom prst="roundRect">
             <a:avLst>
-              <a:gd name="adj" fmla="val 6000"/>
+              <a:gd name="adj" fmla="val 7059"/>
             </a:avLst>
           </a:prstGeom>
           <a:solidFill>
@@ -12219,27 +13146,27 @@
       </p:sp>
       <p:sp>
         <p:nvSpPr>
-          <p:cNvPr id="10" name="circle-host-1"/>
+          <p:cNvPr id="9" name="circle-ctl-1"/>
           <p:cNvSpPr/>
           <p:nvPr/>
         </p:nvSpPr>
         <p:spPr>
           <a:xfrm>
-            <a:off x="3218688" y="1325880"/>
-            <a:ext cx="548640" cy="548640"/>
+            <a:off x="3502152" y="1417320"/>
+            <a:ext cx="475488" cy="475488"/>
           </a:xfrm>
           <a:prstGeom prst="ellipse">
             <a:avLst/>
           </a:prstGeom>
           <a:solidFill>
-            <a:schemeClr val="accent1"/>
+            <a:schemeClr val="accent2"/>
           </a:solidFill>
           <a:ln/>
         </p:spPr>
       </p:sp>
       <p:pic>
         <p:nvPicPr>
-          <p:cNvPr id="11" name="icon-host-1" descr="preencoded.png">    </p:cNvPr>
+          <p:cNvPr id="10" name="icon-ctl-1" descr="preencoded.png">    </p:cNvPr>
           <p:cNvPicPr>
             <a:picLocks noChangeAspect="1"/>
           </p:cNvPicPr>
@@ -12253,8 +13180,8 @@
         </p:blipFill>
         <p:spPr>
           <a:xfrm>
-            <a:off x="3355848" y="1463040"/>
-            <a:ext cx="274320" cy="274320"/>
+            <a:off x="3621024" y="1536192"/>
+            <a:ext cx="237744" cy="237744"/>
           </a:xfrm>
           <a:prstGeom prst="rect">
             <a:avLst/>
@@ -12263,14 +13190,50 @@
       </p:pic>
       <p:sp>
         <p:nvSpPr>
-          <p:cNvPr id="12" name="host-h-1"/>
-          <p:cNvSpPr txBox="1"/>
-          <p:nvPr/>
-        </p:nvSpPr>
-        <p:spPr>
-          <a:xfrm>
-            <a:off x="2688336" y="1965960"/>
-            <a:ext cx="1609344" cy="320040"/>
+          <p:cNvPr id="11" name="ctl-h-1"/>
+          <p:cNvSpPr txBox="1"/>
+          <p:nvPr/>
+        </p:nvSpPr>
+        <p:spPr>
+          <a:xfrm>
+            <a:off x="4096512" y="1417320"/>
+            <a:ext cx="1691640" cy="502920"/>
+          </a:xfrm>
+          <a:prstGeom prst="rect">
+            <a:avLst/>
+          </a:prstGeom>
+          <a:noFill/>
+          <a:ln/>
+        </p:spPr>
+        <p:txBody>
+          <a:bodyPr wrap="square" lIns="0" tIns="0" rIns="0" bIns="0" rtlCol="0" anchor="ctr"/>
+          <a:lstStyle/>
+          <a:p>
+            <a:pPr indent="0" marL="0">
+              <a:buNone/>
+            </a:pPr>
+            <a:r>
+              <a:rPr lang="en-US" sz="1400" b="1" dirty="0">
+                <a:solidFill>
+                  <a:schemeClr val="tx1"/>
+                </a:solidFill>
+              </a:rPr>
+              <a:t>Customers stay in their lane</a:t>
+            </a:r>
+            <a:endParaRPr lang="en-US" sz="1400" dirty="0"/>
+          </a:p>
+        </p:txBody>
+      </p:sp>
+      <p:sp>
+        <p:nvSpPr>
+          <p:cNvPr id="12" name="ctl-b-1"/>
+          <p:cNvSpPr txBox="1"/>
+          <p:nvPr/>
+        </p:nvSpPr>
+        <p:spPr>
+          <a:xfrm>
+            <a:off x="3502152" y="2011680"/>
+            <a:ext cx="2240280" cy="685800"/>
           </a:xfrm>
           <a:prstGeom prst="rect">
             <a:avLst/>
@@ -12282,95 +13245,35 @@
           <a:bodyPr wrap="square" lIns="0" tIns="0" rIns="0" bIns="0" rtlCol="0" anchor="t"/>
           <a:lstStyle/>
           <a:p>
-            <a:pPr algn="ctr" indent="0" marL="0">
-              <a:buNone/>
-            </a:pPr>
-            <a:r>
-              <a:rPr lang="en-US" sz="1400" b="1" dirty="0">
-                <a:solidFill>
-                  <a:schemeClr val="tx1"/>
-                </a:solidFill>
-              </a:rPr>
-              <a:t>One secure entrance</a:t>
-            </a:r>
-            <a:endParaRPr lang="en-US" sz="1400" dirty="0"/>
-          </a:p>
-        </p:txBody>
-      </p:sp>
-      <p:sp>
-        <p:nvSpPr>
-          <p:cNvPr id="13" name="host-b-1"/>
-          <p:cNvSpPr txBox="1"/>
-          <p:nvPr/>
-        </p:nvSpPr>
-        <p:spPr>
-          <a:xfrm>
-            <a:off x="2715768" y="2304288"/>
-            <a:ext cx="1554480" cy="804672"/>
-          </a:xfrm>
-          <a:prstGeom prst="rect">
-            <a:avLst/>
-          </a:prstGeom>
-          <a:noFill/>
-          <a:ln/>
-        </p:spPr>
-        <p:txBody>
-          <a:bodyPr wrap="square" lIns="0" tIns="0" rIns="0" bIns="0" rtlCol="0" anchor="t"/>
-          <a:lstStyle/>
-          <a:p>
-            <a:pPr algn="ctr" indent="0" marL="0">
-              <a:buNone/>
-            </a:pPr>
-            <a:r>
-              <a:rPr lang="en-US" sz="1100" dirty="0">
+            <a:pPr indent="0" marL="0">
+              <a:buNone/>
+            </a:pPr>
+            <a:r>
+              <a:rPr lang="en-US" sz="1200" dirty="0">
                 <a:solidFill>
                   <a:schemeClr val="accent4"/>
                 </a:solidFill>
               </a:rPr>
-              <a:t>Encrypted HTTPS only. Nothing else on the server is reachable from the internet.</a:t>
-            </a:r>
-            <a:endParaRPr lang="en-US" sz="1100" dirty="0"/>
-          </a:p>
-        </p:txBody>
-      </p:sp>
-      <p:sp>
-        <p:nvSpPr>
-          <p:cNvPr id="14" name="host-arrow-1"/>
+              <a:t>Customer chats can only use safe tools — never your mailbox, tasks or files.</a:t>
+            </a:r>
+            <a:endParaRPr lang="en-US" sz="1200" dirty="0"/>
+          </a:p>
+        </p:txBody>
+      </p:sp>
+      <p:sp>
+        <p:nvSpPr>
+          <p:cNvPr id="13" name="ctl-2"/>
           <p:cNvSpPr/>
           <p:nvPr/>
         </p:nvSpPr>
         <p:spPr>
           <a:xfrm>
-            <a:off x="4434840" y="2167128"/>
-            <a:ext cx="237744" cy="0"/>
-          </a:xfrm>
-          <a:prstGeom prst="line">
-            <a:avLst/>
-          </a:prstGeom>
-          <a:noFill/>
-          <a:ln w="19050">
-            <a:solidFill>
-              <a:schemeClr val="accent4"/>
-            </a:solidFill>
-            <a:prstDash val="solid"/>
-            <a:tailEnd type="triangle"/>
-          </a:ln>
-        </p:spPr>
-      </p:sp>
-      <p:sp>
-        <p:nvSpPr>
-          <p:cNvPr id="15" name="host-2"/>
-          <p:cNvSpPr/>
-          <p:nvPr/>
-        </p:nvSpPr>
-        <p:spPr>
-          <a:xfrm>
-            <a:off x="4700016" y="1188720"/>
-            <a:ext cx="1828800" cy="1965960"/>
+            <a:off x="6089904" y="1188720"/>
+            <a:ext cx="2615184" cy="1554480"/>
           </a:xfrm>
           <a:prstGeom prst="roundRect">
             <a:avLst>
-              <a:gd name="adj" fmla="val 6000"/>
+              <a:gd name="adj" fmla="val 7059"/>
             </a:avLst>
           </a:prstGeom>
           <a:solidFill>
@@ -12381,14 +13284,14 @@
       </p:sp>
       <p:sp>
         <p:nvSpPr>
-          <p:cNvPr id="16" name="circle-host-2"/>
+          <p:cNvPr id="14" name="circle-ctl-2"/>
           <p:cNvSpPr/>
           <p:nvPr/>
         </p:nvSpPr>
         <p:spPr>
           <a:xfrm>
-            <a:off x="5340096" y="1325880"/>
-            <a:ext cx="548640" cy="548640"/>
+            <a:off x="6318504" y="1417320"/>
+            <a:ext cx="475488" cy="475488"/>
           </a:xfrm>
           <a:prstGeom prst="ellipse">
             <a:avLst/>
@@ -12401,7 +13304,7 @@
       </p:sp>
       <p:pic>
         <p:nvPicPr>
-          <p:cNvPr id="17" name="icon-host-2" descr="preencoded.png">    </p:cNvPr>
+          <p:cNvPr id="15" name="icon-ctl-2" descr="preencoded.png">    </p:cNvPr>
           <p:cNvPicPr>
             <a:picLocks noChangeAspect="1"/>
           </p:cNvPicPr>
@@ -12415,8 +13318,8 @@
         </p:blipFill>
         <p:spPr>
           <a:xfrm>
-            <a:off x="5477256" y="1463040"/>
-            <a:ext cx="274320" cy="274320"/>
+            <a:off x="6437376" y="1536192"/>
+            <a:ext cx="237744" cy="237744"/>
           </a:xfrm>
           <a:prstGeom prst="rect">
             <a:avLst/>
@@ -12425,14 +13328,50 @@
       </p:pic>
       <p:sp>
         <p:nvSpPr>
-          <p:cNvPr id="18" name="host-h-2"/>
-          <p:cNvSpPr txBox="1"/>
-          <p:nvPr/>
-        </p:nvSpPr>
-        <p:spPr>
-          <a:xfrm>
-            <a:off x="4809744" y="1965960"/>
-            <a:ext cx="1609344" cy="320040"/>
+          <p:cNvPr id="16" name="ctl-h-2"/>
+          <p:cNvSpPr txBox="1"/>
+          <p:nvPr/>
+        </p:nvSpPr>
+        <p:spPr>
+          <a:xfrm>
+            <a:off x="6912864" y="1417320"/>
+            <a:ext cx="1691640" cy="502920"/>
+          </a:xfrm>
+          <a:prstGeom prst="rect">
+            <a:avLst/>
+          </a:prstGeom>
+          <a:noFill/>
+          <a:ln/>
+        </p:spPr>
+        <p:txBody>
+          <a:bodyPr wrap="square" lIns="0" tIns="0" rIns="0" bIns="0" rtlCol="0" anchor="ctr"/>
+          <a:lstStyle/>
+          <a:p>
+            <a:pPr indent="0" marL="0">
+              <a:buNone/>
+            </a:pPr>
+            <a:r>
+              <a:rPr lang="en-US" sz="1400" b="1" dirty="0">
+                <a:solidFill>
+                  <a:schemeClr val="tx1"/>
+                </a:solidFill>
+              </a:rPr>
+              <a:t>Roles for your team</a:t>
+            </a:r>
+            <a:endParaRPr lang="en-US" sz="1400" dirty="0"/>
+          </a:p>
+        </p:txBody>
+      </p:sp>
+      <p:sp>
+        <p:nvSpPr>
+          <p:cNvPr id="17" name="ctl-b-2"/>
+          <p:cNvSpPr txBox="1"/>
+          <p:nvPr/>
+        </p:nvSpPr>
+        <p:spPr>
+          <a:xfrm>
+            <a:off x="6318504" y="2011680"/>
+            <a:ext cx="2240280" cy="685800"/>
           </a:xfrm>
           <a:prstGeom prst="rect">
             <a:avLst/>
@@ -12444,95 +13383,35 @@
           <a:bodyPr wrap="square" lIns="0" tIns="0" rIns="0" bIns="0" rtlCol="0" anchor="t"/>
           <a:lstStyle/>
           <a:p>
-            <a:pPr algn="ctr" indent="0" marL="0">
-              <a:buNone/>
-            </a:pPr>
-            <a:r>
-              <a:rPr lang="en-US" sz="1400" b="1" dirty="0">
-                <a:solidFill>
-                  <a:schemeClr val="tx1"/>
-                </a:solidFill>
-              </a:rPr>
-              <a:t>SwarmAI</a:t>
-            </a:r>
-            <a:endParaRPr lang="en-US" sz="1400" dirty="0"/>
-          </a:p>
-        </p:txBody>
-      </p:sp>
-      <p:sp>
-        <p:nvSpPr>
-          <p:cNvPr id="19" name="host-b-2"/>
-          <p:cNvSpPr txBox="1"/>
-          <p:nvPr/>
-        </p:nvSpPr>
-        <p:spPr>
-          <a:xfrm>
-            <a:off x="4837176" y="2304288"/>
-            <a:ext cx="1554480" cy="804672"/>
-          </a:xfrm>
-          <a:prstGeom prst="rect">
-            <a:avLst/>
-          </a:prstGeom>
-          <a:noFill/>
-          <a:ln/>
-        </p:spPr>
-        <p:txBody>
-          <a:bodyPr wrap="square" lIns="0" tIns="0" rIns="0" bIns="0" rtlCol="0" anchor="t"/>
-          <a:lstStyle/>
-          <a:p>
-            <a:pPr algn="ctr" indent="0" marL="0">
-              <a:buNone/>
-            </a:pPr>
-            <a:r>
-              <a:rPr lang="en-US" sz="1100" dirty="0">
+            <a:pPr indent="0" marL="0">
+              <a:buNone/>
+            </a:pPr>
+            <a:r>
+              <a:rPr lang="en-US" sz="1200" dirty="0">
                 <a:solidFill>
                   <a:schemeClr val="accent4"/>
                 </a:solidFill>
               </a:rPr>
-              <a:t>AI agents, workflows and your data on a private network inside the server.</a:t>
-            </a:r>
-            <a:endParaRPr lang="en-US" sz="1100" dirty="0"/>
-          </a:p>
-        </p:txBody>
-      </p:sp>
-      <p:sp>
-        <p:nvSpPr>
-          <p:cNvPr id="20" name="host-arrow-2"/>
+              <a:t>Owner, admin, agent and member. Invite links that expire after 7 days.</a:t>
+            </a:r>
+            <a:endParaRPr lang="en-US" sz="1200" dirty="0"/>
+          </a:p>
+        </p:txBody>
+      </p:sp>
+      <p:sp>
+        <p:nvSpPr>
+          <p:cNvPr id="18" name="ctl-3"/>
           <p:cNvSpPr/>
           <p:nvPr/>
         </p:nvSpPr>
         <p:spPr>
           <a:xfrm>
-            <a:off x="6556248" y="2167128"/>
-            <a:ext cx="237744" cy="0"/>
-          </a:xfrm>
-          <a:prstGeom prst="line">
-            <a:avLst/>
-          </a:prstGeom>
-          <a:noFill/>
-          <a:ln w="19050">
-            <a:solidFill>
-              <a:schemeClr val="accent4"/>
-            </a:solidFill>
-            <a:prstDash val="solid"/>
-            <a:tailEnd type="triangle"/>
-          </a:ln>
-        </p:spPr>
-      </p:sp>
-      <p:sp>
-        <p:nvSpPr>
-          <p:cNvPr id="21" name="host-3"/>
-          <p:cNvSpPr/>
-          <p:nvPr/>
-        </p:nvSpPr>
-        <p:spPr>
-          <a:xfrm>
-            <a:off x="6821424" y="1188720"/>
-            <a:ext cx="1828800" cy="1965960"/>
+            <a:off x="457200" y="2907792"/>
+            <a:ext cx="2615184" cy="1554480"/>
           </a:xfrm>
           <a:prstGeom prst="roundRect">
             <a:avLst>
-              <a:gd name="adj" fmla="val 6000"/>
+              <a:gd name="adj" fmla="val 7059"/>
             </a:avLst>
           </a:prstGeom>
           <a:solidFill>
@@ -12543,14 +13422,14 @@
       </p:sp>
       <p:sp>
         <p:nvSpPr>
-          <p:cNvPr id="22" name="circle-host-3"/>
+          <p:cNvPr id="19" name="circle-ctl-3"/>
           <p:cNvSpPr/>
           <p:nvPr/>
         </p:nvSpPr>
         <p:spPr>
           <a:xfrm>
-            <a:off x="7461504" y="1325880"/>
-            <a:ext cx="548640" cy="548640"/>
+            <a:off x="685800" y="3136392"/>
+            <a:ext cx="475488" cy="475488"/>
           </a:xfrm>
           <a:prstGeom prst="ellipse">
             <a:avLst/>
@@ -12563,7 +13442,7 @@
       </p:sp>
       <p:pic>
         <p:nvPicPr>
-          <p:cNvPr id="23" name="icon-host-3" descr="preencoded.png">    </p:cNvPr>
+          <p:cNvPr id="20" name="icon-ctl-3" descr="preencoded.png">    </p:cNvPr>
           <p:cNvPicPr>
             <a:picLocks noChangeAspect="1"/>
           </p:cNvPicPr>
@@ -12577,8 +13456,8 @@
         </p:blipFill>
         <p:spPr>
           <a:xfrm>
-            <a:off x="7598664" y="1463040"/>
-            <a:ext cx="274320" cy="274320"/>
+            <a:off x="804672" y="3255264"/>
+            <a:ext cx="237744" cy="237744"/>
           </a:xfrm>
           <a:prstGeom prst="rect">
             <a:avLst/>
@@ -12587,14 +13466,50 @@
       </p:pic>
       <p:sp>
         <p:nvSpPr>
-          <p:cNvPr id="24" name="host-h-3"/>
-          <p:cNvSpPr txBox="1"/>
-          <p:nvPr/>
-        </p:nvSpPr>
-        <p:spPr>
-          <a:xfrm>
-            <a:off x="6931152" y="1965960"/>
-            <a:ext cx="1609344" cy="320040"/>
+          <p:cNvPr id="21" name="ctl-h-3"/>
+          <p:cNvSpPr txBox="1"/>
+          <p:nvPr/>
+        </p:nvSpPr>
+        <p:spPr>
+          <a:xfrm>
+            <a:off x="1280160" y="3136392"/>
+            <a:ext cx="1691640" cy="502920"/>
+          </a:xfrm>
+          <a:prstGeom prst="rect">
+            <a:avLst/>
+          </a:prstGeom>
+          <a:noFill/>
+          <a:ln/>
+        </p:spPr>
+        <p:txBody>
+          <a:bodyPr wrap="square" lIns="0" tIns="0" rIns="0" bIns="0" rtlCol="0" anchor="ctr"/>
+          <a:lstStyle/>
+          <a:p>
+            <a:pPr indent="0" marL="0">
+              <a:buNone/>
+            </a:pPr>
+            <a:r>
+              <a:rPr lang="en-US" sz="1400" b="1" dirty="0">
+                <a:solidFill>
+                  <a:schemeClr val="tx1"/>
+                </a:solidFill>
+              </a:rPr>
+              <a:t>Full audit log</a:t>
+            </a:r>
+            <a:endParaRPr lang="en-US" sz="1400" dirty="0"/>
+          </a:p>
+        </p:txBody>
+      </p:sp>
+      <p:sp>
+        <p:nvSpPr>
+          <p:cNvPr id="22" name="ctl-b-3"/>
+          <p:cNvSpPr txBox="1"/>
+          <p:nvPr/>
+        </p:nvSpPr>
+        <p:spPr>
+          <a:xfrm>
+            <a:off x="685800" y="3730752"/>
+            <a:ext cx="2240280" cy="685800"/>
           </a:xfrm>
           <a:prstGeom prst="rect">
             <a:avLst/>
@@ -12606,102 +13521,66 @@
           <a:bodyPr wrap="square" lIns="0" tIns="0" rIns="0" bIns="0" rtlCol="0" anchor="t"/>
           <a:lstStyle/>
           <a:p>
-            <a:pPr algn="ctr" indent="0" marL="0">
-              <a:buNone/>
-            </a:pPr>
-            <a:r>
-              <a:rPr lang="en-US" sz="1400" b="1" dirty="0">
-                <a:solidFill>
-                  <a:schemeClr val="tx1"/>
-                </a:solidFill>
-              </a:rPr>
-              <a:t>Backups &amp; alerts</a:t>
-            </a:r>
-            <a:endParaRPr lang="en-US" sz="1400" dirty="0"/>
-          </a:p>
-        </p:txBody>
-      </p:sp>
-      <p:sp>
-        <p:nvSpPr>
-          <p:cNvPr id="25" name="host-b-3"/>
-          <p:cNvSpPr txBox="1"/>
-          <p:nvPr/>
-        </p:nvSpPr>
-        <p:spPr>
-          <a:xfrm>
-            <a:off x="6958584" y="2304288"/>
-            <a:ext cx="1554480" cy="804672"/>
-          </a:xfrm>
-          <a:prstGeom prst="rect">
-            <a:avLst/>
-          </a:prstGeom>
-          <a:noFill/>
-          <a:ln/>
-        </p:spPr>
-        <p:txBody>
-          <a:bodyPr wrap="square" lIns="0" tIns="0" rIns="0" bIns="0" rtlCol="0" anchor="t"/>
-          <a:lstStyle/>
-          <a:p>
-            <a:pPr algn="ctr" indent="0" marL="0">
-              <a:buNone/>
-            </a:pPr>
-            <a:r>
-              <a:rPr lang="en-US" sz="1100" dirty="0">
+            <a:pPr indent="0" marL="0">
+              <a:buNone/>
+            </a:pPr>
+            <a:r>
+              <a:rPr lang="en-US" sz="1200" dirty="0">
                 <a:solidFill>
                   <a:schemeClr val="accent4"/>
                 </a:solidFill>
               </a:rPr>
-              <a:t>Every night, kept 14 days. Your team is told on Telegram if anything fails.</a:t>
-            </a:r>
-            <a:endParaRPr lang="en-US" sz="1100" dirty="0"/>
-          </a:p>
-        </p:txBody>
-      </p:sp>
-      <p:sp>
-        <p:nvSpPr>
-          <p:cNvPr id="26" name="hostpt-0"/>
+              <a:t>Every action, take-over and reply is recorded and searchable.</a:t>
+            </a:r>
+            <a:endParaRPr lang="en-US" sz="1200" dirty="0"/>
+          </a:p>
+        </p:txBody>
+      </p:sp>
+      <p:sp>
+        <p:nvSpPr>
+          <p:cNvPr id="23" name="ctl-4"/>
           <p:cNvSpPr/>
           <p:nvPr/>
         </p:nvSpPr>
         <p:spPr>
           <a:xfrm>
-            <a:off x="457200" y="3383280"/>
-            <a:ext cx="2615184" cy="1143000"/>
+            <a:off x="3273552" y="2907792"/>
+            <a:ext cx="2615184" cy="1554480"/>
           </a:xfrm>
           <a:prstGeom prst="roundRect">
             <a:avLst>
-              <a:gd name="adj" fmla="val 9600"/>
+              <a:gd name="adj" fmla="val 7059"/>
             </a:avLst>
           </a:prstGeom>
           <a:solidFill>
-            <a:schemeClr val="accent5"/>
+            <a:schemeClr val="bg2"/>
           </a:solidFill>
           <a:ln/>
         </p:spPr>
       </p:sp>
       <p:sp>
         <p:nvSpPr>
-          <p:cNvPr id="27" name="circle-hostpt-0"/>
+          <p:cNvPr id="24" name="circle-ctl-4"/>
           <p:cNvSpPr/>
           <p:nvPr/>
         </p:nvSpPr>
         <p:spPr>
           <a:xfrm>
-            <a:off x="640080" y="3566160"/>
-            <a:ext cx="420624" cy="420624"/>
+            <a:off x="3502152" y="3136392"/>
+            <a:ext cx="475488" cy="475488"/>
           </a:xfrm>
           <a:prstGeom prst="ellipse">
             <a:avLst/>
           </a:prstGeom>
           <a:solidFill>
-            <a:schemeClr val="accent1"/>
+            <a:schemeClr val="accent2"/>
           </a:solidFill>
           <a:ln/>
         </p:spPr>
       </p:sp>
       <p:pic>
         <p:nvPicPr>
-          <p:cNvPr id="28" name="icon-hostpt-0" descr="preencoded.png">    </p:cNvPr>
+          <p:cNvPr id="25" name="icon-ctl-4" descr="preencoded.png">    </p:cNvPr>
           <p:cNvPicPr>
             <a:picLocks noChangeAspect="1"/>
           </p:cNvPicPr>
@@ -12715,8 +13594,8 @@
         </p:blipFill>
         <p:spPr>
           <a:xfrm>
-            <a:off x="745236" y="3671316"/>
-            <a:ext cx="210312" cy="210312"/>
+            <a:off x="3621024" y="3255264"/>
+            <a:ext cx="237744" cy="237744"/>
           </a:xfrm>
           <a:prstGeom prst="rect">
             <a:avLst/>
@@ -12725,14 +13604,50 @@
       </p:pic>
       <p:sp>
         <p:nvSpPr>
-          <p:cNvPr id="29" name="hostpt-h-0"/>
-          <p:cNvSpPr txBox="1"/>
-          <p:nvPr/>
-        </p:nvSpPr>
-        <p:spPr>
-          <a:xfrm>
-            <a:off x="1170432" y="3520440"/>
-            <a:ext cx="1783080" cy="292608"/>
+          <p:cNvPr id="26" name="ctl-h-4"/>
+          <p:cNvSpPr txBox="1"/>
+          <p:nvPr/>
+        </p:nvSpPr>
+        <p:spPr>
+          <a:xfrm>
+            <a:off x="4096512" y="3136392"/>
+            <a:ext cx="1691640" cy="502920"/>
+          </a:xfrm>
+          <a:prstGeom prst="rect">
+            <a:avLst/>
+          </a:prstGeom>
+          <a:noFill/>
+          <a:ln/>
+        </p:spPr>
+        <p:txBody>
+          <a:bodyPr wrap="square" lIns="0" tIns="0" rIns="0" bIns="0" rtlCol="0" anchor="ctr"/>
+          <a:lstStyle/>
+          <a:p>
+            <a:pPr indent="0" marL="0">
+              <a:buNone/>
+            </a:pPr>
+            <a:r>
+              <a:rPr lang="en-US" sz="1400" b="1" dirty="0">
+                <a:solidFill>
+                  <a:schemeClr val="tx1"/>
+                </a:solidFill>
+              </a:rPr>
+              <a:t>Your data, kept separate</a:t>
+            </a:r>
+            <a:endParaRPr lang="en-US" sz="1400" dirty="0"/>
+          </a:p>
+        </p:txBody>
+      </p:sp>
+      <p:sp>
+        <p:nvSpPr>
+          <p:cNvPr id="27" name="ctl-b-4"/>
+          <p:cNvSpPr txBox="1"/>
+          <p:nvPr/>
+        </p:nvSpPr>
+        <p:spPr>
+          <a:xfrm>
+            <a:off x="3502152" y="3730752"/>
+            <a:ext cx="2240280" cy="685800"/>
           </a:xfrm>
           <a:prstGeom prst="rect">
             <a:avLst/>
@@ -12748,98 +13663,62 @@
               <a:buNone/>
             </a:pPr>
             <a:r>
-              <a:rPr lang="en-US" sz="1400" b="1" dirty="0">
-                <a:solidFill>
-                  <a:schemeClr val="tx1"/>
-                </a:solidFill>
-              </a:rPr>
-              <a:t>Runs 24×7</a:t>
-            </a:r>
-            <a:endParaRPr lang="en-US" sz="1400" dirty="0"/>
-          </a:p>
-        </p:txBody>
-      </p:sp>
-      <p:sp>
-        <p:nvSpPr>
-          <p:cNvPr id="30" name="hostpt-b-0"/>
-          <p:cNvSpPr txBox="1"/>
-          <p:nvPr/>
-        </p:nvSpPr>
-        <p:spPr>
-          <a:xfrm>
-            <a:off x="1170432" y="3813048"/>
-            <a:ext cx="1810512" cy="658368"/>
-          </a:xfrm>
-          <a:prstGeom prst="rect">
-            <a:avLst/>
-          </a:prstGeom>
-          <a:noFill/>
-          <a:ln/>
-        </p:spPr>
-        <p:txBody>
-          <a:bodyPr wrap="square" lIns="0" tIns="0" rIns="0" bIns="0" rtlCol="0" anchor="t"/>
-          <a:lstStyle/>
-          <a:p>
-            <a:pPr indent="0" marL="0">
-              <a:buNone/>
-            </a:pPr>
-            <a:r>
-              <a:rPr lang="en-US" sz="1100" dirty="0">
-                <a:solidFill>
-                  <a:schemeClr val="tx1"/>
-                </a:solidFill>
-              </a:rPr>
-              <a:t>In the cloud — restarts itself after a crash or reboot. Your laptop can be off.</a:t>
-            </a:r>
-            <a:endParaRPr lang="en-US" sz="1100" dirty="0"/>
-          </a:p>
-        </p:txBody>
-      </p:sp>
-      <p:sp>
-        <p:nvSpPr>
-          <p:cNvPr id="31" name="hostpt-1"/>
+              <a:rPr lang="en-US" sz="1200" dirty="0">
+                <a:solidFill>
+                  <a:schemeClr val="accent4"/>
+                </a:solidFill>
+              </a:rPr>
+              <a:t>Documents and conversations are isolated per organisation.</a:t>
+            </a:r>
+            <a:endParaRPr lang="en-US" sz="1200" dirty="0"/>
+          </a:p>
+        </p:txBody>
+      </p:sp>
+      <p:sp>
+        <p:nvSpPr>
+          <p:cNvPr id="28" name="ctl-5"/>
           <p:cNvSpPr/>
           <p:nvPr/>
         </p:nvSpPr>
         <p:spPr>
           <a:xfrm>
-            <a:off x="3273552" y="3383280"/>
-            <a:ext cx="2615184" cy="1143000"/>
+            <a:off x="6089904" y="2907792"/>
+            <a:ext cx="2615184" cy="1554480"/>
           </a:xfrm>
           <a:prstGeom prst="roundRect">
             <a:avLst>
-              <a:gd name="adj" fmla="val 9600"/>
+              <a:gd name="adj" fmla="val 7059"/>
             </a:avLst>
           </a:prstGeom>
           <a:solidFill>
-            <a:schemeClr val="accent5"/>
+            <a:schemeClr val="bg2"/>
           </a:solidFill>
           <a:ln/>
         </p:spPr>
       </p:sp>
       <p:sp>
         <p:nvSpPr>
-          <p:cNvPr id="32" name="circle-hostpt-1"/>
+          <p:cNvPr id="29" name="circle-ctl-5"/>
           <p:cNvSpPr/>
           <p:nvPr/>
         </p:nvSpPr>
         <p:spPr>
           <a:xfrm>
-            <a:off x="3456432" y="3566160"/>
-            <a:ext cx="420624" cy="420624"/>
+            <a:off x="6318504" y="3136392"/>
+            <a:ext cx="475488" cy="475488"/>
           </a:xfrm>
           <a:prstGeom prst="ellipse">
             <a:avLst/>
           </a:prstGeom>
           <a:solidFill>
-            <a:schemeClr val="accent1"/>
+            <a:schemeClr val="accent2"/>
           </a:solidFill>
           <a:ln/>
         </p:spPr>
       </p:sp>
       <p:pic>
         <p:nvPicPr>
-          <p:cNvPr id="33" name="icon-hostpt-1" descr="preencoded.png">    </p:cNvPr>
+          <p:cNvPr id="30" name="icon-ctl-5" descr="preencoded.png">    </p:cNvPr>
           <p:cNvPicPr>
             <a:picLocks noChangeAspect="1"/>
           </p:cNvPicPr>
@@ -12853,8 +13732,8 @@
         </p:blipFill>
         <p:spPr>
           <a:xfrm>
-            <a:off x="3561588" y="3671316"/>
-            <a:ext cx="210312" cy="210312"/>
+            <a:off x="6437376" y="3255264"/>
+            <a:ext cx="237744" cy="237744"/>
           </a:xfrm>
           <a:prstGeom prst="rect">
             <a:avLst/>
@@ -12863,14 +13742,50 @@
       </p:pic>
       <p:sp>
         <p:nvSpPr>
-          <p:cNvPr id="34" name="hostpt-h-1"/>
-          <p:cNvSpPr txBox="1"/>
-          <p:nvPr/>
-        </p:nvSpPr>
-        <p:spPr>
-          <a:xfrm>
-            <a:off x="3986784" y="3520440"/>
-            <a:ext cx="1783080" cy="292608"/>
+          <p:cNvPr id="31" name="ctl-h-5"/>
+          <p:cNvSpPr txBox="1"/>
+          <p:nvPr/>
+        </p:nvSpPr>
+        <p:spPr>
+          <a:xfrm>
+            <a:off x="6912864" y="3136392"/>
+            <a:ext cx="1691640" cy="502920"/>
+          </a:xfrm>
+          <a:prstGeom prst="rect">
+            <a:avLst/>
+          </a:prstGeom>
+          <a:noFill/>
+          <a:ln/>
+        </p:spPr>
+        <p:txBody>
+          <a:bodyPr wrap="square" lIns="0" tIns="0" rIns="0" bIns="0" rtlCol="0" anchor="ctr"/>
+          <a:lstStyle/>
+          <a:p>
+            <a:pPr indent="0" marL="0">
+              <a:buNone/>
+            </a:pPr>
+            <a:r>
+              <a:rPr lang="en-US" sz="1400" b="1" dirty="0">
+                <a:solidFill>
+                  <a:schemeClr val="tx1"/>
+                </a:solidFill>
+              </a:rPr>
+              <a:t>Your own AI account</a:t>
+            </a:r>
+            <a:endParaRPr lang="en-US" sz="1400" dirty="0"/>
+          </a:p>
+        </p:txBody>
+      </p:sp>
+      <p:sp>
+        <p:nvSpPr>
+          <p:cNvPr id="32" name="ctl-b-5"/>
+          <p:cNvSpPr txBox="1"/>
+          <p:nvPr/>
+        </p:nvSpPr>
+        <p:spPr>
+          <a:xfrm>
+            <a:off x="6318504" y="3730752"/>
+            <a:ext cx="2240280" cy="685800"/>
           </a:xfrm>
           <a:prstGeom prst="rect">
             <a:avLst/>
@@ -12886,188 +13801,14 @@
               <a:buNone/>
             </a:pPr>
             <a:r>
-              <a:rPr lang="en-US" sz="1400" b="1" dirty="0">
-                <a:solidFill>
-                  <a:schemeClr val="tx1"/>
-                </a:solidFill>
-              </a:rPr>
-              <a:t>Invite-only access</a:t>
-            </a:r>
-            <a:endParaRPr lang="en-US" sz="1400" dirty="0"/>
-          </a:p>
-        </p:txBody>
-      </p:sp>
-      <p:sp>
-        <p:nvSpPr>
-          <p:cNvPr id="35" name="hostpt-b-1"/>
-          <p:cNvSpPr txBox="1"/>
-          <p:nvPr/>
-        </p:nvSpPr>
-        <p:spPr>
-          <a:xfrm>
-            <a:off x="3986784" y="3813048"/>
-            <a:ext cx="1810512" cy="658368"/>
-          </a:xfrm>
-          <a:prstGeom prst="rect">
-            <a:avLst/>
-          </a:prstGeom>
-          <a:noFill/>
-          <a:ln/>
-        </p:spPr>
-        <p:txBody>
-          <a:bodyPr wrap="square" lIns="0" tIns="0" rIns="0" bIns="0" rtlCol="0" anchor="t"/>
-          <a:lstStyle/>
-          <a:p>
-            <a:pPr indent="0" marL="0">
-              <a:buNone/>
-            </a:pPr>
-            <a:r>
-              <a:rPr lang="en-US" sz="1100" dirty="0">
-                <a:solidFill>
-                  <a:schemeClr val="tx1"/>
-                </a:solidFill>
-              </a:rPr>
-              <a:t>Only people you invite can create an account on your SwarmAI.</a:t>
-            </a:r>
-            <a:endParaRPr lang="en-US" sz="1100" dirty="0"/>
-          </a:p>
-        </p:txBody>
-      </p:sp>
-      <p:sp>
-        <p:nvSpPr>
-          <p:cNvPr id="36" name="hostpt-2"/>
-          <p:cNvSpPr/>
-          <p:nvPr/>
-        </p:nvSpPr>
-        <p:spPr>
-          <a:xfrm>
-            <a:off x="6089904" y="3383280"/>
-            <a:ext cx="2615184" cy="1143000"/>
-          </a:xfrm>
-          <a:prstGeom prst="roundRect">
-            <a:avLst>
-              <a:gd name="adj" fmla="val 9600"/>
-            </a:avLst>
-          </a:prstGeom>
-          <a:solidFill>
-            <a:schemeClr val="accent5"/>
-          </a:solidFill>
-          <a:ln/>
-        </p:spPr>
-      </p:sp>
-      <p:sp>
-        <p:nvSpPr>
-          <p:cNvPr id="37" name="circle-hostpt-2"/>
-          <p:cNvSpPr/>
-          <p:nvPr/>
-        </p:nvSpPr>
-        <p:spPr>
-          <a:xfrm>
-            <a:off x="6272784" y="3566160"/>
-            <a:ext cx="420624" cy="420624"/>
-          </a:xfrm>
-          <a:prstGeom prst="ellipse">
-            <a:avLst/>
-          </a:prstGeom>
-          <a:solidFill>
-            <a:schemeClr val="accent1"/>
-          </a:solidFill>
-          <a:ln/>
-        </p:spPr>
-      </p:sp>
-      <p:pic>
-        <p:nvPicPr>
-          <p:cNvPr id="38" name="icon-hostpt-2" descr="preencoded.png">    </p:cNvPr>
-          <p:cNvPicPr>
-            <a:picLocks noChangeAspect="1"/>
-          </p:cNvPicPr>
-          <p:nvPr/>
-        </p:nvPicPr>
-        <p:blipFill>
-          <a:blip r:embed="rId7"/>
-          <a:stretch>
-            <a:fillRect/>
-          </a:stretch>
-        </p:blipFill>
-        <p:spPr>
-          <a:xfrm>
-            <a:off x="6377940" y="3671316"/>
-            <a:ext cx="210312" cy="210312"/>
-          </a:xfrm>
-          <a:prstGeom prst="rect">
-            <a:avLst/>
-          </a:prstGeom>
-        </p:spPr>
-      </p:pic>
-      <p:sp>
-        <p:nvSpPr>
-          <p:cNvPr id="39" name="hostpt-h-2"/>
-          <p:cNvSpPr txBox="1"/>
-          <p:nvPr/>
-        </p:nvSpPr>
-        <p:spPr>
-          <a:xfrm>
-            <a:off x="6803136" y="3520440"/>
-            <a:ext cx="1783080" cy="292608"/>
-          </a:xfrm>
-          <a:prstGeom prst="rect">
-            <a:avLst/>
-          </a:prstGeom>
-          <a:noFill/>
-          <a:ln/>
-        </p:spPr>
-        <p:txBody>
-          <a:bodyPr wrap="square" lIns="0" tIns="0" rIns="0" bIns="0" rtlCol="0" anchor="t"/>
-          <a:lstStyle/>
-          <a:p>
-            <a:pPr indent="0" marL="0">
-              <a:buNone/>
-            </a:pPr>
-            <a:r>
-              <a:rPr lang="en-US" sz="1400" b="1" dirty="0">
-                <a:solidFill>
-                  <a:schemeClr val="tx1"/>
-                </a:solidFill>
-              </a:rPr>
-              <a:t>Or in your own cloud</a:t>
-            </a:r>
-            <a:endParaRPr lang="en-US" sz="1400" dirty="0"/>
-          </a:p>
-        </p:txBody>
-      </p:sp>
-      <p:sp>
-        <p:nvSpPr>
-          <p:cNvPr id="40" name="hostpt-b-2"/>
-          <p:cNvSpPr txBox="1"/>
-          <p:nvPr/>
-        </p:nvSpPr>
-        <p:spPr>
-          <a:xfrm>
-            <a:off x="6803136" y="3813048"/>
-            <a:ext cx="1810512" cy="658368"/>
-          </a:xfrm>
-          <a:prstGeom prst="rect">
-            <a:avLst/>
-          </a:prstGeom>
-          <a:noFill/>
-          <a:ln/>
-        </p:spPr>
-        <p:txBody>
-          <a:bodyPr wrap="square" lIns="0" tIns="0" rIns="0" bIns="0" rtlCol="0" anchor="t"/>
-          <a:lstStyle/>
-          <a:p>
-            <a:pPr indent="0" marL="0">
-              <a:buNone/>
-            </a:pPr>
-            <a:r>
-              <a:rPr lang="en-US" sz="1100" dirty="0">
-                <a:solidFill>
-                  <a:schemeClr val="tx1"/>
-                </a:solidFill>
-              </a:rPr>
-              <a:t>The same setup runs on your server with your own AI account.</a:t>
-            </a:r>
-            <a:endParaRPr lang="en-US" sz="1100" dirty="0"/>
+              <a:rPr lang="en-US" sz="1200" dirty="0">
+                <a:solidFill>
+                  <a:schemeClr val="accent4"/>
+                </a:solidFill>
+              </a:rPr>
+              <a:t>Optionally use your own OpenAI key, stored encrypted.</a:t>
+            </a:r>
+            <a:endParaRPr lang="en-US" sz="1200" dirty="0"/>
           </a:p>
         </p:txBody>
       </p:sp>
